--- a/folletos/2026-04/pptx/FIP_VANTRUST_LIQUIDEZ_CAJA.pptx
+++ b/folletos/2026-04/pptx/FIP_VANTRUST_LIQUIDEZ_CAJA.pptx
@@ -2927,7 +2927,7 @@
                 <a:ea typeface="Calibri" pitchFamily="34" charset="-122"/>
                 <a:cs typeface="Calibri" pitchFamily="34" charset="-120"/>
               </a:rPr>
-              <a:t>prueba CLP</a:t>
+              <a:t>prueba 2 CLP</a:t>
             </a:r>
             <a:endParaRPr lang="en-US" sz="800" dirty="0"/>
           </a:p>

--- a/folletos/2026-04/pptx/FIP_VANTRUST_LIQUIDEZ_CAJA.pptx
+++ b/folletos/2026-04/pptx/FIP_VANTRUST_LIQUIDEZ_CAJA.pptx
@@ -5363,7 +5363,7 @@
                 <a:ea typeface="Calibri" pitchFamily="34" charset="-122"/>
                 <a:cs typeface="Calibri" pitchFamily="34" charset="-120"/>
               </a:rPr>
-              <a:t>prueba CLP</a:t>
+              <a:t>prueba 3 CLP</a:t>
             </a:r>
             <a:endParaRPr lang="en-US" sz="800" dirty="0"/>
           </a:p>

--- a/folletos/2026-04/pptx/FIP_VANTRUST_LIQUIDEZ_CAJA.pptx
+++ b/folletos/2026-04/pptx/FIP_VANTRUST_LIQUIDEZ_CAJA.pptx
@@ -6323,7 +6323,7 @@
                 <a:ea typeface="Calibri" pitchFamily="34" charset="-122"/>
                 <a:cs typeface="Calibri" pitchFamily="34" charset="-120"/>
               </a:rPr>
-              <a:t>prueba CLP</a:t>
+              <a:t>prueba 4 CLP</a:t>
             </a:r>
             <a:endParaRPr lang="en-US" sz="800" dirty="0"/>
           </a:p>

--- a/folletos/2026-04/pptx/FIP_VANTRUST_LIQUIDEZ_CAJA.pptx
+++ b/folletos/2026-04/pptx/FIP_VANTRUST_LIQUIDEZ_CAJA.pptx
@@ -6373,7 +6373,7 @@
                 <a:ea typeface="Calibri" pitchFamily="34" charset="-122"/>
                 <a:cs typeface="Calibri" pitchFamily="34" charset="-120"/>
               </a:rPr>
-              <a:t>prueba CLP</a:t>
+              <a:t>prueba 6 CLP</a:t>
             </a:r>
             <a:endParaRPr lang="en-US" sz="800" dirty="0"/>
           </a:p>

--- a/folletos/2026-04/pptx/FIP_VANTRUST_LIQUIDEZ_CAJA.pptx
+++ b/folletos/2026-04/pptx/FIP_VANTRUST_LIQUIDEZ_CAJA.pptx
@@ -6373,7 +6373,7 @@
                 <a:ea typeface="Calibri" pitchFamily="34" charset="-122"/>
                 <a:cs typeface="Calibri" pitchFamily="34" charset="-120"/>
               </a:rPr>
-              <a:t>prueba 6 CLP</a:t>
+              <a:t>prueba CLP</a:t>
             </a:r>
             <a:endParaRPr lang="en-US" sz="800" dirty="0"/>
           </a:p>
@@ -33352,13 +33352,91 @@
       </p:sp>
       <p:sp>
         <p:nvSpPr>
-          <p:cNvPr id="8" name="Shape 6"/>
+          <p:cNvPr id="8" name="Text 6"/>
           <p:cNvSpPr/>
           <p:nvPr/>
         </p:nvSpPr>
         <p:spPr>
           <a:xfrm>
-            <a:off x="118872" y="1810512"/>
+            <a:off x="118872" y="1719072"/>
+            <a:ext cx="1188720" cy="173736"/>
+          </a:xfrm>
+          <a:prstGeom prst="rect">
+            <a:avLst/>
+          </a:prstGeom>
+          <a:noFill/>
+          <a:ln/>
+        </p:spPr>
+        <p:txBody>
+          <a:bodyPr wrap="square" lIns="0" tIns="0" rIns="0" bIns="0" rtlCol="0" anchor="ctr"/>
+          <a:lstStyle/>
+          <a:p>
+            <a:pPr indent="0" marL="0">
+              <a:buNone/>
+            </a:pPr>
+            <a:r>
+              <a:rPr lang="en-US" sz="750" dirty="0">
+                <a:solidFill>
+                  <a:srgbClr val="000000"/>
+                </a:solidFill>
+                <a:latin typeface="Calibri" pitchFamily="34" charset="0"/>
+                <a:ea typeface="Calibri" pitchFamily="34" charset="-122"/>
+                <a:cs typeface="Calibri" pitchFamily="34" charset="-120"/>
+              </a:rPr>
+              <a:t>CLP</a:t>
+            </a:r>
+            <a:endParaRPr lang="en-US" sz="750" dirty="0"/>
+          </a:p>
+        </p:txBody>
+      </p:sp>
+      <p:sp>
+        <p:nvSpPr>
+          <p:cNvPr id="9" name="Text 7"/>
+          <p:cNvSpPr/>
+          <p:nvPr/>
+        </p:nvSpPr>
+        <p:spPr>
+          <a:xfrm>
+            <a:off x="1307592" y="1719072"/>
+            <a:ext cx="1024128" cy="173736"/>
+          </a:xfrm>
+          <a:prstGeom prst="rect">
+            <a:avLst/>
+          </a:prstGeom>
+          <a:noFill/>
+          <a:ln/>
+        </p:spPr>
+        <p:txBody>
+          <a:bodyPr wrap="square" lIns="0" tIns="0" rIns="0" bIns="0" rtlCol="0" anchor="ctr"/>
+          <a:lstStyle/>
+          <a:p>
+            <a:pPr algn="r" indent="0" marL="0">
+              <a:buNone/>
+            </a:pPr>
+            <a:r>
+              <a:rPr lang="en-US" sz="750" b="1" dirty="0">
+                <a:solidFill>
+                  <a:srgbClr val="000000"/>
+                </a:solidFill>
+                <a:latin typeface="Calibri" pitchFamily="34" charset="0"/>
+                <a:ea typeface="Calibri" pitchFamily="34" charset="-122"/>
+                <a:cs typeface="Calibri" pitchFamily="34" charset="-120"/>
+              </a:rPr>
+              <a:t>100,00%</a:t>
+            </a:r>
+            <a:endParaRPr lang="en-US" sz="750" dirty="0"/>
+          </a:p>
+        </p:txBody>
+      </p:sp>
+      <p:sp>
+        <p:nvSpPr>
+          <p:cNvPr id="10" name="Shape 8"/>
+          <p:cNvSpPr/>
+          <p:nvPr/>
+        </p:nvSpPr>
+        <p:spPr>
+          <a:xfrm>
+            <a:off x="118872" y="2002536"/>
             <a:ext cx="2212848" cy="0"/>
           </a:xfrm>
           <a:prstGeom prst="line">
@@ -33375,13 +33453,13 @@
       </p:sp>
       <p:sp>
         <p:nvSpPr>
-          <p:cNvPr id="9" name="Text 7"/>
+          <p:cNvPr id="11" name="Text 9"/>
           <p:cNvSpPr/>
           <p:nvPr/>
         </p:nvSpPr>
         <p:spPr>
           <a:xfrm>
-            <a:off x="118872" y="1901952"/>
+            <a:off x="118872" y="2093976"/>
             <a:ext cx="2212848" cy="164592"/>
           </a:xfrm>
           <a:prstGeom prst="rect">
@@ -33414,13 +33492,13 @@
       </p:sp>
       <p:sp>
         <p:nvSpPr>
-          <p:cNvPr id="10" name="Shape 8"/>
+          <p:cNvPr id="12" name="Shape 10"/>
           <p:cNvSpPr/>
           <p:nvPr/>
         </p:nvSpPr>
         <p:spPr>
           <a:xfrm>
-            <a:off x="118872" y="2084832"/>
+            <a:off x="118872" y="2276856"/>
             <a:ext cx="2212848" cy="0"/>
           </a:xfrm>
           <a:prstGeom prst="line">
@@ -33437,13 +33515,13 @@
       </p:sp>
       <p:sp>
         <p:nvSpPr>
-          <p:cNvPr id="11" name="Text 9"/>
+          <p:cNvPr id="13" name="Text 11"/>
           <p:cNvSpPr/>
           <p:nvPr/>
         </p:nvSpPr>
         <p:spPr>
           <a:xfrm>
-            <a:off x="118872" y="2157984"/>
+            <a:off x="118872" y="2350008"/>
             <a:ext cx="1371600" cy="164592"/>
           </a:xfrm>
           <a:prstGeom prst="rect">
@@ -33476,13 +33554,13 @@
       </p:sp>
       <p:sp>
         <p:nvSpPr>
-          <p:cNvPr id="12" name="Text 10"/>
+          <p:cNvPr id="14" name="Text 12"/>
           <p:cNvSpPr/>
           <p:nvPr/>
         </p:nvSpPr>
         <p:spPr>
           <a:xfrm>
-            <a:off x="1490472" y="2157984"/>
+            <a:off x="1490472" y="2350008"/>
             <a:ext cx="841248" cy="164592"/>
           </a:xfrm>
           <a:prstGeom prst="rect">
@@ -33507,7 +33585,7 @@
                 <a:ea typeface="Calibri" pitchFamily="34" charset="-122"/>
                 <a:cs typeface="Calibri" pitchFamily="34" charset="-120"/>
               </a:rPr>
-              <a:t>100,00%</a:t>
+              <a:t>62,90%</a:t>
             </a:r>
             <a:endParaRPr lang="en-US" sz="700" dirty="0"/>
           </a:p>
@@ -33515,13 +33593,247 @@
       </p:sp>
       <p:sp>
         <p:nvSpPr>
-          <p:cNvPr id="13" name="Shape 11"/>
+          <p:cNvPr id="15" name="Text 13"/>
           <p:cNvSpPr/>
           <p:nvPr/>
         </p:nvSpPr>
         <p:spPr>
           <a:xfrm>
-            <a:off x="118872" y="2423160"/>
+            <a:off x="118872" y="2523744"/>
+            <a:ext cx="1371600" cy="164592"/>
+          </a:xfrm>
+          <a:prstGeom prst="rect">
+            <a:avLst/>
+          </a:prstGeom>
+          <a:noFill/>
+          <a:ln/>
+        </p:spPr>
+        <p:txBody>
+          <a:bodyPr wrap="square" lIns="0" tIns="0" rIns="0" bIns="0" rtlCol="0" anchor="ctr"/>
+          <a:lstStyle/>
+          <a:p>
+            <a:pPr indent="0" marL="0">
+              <a:buNone/>
+            </a:pPr>
+            <a:r>
+              <a:rPr lang="en-US" sz="700" dirty="0">
+                <a:solidFill>
+                  <a:srgbClr val="000000"/>
+                </a:solidFill>
+                <a:latin typeface="Calibri" pitchFamily="34" charset="0"/>
+                <a:ea typeface="Calibri" pitchFamily="34" charset="-122"/>
+                <a:cs typeface="Calibri" pitchFamily="34" charset="-120"/>
+              </a:rPr>
+              <a:t>Inmob</a:t>
+            </a:r>
+            <a:endParaRPr lang="en-US" sz="700" dirty="0"/>
+          </a:p>
+        </p:txBody>
+      </p:sp>
+      <p:sp>
+        <p:nvSpPr>
+          <p:cNvPr id="16" name="Text 14"/>
+          <p:cNvSpPr/>
+          <p:nvPr/>
+        </p:nvSpPr>
+        <p:spPr>
+          <a:xfrm>
+            <a:off x="1490472" y="2523744"/>
+            <a:ext cx="841248" cy="164592"/>
+          </a:xfrm>
+          <a:prstGeom prst="rect">
+            <a:avLst/>
+          </a:prstGeom>
+          <a:noFill/>
+          <a:ln/>
+        </p:spPr>
+        <p:txBody>
+          <a:bodyPr wrap="square" lIns="0" tIns="0" rIns="0" bIns="0" rtlCol="0" anchor="ctr"/>
+          <a:lstStyle/>
+          <a:p>
+            <a:pPr algn="r" indent="0" marL="0">
+              <a:buNone/>
+            </a:pPr>
+            <a:r>
+              <a:rPr lang="en-US" sz="700" b="1" dirty="0">
+                <a:solidFill>
+                  <a:srgbClr val="000000"/>
+                </a:solidFill>
+                <a:latin typeface="Calibri" pitchFamily="34" charset="0"/>
+                <a:ea typeface="Calibri" pitchFamily="34" charset="-122"/>
+                <a:cs typeface="Calibri" pitchFamily="34" charset="-120"/>
+              </a:rPr>
+              <a:t>35,54%</a:t>
+            </a:r>
+            <a:endParaRPr lang="en-US" sz="700" dirty="0"/>
+          </a:p>
+        </p:txBody>
+      </p:sp>
+      <p:sp>
+        <p:nvSpPr>
+          <p:cNvPr id="17" name="Text 15"/>
+          <p:cNvSpPr/>
+          <p:nvPr/>
+        </p:nvSpPr>
+        <p:spPr>
+          <a:xfrm>
+            <a:off x="118872" y="2697480"/>
+            <a:ext cx="1371600" cy="164592"/>
+          </a:xfrm>
+          <a:prstGeom prst="rect">
+            <a:avLst/>
+          </a:prstGeom>
+          <a:noFill/>
+          <a:ln/>
+        </p:spPr>
+        <p:txBody>
+          <a:bodyPr wrap="square" lIns="0" tIns="0" rIns="0" bIns="0" rtlCol="0" anchor="ctr"/>
+          <a:lstStyle/>
+          <a:p>
+            <a:pPr indent="0" marL="0">
+              <a:buNone/>
+            </a:pPr>
+            <a:r>
+              <a:rPr lang="en-US" sz="700" dirty="0">
+                <a:solidFill>
+                  <a:srgbClr val="000000"/>
+                </a:solidFill>
+                <a:latin typeface="Calibri" pitchFamily="34" charset="0"/>
+                <a:ea typeface="Calibri" pitchFamily="34" charset="-122"/>
+                <a:cs typeface="Calibri" pitchFamily="34" charset="-120"/>
+              </a:rPr>
+              <a:t>Revisar</a:t>
+            </a:r>
+            <a:endParaRPr lang="en-US" sz="700" dirty="0"/>
+          </a:p>
+        </p:txBody>
+      </p:sp>
+      <p:sp>
+        <p:nvSpPr>
+          <p:cNvPr id="18" name="Text 16"/>
+          <p:cNvSpPr/>
+          <p:nvPr/>
+        </p:nvSpPr>
+        <p:spPr>
+          <a:xfrm>
+            <a:off x="1490472" y="2697480"/>
+            <a:ext cx="841248" cy="164592"/>
+          </a:xfrm>
+          <a:prstGeom prst="rect">
+            <a:avLst/>
+          </a:prstGeom>
+          <a:noFill/>
+          <a:ln/>
+        </p:spPr>
+        <p:txBody>
+          <a:bodyPr wrap="square" lIns="0" tIns="0" rIns="0" bIns="0" rtlCol="0" anchor="ctr"/>
+          <a:lstStyle/>
+          <a:p>
+            <a:pPr algn="r" indent="0" marL="0">
+              <a:buNone/>
+            </a:pPr>
+            <a:r>
+              <a:rPr lang="en-US" sz="700" b="1" dirty="0">
+                <a:solidFill>
+                  <a:srgbClr val="000000"/>
+                </a:solidFill>
+                <a:latin typeface="Calibri" pitchFamily="34" charset="0"/>
+                <a:ea typeface="Calibri" pitchFamily="34" charset="-122"/>
+                <a:cs typeface="Calibri" pitchFamily="34" charset="-120"/>
+              </a:rPr>
+              <a:t>0,95%</a:t>
+            </a:r>
+            <a:endParaRPr lang="en-US" sz="700" dirty="0"/>
+          </a:p>
+        </p:txBody>
+      </p:sp>
+      <p:sp>
+        <p:nvSpPr>
+          <p:cNvPr id="19" name="Text 17"/>
+          <p:cNvSpPr/>
+          <p:nvPr/>
+        </p:nvSpPr>
+        <p:spPr>
+          <a:xfrm>
+            <a:off x="118872" y="2871216"/>
+            <a:ext cx="1371600" cy="164592"/>
+          </a:xfrm>
+          <a:prstGeom prst="rect">
+            <a:avLst/>
+          </a:prstGeom>
+          <a:noFill/>
+          <a:ln/>
+        </p:spPr>
+        <p:txBody>
+          <a:bodyPr wrap="square" lIns="0" tIns="0" rIns="0" bIns="0" rtlCol="0" anchor="ctr"/>
+          <a:lstStyle/>
+          <a:p>
+            <a:pPr indent="0" marL="0">
+              <a:buNone/>
+            </a:pPr>
+            <a:r>
+              <a:rPr lang="en-US" sz="700" dirty="0">
+                <a:solidFill>
+                  <a:srgbClr val="000000"/>
+                </a:solidFill>
+                <a:latin typeface="Calibri" pitchFamily="34" charset="0"/>
+                <a:ea typeface="Calibri" pitchFamily="34" charset="-122"/>
+                <a:cs typeface="Calibri" pitchFamily="34" charset="-120"/>
+              </a:rPr>
+              <a:t>Nota estructurada</a:t>
+            </a:r>
+            <a:endParaRPr lang="en-US" sz="700" dirty="0"/>
+          </a:p>
+        </p:txBody>
+      </p:sp>
+      <p:sp>
+        <p:nvSpPr>
+          <p:cNvPr id="20" name="Text 18"/>
+          <p:cNvSpPr/>
+          <p:nvPr/>
+        </p:nvSpPr>
+        <p:spPr>
+          <a:xfrm>
+            <a:off x="1490472" y="2871216"/>
+            <a:ext cx="841248" cy="164592"/>
+          </a:xfrm>
+          <a:prstGeom prst="rect">
+            <a:avLst/>
+          </a:prstGeom>
+          <a:noFill/>
+          <a:ln/>
+        </p:spPr>
+        <p:txBody>
+          <a:bodyPr wrap="square" lIns="0" tIns="0" rIns="0" bIns="0" rtlCol="0" anchor="ctr"/>
+          <a:lstStyle/>
+          <a:p>
+            <a:pPr algn="r" indent="0" marL="0">
+              <a:buNone/>
+            </a:pPr>
+            <a:r>
+              <a:rPr lang="en-US" sz="700" b="1" dirty="0">
+                <a:solidFill>
+                  <a:srgbClr val="000000"/>
+                </a:solidFill>
+                <a:latin typeface="Calibri" pitchFamily="34" charset="0"/>
+                <a:ea typeface="Calibri" pitchFamily="34" charset="-122"/>
+                <a:cs typeface="Calibri" pitchFamily="34" charset="-120"/>
+              </a:rPr>
+              <a:t>0,60%</a:t>
+            </a:r>
+            <a:endParaRPr lang="en-US" sz="700" dirty="0"/>
+          </a:p>
+        </p:txBody>
+      </p:sp>
+      <p:sp>
+        <p:nvSpPr>
+          <p:cNvPr id="21" name="Shape 19"/>
+          <p:cNvSpPr/>
+          <p:nvPr/>
+        </p:nvSpPr>
+        <p:spPr>
+          <a:xfrm>
+            <a:off x="118872" y="3136392"/>
             <a:ext cx="2212848" cy="0"/>
           </a:xfrm>
           <a:prstGeom prst="line">
@@ -33538,13 +33850,13 @@
       </p:sp>
       <p:sp>
         <p:nvSpPr>
-          <p:cNvPr id="14" name="Text 12"/>
+          <p:cNvPr id="22" name="Text 20"/>
           <p:cNvSpPr/>
           <p:nvPr/>
         </p:nvSpPr>
         <p:spPr>
           <a:xfrm>
-            <a:off x="118872" y="2514600"/>
+            <a:off x="118872" y="3227832"/>
             <a:ext cx="2212848" cy="164592"/>
           </a:xfrm>
           <a:prstGeom prst="rect">
@@ -33577,13 +33889,13 @@
       </p:sp>
       <p:sp>
         <p:nvSpPr>
-          <p:cNvPr id="15" name="Shape 13"/>
+          <p:cNvPr id="23" name="Shape 21"/>
           <p:cNvSpPr/>
           <p:nvPr/>
         </p:nvSpPr>
         <p:spPr>
           <a:xfrm>
-            <a:off x="118872" y="2697480"/>
+            <a:off x="118872" y="3410712"/>
             <a:ext cx="2212848" cy="0"/>
           </a:xfrm>
           <a:prstGeom prst="line">
@@ -33600,13 +33912,13 @@
       </p:sp>
       <p:sp>
         <p:nvSpPr>
-          <p:cNvPr id="16" name="Text 14"/>
+          <p:cNvPr id="24" name="Text 22"/>
           <p:cNvSpPr/>
           <p:nvPr/>
         </p:nvSpPr>
         <p:spPr>
           <a:xfrm>
-            <a:off x="118872" y="2770632"/>
+            <a:off x="118872" y="3483864"/>
             <a:ext cx="1371600" cy="182880"/>
           </a:xfrm>
           <a:prstGeom prst="rect">
@@ -33639,13 +33951,13 @@
       </p:sp>
       <p:sp>
         <p:nvSpPr>
-          <p:cNvPr id="17" name="Text 15"/>
+          <p:cNvPr id="25" name="Text 23"/>
           <p:cNvSpPr/>
           <p:nvPr/>
         </p:nvSpPr>
         <p:spPr>
           <a:xfrm>
-            <a:off x="1490472" y="2770632"/>
+            <a:off x="1490472" y="3483864"/>
             <a:ext cx="841248" cy="182880"/>
           </a:xfrm>
           <a:prstGeom prst="rect">
@@ -33670,7 +33982,7 @@
                 <a:ea typeface="Calibri" pitchFamily="34" charset="-122"/>
                 <a:cs typeface="Calibri" pitchFamily="34" charset="-120"/>
               </a:rPr>
-              <a:t>63,16%</a:t>
+              <a:t>62,16%</a:t>
             </a:r>
             <a:endParaRPr lang="en-US" sz="750" dirty="0"/>
           </a:p>
@@ -33678,13 +33990,13 @@
       </p:sp>
       <p:sp>
         <p:nvSpPr>
-          <p:cNvPr id="18" name="Text 16"/>
+          <p:cNvPr id="26" name="Text 24"/>
           <p:cNvSpPr/>
           <p:nvPr/>
         </p:nvSpPr>
         <p:spPr>
           <a:xfrm>
-            <a:off x="118872" y="2971800"/>
+            <a:off x="118872" y="3685032"/>
             <a:ext cx="1371600" cy="182880"/>
           </a:xfrm>
           <a:prstGeom prst="rect">
@@ -33717,13 +34029,13 @@
       </p:sp>
       <p:sp>
         <p:nvSpPr>
-          <p:cNvPr id="19" name="Text 17"/>
+          <p:cNvPr id="27" name="Text 25"/>
           <p:cNvSpPr/>
           <p:nvPr/>
         </p:nvSpPr>
         <p:spPr>
           <a:xfrm>
-            <a:off x="1490472" y="2971800"/>
+            <a:off x="1490472" y="3685032"/>
             <a:ext cx="841248" cy="182880"/>
           </a:xfrm>
           <a:prstGeom prst="rect">
@@ -33748,7 +34060,7 @@
                 <a:ea typeface="Calibri" pitchFamily="34" charset="-122"/>
                 <a:cs typeface="Calibri" pitchFamily="34" charset="-120"/>
               </a:rPr>
-              <a:t>28,00%</a:t>
+              <a:t>25,54%</a:t>
             </a:r>
             <a:endParaRPr lang="en-US" sz="750" dirty="0"/>
           </a:p>
@@ -33756,13 +34068,13 @@
       </p:sp>
       <p:sp>
         <p:nvSpPr>
-          <p:cNvPr id="20" name="Text 18"/>
+          <p:cNvPr id="28" name="Text 26"/>
           <p:cNvSpPr/>
           <p:nvPr/>
         </p:nvSpPr>
         <p:spPr>
           <a:xfrm>
-            <a:off x="118872" y="3172968"/>
+            <a:off x="118872" y="3886200"/>
             <a:ext cx="1371600" cy="182880"/>
           </a:xfrm>
           <a:prstGeom prst="rect">
@@ -33795,13 +34107,13 @@
       </p:sp>
       <p:sp>
         <p:nvSpPr>
-          <p:cNvPr id="21" name="Text 19"/>
+          <p:cNvPr id="29" name="Text 27"/>
           <p:cNvSpPr/>
           <p:nvPr/>
         </p:nvSpPr>
         <p:spPr>
           <a:xfrm>
-            <a:off x="1490472" y="3172968"/>
+            <a:off x="1490472" y="3886200"/>
             <a:ext cx="841248" cy="182880"/>
           </a:xfrm>
           <a:prstGeom prst="rect">
@@ -33826,7 +34138,7 @@
                 <a:ea typeface="Calibri" pitchFamily="34" charset="-122"/>
                 <a:cs typeface="Calibri" pitchFamily="34" charset="-120"/>
               </a:rPr>
-              <a:t>8,84%</a:t>
+              <a:t>12,30%</a:t>
             </a:r>
             <a:endParaRPr lang="en-US" sz="750" dirty="0"/>
           </a:p>
@@ -33834,13 +34146,13 @@
       </p:sp>
       <p:sp>
         <p:nvSpPr>
-          <p:cNvPr id="22" name="Text 20"/>
+          <p:cNvPr id="30" name="Text 28"/>
           <p:cNvSpPr/>
           <p:nvPr/>
         </p:nvSpPr>
         <p:spPr>
           <a:xfrm>
-            <a:off x="118872" y="3374136"/>
+            <a:off x="118872" y="4087368"/>
             <a:ext cx="1371600" cy="182880"/>
           </a:xfrm>
           <a:prstGeom prst="rect">
@@ -33873,13 +34185,13 @@
       </p:sp>
       <p:sp>
         <p:nvSpPr>
-          <p:cNvPr id="23" name="Text 21"/>
+          <p:cNvPr id="31" name="Text 29"/>
           <p:cNvSpPr/>
           <p:nvPr/>
         </p:nvSpPr>
         <p:spPr>
           <a:xfrm>
-            <a:off x="1490472" y="3374136"/>
+            <a:off x="1490472" y="4087368"/>
             <a:ext cx="841248" cy="182880"/>
           </a:xfrm>
           <a:prstGeom prst="rect">
@@ -33912,7 +34224,7 @@
       </p:sp>
       <p:sp>
         <p:nvSpPr>
-          <p:cNvPr id="24" name="Text 22"/>
+          <p:cNvPr id="32" name="Text 30"/>
           <p:cNvSpPr/>
           <p:nvPr/>
         </p:nvSpPr>
@@ -33951,7 +34263,7 @@
       </p:sp>
       <p:sp>
         <p:nvSpPr>
-          <p:cNvPr id="25" name="Shape 23"/>
+          <p:cNvPr id="33" name="Shape 31"/>
           <p:cNvSpPr/>
           <p:nvPr/>
         </p:nvSpPr>
@@ -33974,7 +34286,7 @@
       </p:sp>
       <p:sp>
         <p:nvSpPr>
-          <p:cNvPr id="26" name="Text 24"/>
+          <p:cNvPr id="34" name="Text 32"/>
           <p:cNvSpPr/>
           <p:nvPr/>
         </p:nvSpPr>
@@ -34030,7 +34342,7 @@
       </p:sp>
       <p:sp>
         <p:nvSpPr>
-          <p:cNvPr id="27" name="Text 25"/>
+          <p:cNvPr id="35" name="Text 33"/>
           <p:cNvSpPr/>
           <p:nvPr/>
         </p:nvSpPr>
@@ -34086,7 +34398,7 @@
       </p:sp>
       <p:sp>
         <p:nvSpPr>
-          <p:cNvPr id="28" name="Text 26"/>
+          <p:cNvPr id="36" name="Text 34"/>
           <p:cNvSpPr/>
           <p:nvPr/>
         </p:nvSpPr>
@@ -34142,7 +34454,7 @@
       </p:sp>
       <p:sp>
         <p:nvSpPr>
-          <p:cNvPr id="29" name="Text 27"/>
+          <p:cNvPr id="37" name="Text 35"/>
           <p:cNvSpPr/>
           <p:nvPr/>
         </p:nvSpPr>
@@ -34198,7 +34510,7 @@
       </p:sp>
       <p:sp>
         <p:nvSpPr>
-          <p:cNvPr id="30" name="Text 28"/>
+          <p:cNvPr id="38" name="Text 36"/>
           <p:cNvSpPr/>
           <p:nvPr/>
         </p:nvSpPr>
@@ -34254,7 +34566,7 @@
       </p:sp>
       <p:sp>
         <p:nvSpPr>
-          <p:cNvPr id="31" name="Text 29"/>
+          <p:cNvPr id="39" name="Text 37"/>
           <p:cNvSpPr/>
           <p:nvPr/>
         </p:nvSpPr>
@@ -34310,7 +34622,7 @@
       </p:sp>
       <p:sp>
         <p:nvSpPr>
-          <p:cNvPr id="32" name="Text 30"/>
+          <p:cNvPr id="40" name="Text 38"/>
           <p:cNvSpPr/>
           <p:nvPr/>
         </p:nvSpPr>
@@ -34366,7 +34678,7 @@
       </p:sp>
       <p:sp>
         <p:nvSpPr>
-          <p:cNvPr id="33" name="Text 31"/>
+          <p:cNvPr id="41" name="Text 39"/>
           <p:cNvSpPr/>
           <p:nvPr/>
         </p:nvSpPr>
@@ -34422,7 +34734,7 @@
       </p:sp>
       <p:sp>
         <p:nvSpPr>
-          <p:cNvPr id="34" name="Text 32"/>
+          <p:cNvPr id="42" name="Text 40"/>
           <p:cNvSpPr/>
           <p:nvPr/>
         </p:nvSpPr>
@@ -34478,7 +34790,7 @@
       </p:sp>
       <p:sp>
         <p:nvSpPr>
-          <p:cNvPr id="35" name="Shape 33"/>
+          <p:cNvPr id="43" name="Shape 41"/>
           <p:cNvSpPr/>
           <p:nvPr/>
         </p:nvSpPr>
@@ -34501,7 +34813,7 @@
       </p:sp>
       <p:sp>
         <p:nvSpPr>
-          <p:cNvPr id="36" name="Text 34"/>
+          <p:cNvPr id="44" name="Text 42"/>
           <p:cNvSpPr/>
           <p:nvPr/>
         </p:nvSpPr>
@@ -34540,7 +34852,7 @@
       </p:sp>
       <p:sp>
         <p:nvSpPr>
-          <p:cNvPr id="37" name="Shape 35"/>
+          <p:cNvPr id="45" name="Shape 43"/>
           <p:cNvSpPr/>
           <p:nvPr/>
         </p:nvSpPr>
@@ -34563,7 +34875,7 @@
       </p:sp>
       <p:sp>
         <p:nvSpPr>
-          <p:cNvPr id="38" name="Text 36"/>
+          <p:cNvPr id="46" name="Text 44"/>
           <p:cNvSpPr/>
           <p:nvPr/>
         </p:nvSpPr>

--- a/folletos/2026-04/pptx/FIP_VANTRUST_LIQUIDEZ_CAJA.pptx
+++ b/folletos/2026-04/pptx/FIP_VANTRUST_LIQUIDEZ_CAJA.pptx
@@ -6373,7 +6373,7 @@
                 <a:ea typeface="Calibri" pitchFamily="34" charset="-122"/>
                 <a:cs typeface="Calibri" pitchFamily="34" charset="-120"/>
               </a:rPr>
-              <a:t>prueba CLP</a:t>
+              <a:t>prueba 8 CLP</a:t>
             </a:r>
             <a:endParaRPr lang="en-US" sz="800" dirty="0"/>
           </a:p>

--- a/folletos/2026-04/pptx/FIP_VANTRUST_LIQUIDEZ_CAJA.pptx
+++ b/folletos/2026-04/pptx/FIP_VANTRUST_LIQUIDEZ_CAJA.pptx
@@ -3114,7 +3114,7 @@
                 <a:ea typeface="Calibri" pitchFamily="34" charset="-122"/>
                 <a:cs typeface="Calibri" pitchFamily="34" charset="-120"/>
               </a:rPr>
-              <a:t>prueba CLP</a:t>
+              <a:t>prueba 10 CLP</a:t>
             </a:r>
             <a:endParaRPr lang="en-US" sz="800" dirty="0"/>
           </a:p>

--- a/folletos/2026-04/pptx/FIP_VANTRUST_LIQUIDEZ_CAJA.pptx
+++ b/folletos/2026-04/pptx/FIP_VANTRUST_LIQUIDEZ_CAJA.pptx
@@ -3114,7 +3114,7 @@
                 <a:ea typeface="Calibri" pitchFamily="34" charset="-122"/>
                 <a:cs typeface="Calibri" pitchFamily="34" charset="-120"/>
               </a:rPr>
-              <a:t>prueba 10 CLP</a:t>
+              <a:t>prueba 11 CLP</a:t>
             </a:r>
             <a:endParaRPr lang="en-US" sz="800" dirty="0"/>
           </a:p>

--- a/folletos/2026-04/pptx/FIP_VANTRUST_LIQUIDEZ_CAJA.pptx
+++ b/folletos/2026-04/pptx/FIP_VANTRUST_LIQUIDEZ_CAJA.pptx
@@ -3131,7 +3131,7 @@
                 <a:ea typeface="Calibri" pitchFamily="34" charset="-122"/>
                 <a:cs typeface="Calibri" pitchFamily="34" charset="-120"/>
               </a:rPr>
-              <a:t>prueba CLP</a:t>
+              <a:t>prueba 11 CLP</a:t>
             </a:r>
             <a:endParaRPr lang="en-US" sz="800" dirty="0"/>
           </a:p>

--- a/folletos/2026-04/pptx/FIP_VANTRUST_LIQUIDEZ_CAJA.pptx
+++ b/folletos/2026-04/pptx/FIP_VANTRUST_LIQUIDEZ_CAJA.pptx
@@ -3131,7 +3131,7 @@
                 <a:ea typeface="Calibri" pitchFamily="34" charset="-122"/>
                 <a:cs typeface="Calibri" pitchFamily="34" charset="-120"/>
               </a:rPr>
-              <a:t>prueba 11 CLP</a:t>
+              <a:t>prueba 12 CLP</a:t>
             </a:r>
             <a:endParaRPr lang="en-US" sz="800" dirty="0"/>
           </a:p>

--- a/folletos/2026-04/pptx/FIP_VANTRUST_LIQUIDEZ_CAJA.pptx
+++ b/folletos/2026-04/pptx/FIP_VANTRUST_LIQUIDEZ_CAJA.pptx
@@ -3113,7 +3113,7 @@
                 <a:ea typeface="Calibri" pitchFamily="34" charset="-122"/>
                 <a:cs typeface="Calibri" pitchFamily="34" charset="-120"/>
               </a:rPr>
-              <a:t>prueba CLP</a:t>
+              <a:t>prueba 12 CLP</a:t>
             </a:r>
             <a:endParaRPr lang="en-US" sz="800" dirty="0"/>
           </a:p>

--- a/folletos/2026-04/pptx/FIP_VANTRUST_LIQUIDEZ_CAJA.pptx
+++ b/folletos/2026-04/pptx/FIP_VANTRUST_LIQUIDEZ_CAJA.pptx
@@ -3113,7 +3113,7 @@
                 <a:ea typeface="Calibri" pitchFamily="34" charset="-122"/>
                 <a:cs typeface="Calibri" pitchFamily="34" charset="-120"/>
               </a:rPr>
-              <a:t>prueba 12 CLP</a:t>
+              <a:t>prueba CLP</a:t>
             </a:r>
             <a:endParaRPr lang="en-US" sz="800" dirty="0"/>
           </a:p>
@@ -7663,7 +7663,7 @@
                           <a:ea typeface="Calibri" pitchFamily="34" charset="-122"/>
                           <a:cs typeface="Calibri" pitchFamily="34" charset="-120"/>
                         </a:rPr>
-                        <a:t>0.00%</a:t>
+                        <a:t>0.10%</a:t>
                       </a:r>
                       <a:endParaRPr lang="en-US" sz="500" dirty="0">
                         <a:latin typeface="Calibri" charset="0"/>
@@ -7793,7 +7793,7 @@
                           <a:ea typeface="Calibri" pitchFamily="34" charset="-122"/>
                           <a:cs typeface="Calibri" pitchFamily="34" charset="-120"/>
                         </a:rPr>
-                        <a:t>3.10%</a:t>
+                        <a:t>3.21%</a:t>
                       </a:r>
                       <a:endParaRPr lang="en-US" sz="500" dirty="0">
                         <a:latin typeface="Calibri" charset="0"/>
@@ -8519,7 +8519,7 @@
                           <a:ea typeface="Calibri" pitchFamily="34" charset="-122"/>
                           <a:cs typeface="Calibri" pitchFamily="34" charset="-120"/>
                         </a:rPr>
-                        <a:t>0.00%</a:t>
+                        <a:t>0.34%</a:t>
                       </a:r>
                       <a:endParaRPr lang="en-US" sz="500" dirty="0">
                         <a:latin typeface="Calibri" charset="0"/>
@@ -8584,7 +8584,7 @@
                           <a:ea typeface="Calibri" pitchFamily="34" charset="-122"/>
                           <a:cs typeface="Calibri" pitchFamily="34" charset="-120"/>
                         </a:rPr>
-                        <a:t>0.00%</a:t>
+                        <a:t>0.22%</a:t>
                       </a:r>
                       <a:endParaRPr lang="en-US" sz="500" dirty="0">
                         <a:latin typeface="Calibri" charset="0"/>
@@ -8649,7 +8649,7 @@
                           <a:ea typeface="Calibri" pitchFamily="34" charset="-122"/>
                           <a:cs typeface="Calibri" pitchFamily="34" charset="-120"/>
                         </a:rPr>
-                        <a:t>0.01%</a:t>
+                        <a:t>0.57%</a:t>
                       </a:r>
                       <a:endParaRPr lang="en-US" sz="500" dirty="0">
                         <a:latin typeface="Calibri" charset="0"/>
@@ -9877,7 +9877,7 @@
                           <a:ea typeface="Calibri" pitchFamily="34" charset="-122"/>
                           <a:cs typeface="Calibri" pitchFamily="34" charset="-120"/>
                         </a:rPr>
-                        <a:t>0.00%</a:t>
+                        <a:t>0.14%</a:t>
                       </a:r>
                       <a:endParaRPr lang="en-US" sz="500" dirty="0">
                         <a:latin typeface="Calibri" charset="0"/>
@@ -9942,7 +9942,7 @@
                           <a:ea typeface="Calibri" pitchFamily="34" charset="-122"/>
                           <a:cs typeface="Calibri" pitchFamily="34" charset="-120"/>
                         </a:rPr>
-                        <a:t>0.00%</a:t>
+                        <a:t>0.14%</a:t>
                       </a:r>
                       <a:endParaRPr lang="en-US" sz="500" dirty="0">
                         <a:latin typeface="Calibri" charset="0"/>
@@ -10007,7 +10007,7 @@
                           <a:ea typeface="Calibri" pitchFamily="34" charset="-122"/>
                           <a:cs typeface="Calibri" pitchFamily="34" charset="-120"/>
                         </a:rPr>
-                        <a:t>0.00%</a:t>
+                        <a:t>0.14%</a:t>
                       </a:r>
                       <a:endParaRPr lang="en-US" sz="500" dirty="0">
                         <a:latin typeface="Calibri" charset="0"/>
@@ -10072,7 +10072,7 @@
                           <a:ea typeface="Calibri" pitchFamily="34" charset="-122"/>
                           <a:cs typeface="Calibri" pitchFamily="34" charset="-120"/>
                         </a:rPr>
-                        <a:t>0.00%</a:t>
+                        <a:t>0.13%</a:t>
                       </a:r>
                       <a:endParaRPr lang="en-US" sz="500" dirty="0">
                         <a:latin typeface="Calibri" charset="0"/>
@@ -10137,7 +10137,7 @@
                           <a:ea typeface="Calibri" pitchFamily="34" charset="-122"/>
                           <a:cs typeface="Calibri" pitchFamily="34" charset="-120"/>
                         </a:rPr>
-                        <a:t>0.00%</a:t>
+                        <a:t>0.12%</a:t>
                       </a:r>
                       <a:endParaRPr lang="en-US" sz="500" dirty="0">
                         <a:latin typeface="Calibri" charset="0"/>
@@ -10202,7 +10202,7 @@
                           <a:ea typeface="Calibri" pitchFamily="34" charset="-122"/>
                           <a:cs typeface="Calibri" pitchFamily="34" charset="-120"/>
                         </a:rPr>
-                        <a:t>0.00%</a:t>
+                        <a:t>0.10%</a:t>
                       </a:r>
                       <a:endParaRPr lang="en-US" sz="500" dirty="0">
                         <a:latin typeface="Calibri" charset="0"/>
@@ -10267,7 +10267,7 @@
                           <a:ea typeface="Calibri" pitchFamily="34" charset="-122"/>
                           <a:cs typeface="Calibri" pitchFamily="34" charset="-120"/>
                         </a:rPr>
-                        <a:t>0.00%</a:t>
+                        <a:t>0.09%</a:t>
                       </a:r>
                       <a:endParaRPr lang="en-US" sz="500" dirty="0">
                         <a:latin typeface="Calibri" charset="0"/>
@@ -10332,7 +10332,7 @@
                           <a:ea typeface="Calibri" pitchFamily="34" charset="-122"/>
                           <a:cs typeface="Calibri" pitchFamily="34" charset="-120"/>
                         </a:rPr>
-                        <a:t>0.00%</a:t>
+                        <a:t>0.11%</a:t>
                       </a:r>
                       <a:endParaRPr lang="en-US" sz="500" dirty="0">
                         <a:latin typeface="Calibri" charset="0"/>
@@ -10397,7 +10397,7 @@
                           <a:ea typeface="Calibri" pitchFamily="34" charset="-122"/>
                           <a:cs typeface="Calibri" pitchFamily="34" charset="-120"/>
                         </a:rPr>
-                        <a:t>0.00%</a:t>
+                        <a:t>0.06%</a:t>
                       </a:r>
                       <a:endParaRPr lang="en-US" sz="500" dirty="0">
                         <a:latin typeface="Calibri" charset="0"/>
@@ -10462,7 +10462,7 @@
                           <a:ea typeface="Calibri" pitchFamily="34" charset="-122"/>
                           <a:cs typeface="Calibri" pitchFamily="34" charset="-120"/>
                         </a:rPr>
-                        <a:t>0.00%</a:t>
+                        <a:t>0.07%</a:t>
                       </a:r>
                       <a:endParaRPr lang="en-US" sz="500" dirty="0">
                         <a:latin typeface="Calibri" charset="0"/>
@@ -10592,7 +10592,7 @@
                           <a:ea typeface="Calibri" pitchFamily="34" charset="-122"/>
                           <a:cs typeface="Calibri" pitchFamily="34" charset="-120"/>
                         </a:rPr>
-                        <a:t>2.92%</a:t>
+                        <a:t>4.05%</a:t>
                       </a:r>
                       <a:endParaRPr lang="en-US" sz="500" dirty="0">
                         <a:latin typeface="Calibri" charset="0"/>
@@ -10778,7 +10778,7 @@
                           <a:ea typeface="Calibri" pitchFamily="34" charset="-122"/>
                           <a:cs typeface="Calibri" pitchFamily="34" charset="-120"/>
                         </a:rPr>
-                        <a:t>0.00%</a:t>
+                        <a:t>0.18%</a:t>
                       </a:r>
                       <a:endParaRPr lang="en-US" sz="500" dirty="0">
                         <a:latin typeface="Calibri" charset="0"/>
@@ -10843,7 +10843,7 @@
                           <a:ea typeface="Calibri" pitchFamily="34" charset="-122"/>
                           <a:cs typeface="Calibri" pitchFamily="34" charset="-120"/>
                         </a:rPr>
-                        <a:t>0.00%</a:t>
+                        <a:t>0.17%</a:t>
                       </a:r>
                       <a:endParaRPr lang="en-US" sz="500" dirty="0">
                         <a:latin typeface="Calibri" charset="0"/>
@@ -10908,7 +10908,7 @@
                           <a:ea typeface="Calibri" pitchFamily="34" charset="-122"/>
                           <a:cs typeface="Calibri" pitchFamily="34" charset="-120"/>
                         </a:rPr>
-                        <a:t>0.00%</a:t>
+                        <a:t>0.18%</a:t>
                       </a:r>
                       <a:endParaRPr lang="en-US" sz="500" dirty="0">
                         <a:latin typeface="Calibri" charset="0"/>
@@ -10973,7 +10973,7 @@
                           <a:ea typeface="Calibri" pitchFamily="34" charset="-122"/>
                           <a:cs typeface="Calibri" pitchFamily="34" charset="-120"/>
                         </a:rPr>
-                        <a:t>0.00%</a:t>
+                        <a:t>0.19%</a:t>
                       </a:r>
                       <a:endParaRPr lang="en-US" sz="500" dirty="0">
                         <a:latin typeface="Calibri" charset="0"/>
@@ -11038,7 +11038,7 @@
                           <a:ea typeface="Calibri" pitchFamily="34" charset="-122"/>
                           <a:cs typeface="Calibri" pitchFamily="34" charset="-120"/>
                         </a:rPr>
-                        <a:t>0.00%</a:t>
+                        <a:t>0.21%</a:t>
                       </a:r>
                       <a:endParaRPr lang="en-US" sz="500" dirty="0">
                         <a:latin typeface="Calibri" charset="0"/>
@@ -11103,7 +11103,7 @@
                           <a:ea typeface="Calibri" pitchFamily="34" charset="-122"/>
                           <a:cs typeface="Calibri" pitchFamily="34" charset="-120"/>
                         </a:rPr>
-                        <a:t>0.00%</a:t>
+                        <a:t>0.20%</a:t>
                       </a:r>
                       <a:endParaRPr lang="en-US" sz="500" dirty="0">
                         <a:latin typeface="Calibri" charset="0"/>
@@ -11168,7 +11168,7 @@
                           <a:ea typeface="Calibri" pitchFamily="34" charset="-122"/>
                           <a:cs typeface="Calibri" pitchFamily="34" charset="-120"/>
                         </a:rPr>
-                        <a:t>0.00%</a:t>
+                        <a:t>0.20%</a:t>
                       </a:r>
                       <a:endParaRPr lang="en-US" sz="500" dirty="0">
                         <a:latin typeface="Calibri" charset="0"/>
@@ -11233,7 +11233,7 @@
                           <a:ea typeface="Calibri" pitchFamily="34" charset="-122"/>
                           <a:cs typeface="Calibri" pitchFamily="34" charset="-120"/>
                         </a:rPr>
-                        <a:t>0.00%</a:t>
+                        <a:t>0.18%</a:t>
                       </a:r>
                       <a:endParaRPr lang="en-US" sz="500" dirty="0">
                         <a:latin typeface="Calibri" charset="0"/>
@@ -11298,7 +11298,7 @@
                           <a:ea typeface="Calibri" pitchFamily="34" charset="-122"/>
                           <a:cs typeface="Calibri" pitchFamily="34" charset="-120"/>
                         </a:rPr>
-                        <a:t>0.00%</a:t>
+                        <a:t>0.11%</a:t>
                       </a:r>
                       <a:endParaRPr lang="en-US" sz="500" dirty="0">
                         <a:latin typeface="Calibri" charset="0"/>
@@ -11363,7 +11363,7 @@
                           <a:ea typeface="Calibri" pitchFamily="34" charset="-122"/>
                           <a:cs typeface="Calibri" pitchFamily="34" charset="-120"/>
                         </a:rPr>
-                        <a:t>0.00%</a:t>
+                        <a:t>0.09%</a:t>
                       </a:r>
                       <a:endParaRPr lang="en-US" sz="500" dirty="0">
                         <a:latin typeface="Calibri" charset="0"/>
@@ -11428,7 +11428,7 @@
                           <a:ea typeface="Calibri" pitchFamily="34" charset="-122"/>
                           <a:cs typeface="Calibri" pitchFamily="34" charset="-120"/>
                         </a:rPr>
-                        <a:t>0.00%</a:t>
+                        <a:t>0.09%</a:t>
                       </a:r>
                       <a:endParaRPr lang="en-US" sz="500" dirty="0">
                         <a:latin typeface="Calibri" charset="0"/>
@@ -11493,7 +11493,7 @@
                           <a:ea typeface="Calibri" pitchFamily="34" charset="-122"/>
                           <a:cs typeface="Calibri" pitchFamily="34" charset="-120"/>
                         </a:rPr>
-                        <a:t>0.00%</a:t>
+                        <a:t>0.13%</a:t>
                       </a:r>
                       <a:endParaRPr lang="en-US" sz="500" dirty="0">
                         <a:latin typeface="Calibri" charset="0"/>
@@ -11558,7 +11558,7 @@
                           <a:ea typeface="Calibri" pitchFamily="34" charset="-122"/>
                           <a:cs typeface="Calibri" pitchFamily="34" charset="-120"/>
                         </a:rPr>
-                        <a:t>0.02%</a:t>
+                        <a:t>1.96%</a:t>
                       </a:r>
                       <a:endParaRPr lang="en-US" sz="500" dirty="0">
                         <a:latin typeface="Calibri" charset="0"/>
@@ -12786,7 +12786,7 @@
                           <a:ea typeface="Calibri" pitchFamily="34" charset="-122"/>
                           <a:cs typeface="Calibri" pitchFamily="34" charset="-120"/>
                         </a:rPr>
-                        <a:t>0.00%</a:t>
+                        <a:t>0.05%</a:t>
                       </a:r>
                       <a:endParaRPr lang="en-US" sz="500" dirty="0">
                         <a:latin typeface="Calibri" charset="0"/>
@@ -12851,7 +12851,7 @@
                           <a:ea typeface="Calibri" pitchFamily="34" charset="-122"/>
                           <a:cs typeface="Calibri" pitchFamily="34" charset="-120"/>
                         </a:rPr>
-                        <a:t>0.00%</a:t>
+                        <a:t>0.09%</a:t>
                       </a:r>
                       <a:endParaRPr lang="en-US" sz="500" dirty="0">
                         <a:latin typeface="Calibri" charset="0"/>
@@ -12916,7 +12916,7 @@
                           <a:ea typeface="Calibri" pitchFamily="34" charset="-122"/>
                           <a:cs typeface="Calibri" pitchFamily="34" charset="-120"/>
                         </a:rPr>
-                        <a:t>0.00%</a:t>
+                        <a:t>0.22%</a:t>
                       </a:r>
                       <a:endParaRPr lang="en-US" sz="500" dirty="0">
                         <a:latin typeface="Calibri" charset="0"/>
@@ -12981,7 +12981,7 @@
                           <a:ea typeface="Calibri" pitchFamily="34" charset="-122"/>
                           <a:cs typeface="Calibri" pitchFamily="34" charset="-120"/>
                         </a:rPr>
-                        <a:t>0.00%</a:t>
+                        <a:t>0.02%</a:t>
                       </a:r>
                       <a:endParaRPr lang="en-US" sz="500" dirty="0">
                         <a:latin typeface="Calibri" charset="0"/>
@@ -13046,7 +13046,7 @@
                           <a:ea typeface="Calibri" pitchFamily="34" charset="-122"/>
                           <a:cs typeface="Calibri" pitchFamily="34" charset="-120"/>
                         </a:rPr>
-                        <a:t>0.00%</a:t>
+                        <a:t>0.02%</a:t>
                       </a:r>
                       <a:endParaRPr lang="en-US" sz="500" dirty="0">
                         <a:latin typeface="Calibri" charset="0"/>
@@ -13111,7 +13111,7 @@
                           <a:ea typeface="Calibri" pitchFamily="34" charset="-122"/>
                           <a:cs typeface="Calibri" pitchFamily="34" charset="-120"/>
                         </a:rPr>
-                        <a:t>0.00%</a:t>
+                        <a:t>0.01%</a:t>
                       </a:r>
                       <a:endParaRPr lang="en-US" sz="500" dirty="0">
                         <a:latin typeface="Calibri" charset="0"/>
@@ -13176,7 +13176,7 @@
                           <a:ea typeface="Calibri" pitchFamily="34" charset="-122"/>
                           <a:cs typeface="Calibri" pitchFamily="34" charset="-120"/>
                         </a:rPr>
-                        <a:t>0.00%</a:t>
+                        <a:t>0.02%</a:t>
                       </a:r>
                       <a:endParaRPr lang="en-US" sz="500" dirty="0">
                         <a:latin typeface="Calibri" charset="0"/>
@@ -13241,7 +13241,7 @@
                           <a:ea typeface="Calibri" pitchFamily="34" charset="-122"/>
                           <a:cs typeface="Calibri" pitchFamily="34" charset="-120"/>
                         </a:rPr>
-                        <a:t>0.00%</a:t>
+                        <a:t>0.01%</a:t>
                       </a:r>
                       <a:endParaRPr lang="en-US" sz="500" dirty="0">
                         <a:latin typeface="Calibri" charset="0"/>
@@ -13306,7 +13306,7 @@
                           <a:ea typeface="Calibri" pitchFamily="34" charset="-122"/>
                           <a:cs typeface="Calibri" pitchFamily="34" charset="-120"/>
                         </a:rPr>
-                        <a:t>0.00%</a:t>
+                        <a:t>0.01%</a:t>
                       </a:r>
                       <a:endParaRPr lang="en-US" sz="500" dirty="0">
                         <a:latin typeface="Calibri" charset="0"/>
@@ -13371,7 +13371,7 @@
                           <a:ea typeface="Calibri" pitchFamily="34" charset="-122"/>
                           <a:cs typeface="Calibri" pitchFamily="34" charset="-120"/>
                         </a:rPr>
-                        <a:t>0.00%</a:t>
+                        <a:t>0.01%</a:t>
                       </a:r>
                       <a:endParaRPr lang="en-US" sz="500" dirty="0">
                         <a:latin typeface="Calibri" charset="0"/>
@@ -13501,7 +13501,7 @@
                           <a:ea typeface="Calibri" pitchFamily="34" charset="-122"/>
                           <a:cs typeface="Calibri" pitchFamily="34" charset="-120"/>
                         </a:rPr>
-                        <a:t>0.89%</a:t>
+                        <a:t>1.33%</a:t>
                       </a:r>
                       <a:endParaRPr lang="en-US" sz="500" dirty="0">
                         <a:latin typeface="Calibri" charset="0"/>
@@ -13687,7 +13687,7 @@
                           <a:ea typeface="Calibri" pitchFamily="34" charset="-122"/>
                           <a:cs typeface="Calibri" pitchFamily="34" charset="-120"/>
                         </a:rPr>
-                        <a:t>0.00%</a:t>
+                        <a:t>0.13%</a:t>
                       </a:r>
                       <a:endParaRPr lang="en-US" sz="500" dirty="0">
                         <a:latin typeface="Calibri" charset="0"/>
@@ -13752,7 +13752,7 @@
                           <a:ea typeface="Calibri" pitchFamily="34" charset="-122"/>
                           <a:cs typeface="Calibri" pitchFamily="34" charset="-120"/>
                         </a:rPr>
-                        <a:t>0.00%</a:t>
+                        <a:t>0.06%</a:t>
                       </a:r>
                       <a:endParaRPr lang="en-US" sz="500" dirty="0">
                         <a:latin typeface="Calibri" charset="0"/>
@@ -13817,7 +13817,7 @@
                           <a:ea typeface="Calibri" pitchFamily="34" charset="-122"/>
                           <a:cs typeface="Calibri" pitchFamily="34" charset="-120"/>
                         </a:rPr>
-                        <a:t>0.00%</a:t>
+                        <a:t>0.07%</a:t>
                       </a:r>
                       <a:endParaRPr lang="en-US" sz="500" dirty="0">
                         <a:latin typeface="Calibri" charset="0"/>
@@ -13882,7 +13882,7 @@
                           <a:ea typeface="Calibri" pitchFamily="34" charset="-122"/>
                           <a:cs typeface="Calibri" pitchFamily="34" charset="-120"/>
                         </a:rPr>
-                        <a:t>0.00%</a:t>
+                        <a:t>0.14%</a:t>
                       </a:r>
                       <a:endParaRPr lang="en-US" sz="500" dirty="0">
                         <a:latin typeface="Calibri" charset="0"/>
@@ -13947,7 +13947,7 @@
                           <a:ea typeface="Calibri" pitchFamily="34" charset="-122"/>
                           <a:cs typeface="Calibri" pitchFamily="34" charset="-120"/>
                         </a:rPr>
-                        <a:t>0.00%</a:t>
+                        <a:t>0.13%</a:t>
                       </a:r>
                       <a:endParaRPr lang="en-US" sz="500" dirty="0">
                         <a:latin typeface="Calibri" charset="0"/>
@@ -14012,7 +14012,7 @@
                           <a:ea typeface="Calibri" pitchFamily="34" charset="-122"/>
                           <a:cs typeface="Calibri" pitchFamily="34" charset="-120"/>
                         </a:rPr>
-                        <a:t>0.00%</a:t>
+                        <a:t>0.13%</a:t>
                       </a:r>
                       <a:endParaRPr lang="en-US" sz="500" dirty="0">
                         <a:latin typeface="Calibri" charset="0"/>
@@ -14077,7 +14077,7 @@
                           <a:ea typeface="Calibri" pitchFamily="34" charset="-122"/>
                           <a:cs typeface="Calibri" pitchFamily="34" charset="-120"/>
                         </a:rPr>
-                        <a:t>0.00%</a:t>
+                        <a:t>0.11%</a:t>
                       </a:r>
                       <a:endParaRPr lang="en-US" sz="500" dirty="0">
                         <a:latin typeface="Calibri" charset="0"/>
@@ -14142,7 +14142,7 @@
                           <a:ea typeface="Calibri" pitchFamily="34" charset="-122"/>
                           <a:cs typeface="Calibri" pitchFamily="34" charset="-120"/>
                         </a:rPr>
-                        <a:t>0.00%</a:t>
+                        <a:t>0.11%</a:t>
                       </a:r>
                       <a:endParaRPr lang="en-US" sz="500" dirty="0">
                         <a:latin typeface="Calibri" charset="0"/>
@@ -14207,7 +14207,7 @@
                           <a:ea typeface="Calibri" pitchFamily="34" charset="-122"/>
                           <a:cs typeface="Calibri" pitchFamily="34" charset="-120"/>
                         </a:rPr>
-                        <a:t>0.00%</a:t>
+                        <a:t>0.11%</a:t>
                       </a:r>
                       <a:endParaRPr lang="en-US" sz="500" dirty="0">
                         <a:latin typeface="Calibri" charset="0"/>
@@ -14272,7 +14272,7 @@
                           <a:ea typeface="Calibri" pitchFamily="34" charset="-122"/>
                           <a:cs typeface="Calibri" pitchFamily="34" charset="-120"/>
                         </a:rPr>
-                        <a:t>0.00%</a:t>
+                        <a:t>0.12%</a:t>
                       </a:r>
                       <a:endParaRPr lang="en-US" sz="500" dirty="0">
                         <a:latin typeface="Calibri" charset="0"/>
@@ -14337,7 +14337,7 @@
                           <a:ea typeface="Calibri" pitchFamily="34" charset="-122"/>
                           <a:cs typeface="Calibri" pitchFamily="34" charset="-120"/>
                         </a:rPr>
-                        <a:t>0.00%</a:t>
+                        <a:t>0.11%</a:t>
                       </a:r>
                       <a:endParaRPr lang="en-US" sz="500" dirty="0">
                         <a:latin typeface="Calibri" charset="0"/>
@@ -14402,7 +14402,7 @@
                           <a:ea typeface="Calibri" pitchFamily="34" charset="-122"/>
                           <a:cs typeface="Calibri" pitchFamily="34" charset="-120"/>
                         </a:rPr>
-                        <a:t>0.00%</a:t>
+                        <a:t>0.24%</a:t>
                       </a:r>
                       <a:endParaRPr lang="en-US" sz="500" dirty="0">
                         <a:latin typeface="Calibri" charset="0"/>
@@ -14467,7 +14467,7 @@
                           <a:ea typeface="Calibri" pitchFamily="34" charset="-122"/>
                           <a:cs typeface="Calibri" pitchFamily="34" charset="-120"/>
                         </a:rPr>
-                        <a:t>0.01%</a:t>
+                        <a:t>1.48%</a:t>
                       </a:r>
                       <a:endParaRPr lang="en-US" sz="500" dirty="0">
                         <a:latin typeface="Calibri" charset="0"/>
@@ -15695,7 +15695,7 @@
                           <a:ea typeface="Calibri" pitchFamily="34" charset="-122"/>
                           <a:cs typeface="Calibri" pitchFamily="34" charset="-120"/>
                         </a:rPr>
-                        <a:t>0.00%</a:t>
+                        <a:t>0.01%</a:t>
                       </a:r>
                       <a:endParaRPr lang="en-US" sz="500" dirty="0">
                         <a:latin typeface="Calibri" charset="0"/>
@@ -15760,7 +15760,7 @@
                           <a:ea typeface="Calibri" pitchFamily="34" charset="-122"/>
                           <a:cs typeface="Calibri" pitchFamily="34" charset="-120"/>
                         </a:rPr>
-                        <a:t>0.00%</a:t>
+                        <a:t>0.01%</a:t>
                       </a:r>
                       <a:endParaRPr lang="en-US" sz="500" dirty="0">
                         <a:latin typeface="Calibri" charset="0"/>
@@ -15825,7 +15825,7 @@
                           <a:ea typeface="Calibri" pitchFamily="34" charset="-122"/>
                           <a:cs typeface="Calibri" pitchFamily="34" charset="-120"/>
                         </a:rPr>
-                        <a:t>0.00%</a:t>
+                        <a:t>0.01%</a:t>
                       </a:r>
                       <a:endParaRPr lang="en-US" sz="500" dirty="0">
                         <a:latin typeface="Calibri" charset="0"/>
@@ -15890,7 +15890,7 @@
                           <a:ea typeface="Calibri" pitchFamily="34" charset="-122"/>
                           <a:cs typeface="Calibri" pitchFamily="34" charset="-120"/>
                         </a:rPr>
-                        <a:t>0.00%</a:t>
+                        <a:t>0.01%</a:t>
                       </a:r>
                       <a:endParaRPr lang="en-US" sz="500" dirty="0">
                         <a:latin typeface="Calibri" charset="0"/>
@@ -15955,7 +15955,7 @@
                           <a:ea typeface="Calibri" pitchFamily="34" charset="-122"/>
                           <a:cs typeface="Calibri" pitchFamily="34" charset="-120"/>
                         </a:rPr>
-                        <a:t>0.00%</a:t>
+                        <a:t>0.01%</a:t>
                       </a:r>
                       <a:endParaRPr lang="en-US" sz="500" dirty="0">
                         <a:latin typeface="Calibri" charset="0"/>
@@ -16020,7 +16020,7 @@
                           <a:ea typeface="Calibri" pitchFamily="34" charset="-122"/>
                           <a:cs typeface="Calibri" pitchFamily="34" charset="-120"/>
                         </a:rPr>
-                        <a:t>0.00%</a:t>
+                        <a:t>0.01%</a:t>
                       </a:r>
                       <a:endParaRPr lang="en-US" sz="500" dirty="0">
                         <a:latin typeface="Calibri" charset="0"/>
@@ -16085,7 +16085,7 @@
                           <a:ea typeface="Calibri" pitchFamily="34" charset="-122"/>
                           <a:cs typeface="Calibri" pitchFamily="34" charset="-120"/>
                         </a:rPr>
-                        <a:t>0.00%</a:t>
+                        <a:t>0.01%</a:t>
                       </a:r>
                       <a:endParaRPr lang="en-US" sz="500" dirty="0">
                         <a:latin typeface="Calibri" charset="0"/>
@@ -16150,7 +16150,7 @@
                           <a:ea typeface="Calibri" pitchFamily="34" charset="-122"/>
                           <a:cs typeface="Calibri" pitchFamily="34" charset="-120"/>
                         </a:rPr>
-                        <a:t>-0.00%</a:t>
+                        <a:t>-0.01%</a:t>
                       </a:r>
                       <a:endParaRPr lang="en-US" sz="500" dirty="0">
                         <a:latin typeface="Calibri" charset="0"/>
@@ -16215,7 +16215,7 @@
                           <a:ea typeface="Calibri" pitchFamily="34" charset="-122"/>
                           <a:cs typeface="Calibri" pitchFamily="34" charset="-120"/>
                         </a:rPr>
-                        <a:t>0.00%</a:t>
+                        <a:t>0.10%</a:t>
                       </a:r>
                       <a:endParaRPr lang="en-US" sz="500" dirty="0">
                         <a:latin typeface="Calibri" charset="0"/>
@@ -16280,7 +16280,7 @@
                           <a:ea typeface="Calibri" pitchFamily="34" charset="-122"/>
                           <a:cs typeface="Calibri" pitchFamily="34" charset="-120"/>
                         </a:rPr>
-                        <a:t>0.00%</a:t>
+                        <a:t>0.13%</a:t>
                       </a:r>
                       <a:endParaRPr lang="en-US" sz="500" dirty="0">
                         <a:latin typeface="Calibri" charset="0"/>
@@ -16410,7 +16410,7 @@
                           <a:ea typeface="Calibri" pitchFamily="34" charset="-122"/>
                           <a:cs typeface="Calibri" pitchFamily="34" charset="-120"/>
                         </a:rPr>
-                        <a:t>0.60%</a:t>
+                        <a:t>0.85%</a:t>
                       </a:r>
                       <a:endParaRPr lang="en-US" sz="500" dirty="0">
                         <a:latin typeface="Calibri" charset="0"/>
@@ -16596,7 +16596,7 @@
                           <a:ea typeface="Calibri" pitchFamily="34" charset="-122"/>
                           <a:cs typeface="Calibri" pitchFamily="34" charset="-120"/>
                         </a:rPr>
-                        <a:t>0.00%</a:t>
+                        <a:t>0.09%</a:t>
                       </a:r>
                       <a:endParaRPr lang="en-US" sz="500" dirty="0">
                         <a:latin typeface="Calibri" charset="0"/>
@@ -16661,7 +16661,7 @@
                           <a:ea typeface="Calibri" pitchFamily="34" charset="-122"/>
                           <a:cs typeface="Calibri" pitchFamily="34" charset="-120"/>
                         </a:rPr>
-                        <a:t>0.00%</a:t>
+                        <a:t>0.09%</a:t>
                       </a:r>
                       <a:endParaRPr lang="en-US" sz="500" dirty="0">
                         <a:latin typeface="Calibri" charset="0"/>
@@ -16726,7 +16726,7 @@
                           <a:ea typeface="Calibri" pitchFamily="34" charset="-122"/>
                           <a:cs typeface="Calibri" pitchFamily="34" charset="-120"/>
                         </a:rPr>
-                        <a:t>0.00%</a:t>
+                        <a:t>0.02%</a:t>
                       </a:r>
                       <a:endParaRPr lang="en-US" sz="500" dirty="0">
                         <a:latin typeface="Calibri" charset="0"/>
@@ -16791,7 +16791,7 @@
                           <a:ea typeface="Calibri" pitchFamily="34" charset="-122"/>
                           <a:cs typeface="Calibri" pitchFamily="34" charset="-120"/>
                         </a:rPr>
-                        <a:t>0.00%</a:t>
+                        <a:t>0.02%</a:t>
                       </a:r>
                       <a:endParaRPr lang="en-US" sz="500" dirty="0">
                         <a:latin typeface="Calibri" charset="0"/>
@@ -16856,7 +16856,7 @@
                           <a:ea typeface="Calibri" pitchFamily="34" charset="-122"/>
                           <a:cs typeface="Calibri" pitchFamily="34" charset="-120"/>
                         </a:rPr>
-                        <a:t>0.00%</a:t>
+                        <a:t>0.12%</a:t>
                       </a:r>
                       <a:endParaRPr lang="en-US" sz="500" dirty="0">
                         <a:latin typeface="Calibri" charset="0"/>
@@ -16921,7 +16921,7 @@
                           <a:ea typeface="Calibri" pitchFamily="34" charset="-122"/>
                           <a:cs typeface="Calibri" pitchFamily="34" charset="-120"/>
                         </a:rPr>
-                        <a:t>0.00%</a:t>
+                        <a:t>0.12%</a:t>
                       </a:r>
                       <a:endParaRPr lang="en-US" sz="500" dirty="0">
                         <a:latin typeface="Calibri" charset="0"/>
@@ -16986,7 +16986,7 @@
                           <a:ea typeface="Calibri" pitchFamily="34" charset="-122"/>
                           <a:cs typeface="Calibri" pitchFamily="34" charset="-120"/>
                         </a:rPr>
-                        <a:t>0.00%</a:t>
+                        <a:t>0.11%</a:t>
                       </a:r>
                       <a:endParaRPr lang="en-US" sz="500" dirty="0">
                         <a:latin typeface="Calibri" charset="0"/>
@@ -17051,7 +17051,7 @@
                           <a:ea typeface="Calibri" pitchFamily="34" charset="-122"/>
                           <a:cs typeface="Calibri" pitchFamily="34" charset="-120"/>
                         </a:rPr>
-                        <a:t>0.00%</a:t>
+                        <a:t>0.10%</a:t>
                       </a:r>
                       <a:endParaRPr lang="en-US" sz="500" dirty="0">
                         <a:latin typeface="Calibri" charset="0"/>
@@ -17116,7 +17116,7 @@
                           <a:ea typeface="Calibri" pitchFamily="34" charset="-122"/>
                           <a:cs typeface="Calibri" pitchFamily="34" charset="-120"/>
                         </a:rPr>
-                        <a:t>0.00%</a:t>
+                        <a:t>0.06%</a:t>
                       </a:r>
                       <a:endParaRPr lang="en-US" sz="500" dirty="0">
                         <a:latin typeface="Calibri" charset="0"/>
@@ -17181,7 +17181,7 @@
                           <a:ea typeface="Calibri" pitchFamily="34" charset="-122"/>
                           <a:cs typeface="Calibri" pitchFamily="34" charset="-120"/>
                         </a:rPr>
-                        <a:t>0.00%</a:t>
+                        <a:t>0.08%</a:t>
                       </a:r>
                       <a:endParaRPr lang="en-US" sz="500" dirty="0">
                         <a:latin typeface="Calibri" charset="0"/>
@@ -17246,7 +17246,7 @@
                           <a:ea typeface="Calibri" pitchFamily="34" charset="-122"/>
                           <a:cs typeface="Calibri" pitchFamily="34" charset="-120"/>
                         </a:rPr>
-                        <a:t>0.00%</a:t>
+                        <a:t>0.14%</a:t>
                       </a:r>
                       <a:endParaRPr lang="en-US" sz="500" dirty="0">
                         <a:latin typeface="Calibri" charset="0"/>
@@ -17311,7 +17311,7 @@
                           <a:ea typeface="Calibri" pitchFamily="34" charset="-122"/>
                           <a:cs typeface="Calibri" pitchFamily="34" charset="-120"/>
                         </a:rPr>
-                        <a:t>0.00%</a:t>
+                        <a:t>0.17%</a:t>
                       </a:r>
                       <a:endParaRPr lang="en-US" sz="500" dirty="0">
                         <a:latin typeface="Calibri" charset="0"/>
@@ -17376,7 +17376,7 @@
                           <a:ea typeface="Calibri" pitchFamily="34" charset="-122"/>
                           <a:cs typeface="Calibri" pitchFamily="34" charset="-120"/>
                         </a:rPr>
-                        <a:t>0.01%</a:t>
+                        <a:t>1.14%</a:t>
                       </a:r>
                       <a:endParaRPr lang="en-US" sz="500" dirty="0">
                         <a:latin typeface="Calibri" charset="0"/>
@@ -18604,7 +18604,7 @@
                           <a:ea typeface="Calibri" pitchFamily="34" charset="-122"/>
                           <a:cs typeface="Calibri" pitchFamily="34" charset="-120"/>
                         </a:rPr>
-                        <a:t>0.00%</a:t>
+                        <a:t>0.35%</a:t>
                       </a:r>
                       <a:endParaRPr lang="en-US" sz="500" dirty="0">
                         <a:latin typeface="Calibri" charset="0"/>
@@ -18669,7 +18669,7 @@
                           <a:ea typeface="Calibri" pitchFamily="34" charset="-122"/>
                           <a:cs typeface="Calibri" pitchFamily="34" charset="-120"/>
                         </a:rPr>
-                        <a:t>0.00%</a:t>
+                        <a:t>0.37%</a:t>
                       </a:r>
                       <a:endParaRPr lang="en-US" sz="500" dirty="0">
                         <a:latin typeface="Calibri" charset="0"/>
@@ -18734,7 +18734,7 @@
                           <a:ea typeface="Calibri" pitchFamily="34" charset="-122"/>
                           <a:cs typeface="Calibri" pitchFamily="34" charset="-120"/>
                         </a:rPr>
-                        <a:t>0.00%</a:t>
+                        <a:t>0.46%</a:t>
                       </a:r>
                       <a:endParaRPr lang="en-US" sz="500" dirty="0">
                         <a:latin typeface="Calibri" charset="0"/>
@@ -18799,7 +18799,7 @@
                           <a:ea typeface="Calibri" pitchFamily="34" charset="-122"/>
                           <a:cs typeface="Calibri" pitchFamily="34" charset="-120"/>
                         </a:rPr>
-                        <a:t>0.01%</a:t>
+                        <a:t>0.53%</a:t>
                       </a:r>
                       <a:endParaRPr lang="en-US" sz="500" dirty="0">
                         <a:latin typeface="Calibri" charset="0"/>
@@ -18864,7 +18864,7 @@
                           <a:ea typeface="Calibri" pitchFamily="34" charset="-122"/>
                           <a:cs typeface="Calibri" pitchFamily="34" charset="-120"/>
                         </a:rPr>
-                        <a:t>0.01%</a:t>
+                        <a:t>0.59%</a:t>
                       </a:r>
                       <a:endParaRPr lang="en-US" sz="500" dirty="0">
                         <a:latin typeface="Calibri" charset="0"/>
@@ -18929,7 +18929,7 @@
                           <a:ea typeface="Calibri" pitchFamily="34" charset="-122"/>
                           <a:cs typeface="Calibri" pitchFamily="34" charset="-120"/>
                         </a:rPr>
-                        <a:t>0.01%</a:t>
+                        <a:t>0.63%</a:t>
                       </a:r>
                       <a:endParaRPr lang="en-US" sz="500" dirty="0">
                         <a:latin typeface="Calibri" charset="0"/>
@@ -18994,7 +18994,7 @@
                           <a:ea typeface="Calibri" pitchFamily="34" charset="-122"/>
                           <a:cs typeface="Calibri" pitchFamily="34" charset="-120"/>
                         </a:rPr>
-                        <a:t>0.01%</a:t>
+                        <a:t>0.68%</a:t>
                       </a:r>
                       <a:endParaRPr lang="en-US" sz="500" dirty="0">
                         <a:latin typeface="Calibri" charset="0"/>
@@ -19059,7 +19059,7 @@
                           <a:ea typeface="Calibri" pitchFamily="34" charset="-122"/>
                           <a:cs typeface="Calibri" pitchFamily="34" charset="-120"/>
                         </a:rPr>
-                        <a:t>0.01%</a:t>
+                        <a:t>0.73%</a:t>
                       </a:r>
                       <a:endParaRPr lang="en-US" sz="500" dirty="0">
                         <a:latin typeface="Calibri" charset="0"/>
@@ -19124,7 +19124,7 @@
                           <a:ea typeface="Calibri" pitchFamily="34" charset="-122"/>
                           <a:cs typeface="Calibri" pitchFamily="34" charset="-120"/>
                         </a:rPr>
-                        <a:t>0.01%</a:t>
+                        <a:t>0.78%</a:t>
                       </a:r>
                       <a:endParaRPr lang="en-US" sz="500" dirty="0">
                         <a:latin typeface="Calibri" charset="0"/>
@@ -19189,7 +19189,7 @@
                           <a:ea typeface="Calibri" pitchFamily="34" charset="-122"/>
                           <a:cs typeface="Calibri" pitchFamily="34" charset="-120"/>
                         </a:rPr>
-                        <a:t>0.01%</a:t>
+                        <a:t>0.79%</a:t>
                       </a:r>
                       <a:endParaRPr lang="en-US" sz="500" dirty="0">
                         <a:latin typeface="Calibri" charset="0"/>
@@ -19319,7 +19319,7 @@
                           <a:ea typeface="Calibri" pitchFamily="34" charset="-122"/>
                           <a:cs typeface="Calibri" pitchFamily="34" charset="-120"/>
                         </a:rPr>
-                        <a:t>8.50%</a:t>
+                        <a:t>15.02%</a:t>
                       </a:r>
                       <a:endParaRPr lang="en-US" sz="500" dirty="0">
                         <a:latin typeface="Calibri" charset="0"/>
@@ -19505,7 +19505,7 @@
                           <a:ea typeface="Calibri" pitchFamily="34" charset="-122"/>
                           <a:cs typeface="Calibri" pitchFamily="34" charset="-120"/>
                         </a:rPr>
-                        <a:t>0.01%</a:t>
+                        <a:t>1.00%</a:t>
                       </a:r>
                       <a:endParaRPr lang="en-US" sz="500" dirty="0">
                         <a:latin typeface="Calibri" charset="0"/>
@@ -19570,7 +19570,7 @@
                           <a:ea typeface="Calibri" pitchFamily="34" charset="-122"/>
                           <a:cs typeface="Calibri" pitchFamily="34" charset="-120"/>
                         </a:rPr>
-                        <a:t>0.01%</a:t>
+                        <a:t>0.88%</a:t>
                       </a:r>
                       <a:endParaRPr lang="en-US" sz="500" dirty="0">
                         <a:latin typeface="Calibri" charset="0"/>
@@ -19635,7 +19635,7 @@
                           <a:ea typeface="Calibri" pitchFamily="34" charset="-122"/>
                           <a:cs typeface="Calibri" pitchFamily="34" charset="-120"/>
                         </a:rPr>
-                        <a:t>0.01%</a:t>
+                        <a:t>0.97%</a:t>
                       </a:r>
                       <a:endParaRPr lang="en-US" sz="500" dirty="0">
                         <a:latin typeface="Calibri" charset="0"/>
@@ -19700,7 +19700,7 @@
                           <a:ea typeface="Calibri" pitchFamily="34" charset="-122"/>
                           <a:cs typeface="Calibri" pitchFamily="34" charset="-120"/>
                         </a:rPr>
-                        <a:t>0.01%</a:t>
+                        <a:t>0.88%</a:t>
                       </a:r>
                       <a:endParaRPr lang="en-US" sz="500" dirty="0">
                         <a:latin typeface="Calibri" charset="0"/>
@@ -19765,7 +19765,7 @@
                           <a:ea typeface="Calibri" pitchFamily="34" charset="-122"/>
                           <a:cs typeface="Calibri" pitchFamily="34" charset="-120"/>
                         </a:rPr>
-                        <a:t>0.01%</a:t>
+                        <a:t>1.04%</a:t>
                       </a:r>
                       <a:endParaRPr lang="en-US" sz="500" dirty="0">
                         <a:latin typeface="Calibri" charset="0"/>
@@ -19830,7 +19830,7 @@
                           <a:ea typeface="Calibri" pitchFamily="34" charset="-122"/>
                           <a:cs typeface="Calibri" pitchFamily="34" charset="-120"/>
                         </a:rPr>
-                        <a:t>0.01%</a:t>
+                        <a:t>0.94%</a:t>
                       </a:r>
                       <a:endParaRPr lang="en-US" sz="500" dirty="0">
                         <a:latin typeface="Calibri" charset="0"/>
@@ -19895,7 +19895,7 @@
                           <a:ea typeface="Calibri" pitchFamily="34" charset="-122"/>
                           <a:cs typeface="Calibri" pitchFamily="34" charset="-120"/>
                         </a:rPr>
-                        <a:t>0.01%</a:t>
+                        <a:t>0.97%</a:t>
                       </a:r>
                       <a:endParaRPr lang="en-US" sz="500" dirty="0">
                         <a:latin typeface="Calibri" charset="0"/>
@@ -19960,7 +19960,7 @@
                           <a:ea typeface="Calibri" pitchFamily="34" charset="-122"/>
                           <a:cs typeface="Calibri" pitchFamily="34" charset="-120"/>
                         </a:rPr>
-                        <a:t>0.01%</a:t>
+                        <a:t>0.89%</a:t>
                       </a:r>
                       <a:endParaRPr lang="en-US" sz="500" dirty="0">
                         <a:latin typeface="Calibri" charset="0"/>
@@ -20025,7 +20025,7 @@
                           <a:ea typeface="Calibri" pitchFamily="34" charset="-122"/>
                           <a:cs typeface="Calibri" pitchFamily="34" charset="-120"/>
                         </a:rPr>
-                        <a:t>0.01%</a:t>
+                        <a:t>0.78%</a:t>
                       </a:r>
                       <a:endParaRPr lang="en-US" sz="500" dirty="0">
                         <a:latin typeface="Calibri" charset="0"/>
@@ -20090,7 +20090,7 @@
                           <a:ea typeface="Calibri" pitchFamily="34" charset="-122"/>
                           <a:cs typeface="Calibri" pitchFamily="34" charset="-120"/>
                         </a:rPr>
-                        <a:t>0.01%</a:t>
+                        <a:t>0.85%</a:t>
                       </a:r>
                       <a:endParaRPr lang="en-US" sz="500" dirty="0">
                         <a:latin typeface="Calibri" charset="0"/>
@@ -20155,7 +20155,7 @@
                           <a:ea typeface="Calibri" pitchFamily="34" charset="-122"/>
                           <a:cs typeface="Calibri" pitchFamily="34" charset="-120"/>
                         </a:rPr>
-                        <a:t>0.01%</a:t>
+                        <a:t>0.75%</a:t>
                       </a:r>
                       <a:endParaRPr lang="en-US" sz="500" dirty="0">
                         <a:latin typeface="Calibri" charset="0"/>
@@ -20220,7 +20220,7 @@
                           <a:ea typeface="Calibri" pitchFamily="34" charset="-122"/>
                           <a:cs typeface="Calibri" pitchFamily="34" charset="-120"/>
                         </a:rPr>
-                        <a:t>0.01%</a:t>
+                        <a:t>0.71%</a:t>
                       </a:r>
                       <a:endParaRPr lang="en-US" sz="500" dirty="0">
                         <a:latin typeface="Calibri" charset="0"/>
@@ -20285,7 +20285,7 @@
                           <a:ea typeface="Calibri" pitchFamily="34" charset="-122"/>
                           <a:cs typeface="Calibri" pitchFamily="34" charset="-120"/>
                         </a:rPr>
-                        <a:t>0.11%</a:t>
+                        <a:t>11.19%</a:t>
                       </a:r>
                       <a:endParaRPr lang="en-US" sz="500" dirty="0">
                         <a:latin typeface="Calibri" charset="0"/>
@@ -21513,7 +21513,7 @@
                           <a:ea typeface="Calibri" pitchFamily="34" charset="-122"/>
                           <a:cs typeface="Calibri" pitchFamily="34" charset="-120"/>
                         </a:rPr>
-                        <a:t>0.01%</a:t>
+                        <a:t>0.79%</a:t>
                       </a:r>
                       <a:endParaRPr lang="en-US" sz="500" dirty="0">
                         <a:latin typeface="Calibri" charset="0"/>
@@ -21578,7 +21578,7 @@
                           <a:ea typeface="Calibri" pitchFamily="34" charset="-122"/>
                           <a:cs typeface="Calibri" pitchFamily="34" charset="-120"/>
                         </a:rPr>
-                        <a:t>0.01%</a:t>
+                        <a:t>0.79%</a:t>
                       </a:r>
                       <a:endParaRPr lang="en-US" sz="500" dirty="0">
                         <a:latin typeface="Calibri" charset="0"/>
@@ -21643,7 +21643,7 @@
                           <a:ea typeface="Calibri" pitchFamily="34" charset="-122"/>
                           <a:cs typeface="Calibri" pitchFamily="34" charset="-120"/>
                         </a:rPr>
-                        <a:t>0.01%</a:t>
+                        <a:t>0.80%</a:t>
                       </a:r>
                       <a:endParaRPr lang="en-US" sz="500" dirty="0">
                         <a:latin typeface="Calibri" charset="0"/>
@@ -21708,7 +21708,7 @@
                           <a:ea typeface="Calibri" pitchFamily="34" charset="-122"/>
                           <a:cs typeface="Calibri" pitchFamily="34" charset="-120"/>
                         </a:rPr>
-                        <a:t>0.01%</a:t>
+                        <a:t>0.80%</a:t>
                       </a:r>
                       <a:endParaRPr lang="en-US" sz="500" dirty="0">
                         <a:latin typeface="Calibri" charset="0"/>
@@ -21773,7 +21773,7 @@
                           <a:ea typeface="Calibri" pitchFamily="34" charset="-122"/>
                           <a:cs typeface="Calibri" pitchFamily="34" charset="-120"/>
                         </a:rPr>
-                        <a:t>0.01%</a:t>
+                        <a:t>0.80%</a:t>
                       </a:r>
                       <a:endParaRPr lang="en-US" sz="500" dirty="0">
                         <a:latin typeface="Calibri" charset="0"/>
@@ -21838,7 +21838,7 @@
                           <a:ea typeface="Calibri" pitchFamily="34" charset="-122"/>
                           <a:cs typeface="Calibri" pitchFamily="34" charset="-120"/>
                         </a:rPr>
-                        <a:t>0.01%</a:t>
+                        <a:t>0.79%</a:t>
                       </a:r>
                       <a:endParaRPr lang="en-US" sz="500" dirty="0">
                         <a:latin typeface="Calibri" charset="0"/>
@@ -21903,7 +21903,7 @@
                           <a:ea typeface="Calibri" pitchFamily="34" charset="-122"/>
                           <a:cs typeface="Calibri" pitchFamily="34" charset="-120"/>
                         </a:rPr>
-                        <a:t>0.01%</a:t>
+                        <a:t>0.74%</a:t>
                       </a:r>
                       <a:endParaRPr lang="en-US" sz="500" dirty="0">
                         <a:latin typeface="Calibri" charset="0"/>
@@ -21968,7 +21968,7 @@
                           <a:ea typeface="Calibri" pitchFamily="34" charset="-122"/>
                           <a:cs typeface="Calibri" pitchFamily="34" charset="-120"/>
                         </a:rPr>
-                        <a:t>0.01%</a:t>
+                        <a:t>0.68%</a:t>
                       </a:r>
                       <a:endParaRPr lang="en-US" sz="500" dirty="0">
                         <a:latin typeface="Calibri" charset="0"/>
@@ -22033,7 +22033,7 @@
                           <a:ea typeface="Calibri" pitchFamily="34" charset="-122"/>
                           <a:cs typeface="Calibri" pitchFamily="34" charset="-120"/>
                         </a:rPr>
-                        <a:t>0.01%</a:t>
+                        <a:t>0.65%</a:t>
                       </a:r>
                       <a:endParaRPr lang="en-US" sz="500" dirty="0">
                         <a:latin typeface="Calibri" charset="0"/>
@@ -22098,7 +22098,7 @@
                           <a:ea typeface="Calibri" pitchFamily="34" charset="-122"/>
                           <a:cs typeface="Calibri" pitchFamily="34" charset="-120"/>
                         </a:rPr>
-                        <a:t>0.01%</a:t>
+                        <a:t>0.62%</a:t>
                       </a:r>
                       <a:endParaRPr lang="en-US" sz="500" dirty="0">
                         <a:latin typeface="Calibri" charset="0"/>
@@ -22228,7 +22228,7 @@
                           <a:ea typeface="Calibri" pitchFamily="34" charset="-122"/>
                           <a:cs typeface="Calibri" pitchFamily="34" charset="-120"/>
                         </a:rPr>
-                        <a:t>7.57%</a:t>
+                        <a:t>15.78%</a:t>
                       </a:r>
                       <a:endParaRPr lang="en-US" sz="500" dirty="0">
                         <a:latin typeface="Calibri" charset="0"/>
@@ -22414,7 +22414,7 @@
                           <a:ea typeface="Calibri" pitchFamily="34" charset="-122"/>
                           <a:cs typeface="Calibri" pitchFamily="34" charset="-120"/>
                         </a:rPr>
-                        <a:t>0.01%</a:t>
+                        <a:t>0.96%</a:t>
                       </a:r>
                       <a:endParaRPr lang="en-US" sz="500" dirty="0">
                         <a:latin typeface="Calibri" charset="0"/>
@@ -22479,7 +22479,7 @@
                           <a:ea typeface="Calibri" pitchFamily="34" charset="-122"/>
                           <a:cs typeface="Calibri" pitchFamily="34" charset="-120"/>
                         </a:rPr>
-                        <a:t>0.01%</a:t>
+                        <a:t>0.88%</a:t>
                       </a:r>
                       <a:endParaRPr lang="en-US" sz="500" dirty="0">
                         <a:latin typeface="Calibri" charset="0"/>
@@ -22544,7 +22544,7 @@
                           <a:ea typeface="Calibri" pitchFamily="34" charset="-122"/>
                           <a:cs typeface="Calibri" pitchFamily="34" charset="-120"/>
                         </a:rPr>
-                        <a:t>0.01%</a:t>
+                        <a:t>0.96%</a:t>
                       </a:r>
                       <a:endParaRPr lang="en-US" sz="500" dirty="0">
                         <a:latin typeface="Calibri" charset="0"/>
@@ -22609,7 +22609,7 @@
                           <a:ea typeface="Calibri" pitchFamily="34" charset="-122"/>
                           <a:cs typeface="Calibri" pitchFamily="34" charset="-120"/>
                         </a:rPr>
-                        <a:t>0.01%</a:t>
+                        <a:t>0.99%</a:t>
                       </a:r>
                       <a:endParaRPr lang="en-US" sz="500" dirty="0">
                         <a:latin typeface="Calibri" charset="0"/>
@@ -22674,7 +22674,7 @@
                           <a:ea typeface="Calibri" pitchFamily="34" charset="-122"/>
                           <a:cs typeface="Calibri" pitchFamily="34" charset="-120"/>
                         </a:rPr>
-                        <a:t>0.01%</a:t>
+                        <a:t>0.96%</a:t>
                       </a:r>
                       <a:endParaRPr lang="en-US" sz="500" dirty="0">
                         <a:latin typeface="Calibri" charset="0"/>
@@ -22739,7 +22739,7 @@
                           <a:ea typeface="Calibri" pitchFamily="34" charset="-122"/>
                           <a:cs typeface="Calibri" pitchFamily="34" charset="-120"/>
                         </a:rPr>
-                        <a:t>0.01%</a:t>
+                        <a:t>0.97%</a:t>
                       </a:r>
                       <a:endParaRPr lang="en-US" sz="500" dirty="0">
                         <a:latin typeface="Calibri" charset="0"/>
@@ -22804,7 +22804,7 @@
                           <a:ea typeface="Calibri" pitchFamily="34" charset="-122"/>
                           <a:cs typeface="Calibri" pitchFamily="34" charset="-120"/>
                         </a:rPr>
-                        <a:t>0.01%</a:t>
+                        <a:t>0.96%</a:t>
                       </a:r>
                       <a:endParaRPr lang="en-US" sz="500" dirty="0">
                         <a:latin typeface="Calibri" charset="0"/>
@@ -22869,7 +22869,7 @@
                           <a:ea typeface="Calibri" pitchFamily="34" charset="-122"/>
                           <a:cs typeface="Calibri" pitchFamily="34" charset="-120"/>
                         </a:rPr>
-                        <a:t>0.01%</a:t>
+                        <a:t>0.94%</a:t>
                       </a:r>
                       <a:endParaRPr lang="en-US" sz="500" dirty="0">
                         <a:latin typeface="Calibri" charset="0"/>
@@ -22934,7 +22934,7 @@
                           <a:ea typeface="Calibri" pitchFamily="34" charset="-122"/>
                           <a:cs typeface="Calibri" pitchFamily="34" charset="-120"/>
                         </a:rPr>
-                        <a:t>0.01%</a:t>
+                        <a:t>0.93%</a:t>
                       </a:r>
                       <a:endParaRPr lang="en-US" sz="500" dirty="0">
                         <a:latin typeface="Calibri" charset="0"/>
@@ -22999,7 +22999,7 @@
                           <a:ea typeface="Calibri" pitchFamily="34" charset="-122"/>
                           <a:cs typeface="Calibri" pitchFamily="34" charset="-120"/>
                         </a:rPr>
-                        <a:t>0.01%</a:t>
+                        <a:t>0.85%</a:t>
                       </a:r>
                       <a:endParaRPr lang="en-US" sz="500" dirty="0">
                         <a:latin typeface="Calibri" charset="0"/>
@@ -23064,7 +23064,7 @@
                           <a:ea typeface="Calibri" pitchFamily="34" charset="-122"/>
                           <a:cs typeface="Calibri" pitchFamily="34" charset="-120"/>
                         </a:rPr>
-                        <a:t>0.01%</a:t>
+                        <a:t>0.77%</a:t>
                       </a:r>
                       <a:endParaRPr lang="en-US" sz="500" dirty="0">
                         <a:latin typeface="Calibri" charset="0"/>
@@ -23129,7 +23129,7 @@
                           <a:ea typeface="Calibri" pitchFamily="34" charset="-122"/>
                           <a:cs typeface="Calibri" pitchFamily="34" charset="-120"/>
                         </a:rPr>
-                        <a:t>0.01%</a:t>
+                        <a:t>0.77%</a:t>
                       </a:r>
                       <a:endParaRPr lang="en-US" sz="500" dirty="0">
                         <a:latin typeface="Calibri" charset="0"/>
@@ -23194,7 +23194,7 @@
                           <a:ea typeface="Calibri" pitchFamily="34" charset="-122"/>
                           <a:cs typeface="Calibri" pitchFamily="34" charset="-120"/>
                         </a:rPr>
-                        <a:t>0.11%</a:t>
+                        <a:t>11.51%</a:t>
                       </a:r>
                       <a:endParaRPr lang="en-US" sz="500" dirty="0">
                         <a:latin typeface="Calibri" charset="0"/>
@@ -24422,7 +24422,7 @@
                           <a:ea typeface="Calibri" pitchFamily="34" charset="-122"/>
                           <a:cs typeface="Calibri" pitchFamily="34" charset="-120"/>
                         </a:rPr>
-                        <a:t>0.01%</a:t>
+                        <a:t>0.53%</a:t>
                       </a:r>
                       <a:endParaRPr lang="en-US" sz="500" dirty="0">
                         <a:latin typeface="Calibri" charset="0"/>
@@ -24487,7 +24487,7 @@
                           <a:ea typeface="Calibri" pitchFamily="34" charset="-122"/>
                           <a:cs typeface="Calibri" pitchFamily="34" charset="-120"/>
                         </a:rPr>
-                        <a:t>0.00%</a:t>
+                        <a:t>0.43%</a:t>
                       </a:r>
                       <a:endParaRPr lang="en-US" sz="500" dirty="0">
                         <a:latin typeface="Calibri" charset="0"/>
@@ -24552,7 +24552,7 @@
                           <a:ea typeface="Calibri" pitchFamily="34" charset="-122"/>
                           <a:cs typeface="Calibri" pitchFamily="34" charset="-120"/>
                         </a:rPr>
-                        <a:t>0.00%</a:t>
+                        <a:t>0.47%</a:t>
                       </a:r>
                       <a:endParaRPr lang="en-US" sz="500" dirty="0">
                         <a:latin typeface="Calibri" charset="0"/>
@@ -24617,7 +24617,7 @@
                           <a:ea typeface="Calibri" pitchFamily="34" charset="-122"/>
                           <a:cs typeface="Calibri" pitchFamily="34" charset="-120"/>
                         </a:rPr>
-                        <a:t>0.00%</a:t>
+                        <a:t>0.40%</a:t>
                       </a:r>
                       <a:endParaRPr lang="en-US" sz="500" dirty="0">
                         <a:latin typeface="Calibri" charset="0"/>
@@ -24682,7 +24682,7 @@
                           <a:ea typeface="Calibri" pitchFamily="34" charset="-122"/>
                           <a:cs typeface="Calibri" pitchFamily="34" charset="-120"/>
                         </a:rPr>
-                        <a:t>0.00%</a:t>
+                        <a:t>0.37%</a:t>
                       </a:r>
                       <a:endParaRPr lang="en-US" sz="500" dirty="0">
                         <a:latin typeface="Calibri" charset="0"/>
@@ -24747,7 +24747,7 @@
                           <a:ea typeface="Calibri" pitchFamily="34" charset="-122"/>
                           <a:cs typeface="Calibri" pitchFamily="34" charset="-120"/>
                         </a:rPr>
-                        <a:t>0.00%</a:t>
+                        <a:t>0.35%</a:t>
                       </a:r>
                       <a:endParaRPr lang="en-US" sz="500" dirty="0">
                         <a:latin typeface="Calibri" charset="0"/>
@@ -24812,7 +24812,7 @@
                           <a:ea typeface="Calibri" pitchFamily="34" charset="-122"/>
                           <a:cs typeface="Calibri" pitchFamily="34" charset="-120"/>
                         </a:rPr>
-                        <a:t>0.00%</a:t>
+                        <a:t>0.35%</a:t>
                       </a:r>
                       <a:endParaRPr lang="en-US" sz="500" dirty="0">
                         <a:latin typeface="Calibri" charset="0"/>
@@ -24877,7 +24877,7 @@
                           <a:ea typeface="Calibri" pitchFamily="34" charset="-122"/>
                           <a:cs typeface="Calibri" pitchFamily="34" charset="-120"/>
                         </a:rPr>
-                        <a:t>0.00%</a:t>
+                        <a:t>0.34%</a:t>
                       </a:r>
                       <a:endParaRPr lang="en-US" sz="500" dirty="0">
                         <a:latin typeface="Calibri" charset="0"/>
@@ -24942,7 +24942,7 @@
                           <a:ea typeface="Calibri" pitchFamily="34" charset="-122"/>
                           <a:cs typeface="Calibri" pitchFamily="34" charset="-120"/>
                         </a:rPr>
-                        <a:t>0.00%</a:t>
+                        <a:t>0.33%</a:t>
                       </a:r>
                       <a:endParaRPr lang="en-US" sz="500" dirty="0">
                         <a:latin typeface="Calibri" charset="0"/>
@@ -25007,7 +25007,7 @@
                           <a:ea typeface="Calibri" pitchFamily="34" charset="-122"/>
                           <a:cs typeface="Calibri" pitchFamily="34" charset="-120"/>
                         </a:rPr>
-                        <a:t>0.00%</a:t>
+                        <a:t>0.32%</a:t>
                       </a:r>
                       <a:endParaRPr lang="en-US" sz="500" dirty="0">
                         <a:latin typeface="Calibri" charset="0"/>
@@ -25137,7 +25137,7 @@
                           <a:ea typeface="Calibri" pitchFamily="34" charset="-122"/>
                           <a:cs typeface="Calibri" pitchFamily="34" charset="-120"/>
                         </a:rPr>
-                        <a:t>-2.95%</a:t>
+                        <a:t>0.85%</a:t>
                       </a:r>
                       <a:endParaRPr lang="en-US" sz="500" dirty="0">
                         <a:latin typeface="Calibri" charset="0"/>
@@ -25323,7 +25323,7 @@
                           <a:ea typeface="Calibri" pitchFamily="34" charset="-122"/>
                           <a:cs typeface="Calibri" pitchFamily="34" charset="-120"/>
                         </a:rPr>
-                        <a:t>0.01%</a:t>
+                        <a:t>0.82%</a:t>
                       </a:r>
                       <a:endParaRPr lang="en-US" sz="500" dirty="0">
                         <a:latin typeface="Calibri" charset="0"/>
@@ -25388,7 +25388,7 @@
                           <a:ea typeface="Calibri" pitchFamily="34" charset="-122"/>
                           <a:cs typeface="Calibri" pitchFamily="34" charset="-120"/>
                         </a:rPr>
-                        <a:t>0.01%</a:t>
+                        <a:t>0.68%</a:t>
                       </a:r>
                       <a:endParaRPr lang="en-US" sz="500" dirty="0">
                         <a:latin typeface="Calibri" charset="0"/>
@@ -25453,7 +25453,7 @@
                           <a:ea typeface="Calibri" pitchFamily="34" charset="-122"/>
                           <a:cs typeface="Calibri" pitchFamily="34" charset="-120"/>
                         </a:rPr>
-                        <a:t>0.01%</a:t>
+                        <a:t>0.56%</a:t>
                       </a:r>
                       <a:endParaRPr lang="en-US" sz="500" dirty="0">
                         <a:latin typeface="Calibri" charset="0"/>
@@ -25518,7 +25518,7 @@
                           <a:ea typeface="Calibri" pitchFamily="34" charset="-122"/>
                           <a:cs typeface="Calibri" pitchFamily="34" charset="-120"/>
                         </a:rPr>
-                        <a:t>0.01%</a:t>
+                        <a:t>0.66%</a:t>
                       </a:r>
                       <a:endParaRPr lang="en-US" sz="500" dirty="0">
                         <a:latin typeface="Calibri" charset="0"/>
@@ -25583,7 +25583,7 @@
                           <a:ea typeface="Calibri" pitchFamily="34" charset="-122"/>
                           <a:cs typeface="Calibri" pitchFamily="34" charset="-120"/>
                         </a:rPr>
-                        <a:t>0.01%</a:t>
+                        <a:t>0.65%</a:t>
                       </a:r>
                       <a:endParaRPr lang="en-US" sz="500" dirty="0">
                         <a:latin typeface="Calibri" charset="0"/>
@@ -25648,7 +25648,7 @@
                           <a:ea typeface="Calibri" pitchFamily="34" charset="-122"/>
                           <a:cs typeface="Calibri" pitchFamily="34" charset="-120"/>
                         </a:rPr>
-                        <a:t>0.01%</a:t>
+                        <a:t>0.61%</a:t>
                       </a:r>
                       <a:endParaRPr lang="en-US" sz="500" dirty="0">
                         <a:latin typeface="Calibri" charset="0"/>
@@ -25713,7 +25713,7 @@
                           <a:ea typeface="Calibri" pitchFamily="34" charset="-122"/>
                           <a:cs typeface="Calibri" pitchFamily="34" charset="-120"/>
                         </a:rPr>
-                        <a:t>0.00%</a:t>
+                        <a:t>0.43%</a:t>
                       </a:r>
                       <a:endParaRPr lang="en-US" sz="500" dirty="0">
                         <a:latin typeface="Calibri" charset="0"/>
@@ -25778,7 +25778,7 @@
                           <a:ea typeface="Calibri" pitchFamily="34" charset="-122"/>
                           <a:cs typeface="Calibri" pitchFamily="34" charset="-120"/>
                         </a:rPr>
-                        <a:t>0.00%</a:t>
+                        <a:t>0.43%</a:t>
                       </a:r>
                       <a:endParaRPr lang="en-US" sz="500" dirty="0">
                         <a:latin typeface="Calibri" charset="0"/>
@@ -25843,7 +25843,7 @@
                           <a:ea typeface="Calibri" pitchFamily="34" charset="-122"/>
                           <a:cs typeface="Calibri" pitchFamily="34" charset="-120"/>
                         </a:rPr>
-                        <a:t>0.00%</a:t>
+                        <a:t>0.49%</a:t>
                       </a:r>
                       <a:endParaRPr lang="en-US" sz="500" dirty="0">
                         <a:latin typeface="Calibri" charset="0"/>
@@ -25908,7 +25908,7 @@
                           <a:ea typeface="Calibri" pitchFamily="34" charset="-122"/>
                           <a:cs typeface="Calibri" pitchFamily="34" charset="-120"/>
                         </a:rPr>
-                        <a:t>0.00%</a:t>
+                        <a:t>0.44%</a:t>
                       </a:r>
                       <a:endParaRPr lang="en-US" sz="500" dirty="0">
                         <a:latin typeface="Calibri" charset="0"/>
@@ -25973,7 +25973,7 @@
                           <a:ea typeface="Calibri" pitchFamily="34" charset="-122"/>
                           <a:cs typeface="Calibri" pitchFamily="34" charset="-120"/>
                         </a:rPr>
-                        <a:t>0.00%</a:t>
+                        <a:t>0.47%</a:t>
                       </a:r>
                       <a:endParaRPr lang="en-US" sz="500" dirty="0">
                         <a:latin typeface="Calibri" charset="0"/>
@@ -26038,7 +26038,7 @@
                           <a:ea typeface="Calibri" pitchFamily="34" charset="-122"/>
                           <a:cs typeface="Calibri" pitchFamily="34" charset="-120"/>
                         </a:rPr>
-                        <a:t>0.00%</a:t>
+                        <a:t>0.45%</a:t>
                       </a:r>
                       <a:endParaRPr lang="en-US" sz="500" dirty="0">
                         <a:latin typeface="Calibri" charset="0"/>
@@ -26103,7 +26103,7 @@
                           <a:ea typeface="Calibri" pitchFamily="34" charset="-122"/>
                           <a:cs typeface="Calibri" pitchFamily="34" charset="-120"/>
                         </a:rPr>
-                        <a:t>0.07%</a:t>
+                        <a:t>6.91%</a:t>
                       </a:r>
                       <a:endParaRPr lang="en-US" sz="500" dirty="0">
                         <a:latin typeface="Calibri" charset="0"/>
@@ -28232,7 +28232,7 @@
                           <a:ea typeface="Calibri" pitchFamily="34" charset="-122"/>
                           <a:cs typeface="Calibri" pitchFamily="34" charset="-120"/>
                         </a:rPr>
-                        <a:t>0.00%</a:t>
+                        <a:t>0.29%</a:t>
                       </a:r>
                       <a:endParaRPr lang="en-US" sz="500" dirty="0">
                         <a:latin typeface="Calibri" charset="0"/>
@@ -28297,7 +28297,7 @@
                           <a:ea typeface="Calibri" pitchFamily="34" charset="-122"/>
                           <a:cs typeface="Calibri" pitchFamily="34" charset="-120"/>
                         </a:rPr>
-                        <a:t>0.00%</a:t>
+                        <a:t>0.43%</a:t>
                       </a:r>
                       <a:endParaRPr lang="en-US" sz="500" dirty="0">
                         <a:latin typeface="Calibri" charset="0"/>
@@ -28362,7 +28362,7 @@
                           <a:ea typeface="Calibri" pitchFamily="34" charset="-122"/>
                           <a:cs typeface="Calibri" pitchFamily="34" charset="-120"/>
                         </a:rPr>
-                        <a:t>0.00%</a:t>
+                        <a:t>0.41%</a:t>
                       </a:r>
                       <a:endParaRPr lang="en-US" sz="500" dirty="0">
                         <a:latin typeface="Calibri" charset="0"/>
@@ -28427,7 +28427,7 @@
                           <a:ea typeface="Calibri" pitchFamily="34" charset="-122"/>
                           <a:cs typeface="Calibri" pitchFamily="34" charset="-120"/>
                         </a:rPr>
-                        <a:t>0.00%</a:t>
+                        <a:t>0.42%</a:t>
                       </a:r>
                       <a:endParaRPr lang="en-US" sz="500" dirty="0">
                         <a:latin typeface="Calibri" charset="0"/>
@@ -28492,7 +28492,7 @@
                           <a:ea typeface="Calibri" pitchFamily="34" charset="-122"/>
                           <a:cs typeface="Calibri" pitchFamily="34" charset="-120"/>
                         </a:rPr>
-                        <a:t>0.00%</a:t>
+                        <a:t>0.43%</a:t>
                       </a:r>
                       <a:endParaRPr lang="en-US" sz="500" dirty="0">
                         <a:latin typeface="Calibri" charset="0"/>
@@ -28557,7 +28557,7 @@
                           <a:ea typeface="Calibri" pitchFamily="34" charset="-122"/>
                           <a:cs typeface="Calibri" pitchFamily="34" charset="-120"/>
                         </a:rPr>
-                        <a:t>0.01%</a:t>
+                        <a:t>0.53%</a:t>
                       </a:r>
                       <a:endParaRPr lang="en-US" sz="500" dirty="0">
                         <a:latin typeface="Calibri" charset="0"/>
@@ -28622,7 +28622,7 @@
                           <a:ea typeface="Calibri" pitchFamily="34" charset="-122"/>
                           <a:cs typeface="Calibri" pitchFamily="34" charset="-120"/>
                         </a:rPr>
-                        <a:t>0.00%</a:t>
+                        <a:t>0.48%</a:t>
                       </a:r>
                       <a:endParaRPr lang="en-US" sz="500" dirty="0">
                         <a:latin typeface="Calibri" charset="0"/>
@@ -29012,7 +29012,7 @@
                           <a:ea typeface="Calibri" pitchFamily="34" charset="-122"/>
                           <a:cs typeface="Calibri" pitchFamily="34" charset="-120"/>
                         </a:rPr>
-                        <a:t>2.78%</a:t>
+                        <a:t>5.85%</a:t>
                       </a:r>
                       <a:endParaRPr lang="en-US" sz="500" dirty="0">
                         <a:latin typeface="Calibri" charset="0"/>

--- a/folletos/2026-04/pptx/FIP_VANTRUST_LIQUIDEZ_CAJA.pptx
+++ b/folletos/2026-04/pptx/FIP_VANTRUST_LIQUIDEZ_CAJA.pptx
@@ -3113,7 +3113,7 @@
                 <a:ea typeface="Calibri" pitchFamily="34" charset="-122"/>
                 <a:cs typeface="Calibri" pitchFamily="34" charset="-120"/>
               </a:rPr>
-              <a:t>prueba CLP</a:t>
+              <a:t>prueba 13 CLP</a:t>
             </a:r>
             <a:endParaRPr lang="en-US" sz="800" dirty="0"/>
           </a:p>

--- a/folletos/2026-04/pptx/FIP_VANTRUST_LIQUIDEZ_CAJA.pptx
+++ b/folletos/2026-04/pptx/FIP_VANTRUST_LIQUIDEZ_CAJA.pptx
@@ -189,38 +189,281 @@
           </c:marker>
           <c:cat>
             <c:multiLvlStrRef>
-              <c:f>Sheet1!$A$2:$A$11</c:f>
+              <c:f>Sheet1!$A$2:$A$92</c:f>
               <c:multiLvlStrCache>
-                <c:ptCount val="10"/>
+                <c:ptCount val="91"/>
                 <c:lvl>
                   <c:pt idx="0">
+                    <c:v>Oct 2018</c:v>
+                  </c:pt>
+                  <c:pt idx="1">
+                    <c:v>Nov 2018</c:v>
+                  </c:pt>
+                  <c:pt idx="2">
+                    <c:v>Dec 2018</c:v>
+                  </c:pt>
+                  <c:pt idx="3">
+                    <c:v>Jan 2019</c:v>
+                  </c:pt>
+                  <c:pt idx="4">
+                    <c:v>Feb 2019</c:v>
+                  </c:pt>
+                  <c:pt idx="5">
+                    <c:v>Mar 2019</c:v>
+                  </c:pt>
+                  <c:pt idx="6">
+                    <c:v>Apr 2019</c:v>
+                  </c:pt>
+                  <c:pt idx="7">
+                    <c:v>May 2019</c:v>
+                  </c:pt>
+                  <c:pt idx="8">
+                    <c:v>Jun 2019</c:v>
+                  </c:pt>
+                  <c:pt idx="9">
+                    <c:v>Jul 2019</c:v>
+                  </c:pt>
+                  <c:pt idx="10">
+                    <c:v>Aug 2019</c:v>
+                  </c:pt>
+                  <c:pt idx="11">
+                    <c:v>Sep 2019</c:v>
+                  </c:pt>
+                  <c:pt idx="12">
+                    <c:v>Oct 2019</c:v>
+                  </c:pt>
+                  <c:pt idx="13">
+                    <c:v>Nov 2019</c:v>
+                  </c:pt>
+                  <c:pt idx="14">
+                    <c:v>Dec 2019</c:v>
+                  </c:pt>
+                  <c:pt idx="15">
+                    <c:v>Jan 2020</c:v>
+                  </c:pt>
+                  <c:pt idx="16">
+                    <c:v>Feb 2020</c:v>
+                  </c:pt>
+                  <c:pt idx="17">
+                    <c:v>Mar 2020</c:v>
+                  </c:pt>
+                  <c:pt idx="18">
+                    <c:v>Apr 2020</c:v>
+                  </c:pt>
+                  <c:pt idx="19">
+                    <c:v>May 2020</c:v>
+                  </c:pt>
+                  <c:pt idx="20">
+                    <c:v>Jun 2020</c:v>
+                  </c:pt>
+                  <c:pt idx="21">
+                    <c:v>Jul 2020</c:v>
+                  </c:pt>
+                  <c:pt idx="22">
+                    <c:v>Aug 2020</c:v>
+                  </c:pt>
+                  <c:pt idx="23">
+                    <c:v>Sep 2020</c:v>
+                  </c:pt>
+                  <c:pt idx="24">
+                    <c:v>Oct 2020</c:v>
+                  </c:pt>
+                  <c:pt idx="25">
+                    <c:v>Nov 2020</c:v>
+                  </c:pt>
+                  <c:pt idx="26">
+                    <c:v>Dec 2020</c:v>
+                  </c:pt>
+                  <c:pt idx="27">
+                    <c:v>Jan 2021</c:v>
+                  </c:pt>
+                  <c:pt idx="28">
+                    <c:v>Feb 2021</c:v>
+                  </c:pt>
+                  <c:pt idx="29">
+                    <c:v>Mar 2021</c:v>
+                  </c:pt>
+                  <c:pt idx="30">
+                    <c:v>Apr 2021</c:v>
+                  </c:pt>
+                  <c:pt idx="31">
+                    <c:v>May 2021</c:v>
+                  </c:pt>
+                  <c:pt idx="32">
+                    <c:v>Jun 2021</c:v>
+                  </c:pt>
+                  <c:pt idx="33">
+                    <c:v>Jul 2021</c:v>
+                  </c:pt>
+                  <c:pt idx="34">
+                    <c:v>Aug 2021</c:v>
+                  </c:pt>
+                  <c:pt idx="35">
+                    <c:v>Sep 2021</c:v>
+                  </c:pt>
+                  <c:pt idx="36">
+                    <c:v>Oct 2021</c:v>
+                  </c:pt>
+                  <c:pt idx="37">
+                    <c:v>Nov 2021</c:v>
+                  </c:pt>
+                  <c:pt idx="38">
+                    <c:v>Dec 2021</c:v>
+                  </c:pt>
+                  <c:pt idx="39">
+                    <c:v>Jan 2022</c:v>
+                  </c:pt>
+                  <c:pt idx="40">
+                    <c:v>Feb 2022</c:v>
+                  </c:pt>
+                  <c:pt idx="41">
+                    <c:v>Mar 2022</c:v>
+                  </c:pt>
+                  <c:pt idx="42">
+                    <c:v>Apr 2022</c:v>
+                  </c:pt>
+                  <c:pt idx="43">
+                    <c:v>May 2022</c:v>
+                  </c:pt>
+                  <c:pt idx="44">
+                    <c:v>Jun 2022</c:v>
+                  </c:pt>
+                  <c:pt idx="45">
+                    <c:v>Jul 2022</c:v>
+                  </c:pt>
+                  <c:pt idx="46">
+                    <c:v>Aug 2022</c:v>
+                  </c:pt>
+                  <c:pt idx="47">
+                    <c:v>Sep 2022</c:v>
+                  </c:pt>
+                  <c:pt idx="48">
+                    <c:v>Oct 2022</c:v>
+                  </c:pt>
+                  <c:pt idx="49">
+                    <c:v>Nov 2022</c:v>
+                  </c:pt>
+                  <c:pt idx="50">
+                    <c:v>Dec 2022</c:v>
+                  </c:pt>
+                  <c:pt idx="51">
+                    <c:v>Jan 2023</c:v>
+                  </c:pt>
+                  <c:pt idx="52">
+                    <c:v>Feb 2023</c:v>
+                  </c:pt>
+                  <c:pt idx="53">
+                    <c:v>Mar 2023</c:v>
+                  </c:pt>
+                  <c:pt idx="54">
+                    <c:v>Apr 2023</c:v>
+                  </c:pt>
+                  <c:pt idx="55">
+                    <c:v>May 2023</c:v>
+                  </c:pt>
+                  <c:pt idx="56">
+                    <c:v>Jun 2023</c:v>
+                  </c:pt>
+                  <c:pt idx="57">
+                    <c:v>Jul 2023</c:v>
+                  </c:pt>
+                  <c:pt idx="58">
+                    <c:v>Aug 2023</c:v>
+                  </c:pt>
+                  <c:pt idx="59">
+                    <c:v>Sep 2023</c:v>
+                  </c:pt>
+                  <c:pt idx="60">
+                    <c:v>Oct 2023</c:v>
+                  </c:pt>
+                  <c:pt idx="61">
+                    <c:v>Nov 2023</c:v>
+                  </c:pt>
+                  <c:pt idx="62">
+                    <c:v>Dec 2023</c:v>
+                  </c:pt>
+                  <c:pt idx="63">
+                    <c:v>Jan 2024</c:v>
+                  </c:pt>
+                  <c:pt idx="64">
+                    <c:v>Feb 2024</c:v>
+                  </c:pt>
+                  <c:pt idx="65">
+                    <c:v>Mar 2024</c:v>
+                  </c:pt>
+                  <c:pt idx="66">
+                    <c:v>Apr 2024</c:v>
+                  </c:pt>
+                  <c:pt idx="67">
+                    <c:v>May 2024</c:v>
+                  </c:pt>
+                  <c:pt idx="68">
+                    <c:v>Jun 2024</c:v>
+                  </c:pt>
+                  <c:pt idx="69">
+                    <c:v>Jul 2024</c:v>
+                  </c:pt>
+                  <c:pt idx="70">
+                    <c:v>Aug 2024</c:v>
+                  </c:pt>
+                  <c:pt idx="71">
+                    <c:v>Sep 2024</c:v>
+                  </c:pt>
+                  <c:pt idx="72">
+                    <c:v>Oct 2024</c:v>
+                  </c:pt>
+                  <c:pt idx="73">
+                    <c:v>Nov 2024</c:v>
+                  </c:pt>
+                  <c:pt idx="74">
+                    <c:v>Dec 2024</c:v>
+                  </c:pt>
+                  <c:pt idx="75">
+                    <c:v>Jan 2025</c:v>
+                  </c:pt>
+                  <c:pt idx="76">
+                    <c:v>Feb 2025</c:v>
+                  </c:pt>
+                  <c:pt idx="77">
+                    <c:v>Mar 2025</c:v>
+                  </c:pt>
+                  <c:pt idx="78">
+                    <c:v>Apr 2025</c:v>
+                  </c:pt>
+                  <c:pt idx="79">
+                    <c:v>May 2025</c:v>
+                  </c:pt>
+                  <c:pt idx="80">
+                    <c:v>Jun 2025</c:v>
+                  </c:pt>
+                  <c:pt idx="81">
                     <c:v>Jul 2025</c:v>
                   </c:pt>
-                  <c:pt idx="1">
+                  <c:pt idx="82">
                     <c:v>Aug 2025</c:v>
                   </c:pt>
-                  <c:pt idx="2">
+                  <c:pt idx="83">
                     <c:v>Sep 2025</c:v>
                   </c:pt>
-                  <c:pt idx="3">
+                  <c:pt idx="84">
                     <c:v>Oct 2025</c:v>
                   </c:pt>
-                  <c:pt idx="4">
+                  <c:pt idx="85">
                     <c:v>Nov 2025</c:v>
                   </c:pt>
-                  <c:pt idx="5">
+                  <c:pt idx="86">
                     <c:v>Dec 2025</c:v>
                   </c:pt>
-                  <c:pt idx="6">
+                  <c:pt idx="87">
                     <c:v>Jan 2026</c:v>
                   </c:pt>
-                  <c:pt idx="7">
+                  <c:pt idx="88">
                     <c:v>Feb 2026</c:v>
                   </c:pt>
-                  <c:pt idx="8">
+                  <c:pt idx="89">
                     <c:v>Mar 2026</c:v>
                   </c:pt>
-                  <c:pt idx="9">
+                  <c:pt idx="90">
                     <c:v>Apr 2026</c:v>
                   </c:pt>
                 </c:lvl>
@@ -229,39 +472,282 @@
           </c:cat>
           <c:val>
             <c:numRef>
-              <c:f>Sheet1!$B$2:$B$11</c:f>
+              <c:f>Sheet1!$B$2:$B$92</c:f>
               <c:numCache>
                 <c:formatCode>General</c:formatCode>
-                <c:ptCount val="10"/>
+                <c:ptCount val="91"/>
                 <c:pt idx="0">
                   <c:v>100</c:v>
                 </c:pt>
                 <c:pt idx="1">
-                  <c:v>100.4</c:v>
+                  <c:v>100.23</c:v>
                 </c:pt>
                 <c:pt idx="2">
-                  <c:v>100.79</c:v>
+                  <c:v>100.47</c:v>
                 </c:pt>
                 <c:pt idx="3">
-                  <c:v>101.19</c:v>
+                  <c:v>100.71</c:v>
                 </c:pt>
                 <c:pt idx="4">
-                  <c:v>101.59</c:v>
+                  <c:v>100.94</c:v>
                 </c:pt>
                 <c:pt idx="5">
-                  <c:v>101.98</c:v>
+                  <c:v>101.2</c:v>
                 </c:pt>
                 <c:pt idx="6">
-                  <c:v>102.37</c:v>
+                  <c:v>101.45</c:v>
                 </c:pt>
                 <c:pt idx="7">
-                  <c:v>102.75</c:v>
+                  <c:v>101.72</c:v>
                 </c:pt>
                 <c:pt idx="8">
-                  <c:v>103.14</c:v>
+                  <c:v>101.94</c:v>
                 </c:pt>
                 <c:pt idx="9">
-                  <c:v>103.52</c:v>
+                  <c:v>102.16</c:v>
+                </c:pt>
+                <c:pt idx="10">
+                  <c:v>102.38</c:v>
+                </c:pt>
+                <c:pt idx="11">
+                  <c:v>102.56</c:v>
+                </c:pt>
+                <c:pt idx="12">
+                  <c:v>102.73</c:v>
+                </c:pt>
+                <c:pt idx="13">
+                  <c:v>102.87</c:v>
+                </c:pt>
+                <c:pt idx="14">
+                  <c:v>103.03</c:v>
+                </c:pt>
+                <c:pt idx="15">
+                  <c:v>103.2</c:v>
+                </c:pt>
+                <c:pt idx="16">
+                  <c:v>103.34</c:v>
+                </c:pt>
+                <c:pt idx="17">
+                  <c:v>103.45</c:v>
+                </c:pt>
+                <c:pt idx="18">
+                  <c:v>103.5</c:v>
+                </c:pt>
+                <c:pt idx="19">
+                  <c:v>103.54</c:v>
+                </c:pt>
+                <c:pt idx="20">
+                  <c:v>103.58</c:v>
+                </c:pt>
+                <c:pt idx="21">
+                  <c:v>103.63</c:v>
+                </c:pt>
+                <c:pt idx="22">
+                  <c:v>103.67</c:v>
+                </c:pt>
+                <c:pt idx="23">
+                  <c:v>103.71</c:v>
+                </c:pt>
+                <c:pt idx="24">
+                  <c:v>103.75</c:v>
+                </c:pt>
+                <c:pt idx="25">
+                  <c:v>103.79</c:v>
+                </c:pt>
+                <c:pt idx="26">
+                  <c:v>103.83</c:v>
+                </c:pt>
+                <c:pt idx="27">
+                  <c:v>103.86</c:v>
+                </c:pt>
+                <c:pt idx="28">
+                  <c:v>103.88</c:v>
+                </c:pt>
+                <c:pt idx="29">
+                  <c:v>103.91</c:v>
+                </c:pt>
+                <c:pt idx="30">
+                  <c:v>103.94</c:v>
+                </c:pt>
+                <c:pt idx="31">
+                  <c:v>103.96</c:v>
+                </c:pt>
+                <c:pt idx="32">
+                  <c:v>103.99</c:v>
+                </c:pt>
+                <c:pt idx="33">
+                  <c:v>104.04</c:v>
+                </c:pt>
+                <c:pt idx="34">
+                  <c:v>104.11</c:v>
+                </c:pt>
+                <c:pt idx="35">
+                  <c:v>104.24</c:v>
+                </c:pt>
+                <c:pt idx="36">
+                  <c:v>104.45</c:v>
+                </c:pt>
+                <c:pt idx="37">
+                  <c:v>104.68</c:v>
+                </c:pt>
+                <c:pt idx="38">
+                  <c:v>105.01</c:v>
+                </c:pt>
+                <c:pt idx="39">
+                  <c:v>105.37</c:v>
+                </c:pt>
+                <c:pt idx="40">
+                  <c:v>105.82</c:v>
+                </c:pt>
+                <c:pt idx="41">
+                  <c:v>106.34</c:v>
+                </c:pt>
+                <c:pt idx="42">
+                  <c:v>106.92</c:v>
+                </c:pt>
+                <c:pt idx="43">
+                  <c:v>107.68</c:v>
+                </c:pt>
+                <c:pt idx="44">
+                  <c:v>108.47</c:v>
+                </c:pt>
+                <c:pt idx="45">
+                  <c:v>109.29</c:v>
+                </c:pt>
+                <c:pt idx="46">
+                  <c:v>110.27</c:v>
+                </c:pt>
+                <c:pt idx="47">
+                  <c:v>111.24</c:v>
+                </c:pt>
+                <c:pt idx="48">
+                  <c:v>112.2</c:v>
+                </c:pt>
+                <c:pt idx="49">
+                  <c:v>113.36</c:v>
+                </c:pt>
+                <c:pt idx="50">
+                  <c:v>114.43</c:v>
+                </c:pt>
+                <c:pt idx="51">
+                  <c:v>115.58</c:v>
+                </c:pt>
+                <c:pt idx="52">
+                  <c:v>116.59</c:v>
+                </c:pt>
+                <c:pt idx="53">
+                  <c:v>117.73</c:v>
+                </c:pt>
+                <c:pt idx="54">
+                  <c:v>118.76</c:v>
+                </c:pt>
+                <c:pt idx="55">
+                  <c:v>119.99</c:v>
+                </c:pt>
+                <c:pt idx="56">
+                  <c:v>121.12</c:v>
+                </c:pt>
+                <c:pt idx="57">
+                  <c:v>122.3</c:v>
+                </c:pt>
+                <c:pt idx="58">
+                  <c:v>123.39</c:v>
+                </c:pt>
+                <c:pt idx="59">
+                  <c:v>124.35</c:v>
+                </c:pt>
+                <c:pt idx="60">
+                  <c:v>125.4</c:v>
+                </c:pt>
+                <c:pt idx="61">
+                  <c:v>126.34</c:v>
+                </c:pt>
+                <c:pt idx="62">
+                  <c:v>127.24</c:v>
+                </c:pt>
+                <c:pt idx="63">
+                  <c:v>128.18</c:v>
+                </c:pt>
+                <c:pt idx="64">
+                  <c:v>128.96</c:v>
+                </c:pt>
+                <c:pt idx="65">
+                  <c:v>129.69</c:v>
+                </c:pt>
+                <c:pt idx="66">
+                  <c:v>130.48</c:v>
+                </c:pt>
+                <c:pt idx="67">
+                  <c:v>131.2</c:v>
+                </c:pt>
+                <c:pt idx="68">
+                  <c:v>131.8</c:v>
+                </c:pt>
+                <c:pt idx="69">
+                  <c:v>132.5</c:v>
+                </c:pt>
+                <c:pt idx="70">
+                  <c:v>133.13</c:v>
+                </c:pt>
+                <c:pt idx="71">
+                  <c:v>133.77</c:v>
+                </c:pt>
+                <c:pt idx="72">
+                  <c:v>134.37</c:v>
+                </c:pt>
+                <c:pt idx="73">
+                  <c:v>134.96</c:v>
+                </c:pt>
+                <c:pt idx="74">
+                  <c:v>135.56</c:v>
+                </c:pt>
+                <c:pt idx="75">
+                  <c:v>136.17</c:v>
+                </c:pt>
+                <c:pt idx="76">
+                  <c:v>136.7</c:v>
+                </c:pt>
+                <c:pt idx="77">
+                  <c:v>137.29</c:v>
+                </c:pt>
+                <c:pt idx="78">
+                  <c:v>137.86</c:v>
+                </c:pt>
+                <c:pt idx="79">
+                  <c:v>138.44</c:v>
+                </c:pt>
+                <c:pt idx="80">
+                  <c:v>139.03</c:v>
+                </c:pt>
+                <c:pt idx="81">
+                  <c:v>139.63</c:v>
+                </c:pt>
+                <c:pt idx="82">
+                  <c:v>140.17</c:v>
+                </c:pt>
+                <c:pt idx="83">
+                  <c:v>140.76</c:v>
+                </c:pt>
+                <c:pt idx="84">
+                  <c:v>141.32</c:v>
+                </c:pt>
+                <c:pt idx="85">
+                  <c:v>141.86</c:v>
+                </c:pt>
+                <c:pt idx="86">
+                  <c:v>142.45</c:v>
+                </c:pt>
+                <c:pt idx="87">
+                  <c:v>143</c:v>
+                </c:pt>
+                <c:pt idx="88">
+                  <c:v>143.52</c:v>
+                </c:pt>
+                <c:pt idx="89">
+                  <c:v>144.08</c:v>
+                </c:pt>
+                <c:pt idx="90">
+                  <c:v>144.62</c:v>
                 </c:pt>
               </c:numCache>
             </c:numRef>
@@ -339,38 +825,281 @@
           </c:marker>
           <c:cat>
             <c:multiLvlStrRef>
-              <c:f>Sheet1!$A$2:$A$11</c:f>
+              <c:f>Sheet1!$A$2:$A$92</c:f>
               <c:multiLvlStrCache>
-                <c:ptCount val="10"/>
+                <c:ptCount val="91"/>
                 <c:lvl>
                   <c:pt idx="0">
+                    <c:v>Oct 2018</c:v>
+                  </c:pt>
+                  <c:pt idx="1">
+                    <c:v>Nov 2018</c:v>
+                  </c:pt>
+                  <c:pt idx="2">
+                    <c:v>Dec 2018</c:v>
+                  </c:pt>
+                  <c:pt idx="3">
+                    <c:v>Jan 2019</c:v>
+                  </c:pt>
+                  <c:pt idx="4">
+                    <c:v>Feb 2019</c:v>
+                  </c:pt>
+                  <c:pt idx="5">
+                    <c:v>Mar 2019</c:v>
+                  </c:pt>
+                  <c:pt idx="6">
+                    <c:v>Apr 2019</c:v>
+                  </c:pt>
+                  <c:pt idx="7">
+                    <c:v>May 2019</c:v>
+                  </c:pt>
+                  <c:pt idx="8">
+                    <c:v>Jun 2019</c:v>
+                  </c:pt>
+                  <c:pt idx="9">
+                    <c:v>Jul 2019</c:v>
+                  </c:pt>
+                  <c:pt idx="10">
+                    <c:v>Aug 2019</c:v>
+                  </c:pt>
+                  <c:pt idx="11">
+                    <c:v>Sep 2019</c:v>
+                  </c:pt>
+                  <c:pt idx="12">
+                    <c:v>Oct 2019</c:v>
+                  </c:pt>
+                  <c:pt idx="13">
+                    <c:v>Nov 2019</c:v>
+                  </c:pt>
+                  <c:pt idx="14">
+                    <c:v>Dec 2019</c:v>
+                  </c:pt>
+                  <c:pt idx="15">
+                    <c:v>Jan 2020</c:v>
+                  </c:pt>
+                  <c:pt idx="16">
+                    <c:v>Feb 2020</c:v>
+                  </c:pt>
+                  <c:pt idx="17">
+                    <c:v>Mar 2020</c:v>
+                  </c:pt>
+                  <c:pt idx="18">
+                    <c:v>Apr 2020</c:v>
+                  </c:pt>
+                  <c:pt idx="19">
+                    <c:v>May 2020</c:v>
+                  </c:pt>
+                  <c:pt idx="20">
+                    <c:v>Jun 2020</c:v>
+                  </c:pt>
+                  <c:pt idx="21">
+                    <c:v>Jul 2020</c:v>
+                  </c:pt>
+                  <c:pt idx="22">
+                    <c:v>Aug 2020</c:v>
+                  </c:pt>
+                  <c:pt idx="23">
+                    <c:v>Sep 2020</c:v>
+                  </c:pt>
+                  <c:pt idx="24">
+                    <c:v>Oct 2020</c:v>
+                  </c:pt>
+                  <c:pt idx="25">
+                    <c:v>Nov 2020</c:v>
+                  </c:pt>
+                  <c:pt idx="26">
+                    <c:v>Dec 2020</c:v>
+                  </c:pt>
+                  <c:pt idx="27">
+                    <c:v>Jan 2021</c:v>
+                  </c:pt>
+                  <c:pt idx="28">
+                    <c:v>Feb 2021</c:v>
+                  </c:pt>
+                  <c:pt idx="29">
+                    <c:v>Mar 2021</c:v>
+                  </c:pt>
+                  <c:pt idx="30">
+                    <c:v>Apr 2021</c:v>
+                  </c:pt>
+                  <c:pt idx="31">
+                    <c:v>May 2021</c:v>
+                  </c:pt>
+                  <c:pt idx="32">
+                    <c:v>Jun 2021</c:v>
+                  </c:pt>
+                  <c:pt idx="33">
+                    <c:v>Jul 2021</c:v>
+                  </c:pt>
+                  <c:pt idx="34">
+                    <c:v>Aug 2021</c:v>
+                  </c:pt>
+                  <c:pt idx="35">
+                    <c:v>Sep 2021</c:v>
+                  </c:pt>
+                  <c:pt idx="36">
+                    <c:v>Oct 2021</c:v>
+                  </c:pt>
+                  <c:pt idx="37">
+                    <c:v>Nov 2021</c:v>
+                  </c:pt>
+                  <c:pt idx="38">
+                    <c:v>Dec 2021</c:v>
+                  </c:pt>
+                  <c:pt idx="39">
+                    <c:v>Jan 2022</c:v>
+                  </c:pt>
+                  <c:pt idx="40">
+                    <c:v>Feb 2022</c:v>
+                  </c:pt>
+                  <c:pt idx="41">
+                    <c:v>Mar 2022</c:v>
+                  </c:pt>
+                  <c:pt idx="42">
+                    <c:v>Apr 2022</c:v>
+                  </c:pt>
+                  <c:pt idx="43">
+                    <c:v>May 2022</c:v>
+                  </c:pt>
+                  <c:pt idx="44">
+                    <c:v>Jun 2022</c:v>
+                  </c:pt>
+                  <c:pt idx="45">
+                    <c:v>Jul 2022</c:v>
+                  </c:pt>
+                  <c:pt idx="46">
+                    <c:v>Aug 2022</c:v>
+                  </c:pt>
+                  <c:pt idx="47">
+                    <c:v>Sep 2022</c:v>
+                  </c:pt>
+                  <c:pt idx="48">
+                    <c:v>Oct 2022</c:v>
+                  </c:pt>
+                  <c:pt idx="49">
+                    <c:v>Nov 2022</c:v>
+                  </c:pt>
+                  <c:pt idx="50">
+                    <c:v>Dec 2022</c:v>
+                  </c:pt>
+                  <c:pt idx="51">
+                    <c:v>Jan 2023</c:v>
+                  </c:pt>
+                  <c:pt idx="52">
+                    <c:v>Feb 2023</c:v>
+                  </c:pt>
+                  <c:pt idx="53">
+                    <c:v>Mar 2023</c:v>
+                  </c:pt>
+                  <c:pt idx="54">
+                    <c:v>Apr 2023</c:v>
+                  </c:pt>
+                  <c:pt idx="55">
+                    <c:v>May 2023</c:v>
+                  </c:pt>
+                  <c:pt idx="56">
+                    <c:v>Jun 2023</c:v>
+                  </c:pt>
+                  <c:pt idx="57">
+                    <c:v>Jul 2023</c:v>
+                  </c:pt>
+                  <c:pt idx="58">
+                    <c:v>Aug 2023</c:v>
+                  </c:pt>
+                  <c:pt idx="59">
+                    <c:v>Sep 2023</c:v>
+                  </c:pt>
+                  <c:pt idx="60">
+                    <c:v>Oct 2023</c:v>
+                  </c:pt>
+                  <c:pt idx="61">
+                    <c:v>Nov 2023</c:v>
+                  </c:pt>
+                  <c:pt idx="62">
+                    <c:v>Dec 2023</c:v>
+                  </c:pt>
+                  <c:pt idx="63">
+                    <c:v>Jan 2024</c:v>
+                  </c:pt>
+                  <c:pt idx="64">
+                    <c:v>Feb 2024</c:v>
+                  </c:pt>
+                  <c:pt idx="65">
+                    <c:v>Mar 2024</c:v>
+                  </c:pt>
+                  <c:pt idx="66">
+                    <c:v>Apr 2024</c:v>
+                  </c:pt>
+                  <c:pt idx="67">
+                    <c:v>May 2024</c:v>
+                  </c:pt>
+                  <c:pt idx="68">
+                    <c:v>Jun 2024</c:v>
+                  </c:pt>
+                  <c:pt idx="69">
+                    <c:v>Jul 2024</c:v>
+                  </c:pt>
+                  <c:pt idx="70">
+                    <c:v>Aug 2024</c:v>
+                  </c:pt>
+                  <c:pt idx="71">
+                    <c:v>Sep 2024</c:v>
+                  </c:pt>
+                  <c:pt idx="72">
+                    <c:v>Oct 2024</c:v>
+                  </c:pt>
+                  <c:pt idx="73">
+                    <c:v>Nov 2024</c:v>
+                  </c:pt>
+                  <c:pt idx="74">
+                    <c:v>Dec 2024</c:v>
+                  </c:pt>
+                  <c:pt idx="75">
+                    <c:v>Jan 2025</c:v>
+                  </c:pt>
+                  <c:pt idx="76">
+                    <c:v>Feb 2025</c:v>
+                  </c:pt>
+                  <c:pt idx="77">
+                    <c:v>Mar 2025</c:v>
+                  </c:pt>
+                  <c:pt idx="78">
+                    <c:v>Apr 2025</c:v>
+                  </c:pt>
+                  <c:pt idx="79">
+                    <c:v>May 2025</c:v>
+                  </c:pt>
+                  <c:pt idx="80">
+                    <c:v>Jun 2025</c:v>
+                  </c:pt>
+                  <c:pt idx="81">
                     <c:v>Jul 2025</c:v>
                   </c:pt>
-                  <c:pt idx="1">
+                  <c:pt idx="82">
                     <c:v>Aug 2025</c:v>
                   </c:pt>
-                  <c:pt idx="2">
+                  <c:pt idx="83">
                     <c:v>Sep 2025</c:v>
                   </c:pt>
-                  <c:pt idx="3">
+                  <c:pt idx="84">
                     <c:v>Oct 2025</c:v>
                   </c:pt>
-                  <c:pt idx="4">
+                  <c:pt idx="85">
                     <c:v>Nov 2025</c:v>
                   </c:pt>
-                  <c:pt idx="5">
+                  <c:pt idx="86">
                     <c:v>Dec 2025</c:v>
                   </c:pt>
-                  <c:pt idx="6">
+                  <c:pt idx="87">
                     <c:v>Jan 2026</c:v>
                   </c:pt>
-                  <c:pt idx="7">
+                  <c:pt idx="88">
                     <c:v>Feb 2026</c:v>
                   </c:pt>
-                  <c:pt idx="8">
+                  <c:pt idx="89">
                     <c:v>Mar 2026</c:v>
                   </c:pt>
-                  <c:pt idx="9">
+                  <c:pt idx="90">
                     <c:v>Apr 2026</c:v>
                   </c:pt>
                 </c:lvl>
@@ -379,39 +1108,282 @@
           </c:cat>
           <c:val>
             <c:numRef>
-              <c:f>Sheet1!$C$2:$C$11</c:f>
+              <c:f>Sheet1!$C$2:$C$92</c:f>
               <c:numCache>
                 <c:formatCode>General</c:formatCode>
-                <c:ptCount val="10"/>
+                <c:ptCount val="91"/>
                 <c:pt idx="0">
                   <c:v>100</c:v>
                 </c:pt>
                 <c:pt idx="1">
-                  <c:v>100.52</c:v>
+                  <c:v>100.34</c:v>
                 </c:pt>
                 <c:pt idx="2">
-                  <c:v>101</c:v>
+                  <c:v>100.58</c:v>
                 </c:pt>
                 <c:pt idx="3">
+                  <c:v>100.76</c:v>
+                </c:pt>
+                <c:pt idx="4">
+                  <c:v>100.92</c:v>
+                </c:pt>
+                <c:pt idx="5">
+                  <c:v>101.11</c:v>
+                </c:pt>
+                <c:pt idx="6">
+                  <c:v>101.3</c:v>
+                </c:pt>
+                <c:pt idx="7">
                   <c:v>101.53</c:v>
                 </c:pt>
-                <c:pt idx="4">
-                  <c:v>102.16</c:v>
+                <c:pt idx="8">
+                  <c:v>101.73</c:v>
                 </c:pt>
-                <c:pt idx="5">
-                  <c:v>102.75</c:v>
+                <c:pt idx="9">
+                  <c:v>101.94</c:v>
                 </c:pt>
-                <c:pt idx="6">
-                  <c:v>103.34</c:v>
+                <c:pt idx="10">
+                  <c:v>102.13</c:v>
                 </c:pt>
-                <c:pt idx="7">
-                  <c:v>103.89</c:v>
+                <c:pt idx="11">
+                  <c:v>102.24</c:v>
                 </c:pt>
-                <c:pt idx="8">
+                <c:pt idx="12">
+                  <c:v>102.34</c:v>
+                </c:pt>
+                <c:pt idx="13">
+                  <c:v>102.44</c:v>
+                </c:pt>
+                <c:pt idx="14">
+                  <c:v>102.58</c:v>
+                </c:pt>
+                <c:pt idx="15">
+                  <c:v>102.71</c:v>
+                </c:pt>
+                <c:pt idx="16">
+                  <c:v>102.78</c:v>
+                </c:pt>
+                <c:pt idx="17">
+                  <c:v>102.85</c:v>
+                </c:pt>
+                <c:pt idx="18">
+                  <c:v>102.99</c:v>
+                </c:pt>
+                <c:pt idx="19">
+                  <c:v>103.13</c:v>
+                </c:pt>
+                <c:pt idx="20">
+                  <c:v>103.26</c:v>
+                </c:pt>
+                <c:pt idx="21">
+                  <c:v>103.38</c:v>
+                </c:pt>
+                <c:pt idx="22">
+                  <c:v>103.5</c:v>
+                </c:pt>
+                <c:pt idx="23">
+                  <c:v>103.62</c:v>
+                </c:pt>
+                <c:pt idx="24">
+                  <c:v>103.74</c:v>
+                </c:pt>
+                <c:pt idx="25">
+                  <c:v>103.86</c:v>
+                </c:pt>
+                <c:pt idx="26">
+                  <c:v>104.12</c:v>
+                </c:pt>
+                <c:pt idx="27">
+                  <c:v>104.22</c:v>
+                </c:pt>
+                <c:pt idx="28">
+                  <c:v>104.3</c:v>
+                </c:pt>
+                <c:pt idx="29">
+                  <c:v>104.32</c:v>
+                </c:pt>
+                <c:pt idx="30">
+                  <c:v>104.35</c:v>
+                </c:pt>
+                <c:pt idx="31">
                   <c:v>104.48</c:v>
                 </c:pt>
-                <c:pt idx="9">
-                  <c:v>105.07</c:v>
+                <c:pt idx="32">
+                  <c:v>104.61</c:v>
+                </c:pt>
+                <c:pt idx="33">
+                  <c:v>104.73</c:v>
+                </c:pt>
+                <c:pt idx="34">
+                  <c:v>104.83</c:v>
+                </c:pt>
+                <c:pt idx="35">
+                  <c:v>104.9</c:v>
+                </c:pt>
+                <c:pt idx="36">
+                  <c:v>104.99</c:v>
+                </c:pt>
+                <c:pt idx="37">
+                  <c:v>105.14</c:v>
+                </c:pt>
+                <c:pt idx="38">
+                  <c:v>105.33</c:v>
+                </c:pt>
+                <c:pt idx="39">
+                  <c:v>105.64</c:v>
+                </c:pt>
+                <c:pt idx="40">
+                  <c:v>106.01</c:v>
+                </c:pt>
+                <c:pt idx="41">
+                  <c:v>106.43</c:v>
+                </c:pt>
+                <c:pt idx="42">
+                  <c:v>107.1</c:v>
+                </c:pt>
+                <c:pt idx="43">
+                  <c:v>107.91</c:v>
+                </c:pt>
+                <c:pt idx="44">
+                  <c:v>108.59</c:v>
+                </c:pt>
+                <c:pt idx="45">
+                  <c:v>109.32</c:v>
+                </c:pt>
+                <c:pt idx="46">
+                  <c:v>110.2</c:v>
+                </c:pt>
+                <c:pt idx="47">
+                  <c:v>111.09</c:v>
+                </c:pt>
+                <c:pt idx="48">
+                  <c:v>112.11</c:v>
+                </c:pt>
+                <c:pt idx="49">
+                  <c:v>113.22</c:v>
+                </c:pt>
+                <c:pt idx="50">
+                  <c:v>114.29</c:v>
+                </c:pt>
+                <c:pt idx="51">
+                  <c:v>115.46</c:v>
+                </c:pt>
+                <c:pt idx="52">
+                  <c:v>116.41</c:v>
+                </c:pt>
+                <c:pt idx="53">
+                  <c:v>117.57</c:v>
+                </c:pt>
+                <c:pt idx="54">
+                  <c:v>118.65</c:v>
+                </c:pt>
+                <c:pt idx="55">
+                  <c:v>119.9</c:v>
+                </c:pt>
+                <c:pt idx="56">
+                  <c:v>121.07</c:v>
+                </c:pt>
+                <c:pt idx="57">
+                  <c:v>122.28</c:v>
+                </c:pt>
+                <c:pt idx="58">
+                  <c:v>123.47</c:v>
+                </c:pt>
+                <c:pt idx="59">
+                  <c:v>124.62</c:v>
+                </c:pt>
+                <c:pt idx="60">
+                  <c:v>125.71</c:v>
+                </c:pt>
+                <c:pt idx="61">
+                  <c:v>126.68</c:v>
+                </c:pt>
+                <c:pt idx="62">
+                  <c:v>127.68</c:v>
+                </c:pt>
+                <c:pt idx="63">
+                  <c:v>128.77</c:v>
+                </c:pt>
+                <c:pt idx="64">
+                  <c:v>129.62</c:v>
+                </c:pt>
+                <c:pt idx="65">
+                  <c:v>130.37</c:v>
+                </c:pt>
+                <c:pt idx="66">
+                  <c:v>131.23</c:v>
+                </c:pt>
+                <c:pt idx="67">
+                  <c:v>132.12</c:v>
+                </c:pt>
+                <c:pt idx="68">
+                  <c:v>132.92</c:v>
+                </c:pt>
+                <c:pt idx="69">
+                  <c:v>133.51</c:v>
+                </c:pt>
+                <c:pt idx="70">
+                  <c:v>134.11</c:v>
+                </c:pt>
+                <c:pt idx="71">
+                  <c:v>134.76</c:v>
+                </c:pt>
+                <c:pt idx="72">
+                  <c:v>135.38</c:v>
+                </c:pt>
+                <c:pt idx="73">
+                  <c:v>136.01</c:v>
+                </c:pt>
+                <c:pt idx="74">
+                  <c:v>136.64</c:v>
+                </c:pt>
+                <c:pt idx="75">
+                  <c:v>137.05</c:v>
+                </c:pt>
+                <c:pt idx="76">
+                  <c:v>137.6</c:v>
+                </c:pt>
+                <c:pt idx="77">
+                  <c:v>138.18</c:v>
+                </c:pt>
+                <c:pt idx="78">
+                  <c:v>138.76</c:v>
+                </c:pt>
+                <c:pt idx="79">
+                  <c:v>139.37</c:v>
+                </c:pt>
+                <c:pt idx="80">
+                  <c:v>140.11</c:v>
+                </c:pt>
+                <c:pt idx="81">
+                  <c:v>140.81</c:v>
+                </c:pt>
+                <c:pt idx="82">
+                  <c:v>141.54</c:v>
+                </c:pt>
+                <c:pt idx="83">
+                  <c:v>142.21</c:v>
+                </c:pt>
+                <c:pt idx="84">
+                  <c:v>142.97</c:v>
+                </c:pt>
+                <c:pt idx="85">
+                  <c:v>143.85</c:v>
+                </c:pt>
+                <c:pt idx="86">
+                  <c:v>144.67</c:v>
+                </c:pt>
+                <c:pt idx="87">
+                  <c:v>145.51</c:v>
+                </c:pt>
+                <c:pt idx="88">
+                  <c:v>146.28</c:v>
+                </c:pt>
+                <c:pt idx="89">
+                  <c:v>147.11</c:v>
+                </c:pt>
+                <c:pt idx="90">
+                  <c:v>147.95</c:v>
                 </c:pt>
               </c:numCache>
             </c:numRef>
@@ -489,38 +1461,281 @@
           </c:marker>
           <c:cat>
             <c:multiLvlStrRef>
-              <c:f>Sheet1!$A$2:$A$11</c:f>
+              <c:f>Sheet1!$A$2:$A$92</c:f>
               <c:multiLvlStrCache>
-                <c:ptCount val="10"/>
+                <c:ptCount val="91"/>
                 <c:lvl>
                   <c:pt idx="0">
+                    <c:v>Oct 2018</c:v>
+                  </c:pt>
+                  <c:pt idx="1">
+                    <c:v>Nov 2018</c:v>
+                  </c:pt>
+                  <c:pt idx="2">
+                    <c:v>Dec 2018</c:v>
+                  </c:pt>
+                  <c:pt idx="3">
+                    <c:v>Jan 2019</c:v>
+                  </c:pt>
+                  <c:pt idx="4">
+                    <c:v>Feb 2019</c:v>
+                  </c:pt>
+                  <c:pt idx="5">
+                    <c:v>Mar 2019</c:v>
+                  </c:pt>
+                  <c:pt idx="6">
+                    <c:v>Apr 2019</c:v>
+                  </c:pt>
+                  <c:pt idx="7">
+                    <c:v>May 2019</c:v>
+                  </c:pt>
+                  <c:pt idx="8">
+                    <c:v>Jun 2019</c:v>
+                  </c:pt>
+                  <c:pt idx="9">
+                    <c:v>Jul 2019</c:v>
+                  </c:pt>
+                  <c:pt idx="10">
+                    <c:v>Aug 2019</c:v>
+                  </c:pt>
+                  <c:pt idx="11">
+                    <c:v>Sep 2019</c:v>
+                  </c:pt>
+                  <c:pt idx="12">
+                    <c:v>Oct 2019</c:v>
+                  </c:pt>
+                  <c:pt idx="13">
+                    <c:v>Nov 2019</c:v>
+                  </c:pt>
+                  <c:pt idx="14">
+                    <c:v>Dec 2019</c:v>
+                  </c:pt>
+                  <c:pt idx="15">
+                    <c:v>Jan 2020</c:v>
+                  </c:pt>
+                  <c:pt idx="16">
+                    <c:v>Feb 2020</c:v>
+                  </c:pt>
+                  <c:pt idx="17">
+                    <c:v>Mar 2020</c:v>
+                  </c:pt>
+                  <c:pt idx="18">
+                    <c:v>Apr 2020</c:v>
+                  </c:pt>
+                  <c:pt idx="19">
+                    <c:v>May 2020</c:v>
+                  </c:pt>
+                  <c:pt idx="20">
+                    <c:v>Jun 2020</c:v>
+                  </c:pt>
+                  <c:pt idx="21">
+                    <c:v>Jul 2020</c:v>
+                  </c:pt>
+                  <c:pt idx="22">
+                    <c:v>Aug 2020</c:v>
+                  </c:pt>
+                  <c:pt idx="23">
+                    <c:v>Sep 2020</c:v>
+                  </c:pt>
+                  <c:pt idx="24">
+                    <c:v>Oct 2020</c:v>
+                  </c:pt>
+                  <c:pt idx="25">
+                    <c:v>Nov 2020</c:v>
+                  </c:pt>
+                  <c:pt idx="26">
+                    <c:v>Dec 2020</c:v>
+                  </c:pt>
+                  <c:pt idx="27">
+                    <c:v>Jan 2021</c:v>
+                  </c:pt>
+                  <c:pt idx="28">
+                    <c:v>Feb 2021</c:v>
+                  </c:pt>
+                  <c:pt idx="29">
+                    <c:v>Mar 2021</c:v>
+                  </c:pt>
+                  <c:pt idx="30">
+                    <c:v>Apr 2021</c:v>
+                  </c:pt>
+                  <c:pt idx="31">
+                    <c:v>May 2021</c:v>
+                  </c:pt>
+                  <c:pt idx="32">
+                    <c:v>Jun 2021</c:v>
+                  </c:pt>
+                  <c:pt idx="33">
+                    <c:v>Jul 2021</c:v>
+                  </c:pt>
+                  <c:pt idx="34">
+                    <c:v>Aug 2021</c:v>
+                  </c:pt>
+                  <c:pt idx="35">
+                    <c:v>Sep 2021</c:v>
+                  </c:pt>
+                  <c:pt idx="36">
+                    <c:v>Oct 2021</c:v>
+                  </c:pt>
+                  <c:pt idx="37">
+                    <c:v>Nov 2021</c:v>
+                  </c:pt>
+                  <c:pt idx="38">
+                    <c:v>Dec 2021</c:v>
+                  </c:pt>
+                  <c:pt idx="39">
+                    <c:v>Jan 2022</c:v>
+                  </c:pt>
+                  <c:pt idx="40">
+                    <c:v>Feb 2022</c:v>
+                  </c:pt>
+                  <c:pt idx="41">
+                    <c:v>Mar 2022</c:v>
+                  </c:pt>
+                  <c:pt idx="42">
+                    <c:v>Apr 2022</c:v>
+                  </c:pt>
+                  <c:pt idx="43">
+                    <c:v>May 2022</c:v>
+                  </c:pt>
+                  <c:pt idx="44">
+                    <c:v>Jun 2022</c:v>
+                  </c:pt>
+                  <c:pt idx="45">
+                    <c:v>Jul 2022</c:v>
+                  </c:pt>
+                  <c:pt idx="46">
+                    <c:v>Aug 2022</c:v>
+                  </c:pt>
+                  <c:pt idx="47">
+                    <c:v>Sep 2022</c:v>
+                  </c:pt>
+                  <c:pt idx="48">
+                    <c:v>Oct 2022</c:v>
+                  </c:pt>
+                  <c:pt idx="49">
+                    <c:v>Nov 2022</c:v>
+                  </c:pt>
+                  <c:pt idx="50">
+                    <c:v>Dec 2022</c:v>
+                  </c:pt>
+                  <c:pt idx="51">
+                    <c:v>Jan 2023</c:v>
+                  </c:pt>
+                  <c:pt idx="52">
+                    <c:v>Feb 2023</c:v>
+                  </c:pt>
+                  <c:pt idx="53">
+                    <c:v>Mar 2023</c:v>
+                  </c:pt>
+                  <c:pt idx="54">
+                    <c:v>Apr 2023</c:v>
+                  </c:pt>
+                  <c:pt idx="55">
+                    <c:v>May 2023</c:v>
+                  </c:pt>
+                  <c:pt idx="56">
+                    <c:v>Jun 2023</c:v>
+                  </c:pt>
+                  <c:pt idx="57">
+                    <c:v>Jul 2023</c:v>
+                  </c:pt>
+                  <c:pt idx="58">
+                    <c:v>Aug 2023</c:v>
+                  </c:pt>
+                  <c:pt idx="59">
+                    <c:v>Sep 2023</c:v>
+                  </c:pt>
+                  <c:pt idx="60">
+                    <c:v>Oct 2023</c:v>
+                  </c:pt>
+                  <c:pt idx="61">
+                    <c:v>Nov 2023</c:v>
+                  </c:pt>
+                  <c:pt idx="62">
+                    <c:v>Dec 2023</c:v>
+                  </c:pt>
+                  <c:pt idx="63">
+                    <c:v>Jan 2024</c:v>
+                  </c:pt>
+                  <c:pt idx="64">
+                    <c:v>Feb 2024</c:v>
+                  </c:pt>
+                  <c:pt idx="65">
+                    <c:v>Mar 2024</c:v>
+                  </c:pt>
+                  <c:pt idx="66">
+                    <c:v>Apr 2024</c:v>
+                  </c:pt>
+                  <c:pt idx="67">
+                    <c:v>May 2024</c:v>
+                  </c:pt>
+                  <c:pt idx="68">
+                    <c:v>Jun 2024</c:v>
+                  </c:pt>
+                  <c:pt idx="69">
+                    <c:v>Jul 2024</c:v>
+                  </c:pt>
+                  <c:pt idx="70">
+                    <c:v>Aug 2024</c:v>
+                  </c:pt>
+                  <c:pt idx="71">
+                    <c:v>Sep 2024</c:v>
+                  </c:pt>
+                  <c:pt idx="72">
+                    <c:v>Oct 2024</c:v>
+                  </c:pt>
+                  <c:pt idx="73">
+                    <c:v>Nov 2024</c:v>
+                  </c:pt>
+                  <c:pt idx="74">
+                    <c:v>Dec 2024</c:v>
+                  </c:pt>
+                  <c:pt idx="75">
+                    <c:v>Jan 2025</c:v>
+                  </c:pt>
+                  <c:pt idx="76">
+                    <c:v>Feb 2025</c:v>
+                  </c:pt>
+                  <c:pt idx="77">
+                    <c:v>Mar 2025</c:v>
+                  </c:pt>
+                  <c:pt idx="78">
+                    <c:v>Apr 2025</c:v>
+                  </c:pt>
+                  <c:pt idx="79">
+                    <c:v>May 2025</c:v>
+                  </c:pt>
+                  <c:pt idx="80">
+                    <c:v>Jun 2025</c:v>
+                  </c:pt>
+                  <c:pt idx="81">
                     <c:v>Jul 2025</c:v>
                   </c:pt>
-                  <c:pt idx="1">
+                  <c:pt idx="82">
                     <c:v>Aug 2025</c:v>
                   </c:pt>
-                  <c:pt idx="2">
+                  <c:pt idx="83">
                     <c:v>Sep 2025</c:v>
                   </c:pt>
-                  <c:pt idx="3">
+                  <c:pt idx="84">
                     <c:v>Oct 2025</c:v>
                   </c:pt>
-                  <c:pt idx="4">
+                  <c:pt idx="85">
                     <c:v>Nov 2025</c:v>
                   </c:pt>
-                  <c:pt idx="5">
+                  <c:pt idx="86">
                     <c:v>Dec 2025</c:v>
                   </c:pt>
-                  <c:pt idx="6">
+                  <c:pt idx="87">
                     <c:v>Jan 2026</c:v>
                   </c:pt>
-                  <c:pt idx="7">
+                  <c:pt idx="88">
                     <c:v>Feb 2026</c:v>
                   </c:pt>
-                  <c:pt idx="8">
+                  <c:pt idx="89">
                     <c:v>Mar 2026</c:v>
                   </c:pt>
-                  <c:pt idx="9">
+                  <c:pt idx="90">
                     <c:v>Apr 2026</c:v>
                   </c:pt>
                 </c:lvl>
@@ -529,39 +1744,282 @@
           </c:cat>
           <c:val>
             <c:numRef>
-              <c:f>Sheet1!$D$2:$D$11</c:f>
+              <c:f>Sheet1!$D$2:$D$92</c:f>
               <c:numCache>
                 <c:formatCode>General</c:formatCode>
-                <c:ptCount val="10"/>
+                <c:ptCount val="91"/>
                 <c:pt idx="0">
                   <c:v>100</c:v>
                 </c:pt>
                 <c:pt idx="1">
-                  <c:v>100.3</c:v>
+                  <c:v>100.1</c:v>
                 </c:pt>
                 <c:pt idx="2">
-                  <c:v>100.58</c:v>
+                  <c:v>100.24</c:v>
                 </c:pt>
                 <c:pt idx="3">
-                  <c:v>100.87</c:v>
+                  <c:v>100.38</c:v>
                 </c:pt>
                 <c:pt idx="4">
-                  <c:v>101.15</c:v>
+                  <c:v>100.51</c:v>
                 </c:pt>
                 <c:pt idx="5">
-                  <c:v>101.71</c:v>
+                  <c:v>100.66</c:v>
                 </c:pt>
                 <c:pt idx="6">
-                  <c:v>101.71</c:v>
+                  <c:v>100.8</c:v>
                 </c:pt>
                 <c:pt idx="7">
-                  <c:v>101.96</c:v>
+                  <c:v>100.94</c:v>
                 </c:pt>
                 <c:pt idx="8">
-                  <c:v>102.23</c:v>
+                  <c:v>101.06</c:v>
                 </c:pt>
                 <c:pt idx="9">
-                  <c:v>102.5</c:v>
+                  <c:v>101.16</c:v>
+                </c:pt>
+                <c:pt idx="10">
+                  <c:v>101.26</c:v>
+                </c:pt>
+                <c:pt idx="11">
+                  <c:v>101.37</c:v>
+                </c:pt>
+                <c:pt idx="12">
+                  <c:v>101.43</c:v>
+                </c:pt>
+                <c:pt idx="13">
+                  <c:v>101.5</c:v>
+                </c:pt>
+                <c:pt idx="14">
+                  <c:v>101.57</c:v>
+                </c:pt>
+                <c:pt idx="15">
+                  <c:v>101.62</c:v>
+                </c:pt>
+                <c:pt idx="16">
+                  <c:v>101.67</c:v>
+                </c:pt>
+                <c:pt idx="17">
+                  <c:v>101.76</c:v>
+                </c:pt>
+                <c:pt idx="18">
+                  <c:v>101.99</c:v>
+                </c:pt>
+                <c:pt idx="19">
+                  <c:v>102</c:v>
+                </c:pt>
+                <c:pt idx="20">
+                  <c:v>102.02</c:v>
+                </c:pt>
+                <c:pt idx="21">
+                  <c:v>102.03</c:v>
+                </c:pt>
+                <c:pt idx="22">
+                  <c:v>102.05</c:v>
+                </c:pt>
+                <c:pt idx="23">
+                  <c:v>102.06</c:v>
+                </c:pt>
+                <c:pt idx="24">
+                  <c:v>102.06</c:v>
+                </c:pt>
+                <c:pt idx="25">
+                  <c:v>102.07</c:v>
+                </c:pt>
+                <c:pt idx="26">
+                  <c:v>102.08</c:v>
+                </c:pt>
+                <c:pt idx="27">
+                  <c:v>102.08</c:v>
+                </c:pt>
+                <c:pt idx="28">
+                  <c:v>102.09</c:v>
+                </c:pt>
+                <c:pt idx="29">
+                  <c:v>102.09</c:v>
+                </c:pt>
+                <c:pt idx="30">
+                  <c:v>102.1</c:v>
+                </c:pt>
+                <c:pt idx="31">
+                  <c:v>102.1</c:v>
+                </c:pt>
+                <c:pt idx="32">
+                  <c:v>102.11</c:v>
+                </c:pt>
+                <c:pt idx="33">
+                  <c:v>102.12</c:v>
+                </c:pt>
+                <c:pt idx="34">
+                  <c:v>102.12</c:v>
+                </c:pt>
+                <c:pt idx="35">
+                  <c:v>102.11</c:v>
+                </c:pt>
+                <c:pt idx="36">
+                  <c:v>102.22</c:v>
+                </c:pt>
+                <c:pt idx="37">
+                  <c:v>102.34</c:v>
+                </c:pt>
+                <c:pt idx="38">
+                  <c:v>102.53</c:v>
+                </c:pt>
+                <c:pt idx="39">
+                  <c:v>102.79</c:v>
+                </c:pt>
+                <c:pt idx="40">
+                  <c:v>103.13</c:v>
+                </c:pt>
+                <c:pt idx="41">
+                  <c:v>103.53</c:v>
+                </c:pt>
+                <c:pt idx="42">
+                  <c:v>104</c:v>
+                </c:pt>
+                <c:pt idx="43">
+                  <c:v>104.57</c:v>
+                </c:pt>
+                <c:pt idx="44">
+                  <c:v>105.19</c:v>
+                </c:pt>
+                <c:pt idx="45">
+                  <c:v>105.87</c:v>
+                </c:pt>
+                <c:pt idx="46">
+                  <c:v>106.62</c:v>
+                </c:pt>
+                <c:pt idx="47">
+                  <c:v>107.4</c:v>
+                </c:pt>
+                <c:pt idx="48">
+                  <c:v>108.18</c:v>
+                </c:pt>
+                <c:pt idx="49">
+                  <c:v>109.12</c:v>
+                </c:pt>
+                <c:pt idx="50">
+                  <c:v>109.99</c:v>
+                </c:pt>
+                <c:pt idx="51">
+                  <c:v>110.92</c:v>
+                </c:pt>
+                <c:pt idx="52">
+                  <c:v>111.73</c:v>
+                </c:pt>
+                <c:pt idx="53">
+                  <c:v>112.65</c:v>
+                </c:pt>
+                <c:pt idx="54">
+                  <c:v>113.49</c:v>
+                </c:pt>
+                <c:pt idx="55">
+                  <c:v>114.49</c:v>
+                </c:pt>
+                <c:pt idx="56">
+                  <c:v>115.41</c:v>
+                </c:pt>
+                <c:pt idx="57">
+                  <c:v>116.36</c:v>
+                </c:pt>
+                <c:pt idx="58">
+                  <c:v>117.24</c:v>
+                </c:pt>
+                <c:pt idx="59">
+                  <c:v>118.04</c:v>
+                </c:pt>
+                <c:pt idx="60">
+                  <c:v>118.82</c:v>
+                </c:pt>
+                <c:pt idx="61">
+                  <c:v>119.56</c:v>
+                </c:pt>
+                <c:pt idx="62">
+                  <c:v>120.29</c:v>
+                </c:pt>
+                <c:pt idx="63">
+                  <c:v>120.99</c:v>
+                </c:pt>
+                <c:pt idx="64">
+                  <c:v>121.61</c:v>
+                </c:pt>
+                <c:pt idx="65">
+                  <c:v>122.15</c:v>
+                </c:pt>
+                <c:pt idx="66">
+                  <c:v>122.73</c:v>
+                </c:pt>
+                <c:pt idx="67">
+                  <c:v>123.24</c:v>
+                </c:pt>
+                <c:pt idx="68">
+                  <c:v>123.69</c:v>
+                </c:pt>
+                <c:pt idx="69">
+                  <c:v>124.14</c:v>
+                </c:pt>
+                <c:pt idx="70">
+                  <c:v>124.59</c:v>
+                </c:pt>
+                <c:pt idx="71">
+                  <c:v>125.01</c:v>
+                </c:pt>
+                <c:pt idx="72">
+                  <c:v>125.43</c:v>
+                </c:pt>
+                <c:pt idx="73">
+                  <c:v>125.84</c:v>
+                </c:pt>
+                <c:pt idx="74">
+                  <c:v>126.24</c:v>
+                </c:pt>
+                <c:pt idx="75">
+                  <c:v>126.63</c:v>
+                </c:pt>
+                <c:pt idx="76">
+                  <c:v>126.98</c:v>
+                </c:pt>
+                <c:pt idx="77">
+                  <c:v>127.36</c:v>
+                </c:pt>
+                <c:pt idx="78">
+                  <c:v>127.74</c:v>
+                </c:pt>
+                <c:pt idx="79">
+                  <c:v>128.14</c:v>
+                </c:pt>
+                <c:pt idx="80">
+                  <c:v>128.52</c:v>
+                </c:pt>
+                <c:pt idx="81">
+                  <c:v>128.9</c:v>
+                </c:pt>
+                <c:pt idx="82">
+                  <c:v>129.29</c:v>
+                </c:pt>
+                <c:pt idx="83">
+                  <c:v>129.65</c:v>
+                </c:pt>
+                <c:pt idx="84">
+                  <c:v>130.02</c:v>
+                </c:pt>
+                <c:pt idx="85">
+                  <c:v>130.38</c:v>
+                </c:pt>
+                <c:pt idx="86">
+                  <c:v>130.75</c:v>
+                </c:pt>
+                <c:pt idx="87">
+                  <c:v>131.11</c:v>
+                </c:pt>
+                <c:pt idx="88">
+                  <c:v>131.43</c:v>
+                </c:pt>
+                <c:pt idx="89">
+                  <c:v>131.78</c:v>
+                </c:pt>
+                <c:pt idx="90">
+                  <c:v>132.12</c:v>
                 </c:pt>
               </c:numCache>
             </c:numRef>
@@ -637,7 +2095,7 @@
         <c:auto val="1"/>
         <c:lblAlgn val="ctr"/>
         <c:noMultiLvlLbl val="1"/>
-        <c:tickLblSkip val="1"/>
+        <c:tickLblSkip val="9"/>
       </c:catAx>
       <c:valAx>
         <c:axId val="2094734552"/>
@@ -3113,7 +4571,7 @@
                 <a:ea typeface="Calibri" pitchFamily="34" charset="-122"/>
                 <a:cs typeface="Calibri" pitchFamily="34" charset="-120"/>
               </a:rPr>
-              <a:t>prueba 13 CLP</a:t>
+              <a:t>prueba CLP</a:t>
             </a:r>
             <a:endParaRPr lang="en-US" sz="800" dirty="0"/>
           </a:p>
@@ -3762,7 +5220,7 @@
                           <a:ea typeface="Calibri" pitchFamily="34" charset="-122"/>
                           <a:cs typeface="Calibri" pitchFamily="34" charset="-120"/>
                         </a:rPr>
-                        <a:t>0.37%</a:t>
+                        <a:t>0.38%</a:t>
                       </a:r>
                       <a:endParaRPr lang="en-US" sz="750" dirty="0">
                         <a:latin typeface="Calibri" charset="0"/>
@@ -3898,7 +5356,7 @@
                           <a:ea typeface="Calibri" pitchFamily="34" charset="-122"/>
                           <a:cs typeface="Calibri" pitchFamily="34" charset="-120"/>
                         </a:rPr>
-                        <a:t>2.30%</a:t>
+                        <a:t>2.33%</a:t>
                       </a:r>
                       <a:endParaRPr lang="en-US" sz="750" dirty="0">
                         <a:latin typeface="Calibri" charset="0"/>
@@ -3966,7 +5424,7 @@
                           <a:ea typeface="Calibri" pitchFamily="34" charset="-122"/>
                           <a:cs typeface="Calibri" pitchFamily="34" charset="-120"/>
                         </a:rPr>
-                        <a:t>4.82%</a:t>
+                        <a:t>4.90%</a:t>
                       </a:r>
                       <a:endParaRPr lang="en-US" sz="750" dirty="0">
                         <a:latin typeface="Calibri" charset="0"/>
@@ -4786,7 +6244,7 @@
                           <a:ea typeface="Calibri" pitchFamily="34" charset="-122"/>
                           <a:cs typeface="Calibri" pitchFamily="34" charset="-120"/>
                         </a:rPr>
-                        <a:t>—</a:t>
+                        <a:t>6.62%</a:t>
                       </a:r>
                       <a:endParaRPr lang="en-US" sz="750" dirty="0">
                         <a:latin typeface="Calibri" charset="0"/>
@@ -4996,20 +6454,20 @@
               <a:tblPr/>
               <a:tblGrid>
                 <a:gridCol w="201168"/>
-                <a:gridCol w="822960"/>
-                <a:gridCol w="246888"/>
-                <a:gridCol w="246888"/>
-                <a:gridCol w="246888"/>
-                <a:gridCol w="246888"/>
-                <a:gridCol w="246888"/>
-                <a:gridCol w="246888"/>
-                <a:gridCol w="246888"/>
-                <a:gridCol w="246888"/>
-                <a:gridCol w="246888"/>
-                <a:gridCol w="246888"/>
-                <a:gridCol w="246888"/>
-                <a:gridCol w="246888"/>
-                <a:gridCol w="283464"/>
+                <a:gridCol w="804672"/>
+                <a:gridCol w="292608"/>
+                <a:gridCol w="292608"/>
+                <a:gridCol w="292608"/>
+                <a:gridCol w="292608"/>
+                <a:gridCol w="292608"/>
+                <a:gridCol w="292608"/>
+                <a:gridCol w="292608"/>
+                <a:gridCol w="292608"/>
+                <a:gridCol w="292608"/>
+                <a:gridCol w="292608"/>
+                <a:gridCol w="292608"/>
+                <a:gridCol w="292608"/>
+                <a:gridCol w="301752"/>
               </a:tblGrid>
               <a:tr h="123444">
                 <a:tc>
@@ -6157,6 +7615,201 @@
                           <a:ea typeface="Calibri" pitchFamily="34" charset="-122"/>
                           <a:cs typeface="Calibri" pitchFamily="34" charset="-120"/>
                         </a:rPr>
+                        <a:t>0.34%</a:t>
+                      </a:r>
+                      <a:endParaRPr lang="en-US" sz="500" dirty="0">
+                        <a:latin typeface="Calibri" charset="0"/>
+                        <a:ea typeface="Calibri" charset="0"/>
+                        <a:cs typeface="Calibri" charset="0"/>
+                      </a:endParaRPr>
+                    </a:p>
+                  </a:txBody>
+                  <a:tcPr marL="91440" marR="91440" marT="45720" marB="45720">
+                    <a:lnL w="2540" cap="flat" cmpd="sng" algn="ctr">
+                      <a:solidFill>
+                        <a:srgbClr val="EEEEEE"/>
+                      </a:solidFill>
+                      <a:prstDash val="solid"/>
+                      <a:round/>
+                      <a:headEnd type="none" w="med" len="med"/>
+                      <a:tailEnd type="none" w="med" len="med"/>
+                    </a:lnL>
+                    <a:lnR w="2540" cap="flat" cmpd="sng" algn="ctr">
+                      <a:solidFill>
+                        <a:srgbClr val="EEEEEE"/>
+                      </a:solidFill>
+                      <a:prstDash val="solid"/>
+                      <a:round/>
+                      <a:headEnd type="none" w="med" len="med"/>
+                      <a:tailEnd type="none" w="med" len="med"/>
+                    </a:lnR>
+                    <a:lnT w="2540" cap="flat" cmpd="sng" algn="ctr">
+                      <a:solidFill>
+                        <a:srgbClr val="EEEEEE"/>
+                      </a:solidFill>
+                      <a:prstDash val="solid"/>
+                      <a:round/>
+                      <a:headEnd type="none" w="med" len="med"/>
+                      <a:tailEnd type="none" w="med" len="med"/>
+                    </a:lnT>
+                    <a:lnB w="2540" cap="flat" cmpd="sng" algn="ctr">
+                      <a:solidFill>
+                        <a:srgbClr val="EEEEEE"/>
+                      </a:solidFill>
+                      <a:prstDash val="solid"/>
+                      <a:round/>
+                      <a:headEnd type="none" w="med" len="med"/>
+                      <a:tailEnd type="none" w="med" len="med"/>
+                    </a:lnB>
+                  </a:tcPr>
+                </a:tc>
+                <a:tc>
+                  <a:txBody>
+                    <a:bodyPr/>
+                    <a:lstStyle/>
+                    <a:p>
+                      <a:pPr algn="ctr" indent="0" marL="0">
+                        <a:buNone/>
+                      </a:pPr>
+                      <a:r>
+                        <a:rPr lang="en-US" sz="500" dirty="0">
+                          <a:solidFill>
+                            <a:srgbClr val="777777"/>
+                          </a:solidFill>
+                          <a:latin typeface="Calibri" pitchFamily="34" charset="0"/>
+                          <a:ea typeface="Calibri" pitchFamily="34" charset="-122"/>
+                          <a:cs typeface="Calibri" pitchFamily="34" charset="-120"/>
+                        </a:rPr>
+                        <a:t>0.19%</a:t>
+                      </a:r>
+                      <a:endParaRPr lang="en-US" sz="500" dirty="0">
+                        <a:latin typeface="Calibri" charset="0"/>
+                        <a:ea typeface="Calibri" charset="0"/>
+                        <a:cs typeface="Calibri" charset="0"/>
+                      </a:endParaRPr>
+                    </a:p>
+                  </a:txBody>
+                  <a:tcPr marL="91440" marR="91440" marT="45720" marB="45720">
+                    <a:lnL w="2540" cap="flat" cmpd="sng" algn="ctr">
+                      <a:solidFill>
+                        <a:srgbClr val="EEEEEE"/>
+                      </a:solidFill>
+                      <a:prstDash val="solid"/>
+                      <a:round/>
+                      <a:headEnd type="none" w="med" len="med"/>
+                      <a:tailEnd type="none" w="med" len="med"/>
+                    </a:lnL>
+                    <a:lnR w="2540" cap="flat" cmpd="sng" algn="ctr">
+                      <a:solidFill>
+                        <a:srgbClr val="EEEEEE"/>
+                      </a:solidFill>
+                      <a:prstDash val="solid"/>
+                      <a:round/>
+                      <a:headEnd type="none" w="med" len="med"/>
+                      <a:tailEnd type="none" w="med" len="med"/>
+                    </a:lnR>
+                    <a:lnT w="2540" cap="flat" cmpd="sng" algn="ctr">
+                      <a:solidFill>
+                        <a:srgbClr val="EEEEEE"/>
+                      </a:solidFill>
+                      <a:prstDash val="solid"/>
+                      <a:round/>
+                      <a:headEnd type="none" w="med" len="med"/>
+                      <a:tailEnd type="none" w="med" len="med"/>
+                    </a:lnT>
+                    <a:lnB w="2540" cap="flat" cmpd="sng" algn="ctr">
+                      <a:solidFill>
+                        <a:srgbClr val="EEEEEE"/>
+                      </a:solidFill>
+                      <a:prstDash val="solid"/>
+                      <a:round/>
+                      <a:headEnd type="none" w="med" len="med"/>
+                      <a:tailEnd type="none" w="med" len="med"/>
+                    </a:lnB>
+                  </a:tcPr>
+                </a:tc>
+                <a:tc>
+                  <a:txBody>
+                    <a:bodyPr/>
+                    <a:lstStyle/>
+                    <a:p>
+                      <a:pPr algn="ctr" indent="0" marL="0">
+                        <a:buNone/>
+                      </a:pPr>
+                      <a:r>
+                        <a:rPr lang="en-US" sz="500" dirty="0">
+                          <a:solidFill>
+                            <a:srgbClr val="777777"/>
+                          </a:solidFill>
+                          <a:latin typeface="Calibri" pitchFamily="34" charset="0"/>
+                          <a:ea typeface="Calibri" pitchFamily="34" charset="-122"/>
+                          <a:cs typeface="Calibri" pitchFamily="34" charset="-120"/>
+                        </a:rPr>
+                        <a:t>0.22%</a:t>
+                      </a:r>
+                      <a:endParaRPr lang="en-US" sz="500" dirty="0">
+                        <a:latin typeface="Calibri" charset="0"/>
+                        <a:ea typeface="Calibri" charset="0"/>
+                        <a:cs typeface="Calibri" charset="0"/>
+                      </a:endParaRPr>
+                    </a:p>
+                  </a:txBody>
+                  <a:tcPr marL="91440" marR="91440" marT="45720" marB="45720">
+                    <a:lnL w="2540" cap="flat" cmpd="sng" algn="ctr">
+                      <a:solidFill>
+                        <a:srgbClr val="EEEEEE"/>
+                      </a:solidFill>
+                      <a:prstDash val="solid"/>
+                      <a:round/>
+                      <a:headEnd type="none" w="med" len="med"/>
+                      <a:tailEnd type="none" w="med" len="med"/>
+                    </a:lnL>
+                    <a:lnR w="2540" cap="flat" cmpd="sng" algn="ctr">
+                      <a:solidFill>
+                        <a:srgbClr val="EEEEEE"/>
+                      </a:solidFill>
+                      <a:prstDash val="solid"/>
+                      <a:round/>
+                      <a:headEnd type="none" w="med" len="med"/>
+                      <a:tailEnd type="none" w="med" len="med"/>
+                    </a:lnR>
+                    <a:lnT w="2540" cap="flat" cmpd="sng" algn="ctr">
+                      <a:solidFill>
+                        <a:srgbClr val="EEEEEE"/>
+                      </a:solidFill>
+                      <a:prstDash val="solid"/>
+                      <a:round/>
+                      <a:headEnd type="none" w="med" len="med"/>
+                      <a:tailEnd type="none" w="med" len="med"/>
+                    </a:lnT>
+                    <a:lnB w="2540" cap="flat" cmpd="sng" algn="ctr">
+                      <a:solidFill>
+                        <a:srgbClr val="EEEEEE"/>
+                      </a:solidFill>
+                      <a:prstDash val="solid"/>
+                      <a:round/>
+                      <a:headEnd type="none" w="med" len="med"/>
+                      <a:tailEnd type="none" w="med" len="med"/>
+                    </a:lnB>
+                  </a:tcPr>
+                </a:tc>
+                <a:tc>
+                  <a:txBody>
+                    <a:bodyPr/>
+                    <a:lstStyle/>
+                    <a:p>
+                      <a:pPr algn="ctr" indent="0" marL="0">
+                        <a:buNone/>
+                      </a:pPr>
+                      <a:r>
+                        <a:rPr lang="en-US" sz="500" dirty="0">
+                          <a:solidFill>
+                            <a:srgbClr val="777777"/>
+                          </a:solidFill>
+                          <a:latin typeface="Calibri" pitchFamily="34" charset="0"/>
+                          <a:ea typeface="Calibri" pitchFamily="34" charset="-122"/>
+                          <a:cs typeface="Calibri" pitchFamily="34" charset="-120"/>
+                        </a:rPr>
                         <a:t>0.21%</a:t>
                       </a:r>
                       <a:endParaRPr lang="en-US" sz="500" dirty="0">
@@ -6352,6 +8005,71 @@
                           <a:ea typeface="Calibri" pitchFamily="34" charset="-122"/>
                           <a:cs typeface="Calibri" pitchFamily="34" charset="-120"/>
                         </a:rPr>
+                        <a:t>0.22%</a:t>
+                      </a:r>
+                      <a:endParaRPr lang="en-US" sz="500" dirty="0">
+                        <a:latin typeface="Calibri" charset="0"/>
+                        <a:ea typeface="Calibri" charset="0"/>
+                        <a:cs typeface="Calibri" charset="0"/>
+                      </a:endParaRPr>
+                    </a:p>
+                  </a:txBody>
+                  <a:tcPr marL="91440" marR="91440" marT="45720" marB="45720">
+                    <a:lnL w="2540" cap="flat" cmpd="sng" algn="ctr">
+                      <a:solidFill>
+                        <a:srgbClr val="EEEEEE"/>
+                      </a:solidFill>
+                      <a:prstDash val="solid"/>
+                      <a:round/>
+                      <a:headEnd type="none" w="med" len="med"/>
+                      <a:tailEnd type="none" w="med" len="med"/>
+                    </a:lnL>
+                    <a:lnR w="2540" cap="flat" cmpd="sng" algn="ctr">
+                      <a:solidFill>
+                        <a:srgbClr val="EEEEEE"/>
+                      </a:solidFill>
+                      <a:prstDash val="solid"/>
+                      <a:round/>
+                      <a:headEnd type="none" w="med" len="med"/>
+                      <a:tailEnd type="none" w="med" len="med"/>
+                    </a:lnR>
+                    <a:lnT w="2540" cap="flat" cmpd="sng" algn="ctr">
+                      <a:solidFill>
+                        <a:srgbClr val="EEEEEE"/>
+                      </a:solidFill>
+                      <a:prstDash val="solid"/>
+                      <a:round/>
+                      <a:headEnd type="none" w="med" len="med"/>
+                      <a:tailEnd type="none" w="med" len="med"/>
+                    </a:lnT>
+                    <a:lnB w="2540" cap="flat" cmpd="sng" algn="ctr">
+                      <a:solidFill>
+                        <a:srgbClr val="EEEEEE"/>
+                      </a:solidFill>
+                      <a:prstDash val="solid"/>
+                      <a:round/>
+                      <a:headEnd type="none" w="med" len="med"/>
+                      <a:tailEnd type="none" w="med" len="med"/>
+                    </a:lnB>
+                  </a:tcPr>
+                </a:tc>
+                <a:tc>
+                  <a:txBody>
+                    <a:bodyPr/>
+                    <a:lstStyle/>
+                    <a:p>
+                      <a:pPr algn="ctr" indent="0" marL="0">
+                        <a:buNone/>
+                      </a:pPr>
+                      <a:r>
+                        <a:rPr lang="en-US" sz="500" dirty="0">
+                          <a:solidFill>
+                            <a:srgbClr val="777777"/>
+                          </a:solidFill>
+                          <a:latin typeface="Calibri" pitchFamily="34" charset="0"/>
+                          <a:ea typeface="Calibri" pitchFamily="34" charset="-122"/>
+                          <a:cs typeface="Calibri" pitchFamily="34" charset="-120"/>
+                        </a:rPr>
                         <a:t>0.21%</a:t>
                       </a:r>
                       <a:endParaRPr lang="en-US" sz="500" dirty="0">
@@ -6417,7 +8135,7 @@
                           <a:ea typeface="Calibri" pitchFamily="34" charset="-122"/>
                           <a:cs typeface="Calibri" pitchFamily="34" charset="-120"/>
                         </a:rPr>
-                        <a:t>0.21%</a:t>
+                        <a:t>0.20%</a:t>
                       </a:r>
                       <a:endParaRPr lang="en-US" sz="500" dirty="0">
                         <a:latin typeface="Calibri" charset="0"/>
@@ -6482,7 +8200,7 @@
                           <a:ea typeface="Calibri" pitchFamily="34" charset="-122"/>
                           <a:cs typeface="Calibri" pitchFamily="34" charset="-120"/>
                         </a:rPr>
-                        <a:t>0.21%</a:t>
+                        <a:t>0.23%</a:t>
                       </a:r>
                       <a:endParaRPr lang="en-US" sz="500" dirty="0">
                         <a:latin typeface="Calibri" charset="0"/>
@@ -6547,7 +8265,7 @@
                           <a:ea typeface="Calibri" pitchFamily="34" charset="-122"/>
                           <a:cs typeface="Calibri" pitchFamily="34" charset="-120"/>
                         </a:rPr>
-                        <a:t>0.21%</a:t>
+                        <a:t>0.23%</a:t>
                       </a:r>
                       <a:endParaRPr lang="en-US" sz="500" dirty="0">
                         <a:latin typeface="Calibri" charset="0"/>
@@ -6612,64 +8330,64 @@
                           <a:ea typeface="Calibri" pitchFamily="34" charset="-122"/>
                           <a:cs typeface="Calibri" pitchFamily="34" charset="-120"/>
                         </a:rPr>
-                        <a:t>0.21%</a:t>
-                      </a:r>
-                      <a:endParaRPr lang="en-US" sz="500" dirty="0">
-                        <a:latin typeface="Calibri" charset="0"/>
-                        <a:ea typeface="Calibri" charset="0"/>
-                        <a:cs typeface="Calibri" charset="0"/>
-                      </a:endParaRPr>
-                    </a:p>
-                  </a:txBody>
-                  <a:tcPr marL="91440" marR="91440" marT="45720" marB="45720">
-                    <a:lnL w="2540" cap="flat" cmpd="sng" algn="ctr">
-                      <a:solidFill>
-                        <a:srgbClr val="EEEEEE"/>
-                      </a:solidFill>
-                      <a:prstDash val="solid"/>
-                      <a:round/>
-                      <a:headEnd type="none" w="med" len="med"/>
-                      <a:tailEnd type="none" w="med" len="med"/>
-                    </a:lnL>
-                    <a:lnR w="2540" cap="flat" cmpd="sng" algn="ctr">
-                      <a:solidFill>
-                        <a:srgbClr val="EEEEEE"/>
-                      </a:solidFill>
-                      <a:prstDash val="solid"/>
-                      <a:round/>
-                      <a:headEnd type="none" w="med" len="med"/>
-                      <a:tailEnd type="none" w="med" len="med"/>
-                    </a:lnR>
-                    <a:lnT w="2540" cap="flat" cmpd="sng" algn="ctr">
-                      <a:solidFill>
-                        <a:srgbClr val="EEEEEE"/>
-                      </a:solidFill>
-                      <a:prstDash val="solid"/>
-                      <a:round/>
-                      <a:headEnd type="none" w="med" len="med"/>
-                      <a:tailEnd type="none" w="med" len="med"/>
-                    </a:lnT>
-                    <a:lnB w="2540" cap="flat" cmpd="sng" algn="ctr">
-                      <a:solidFill>
-                        <a:srgbClr val="EEEEEE"/>
-                      </a:solidFill>
-                      <a:prstDash val="solid"/>
-                      <a:round/>
-                      <a:headEnd type="none" w="med" len="med"/>
-                      <a:tailEnd type="none" w="med" len="med"/>
-                    </a:lnB>
-                  </a:tcPr>
-                </a:tc>
-                <a:tc>
-                  <a:txBody>
-                    <a:bodyPr/>
-                    <a:lstStyle/>
-                    <a:p>
-                      <a:pPr algn="ctr" indent="0" marL="0">
-                        <a:buNone/>
-                      </a:pPr>
-                      <a:r>
-                        <a:rPr lang="en-US" sz="500" dirty="0">
+                        <a:t>0.24%</a:t>
+                      </a:r>
+                      <a:endParaRPr lang="en-US" sz="500" dirty="0">
+                        <a:latin typeface="Calibri" charset="0"/>
+                        <a:ea typeface="Calibri" charset="0"/>
+                        <a:cs typeface="Calibri" charset="0"/>
+                      </a:endParaRPr>
+                    </a:p>
+                  </a:txBody>
+                  <a:tcPr marL="91440" marR="91440" marT="45720" marB="45720">
+                    <a:lnL w="2540" cap="flat" cmpd="sng" algn="ctr">
+                      <a:solidFill>
+                        <a:srgbClr val="EEEEEE"/>
+                      </a:solidFill>
+                      <a:prstDash val="solid"/>
+                      <a:round/>
+                      <a:headEnd type="none" w="med" len="med"/>
+                      <a:tailEnd type="none" w="med" len="med"/>
+                    </a:lnL>
+                    <a:lnR w="2540" cap="flat" cmpd="sng" algn="ctr">
+                      <a:solidFill>
+                        <a:srgbClr val="EEEEEE"/>
+                      </a:solidFill>
+                      <a:prstDash val="solid"/>
+                      <a:round/>
+                      <a:headEnd type="none" w="med" len="med"/>
+                      <a:tailEnd type="none" w="med" len="med"/>
+                    </a:lnR>
+                    <a:lnT w="2540" cap="flat" cmpd="sng" algn="ctr">
+                      <a:solidFill>
+                        <a:srgbClr val="EEEEEE"/>
+                      </a:solidFill>
+                      <a:prstDash val="solid"/>
+                      <a:round/>
+                      <a:headEnd type="none" w="med" len="med"/>
+                      <a:tailEnd type="none" w="med" len="med"/>
+                    </a:lnT>
+                    <a:lnB w="2540" cap="flat" cmpd="sng" algn="ctr">
+                      <a:solidFill>
+                        <a:srgbClr val="EEEEEE"/>
+                      </a:solidFill>
+                      <a:prstDash val="solid"/>
+                      <a:round/>
+                      <a:headEnd type="none" w="med" len="med"/>
+                      <a:tailEnd type="none" w="med" len="med"/>
+                    </a:lnB>
+                  </a:tcPr>
+                </a:tc>
+                <a:tc>
+                  <a:txBody>
+                    <a:bodyPr/>
+                    <a:lstStyle/>
+                    <a:p>
+                      <a:pPr algn="ctr" indent="0" marL="0">
+                        <a:buNone/>
+                      </a:pPr>
+                      <a:r>
+                        <a:rPr lang="en-US" sz="500" b="1" dirty="0">
                           <a:solidFill>
                             <a:srgbClr val="777777"/>
                           </a:solidFill>
@@ -6677,267 +8395,7 @@
                           <a:ea typeface="Calibri" pitchFamily="34" charset="-122"/>
                           <a:cs typeface="Calibri" pitchFamily="34" charset="-120"/>
                         </a:rPr>
-                        <a:t>0.21%</a:t>
-                      </a:r>
-                      <a:endParaRPr lang="en-US" sz="500" dirty="0">
-                        <a:latin typeface="Calibri" charset="0"/>
-                        <a:ea typeface="Calibri" charset="0"/>
-                        <a:cs typeface="Calibri" charset="0"/>
-                      </a:endParaRPr>
-                    </a:p>
-                  </a:txBody>
-                  <a:tcPr marL="91440" marR="91440" marT="45720" marB="45720">
-                    <a:lnL w="2540" cap="flat" cmpd="sng" algn="ctr">
-                      <a:solidFill>
-                        <a:srgbClr val="EEEEEE"/>
-                      </a:solidFill>
-                      <a:prstDash val="solid"/>
-                      <a:round/>
-                      <a:headEnd type="none" w="med" len="med"/>
-                      <a:tailEnd type="none" w="med" len="med"/>
-                    </a:lnL>
-                    <a:lnR w="2540" cap="flat" cmpd="sng" algn="ctr">
-                      <a:solidFill>
-                        <a:srgbClr val="EEEEEE"/>
-                      </a:solidFill>
-                      <a:prstDash val="solid"/>
-                      <a:round/>
-                      <a:headEnd type="none" w="med" len="med"/>
-                      <a:tailEnd type="none" w="med" len="med"/>
-                    </a:lnR>
-                    <a:lnT w="2540" cap="flat" cmpd="sng" algn="ctr">
-                      <a:solidFill>
-                        <a:srgbClr val="EEEEEE"/>
-                      </a:solidFill>
-                      <a:prstDash val="solid"/>
-                      <a:round/>
-                      <a:headEnd type="none" w="med" len="med"/>
-                      <a:tailEnd type="none" w="med" len="med"/>
-                    </a:lnT>
-                    <a:lnB w="2540" cap="flat" cmpd="sng" algn="ctr">
-                      <a:solidFill>
-                        <a:srgbClr val="EEEEEE"/>
-                      </a:solidFill>
-                      <a:prstDash val="solid"/>
-                      <a:round/>
-                      <a:headEnd type="none" w="med" len="med"/>
-                      <a:tailEnd type="none" w="med" len="med"/>
-                    </a:lnB>
-                  </a:tcPr>
-                </a:tc>
-                <a:tc>
-                  <a:txBody>
-                    <a:bodyPr/>
-                    <a:lstStyle/>
-                    <a:p>
-                      <a:pPr algn="ctr" indent="0" marL="0">
-                        <a:buNone/>
-                      </a:pPr>
-                      <a:r>
-                        <a:rPr lang="en-US" sz="500" dirty="0">
-                          <a:solidFill>
-                            <a:srgbClr val="777777"/>
-                          </a:solidFill>
-                          <a:latin typeface="Calibri" pitchFamily="34" charset="0"/>
-                          <a:ea typeface="Calibri" pitchFamily="34" charset="-122"/>
-                          <a:cs typeface="Calibri" pitchFamily="34" charset="-120"/>
-                        </a:rPr>
-                        <a:t>0.22%</a:t>
-                      </a:r>
-                      <a:endParaRPr lang="en-US" sz="500" dirty="0">
-                        <a:latin typeface="Calibri" charset="0"/>
-                        <a:ea typeface="Calibri" charset="0"/>
-                        <a:cs typeface="Calibri" charset="0"/>
-                      </a:endParaRPr>
-                    </a:p>
-                  </a:txBody>
-                  <a:tcPr marL="91440" marR="91440" marT="45720" marB="45720">
-                    <a:lnL w="2540" cap="flat" cmpd="sng" algn="ctr">
-                      <a:solidFill>
-                        <a:srgbClr val="EEEEEE"/>
-                      </a:solidFill>
-                      <a:prstDash val="solid"/>
-                      <a:round/>
-                      <a:headEnd type="none" w="med" len="med"/>
-                      <a:tailEnd type="none" w="med" len="med"/>
-                    </a:lnL>
-                    <a:lnR w="2540" cap="flat" cmpd="sng" algn="ctr">
-                      <a:solidFill>
-                        <a:srgbClr val="EEEEEE"/>
-                      </a:solidFill>
-                      <a:prstDash val="solid"/>
-                      <a:round/>
-                      <a:headEnd type="none" w="med" len="med"/>
-                      <a:tailEnd type="none" w="med" len="med"/>
-                    </a:lnR>
-                    <a:lnT w="2540" cap="flat" cmpd="sng" algn="ctr">
-                      <a:solidFill>
-                        <a:srgbClr val="EEEEEE"/>
-                      </a:solidFill>
-                      <a:prstDash val="solid"/>
-                      <a:round/>
-                      <a:headEnd type="none" w="med" len="med"/>
-                      <a:tailEnd type="none" w="med" len="med"/>
-                    </a:lnT>
-                    <a:lnB w="2540" cap="flat" cmpd="sng" algn="ctr">
-                      <a:solidFill>
-                        <a:srgbClr val="EEEEEE"/>
-                      </a:solidFill>
-                      <a:prstDash val="solid"/>
-                      <a:round/>
-                      <a:headEnd type="none" w="med" len="med"/>
-                      <a:tailEnd type="none" w="med" len="med"/>
-                    </a:lnB>
-                  </a:tcPr>
-                </a:tc>
-                <a:tc>
-                  <a:txBody>
-                    <a:bodyPr/>
-                    <a:lstStyle/>
-                    <a:p>
-                      <a:pPr algn="ctr" indent="0" marL="0">
-                        <a:buNone/>
-                      </a:pPr>
-                      <a:r>
-                        <a:rPr lang="en-US" sz="500" dirty="0">
-                          <a:solidFill>
-                            <a:srgbClr val="777777"/>
-                          </a:solidFill>
-                          <a:latin typeface="Calibri" pitchFamily="34" charset="0"/>
-                          <a:ea typeface="Calibri" pitchFamily="34" charset="-122"/>
-                          <a:cs typeface="Calibri" pitchFamily="34" charset="-120"/>
-                        </a:rPr>
-                        <a:t>0.23%</a:t>
-                      </a:r>
-                      <a:endParaRPr lang="en-US" sz="500" dirty="0">
-                        <a:latin typeface="Calibri" charset="0"/>
-                        <a:ea typeface="Calibri" charset="0"/>
-                        <a:cs typeface="Calibri" charset="0"/>
-                      </a:endParaRPr>
-                    </a:p>
-                  </a:txBody>
-                  <a:tcPr marL="91440" marR="91440" marT="45720" marB="45720">
-                    <a:lnL w="2540" cap="flat" cmpd="sng" algn="ctr">
-                      <a:solidFill>
-                        <a:srgbClr val="EEEEEE"/>
-                      </a:solidFill>
-                      <a:prstDash val="solid"/>
-                      <a:round/>
-                      <a:headEnd type="none" w="med" len="med"/>
-                      <a:tailEnd type="none" w="med" len="med"/>
-                    </a:lnL>
-                    <a:lnR w="2540" cap="flat" cmpd="sng" algn="ctr">
-                      <a:solidFill>
-                        <a:srgbClr val="EEEEEE"/>
-                      </a:solidFill>
-                      <a:prstDash val="solid"/>
-                      <a:round/>
-                      <a:headEnd type="none" w="med" len="med"/>
-                      <a:tailEnd type="none" w="med" len="med"/>
-                    </a:lnR>
-                    <a:lnT w="2540" cap="flat" cmpd="sng" algn="ctr">
-                      <a:solidFill>
-                        <a:srgbClr val="EEEEEE"/>
-                      </a:solidFill>
-                      <a:prstDash val="solid"/>
-                      <a:round/>
-                      <a:headEnd type="none" w="med" len="med"/>
-                      <a:tailEnd type="none" w="med" len="med"/>
-                    </a:lnT>
-                    <a:lnB w="2540" cap="flat" cmpd="sng" algn="ctr">
-                      <a:solidFill>
-                        <a:srgbClr val="EEEEEE"/>
-                      </a:solidFill>
-                      <a:prstDash val="solid"/>
-                      <a:round/>
-                      <a:headEnd type="none" w="med" len="med"/>
-                      <a:tailEnd type="none" w="med" len="med"/>
-                    </a:lnB>
-                  </a:tcPr>
-                </a:tc>
-                <a:tc>
-                  <a:txBody>
-                    <a:bodyPr/>
-                    <a:lstStyle/>
-                    <a:p>
-                      <a:pPr algn="ctr" indent="0" marL="0">
-                        <a:buNone/>
-                      </a:pPr>
-                      <a:r>
-                        <a:rPr lang="en-US" sz="500" dirty="0">
-                          <a:solidFill>
-                            <a:srgbClr val="777777"/>
-                          </a:solidFill>
-                          <a:latin typeface="Calibri" pitchFamily="34" charset="0"/>
-                          <a:ea typeface="Calibri" pitchFamily="34" charset="-122"/>
-                          <a:cs typeface="Calibri" pitchFamily="34" charset="-120"/>
-                        </a:rPr>
-                        <a:t>0.23%</a:t>
-                      </a:r>
-                      <a:endParaRPr lang="en-US" sz="500" dirty="0">
-                        <a:latin typeface="Calibri" charset="0"/>
-                        <a:ea typeface="Calibri" charset="0"/>
-                        <a:cs typeface="Calibri" charset="0"/>
-                      </a:endParaRPr>
-                    </a:p>
-                  </a:txBody>
-                  <a:tcPr marL="91440" marR="91440" marT="45720" marB="45720">
-                    <a:lnL w="2540" cap="flat" cmpd="sng" algn="ctr">
-                      <a:solidFill>
-                        <a:srgbClr val="EEEEEE"/>
-                      </a:solidFill>
-                      <a:prstDash val="solid"/>
-                      <a:round/>
-                      <a:headEnd type="none" w="med" len="med"/>
-                      <a:tailEnd type="none" w="med" len="med"/>
-                    </a:lnL>
-                    <a:lnR w="2540" cap="flat" cmpd="sng" algn="ctr">
-                      <a:solidFill>
-                        <a:srgbClr val="EEEEEE"/>
-                      </a:solidFill>
-                      <a:prstDash val="solid"/>
-                      <a:round/>
-                      <a:headEnd type="none" w="med" len="med"/>
-                      <a:tailEnd type="none" w="med" len="med"/>
-                    </a:lnR>
-                    <a:lnT w="2540" cap="flat" cmpd="sng" algn="ctr">
-                      <a:solidFill>
-                        <a:srgbClr val="EEEEEE"/>
-                      </a:solidFill>
-                      <a:prstDash val="solid"/>
-                      <a:round/>
-                      <a:headEnd type="none" w="med" len="med"/>
-                      <a:tailEnd type="none" w="med" len="med"/>
-                    </a:lnT>
-                    <a:lnB w="2540" cap="flat" cmpd="sng" algn="ctr">
-                      <a:solidFill>
-                        <a:srgbClr val="EEEEEE"/>
-                      </a:solidFill>
-                      <a:prstDash val="solid"/>
-                      <a:round/>
-                      <a:headEnd type="none" w="med" len="med"/>
-                      <a:tailEnd type="none" w="med" len="med"/>
-                    </a:lnB>
-                  </a:tcPr>
-                </a:tc>
-                <a:tc>
-                  <a:txBody>
-                    <a:bodyPr/>
-                    <a:lstStyle/>
-                    <a:p>
-                      <a:pPr algn="ctr" indent="0" marL="0">
-                        <a:buNone/>
-                      </a:pPr>
-                      <a:r>
-                        <a:rPr lang="en-US" sz="500" b="1" dirty="0">
-                          <a:solidFill>
-                            <a:srgbClr val="777777"/>
-                          </a:solidFill>
-                          <a:latin typeface="Calibri" pitchFamily="34" charset="0"/>
-                          <a:ea typeface="Calibri" pitchFamily="34" charset="-122"/>
-                          <a:cs typeface="Calibri" pitchFamily="34" charset="-120"/>
-                        </a:rPr>
-                        <a:t>2.58%</a:t>
+                        <a:t>2.74%</a:t>
                       </a:r>
                       <a:endParaRPr lang="en-US" sz="500" dirty="0">
                         <a:latin typeface="Calibri" charset="0"/>
@@ -7728,7 +9186,7 @@
                           <a:ea typeface="Calibri" pitchFamily="34" charset="-122"/>
                           <a:cs typeface="Calibri" pitchFamily="34" charset="-120"/>
                         </a:rPr>
-                        <a:t>3.10%</a:t>
+                        <a:t>0.13%</a:t>
                       </a:r>
                       <a:endParaRPr lang="en-US" sz="500" dirty="0">
                         <a:latin typeface="Calibri" charset="0"/>
@@ -7793,7 +9251,7 @@
                           <a:ea typeface="Calibri" pitchFamily="34" charset="-122"/>
                           <a:cs typeface="Calibri" pitchFamily="34" charset="-120"/>
                         </a:rPr>
-                        <a:t>3.21%</a:t>
+                        <a:t>0.24%</a:t>
                       </a:r>
                       <a:endParaRPr lang="en-US" sz="500" dirty="0">
                         <a:latin typeface="Calibri" charset="0"/>
@@ -8649,7 +10107,7 @@
                           <a:ea typeface="Calibri" pitchFamily="34" charset="-122"/>
                           <a:cs typeface="Calibri" pitchFamily="34" charset="-120"/>
                         </a:rPr>
-                        <a:t>0.57%</a:t>
+                        <a:t>0.58%</a:t>
                       </a:r>
                       <a:endParaRPr lang="en-US" sz="500" dirty="0">
                         <a:latin typeface="Calibri" charset="0"/>
@@ -8846,6 +10304,71 @@
                           <a:ea typeface="Calibri" pitchFamily="34" charset="-122"/>
                           <a:cs typeface="Calibri" pitchFamily="34" charset="-120"/>
                         </a:rPr>
+                        <a:t>0.25%</a:t>
+                      </a:r>
+                      <a:endParaRPr lang="en-US" sz="500" dirty="0">
+                        <a:latin typeface="Calibri" charset="0"/>
+                        <a:ea typeface="Calibri" charset="0"/>
+                        <a:cs typeface="Calibri" charset="0"/>
+                      </a:endParaRPr>
+                    </a:p>
+                  </a:txBody>
+                  <a:tcPr marL="91440" marR="91440" marT="45720" marB="45720">
+                    <a:lnL w="2540" cap="flat" cmpd="sng" algn="ctr">
+                      <a:solidFill>
+                        <a:srgbClr val="EEEEEE"/>
+                      </a:solidFill>
+                      <a:prstDash val="solid"/>
+                      <a:round/>
+                      <a:headEnd type="none" w="med" len="med"/>
+                      <a:tailEnd type="none" w="med" len="med"/>
+                    </a:lnL>
+                    <a:lnR w="2540" cap="flat" cmpd="sng" algn="ctr">
+                      <a:solidFill>
+                        <a:srgbClr val="EEEEEE"/>
+                      </a:solidFill>
+                      <a:prstDash val="solid"/>
+                      <a:round/>
+                      <a:headEnd type="none" w="med" len="med"/>
+                      <a:tailEnd type="none" w="med" len="med"/>
+                    </a:lnR>
+                    <a:lnT w="2540" cap="flat" cmpd="sng" algn="ctr">
+                      <a:solidFill>
+                        <a:srgbClr val="EEEEEE"/>
+                      </a:solidFill>
+                      <a:prstDash val="solid"/>
+                      <a:round/>
+                      <a:headEnd type="none" w="med" len="med"/>
+                      <a:tailEnd type="none" w="med" len="med"/>
+                    </a:lnT>
+                    <a:lnB w="2540" cap="flat" cmpd="sng" algn="ctr">
+                      <a:solidFill>
+                        <a:srgbClr val="EEEEEE"/>
+                      </a:solidFill>
+                      <a:prstDash val="solid"/>
+                      <a:round/>
+                      <a:headEnd type="none" w="med" len="med"/>
+                      <a:tailEnd type="none" w="med" len="med"/>
+                    </a:lnB>
+                  </a:tcPr>
+                </a:tc>
+                <a:tc>
+                  <a:txBody>
+                    <a:bodyPr/>
+                    <a:lstStyle/>
+                    <a:p>
+                      <a:pPr algn="ctr" indent="0" marL="0">
+                        <a:buNone/>
+                      </a:pPr>
+                      <a:r>
+                        <a:rPr lang="en-US" sz="500" dirty="0">
+                          <a:solidFill>
+                            <a:srgbClr val="777777"/>
+                          </a:solidFill>
+                          <a:latin typeface="Calibri" pitchFamily="34" charset="0"/>
+                          <a:ea typeface="Calibri" pitchFamily="34" charset="-122"/>
+                          <a:cs typeface="Calibri" pitchFamily="34" charset="-120"/>
+                        </a:rPr>
                         <a:t>0.23%</a:t>
                       </a:r>
                       <a:endParaRPr lang="en-US" sz="500" dirty="0">
@@ -8911,6 +10434,71 @@
                           <a:ea typeface="Calibri" pitchFamily="34" charset="-122"/>
                           <a:cs typeface="Calibri" pitchFamily="34" charset="-120"/>
                         </a:rPr>
+                        <a:t>0.26%</a:t>
+                      </a:r>
+                      <a:endParaRPr lang="en-US" sz="500" dirty="0">
+                        <a:latin typeface="Calibri" charset="0"/>
+                        <a:ea typeface="Calibri" charset="0"/>
+                        <a:cs typeface="Calibri" charset="0"/>
+                      </a:endParaRPr>
+                    </a:p>
+                  </a:txBody>
+                  <a:tcPr marL="91440" marR="91440" marT="45720" marB="45720">
+                    <a:lnL w="2540" cap="flat" cmpd="sng" algn="ctr">
+                      <a:solidFill>
+                        <a:srgbClr val="EEEEEE"/>
+                      </a:solidFill>
+                      <a:prstDash val="solid"/>
+                      <a:round/>
+                      <a:headEnd type="none" w="med" len="med"/>
+                      <a:tailEnd type="none" w="med" len="med"/>
+                    </a:lnL>
+                    <a:lnR w="2540" cap="flat" cmpd="sng" algn="ctr">
+                      <a:solidFill>
+                        <a:srgbClr val="EEEEEE"/>
+                      </a:solidFill>
+                      <a:prstDash val="solid"/>
+                      <a:round/>
+                      <a:headEnd type="none" w="med" len="med"/>
+                      <a:tailEnd type="none" w="med" len="med"/>
+                    </a:lnR>
+                    <a:lnT w="2540" cap="flat" cmpd="sng" algn="ctr">
+                      <a:solidFill>
+                        <a:srgbClr val="EEEEEE"/>
+                      </a:solidFill>
+                      <a:prstDash val="solid"/>
+                      <a:round/>
+                      <a:headEnd type="none" w="med" len="med"/>
+                      <a:tailEnd type="none" w="med" len="med"/>
+                    </a:lnT>
+                    <a:lnB w="2540" cap="flat" cmpd="sng" algn="ctr">
+                      <a:solidFill>
+                        <a:srgbClr val="EEEEEE"/>
+                      </a:solidFill>
+                      <a:prstDash val="solid"/>
+                      <a:round/>
+                      <a:headEnd type="none" w="med" len="med"/>
+                      <a:tailEnd type="none" w="med" len="med"/>
+                    </a:lnB>
+                  </a:tcPr>
+                </a:tc>
+                <a:tc>
+                  <a:txBody>
+                    <a:bodyPr/>
+                    <a:lstStyle/>
+                    <a:p>
+                      <a:pPr algn="ctr" indent="0" marL="0">
+                        <a:buNone/>
+                      </a:pPr>
+                      <a:r>
+                        <a:rPr lang="en-US" sz="500" dirty="0">
+                          <a:solidFill>
+                            <a:srgbClr val="777777"/>
+                          </a:solidFill>
+                          <a:latin typeface="Calibri" pitchFamily="34" charset="0"/>
+                          <a:ea typeface="Calibri" pitchFamily="34" charset="-122"/>
+                          <a:cs typeface="Calibri" pitchFamily="34" charset="-120"/>
+                        </a:rPr>
                         <a:t>0.25%</a:t>
                       </a:r>
                       <a:endParaRPr lang="en-US" sz="500" dirty="0">
@@ -8976,7 +10564,7 @@
                           <a:ea typeface="Calibri" pitchFamily="34" charset="-122"/>
                           <a:cs typeface="Calibri" pitchFamily="34" charset="-120"/>
                         </a:rPr>
-                        <a:t>0.25%</a:t>
+                        <a:t>0.26%</a:t>
                       </a:r>
                       <a:endParaRPr lang="en-US" sz="500" dirty="0">
                         <a:latin typeface="Calibri" charset="0"/>
@@ -9041,7 +10629,7 @@
                           <a:ea typeface="Calibri" pitchFamily="34" charset="-122"/>
                           <a:cs typeface="Calibri" pitchFamily="34" charset="-120"/>
                         </a:rPr>
-                        <a:t>0.25%</a:t>
+                        <a:t>0.22%</a:t>
                       </a:r>
                       <a:endParaRPr lang="en-US" sz="500" dirty="0">
                         <a:latin typeface="Calibri" charset="0"/>
@@ -9106,7 +10694,7 @@
                           <a:ea typeface="Calibri" pitchFamily="34" charset="-122"/>
                           <a:cs typeface="Calibri" pitchFamily="34" charset="-120"/>
                         </a:rPr>
-                        <a:t>0.25%</a:t>
+                        <a:t>0.21%</a:t>
                       </a:r>
                       <a:endParaRPr lang="en-US" sz="500" dirty="0">
                         <a:latin typeface="Calibri" charset="0"/>
@@ -9236,7 +10824,7 @@
                           <a:ea typeface="Calibri" pitchFamily="34" charset="-122"/>
                           <a:cs typeface="Calibri" pitchFamily="34" charset="-120"/>
                         </a:rPr>
-                        <a:t>0.21%</a:t>
+                        <a:t>0.17%</a:t>
                       </a:r>
                       <a:endParaRPr lang="en-US" sz="500" dirty="0">
                         <a:latin typeface="Calibri" charset="0"/>
@@ -9301,7 +10889,7 @@
                           <a:ea typeface="Calibri" pitchFamily="34" charset="-122"/>
                           <a:cs typeface="Calibri" pitchFamily="34" charset="-120"/>
                         </a:rPr>
-                        <a:t>0.21%</a:t>
+                        <a:t>0.17%</a:t>
                       </a:r>
                       <a:endParaRPr lang="en-US" sz="500" dirty="0">
                         <a:latin typeface="Calibri" charset="0"/>
@@ -9366,7 +10954,7 @@
                           <a:ea typeface="Calibri" pitchFamily="34" charset="-122"/>
                           <a:cs typeface="Calibri" pitchFamily="34" charset="-120"/>
                         </a:rPr>
-                        <a:t>0.17%</a:t>
+                        <a:t>0.14%</a:t>
                       </a:r>
                       <a:endParaRPr lang="en-US" sz="500" dirty="0">
                         <a:latin typeface="Calibri" charset="0"/>
@@ -9431,64 +11019,64 @@
                           <a:ea typeface="Calibri" pitchFamily="34" charset="-122"/>
                           <a:cs typeface="Calibri" pitchFamily="34" charset="-120"/>
                         </a:rPr>
-                        <a:t>0.16%</a:t>
-                      </a:r>
-                      <a:endParaRPr lang="en-US" sz="500" dirty="0">
-                        <a:latin typeface="Calibri" charset="0"/>
-                        <a:ea typeface="Calibri" charset="0"/>
-                        <a:cs typeface="Calibri" charset="0"/>
-                      </a:endParaRPr>
-                    </a:p>
-                  </a:txBody>
-                  <a:tcPr marL="91440" marR="91440" marT="45720" marB="45720">
-                    <a:lnL w="2540" cap="flat" cmpd="sng" algn="ctr">
-                      <a:solidFill>
-                        <a:srgbClr val="EEEEEE"/>
-                      </a:solidFill>
-                      <a:prstDash val="solid"/>
-                      <a:round/>
-                      <a:headEnd type="none" w="med" len="med"/>
-                      <a:tailEnd type="none" w="med" len="med"/>
-                    </a:lnL>
-                    <a:lnR w="2540" cap="flat" cmpd="sng" algn="ctr">
-                      <a:solidFill>
-                        <a:srgbClr val="EEEEEE"/>
-                      </a:solidFill>
-                      <a:prstDash val="solid"/>
-                      <a:round/>
-                      <a:headEnd type="none" w="med" len="med"/>
-                      <a:tailEnd type="none" w="med" len="med"/>
-                    </a:lnR>
-                    <a:lnT w="2540" cap="flat" cmpd="sng" algn="ctr">
-                      <a:solidFill>
-                        <a:srgbClr val="EEEEEE"/>
-                      </a:solidFill>
-                      <a:prstDash val="solid"/>
-                      <a:round/>
-                      <a:headEnd type="none" w="med" len="med"/>
-                      <a:tailEnd type="none" w="med" len="med"/>
-                    </a:lnT>
-                    <a:lnB w="2540" cap="flat" cmpd="sng" algn="ctr">
-                      <a:solidFill>
-                        <a:srgbClr val="EEEEEE"/>
-                      </a:solidFill>
-                      <a:prstDash val="solid"/>
-                      <a:round/>
-                      <a:headEnd type="none" w="med" len="med"/>
-                      <a:tailEnd type="none" w="med" len="med"/>
-                    </a:lnB>
-                  </a:tcPr>
-                </a:tc>
-                <a:tc>
-                  <a:txBody>
-                    <a:bodyPr/>
-                    <a:lstStyle/>
-                    <a:p>
-                      <a:pPr algn="ctr" indent="0" marL="0">
-                        <a:buNone/>
-                      </a:pPr>
-                      <a:r>
-                        <a:rPr lang="en-US" sz="500" dirty="0">
+                        <a:t>0.15%</a:t>
+                      </a:r>
+                      <a:endParaRPr lang="en-US" sz="500" dirty="0">
+                        <a:latin typeface="Calibri" charset="0"/>
+                        <a:ea typeface="Calibri" charset="0"/>
+                        <a:cs typeface="Calibri" charset="0"/>
+                      </a:endParaRPr>
+                    </a:p>
+                  </a:txBody>
+                  <a:tcPr marL="91440" marR="91440" marT="45720" marB="45720">
+                    <a:lnL w="2540" cap="flat" cmpd="sng" algn="ctr">
+                      <a:solidFill>
+                        <a:srgbClr val="EEEEEE"/>
+                      </a:solidFill>
+                      <a:prstDash val="solid"/>
+                      <a:round/>
+                      <a:headEnd type="none" w="med" len="med"/>
+                      <a:tailEnd type="none" w="med" len="med"/>
+                    </a:lnL>
+                    <a:lnR w="2540" cap="flat" cmpd="sng" algn="ctr">
+                      <a:solidFill>
+                        <a:srgbClr val="EEEEEE"/>
+                      </a:solidFill>
+                      <a:prstDash val="solid"/>
+                      <a:round/>
+                      <a:headEnd type="none" w="med" len="med"/>
+                      <a:tailEnd type="none" w="med" len="med"/>
+                    </a:lnR>
+                    <a:lnT w="2540" cap="flat" cmpd="sng" algn="ctr">
+                      <a:solidFill>
+                        <a:srgbClr val="EEEEEE"/>
+                      </a:solidFill>
+                      <a:prstDash val="solid"/>
+                      <a:round/>
+                      <a:headEnd type="none" w="med" len="med"/>
+                      <a:tailEnd type="none" w="med" len="med"/>
+                    </a:lnT>
+                    <a:lnB w="2540" cap="flat" cmpd="sng" algn="ctr">
+                      <a:solidFill>
+                        <a:srgbClr val="EEEEEE"/>
+                      </a:solidFill>
+                      <a:prstDash val="solid"/>
+                      <a:round/>
+                      <a:headEnd type="none" w="med" len="med"/>
+                      <a:tailEnd type="none" w="med" len="med"/>
+                    </a:lnB>
+                  </a:tcPr>
+                </a:tc>
+                <a:tc>
+                  <a:txBody>
+                    <a:bodyPr/>
+                    <a:lstStyle/>
+                    <a:p>
+                      <a:pPr algn="ctr" indent="0" marL="0">
+                        <a:buNone/>
+                      </a:pPr>
+                      <a:r>
+                        <a:rPr lang="en-US" sz="500" b="1" dirty="0">
                           <a:solidFill>
                             <a:srgbClr val="777777"/>
                           </a:solidFill>
@@ -9496,137 +11084,7 @@
                           <a:ea typeface="Calibri" pitchFamily="34" charset="-122"/>
                           <a:cs typeface="Calibri" pitchFamily="34" charset="-120"/>
                         </a:rPr>
-                        <a:t>0.15%</a:t>
-                      </a:r>
-                      <a:endParaRPr lang="en-US" sz="500" dirty="0">
-                        <a:latin typeface="Calibri" charset="0"/>
-                        <a:ea typeface="Calibri" charset="0"/>
-                        <a:cs typeface="Calibri" charset="0"/>
-                      </a:endParaRPr>
-                    </a:p>
-                  </a:txBody>
-                  <a:tcPr marL="91440" marR="91440" marT="45720" marB="45720">
-                    <a:lnL w="2540" cap="flat" cmpd="sng" algn="ctr">
-                      <a:solidFill>
-                        <a:srgbClr val="EEEEEE"/>
-                      </a:solidFill>
-                      <a:prstDash val="solid"/>
-                      <a:round/>
-                      <a:headEnd type="none" w="med" len="med"/>
-                      <a:tailEnd type="none" w="med" len="med"/>
-                    </a:lnL>
-                    <a:lnR w="2540" cap="flat" cmpd="sng" algn="ctr">
-                      <a:solidFill>
-                        <a:srgbClr val="EEEEEE"/>
-                      </a:solidFill>
-                      <a:prstDash val="solid"/>
-                      <a:round/>
-                      <a:headEnd type="none" w="med" len="med"/>
-                      <a:tailEnd type="none" w="med" len="med"/>
-                    </a:lnR>
-                    <a:lnT w="2540" cap="flat" cmpd="sng" algn="ctr">
-                      <a:solidFill>
-                        <a:srgbClr val="EEEEEE"/>
-                      </a:solidFill>
-                      <a:prstDash val="solid"/>
-                      <a:round/>
-                      <a:headEnd type="none" w="med" len="med"/>
-                      <a:tailEnd type="none" w="med" len="med"/>
-                    </a:lnT>
-                    <a:lnB w="2540" cap="flat" cmpd="sng" algn="ctr">
-                      <a:solidFill>
-                        <a:srgbClr val="EEEEEE"/>
-                      </a:solidFill>
-                      <a:prstDash val="solid"/>
-                      <a:round/>
-                      <a:headEnd type="none" w="med" len="med"/>
-                      <a:tailEnd type="none" w="med" len="med"/>
-                    </a:lnB>
-                  </a:tcPr>
-                </a:tc>
-                <a:tc>
-                  <a:txBody>
-                    <a:bodyPr/>
-                    <a:lstStyle/>
-                    <a:p>
-                      <a:pPr algn="ctr" indent="0" marL="0">
-                        <a:buNone/>
-                      </a:pPr>
-                      <a:r>
-                        <a:rPr lang="en-US" sz="500" dirty="0">
-                          <a:solidFill>
-                            <a:srgbClr val="777777"/>
-                          </a:solidFill>
-                          <a:latin typeface="Calibri" pitchFamily="34" charset="0"/>
-                          <a:ea typeface="Calibri" pitchFamily="34" charset="-122"/>
-                          <a:cs typeface="Calibri" pitchFamily="34" charset="-120"/>
-                        </a:rPr>
-                        <a:t>0.15%</a:t>
-                      </a:r>
-                      <a:endParaRPr lang="en-US" sz="500" dirty="0">
-                        <a:latin typeface="Calibri" charset="0"/>
-                        <a:ea typeface="Calibri" charset="0"/>
-                        <a:cs typeface="Calibri" charset="0"/>
-                      </a:endParaRPr>
-                    </a:p>
-                  </a:txBody>
-                  <a:tcPr marL="91440" marR="91440" marT="45720" marB="45720">
-                    <a:lnL w="2540" cap="flat" cmpd="sng" algn="ctr">
-                      <a:solidFill>
-                        <a:srgbClr val="EEEEEE"/>
-                      </a:solidFill>
-                      <a:prstDash val="solid"/>
-                      <a:round/>
-                      <a:headEnd type="none" w="med" len="med"/>
-                      <a:tailEnd type="none" w="med" len="med"/>
-                    </a:lnL>
-                    <a:lnR w="2540" cap="flat" cmpd="sng" algn="ctr">
-                      <a:solidFill>
-                        <a:srgbClr val="EEEEEE"/>
-                      </a:solidFill>
-                      <a:prstDash val="solid"/>
-                      <a:round/>
-                      <a:headEnd type="none" w="med" len="med"/>
-                      <a:tailEnd type="none" w="med" len="med"/>
-                    </a:lnR>
-                    <a:lnT w="2540" cap="flat" cmpd="sng" algn="ctr">
-                      <a:solidFill>
-                        <a:srgbClr val="EEEEEE"/>
-                      </a:solidFill>
-                      <a:prstDash val="solid"/>
-                      <a:round/>
-                      <a:headEnd type="none" w="med" len="med"/>
-                      <a:tailEnd type="none" w="med" len="med"/>
-                    </a:lnT>
-                    <a:lnB w="2540" cap="flat" cmpd="sng" algn="ctr">
-                      <a:solidFill>
-                        <a:srgbClr val="EEEEEE"/>
-                      </a:solidFill>
-                      <a:prstDash val="solid"/>
-                      <a:round/>
-                      <a:headEnd type="none" w="med" len="med"/>
-                      <a:tailEnd type="none" w="med" len="med"/>
-                    </a:lnB>
-                  </a:tcPr>
-                </a:tc>
-                <a:tc>
-                  <a:txBody>
-                    <a:bodyPr/>
-                    <a:lstStyle/>
-                    <a:p>
-                      <a:pPr algn="ctr" indent="0" marL="0">
-                        <a:buNone/>
-                      </a:pPr>
-                      <a:r>
-                        <a:rPr lang="en-US" sz="500" b="1" dirty="0">
-                          <a:solidFill>
-                            <a:srgbClr val="777777"/>
-                          </a:solidFill>
-                          <a:latin typeface="Calibri" pitchFamily="34" charset="0"/>
-                          <a:ea typeface="Calibri" pitchFamily="34" charset="-122"/>
-                          <a:cs typeface="Calibri" pitchFamily="34" charset="-120"/>
-                        </a:rPr>
-                        <a:t>2.52%</a:t>
+                        <a:t>2.55%</a:t>
                       </a:r>
                       <a:endParaRPr lang="en-US" sz="500" dirty="0">
                         <a:latin typeface="Calibri" charset="0"/>
@@ -9812,7 +11270,7 @@
                           <a:ea typeface="Calibri" pitchFamily="34" charset="-122"/>
                           <a:cs typeface="Calibri" pitchFamily="34" charset="-120"/>
                         </a:rPr>
-                        <a:t>0.00%</a:t>
+                        <a:t>0.13%</a:t>
                       </a:r>
                       <a:endParaRPr lang="en-US" sz="500" dirty="0">
                         <a:latin typeface="Calibri" charset="0"/>
@@ -10527,7 +11985,7 @@
                           <a:ea typeface="Calibri" pitchFamily="34" charset="-122"/>
                           <a:cs typeface="Calibri" pitchFamily="34" charset="-120"/>
                         </a:rPr>
-                        <a:t>2.91%</a:t>
+                        <a:t>0.06%</a:t>
                       </a:r>
                       <a:endParaRPr lang="en-US" sz="500" dirty="0">
                         <a:latin typeface="Calibri" charset="0"/>
@@ -10592,7 +12050,7 @@
                           <a:ea typeface="Calibri" pitchFamily="34" charset="-122"/>
                           <a:cs typeface="Calibri" pitchFamily="34" charset="-120"/>
                         </a:rPr>
-                        <a:t>4.05%</a:t>
+                        <a:t>1.32%</a:t>
                       </a:r>
                       <a:endParaRPr lang="en-US" sz="500" dirty="0">
                         <a:latin typeface="Calibri" charset="0"/>
@@ -11558,7 +13016,7 @@
                           <a:ea typeface="Calibri" pitchFamily="34" charset="-122"/>
                           <a:cs typeface="Calibri" pitchFamily="34" charset="-120"/>
                         </a:rPr>
-                        <a:t>1.96%</a:t>
+                        <a:t>1.99%</a:t>
                       </a:r>
                       <a:endParaRPr lang="en-US" sz="500" dirty="0">
                         <a:latin typeface="Calibri" charset="0"/>
@@ -11755,7 +13213,7 @@
                           <a:ea typeface="Calibri" pitchFamily="34" charset="-122"/>
                           <a:cs typeface="Calibri" pitchFamily="34" charset="-120"/>
                         </a:rPr>
-                        <a:t>0.15%</a:t>
+                        <a:t>0.17%</a:t>
                       </a:r>
                       <a:endParaRPr lang="en-US" sz="500" dirty="0">
                         <a:latin typeface="Calibri" charset="0"/>
@@ -11820,7 +13278,7 @@
                           <a:ea typeface="Calibri" pitchFamily="34" charset="-122"/>
                           <a:cs typeface="Calibri" pitchFamily="34" charset="-120"/>
                         </a:rPr>
-                        <a:t>0.15%</a:t>
+                        <a:t>0.14%</a:t>
                       </a:r>
                       <a:endParaRPr lang="en-US" sz="500" dirty="0">
                         <a:latin typeface="Calibri" charset="0"/>
@@ -11950,6 +13408,331 @@
                           <a:ea typeface="Calibri" pitchFamily="34" charset="-122"/>
                           <a:cs typeface="Calibri" pitchFamily="34" charset="-120"/>
                         </a:rPr>
+                        <a:t>0.05%</a:t>
+                      </a:r>
+                      <a:endParaRPr lang="en-US" sz="500" dirty="0">
+                        <a:latin typeface="Calibri" charset="0"/>
+                        <a:ea typeface="Calibri" charset="0"/>
+                        <a:cs typeface="Calibri" charset="0"/>
+                      </a:endParaRPr>
+                    </a:p>
+                  </a:txBody>
+                  <a:tcPr marL="91440" marR="91440" marT="45720" marB="45720">
+                    <a:lnL w="2540" cap="flat" cmpd="sng" algn="ctr">
+                      <a:solidFill>
+                        <a:srgbClr val="EEEEEE"/>
+                      </a:solidFill>
+                      <a:prstDash val="solid"/>
+                      <a:round/>
+                      <a:headEnd type="none" w="med" len="med"/>
+                      <a:tailEnd type="none" w="med" len="med"/>
+                    </a:lnL>
+                    <a:lnR w="2540" cap="flat" cmpd="sng" algn="ctr">
+                      <a:solidFill>
+                        <a:srgbClr val="EEEEEE"/>
+                      </a:solidFill>
+                      <a:prstDash val="solid"/>
+                      <a:round/>
+                      <a:headEnd type="none" w="med" len="med"/>
+                      <a:tailEnd type="none" w="med" len="med"/>
+                    </a:lnR>
+                    <a:lnT w="2540" cap="flat" cmpd="sng" algn="ctr">
+                      <a:solidFill>
+                        <a:srgbClr val="EEEEEE"/>
+                      </a:solidFill>
+                      <a:prstDash val="solid"/>
+                      <a:round/>
+                      <a:headEnd type="none" w="med" len="med"/>
+                      <a:tailEnd type="none" w="med" len="med"/>
+                    </a:lnT>
+                    <a:lnB w="2540" cap="flat" cmpd="sng" algn="ctr">
+                      <a:solidFill>
+                        <a:srgbClr val="EEEEEE"/>
+                      </a:solidFill>
+                      <a:prstDash val="solid"/>
+                      <a:round/>
+                      <a:headEnd type="none" w="med" len="med"/>
+                      <a:tailEnd type="none" w="med" len="med"/>
+                    </a:lnB>
+                  </a:tcPr>
+                </a:tc>
+                <a:tc>
+                  <a:txBody>
+                    <a:bodyPr/>
+                    <a:lstStyle/>
+                    <a:p>
+                      <a:pPr algn="ctr" indent="0" marL="0">
+                        <a:buNone/>
+                      </a:pPr>
+                      <a:r>
+                        <a:rPr lang="en-US" sz="500" dirty="0">
+                          <a:solidFill>
+                            <a:srgbClr val="777777"/>
+                          </a:solidFill>
+                          <a:latin typeface="Calibri" pitchFamily="34" charset="0"/>
+                          <a:ea typeface="Calibri" pitchFamily="34" charset="-122"/>
+                          <a:cs typeface="Calibri" pitchFamily="34" charset="-120"/>
+                        </a:rPr>
+                        <a:t>0.05%</a:t>
+                      </a:r>
+                      <a:endParaRPr lang="en-US" sz="500" dirty="0">
+                        <a:latin typeface="Calibri" charset="0"/>
+                        <a:ea typeface="Calibri" charset="0"/>
+                        <a:cs typeface="Calibri" charset="0"/>
+                      </a:endParaRPr>
+                    </a:p>
+                  </a:txBody>
+                  <a:tcPr marL="91440" marR="91440" marT="45720" marB="45720">
+                    <a:lnL w="2540" cap="flat" cmpd="sng" algn="ctr">
+                      <a:solidFill>
+                        <a:srgbClr val="EEEEEE"/>
+                      </a:solidFill>
+                      <a:prstDash val="solid"/>
+                      <a:round/>
+                      <a:headEnd type="none" w="med" len="med"/>
+                      <a:tailEnd type="none" w="med" len="med"/>
+                    </a:lnL>
+                    <a:lnR w="2540" cap="flat" cmpd="sng" algn="ctr">
+                      <a:solidFill>
+                        <a:srgbClr val="EEEEEE"/>
+                      </a:solidFill>
+                      <a:prstDash val="solid"/>
+                      <a:round/>
+                      <a:headEnd type="none" w="med" len="med"/>
+                      <a:tailEnd type="none" w="med" len="med"/>
+                    </a:lnR>
+                    <a:lnT w="2540" cap="flat" cmpd="sng" algn="ctr">
+                      <a:solidFill>
+                        <a:srgbClr val="EEEEEE"/>
+                      </a:solidFill>
+                      <a:prstDash val="solid"/>
+                      <a:round/>
+                      <a:headEnd type="none" w="med" len="med"/>
+                      <a:tailEnd type="none" w="med" len="med"/>
+                    </a:lnT>
+                    <a:lnB w="2540" cap="flat" cmpd="sng" algn="ctr">
+                      <a:solidFill>
+                        <a:srgbClr val="EEEEEE"/>
+                      </a:solidFill>
+                      <a:prstDash val="solid"/>
+                      <a:round/>
+                      <a:headEnd type="none" w="med" len="med"/>
+                      <a:tailEnd type="none" w="med" len="med"/>
+                    </a:lnB>
+                  </a:tcPr>
+                </a:tc>
+                <a:tc>
+                  <a:txBody>
+                    <a:bodyPr/>
+                    <a:lstStyle/>
+                    <a:p>
+                      <a:pPr algn="ctr" indent="0" marL="0">
+                        <a:buNone/>
+                      </a:pPr>
+                      <a:r>
+                        <a:rPr lang="en-US" sz="500" dirty="0">
+                          <a:solidFill>
+                            <a:srgbClr val="777777"/>
+                          </a:solidFill>
+                          <a:latin typeface="Calibri" pitchFamily="34" charset="0"/>
+                          <a:ea typeface="Calibri" pitchFamily="34" charset="-122"/>
+                          <a:cs typeface="Calibri" pitchFamily="34" charset="-120"/>
+                        </a:rPr>
+                        <a:t>0.05%</a:t>
+                      </a:r>
+                      <a:endParaRPr lang="en-US" sz="500" dirty="0">
+                        <a:latin typeface="Calibri" charset="0"/>
+                        <a:ea typeface="Calibri" charset="0"/>
+                        <a:cs typeface="Calibri" charset="0"/>
+                      </a:endParaRPr>
+                    </a:p>
+                  </a:txBody>
+                  <a:tcPr marL="91440" marR="91440" marT="45720" marB="45720">
+                    <a:lnL w="2540" cap="flat" cmpd="sng" algn="ctr">
+                      <a:solidFill>
+                        <a:srgbClr val="EEEEEE"/>
+                      </a:solidFill>
+                      <a:prstDash val="solid"/>
+                      <a:round/>
+                      <a:headEnd type="none" w="med" len="med"/>
+                      <a:tailEnd type="none" w="med" len="med"/>
+                    </a:lnL>
+                    <a:lnR w="2540" cap="flat" cmpd="sng" algn="ctr">
+                      <a:solidFill>
+                        <a:srgbClr val="EEEEEE"/>
+                      </a:solidFill>
+                      <a:prstDash val="solid"/>
+                      <a:round/>
+                      <a:headEnd type="none" w="med" len="med"/>
+                      <a:tailEnd type="none" w="med" len="med"/>
+                    </a:lnR>
+                    <a:lnT w="2540" cap="flat" cmpd="sng" algn="ctr">
+                      <a:solidFill>
+                        <a:srgbClr val="EEEEEE"/>
+                      </a:solidFill>
+                      <a:prstDash val="solid"/>
+                      <a:round/>
+                      <a:headEnd type="none" w="med" len="med"/>
+                      <a:tailEnd type="none" w="med" len="med"/>
+                    </a:lnT>
+                    <a:lnB w="2540" cap="flat" cmpd="sng" algn="ctr">
+                      <a:solidFill>
+                        <a:srgbClr val="EEEEEE"/>
+                      </a:solidFill>
+                      <a:prstDash val="solid"/>
+                      <a:round/>
+                      <a:headEnd type="none" w="med" len="med"/>
+                      <a:tailEnd type="none" w="med" len="med"/>
+                    </a:lnB>
+                  </a:tcPr>
+                </a:tc>
+                <a:tc>
+                  <a:txBody>
+                    <a:bodyPr/>
+                    <a:lstStyle/>
+                    <a:p>
+                      <a:pPr algn="ctr" indent="0" marL="0">
+                        <a:buNone/>
+                      </a:pPr>
+                      <a:r>
+                        <a:rPr lang="en-US" sz="500" dirty="0">
+                          <a:solidFill>
+                            <a:srgbClr val="777777"/>
+                          </a:solidFill>
+                          <a:latin typeface="Calibri" pitchFamily="34" charset="0"/>
+                          <a:ea typeface="Calibri" pitchFamily="34" charset="-122"/>
+                          <a:cs typeface="Calibri" pitchFamily="34" charset="-120"/>
+                        </a:rPr>
+                        <a:t>0.05%</a:t>
+                      </a:r>
+                      <a:endParaRPr lang="en-US" sz="500" dirty="0">
+                        <a:latin typeface="Calibri" charset="0"/>
+                        <a:ea typeface="Calibri" charset="0"/>
+                        <a:cs typeface="Calibri" charset="0"/>
+                      </a:endParaRPr>
+                    </a:p>
+                  </a:txBody>
+                  <a:tcPr marL="91440" marR="91440" marT="45720" marB="45720">
+                    <a:lnL w="2540" cap="flat" cmpd="sng" algn="ctr">
+                      <a:solidFill>
+                        <a:srgbClr val="EEEEEE"/>
+                      </a:solidFill>
+                      <a:prstDash val="solid"/>
+                      <a:round/>
+                      <a:headEnd type="none" w="med" len="med"/>
+                      <a:tailEnd type="none" w="med" len="med"/>
+                    </a:lnL>
+                    <a:lnR w="2540" cap="flat" cmpd="sng" algn="ctr">
+                      <a:solidFill>
+                        <a:srgbClr val="EEEEEE"/>
+                      </a:solidFill>
+                      <a:prstDash val="solid"/>
+                      <a:round/>
+                      <a:headEnd type="none" w="med" len="med"/>
+                      <a:tailEnd type="none" w="med" len="med"/>
+                    </a:lnR>
+                    <a:lnT w="2540" cap="flat" cmpd="sng" algn="ctr">
+                      <a:solidFill>
+                        <a:srgbClr val="EEEEEE"/>
+                      </a:solidFill>
+                      <a:prstDash val="solid"/>
+                      <a:round/>
+                      <a:headEnd type="none" w="med" len="med"/>
+                      <a:tailEnd type="none" w="med" len="med"/>
+                    </a:lnT>
+                    <a:lnB w="2540" cap="flat" cmpd="sng" algn="ctr">
+                      <a:solidFill>
+                        <a:srgbClr val="EEEEEE"/>
+                      </a:solidFill>
+                      <a:prstDash val="solid"/>
+                      <a:round/>
+                      <a:headEnd type="none" w="med" len="med"/>
+                      <a:tailEnd type="none" w="med" len="med"/>
+                    </a:lnB>
+                  </a:tcPr>
+                </a:tc>
+                <a:tc>
+                  <a:txBody>
+                    <a:bodyPr/>
+                    <a:lstStyle/>
+                    <a:p>
+                      <a:pPr algn="ctr" indent="0" marL="0">
+                        <a:buNone/>
+                      </a:pPr>
+                      <a:r>
+                        <a:rPr lang="en-US" sz="500" dirty="0">
+                          <a:solidFill>
+                            <a:srgbClr val="777777"/>
+                          </a:solidFill>
+                          <a:latin typeface="Calibri" pitchFamily="34" charset="0"/>
+                          <a:ea typeface="Calibri" pitchFamily="34" charset="-122"/>
+                          <a:cs typeface="Calibri" pitchFamily="34" charset="-120"/>
+                        </a:rPr>
+                        <a:t>0.03%</a:t>
+                      </a:r>
+                      <a:endParaRPr lang="en-US" sz="500" dirty="0">
+                        <a:latin typeface="Calibri" charset="0"/>
+                        <a:ea typeface="Calibri" charset="0"/>
+                        <a:cs typeface="Calibri" charset="0"/>
+                      </a:endParaRPr>
+                    </a:p>
+                  </a:txBody>
+                  <a:tcPr marL="91440" marR="91440" marT="45720" marB="45720">
+                    <a:lnL w="2540" cap="flat" cmpd="sng" algn="ctr">
+                      <a:solidFill>
+                        <a:srgbClr val="EEEEEE"/>
+                      </a:solidFill>
+                      <a:prstDash val="solid"/>
+                      <a:round/>
+                      <a:headEnd type="none" w="med" len="med"/>
+                      <a:tailEnd type="none" w="med" len="med"/>
+                    </a:lnL>
+                    <a:lnR w="2540" cap="flat" cmpd="sng" algn="ctr">
+                      <a:solidFill>
+                        <a:srgbClr val="EEEEEE"/>
+                      </a:solidFill>
+                      <a:prstDash val="solid"/>
+                      <a:round/>
+                      <a:headEnd type="none" w="med" len="med"/>
+                      <a:tailEnd type="none" w="med" len="med"/>
+                    </a:lnR>
+                    <a:lnT w="2540" cap="flat" cmpd="sng" algn="ctr">
+                      <a:solidFill>
+                        <a:srgbClr val="EEEEEE"/>
+                      </a:solidFill>
+                      <a:prstDash val="solid"/>
+                      <a:round/>
+                      <a:headEnd type="none" w="med" len="med"/>
+                      <a:tailEnd type="none" w="med" len="med"/>
+                    </a:lnT>
+                    <a:lnB w="2540" cap="flat" cmpd="sng" algn="ctr">
+                      <a:solidFill>
+                        <a:srgbClr val="EEEEEE"/>
+                      </a:solidFill>
+                      <a:prstDash val="solid"/>
+                      <a:round/>
+                      <a:headEnd type="none" w="med" len="med"/>
+                      <a:tailEnd type="none" w="med" len="med"/>
+                    </a:lnB>
+                  </a:tcPr>
+                </a:tc>
+                <a:tc>
+                  <a:txBody>
+                    <a:bodyPr/>
+                    <a:lstStyle/>
+                    <a:p>
+                      <a:pPr algn="ctr" indent="0" marL="0">
+                        <a:buNone/>
+                      </a:pPr>
+                      <a:r>
+                        <a:rPr lang="en-US" sz="500" dirty="0">
+                          <a:solidFill>
+                            <a:srgbClr val="777777"/>
+                          </a:solidFill>
+                          <a:latin typeface="Calibri" pitchFamily="34" charset="0"/>
+                          <a:ea typeface="Calibri" pitchFamily="34" charset="-122"/>
+                          <a:cs typeface="Calibri" pitchFamily="34" charset="-120"/>
+                        </a:rPr>
                         <a:t>0.04%</a:t>
                       </a:r>
                       <a:endParaRPr lang="en-US" sz="500" dirty="0">
@@ -12080,332 +13863,7 @@
                           <a:ea typeface="Calibri" pitchFamily="34" charset="-122"/>
                           <a:cs typeface="Calibri" pitchFamily="34" charset="-120"/>
                         </a:rPr>
-                        <a:t>0.04%</a:t>
-                      </a:r>
-                      <a:endParaRPr lang="en-US" sz="500" dirty="0">
-                        <a:latin typeface="Calibri" charset="0"/>
-                        <a:ea typeface="Calibri" charset="0"/>
-                        <a:cs typeface="Calibri" charset="0"/>
-                      </a:endParaRPr>
-                    </a:p>
-                  </a:txBody>
-                  <a:tcPr marL="91440" marR="91440" marT="45720" marB="45720">
-                    <a:lnL w="2540" cap="flat" cmpd="sng" algn="ctr">
-                      <a:solidFill>
-                        <a:srgbClr val="EEEEEE"/>
-                      </a:solidFill>
-                      <a:prstDash val="solid"/>
-                      <a:round/>
-                      <a:headEnd type="none" w="med" len="med"/>
-                      <a:tailEnd type="none" w="med" len="med"/>
-                    </a:lnL>
-                    <a:lnR w="2540" cap="flat" cmpd="sng" algn="ctr">
-                      <a:solidFill>
-                        <a:srgbClr val="EEEEEE"/>
-                      </a:solidFill>
-                      <a:prstDash val="solid"/>
-                      <a:round/>
-                      <a:headEnd type="none" w="med" len="med"/>
-                      <a:tailEnd type="none" w="med" len="med"/>
-                    </a:lnR>
-                    <a:lnT w="2540" cap="flat" cmpd="sng" algn="ctr">
-                      <a:solidFill>
-                        <a:srgbClr val="EEEEEE"/>
-                      </a:solidFill>
-                      <a:prstDash val="solid"/>
-                      <a:round/>
-                      <a:headEnd type="none" w="med" len="med"/>
-                      <a:tailEnd type="none" w="med" len="med"/>
-                    </a:lnT>
-                    <a:lnB w="2540" cap="flat" cmpd="sng" algn="ctr">
-                      <a:solidFill>
-                        <a:srgbClr val="EEEEEE"/>
-                      </a:solidFill>
-                      <a:prstDash val="solid"/>
-                      <a:round/>
-                      <a:headEnd type="none" w="med" len="med"/>
-                      <a:tailEnd type="none" w="med" len="med"/>
-                    </a:lnB>
-                  </a:tcPr>
-                </a:tc>
-                <a:tc>
-                  <a:txBody>
-                    <a:bodyPr/>
-                    <a:lstStyle/>
-                    <a:p>
-                      <a:pPr algn="ctr" indent="0" marL="0">
-                        <a:buNone/>
-                      </a:pPr>
-                      <a:r>
-                        <a:rPr lang="en-US" sz="500" dirty="0">
-                          <a:solidFill>
-                            <a:srgbClr val="777777"/>
-                          </a:solidFill>
-                          <a:latin typeface="Calibri" pitchFamily="34" charset="0"/>
-                          <a:ea typeface="Calibri" pitchFamily="34" charset="-122"/>
-                          <a:cs typeface="Calibri" pitchFamily="34" charset="-120"/>
-                        </a:rPr>
-                        <a:t>0.04%</a:t>
-                      </a:r>
-                      <a:endParaRPr lang="en-US" sz="500" dirty="0">
-                        <a:latin typeface="Calibri" charset="0"/>
-                        <a:ea typeface="Calibri" charset="0"/>
-                        <a:cs typeface="Calibri" charset="0"/>
-                      </a:endParaRPr>
-                    </a:p>
-                  </a:txBody>
-                  <a:tcPr marL="91440" marR="91440" marT="45720" marB="45720">
-                    <a:lnL w="2540" cap="flat" cmpd="sng" algn="ctr">
-                      <a:solidFill>
-                        <a:srgbClr val="EEEEEE"/>
-                      </a:solidFill>
-                      <a:prstDash val="solid"/>
-                      <a:round/>
-                      <a:headEnd type="none" w="med" len="med"/>
-                      <a:tailEnd type="none" w="med" len="med"/>
-                    </a:lnL>
-                    <a:lnR w="2540" cap="flat" cmpd="sng" algn="ctr">
-                      <a:solidFill>
-                        <a:srgbClr val="EEEEEE"/>
-                      </a:solidFill>
-                      <a:prstDash val="solid"/>
-                      <a:round/>
-                      <a:headEnd type="none" w="med" len="med"/>
-                      <a:tailEnd type="none" w="med" len="med"/>
-                    </a:lnR>
-                    <a:lnT w="2540" cap="flat" cmpd="sng" algn="ctr">
-                      <a:solidFill>
-                        <a:srgbClr val="EEEEEE"/>
-                      </a:solidFill>
-                      <a:prstDash val="solid"/>
-                      <a:round/>
-                      <a:headEnd type="none" w="med" len="med"/>
-                      <a:tailEnd type="none" w="med" len="med"/>
-                    </a:lnT>
-                    <a:lnB w="2540" cap="flat" cmpd="sng" algn="ctr">
-                      <a:solidFill>
-                        <a:srgbClr val="EEEEEE"/>
-                      </a:solidFill>
-                      <a:prstDash val="solid"/>
-                      <a:round/>
-                      <a:headEnd type="none" w="med" len="med"/>
-                      <a:tailEnd type="none" w="med" len="med"/>
-                    </a:lnB>
-                  </a:tcPr>
-                </a:tc>
-                <a:tc>
-                  <a:txBody>
-                    <a:bodyPr/>
-                    <a:lstStyle/>
-                    <a:p>
-                      <a:pPr algn="ctr" indent="0" marL="0">
-                        <a:buNone/>
-                      </a:pPr>
-                      <a:r>
-                        <a:rPr lang="en-US" sz="500" dirty="0">
-                          <a:solidFill>
-                            <a:srgbClr val="777777"/>
-                          </a:solidFill>
-                          <a:latin typeface="Calibri" pitchFamily="34" charset="0"/>
-                          <a:ea typeface="Calibri" pitchFamily="34" charset="-122"/>
-                          <a:cs typeface="Calibri" pitchFamily="34" charset="-120"/>
-                        </a:rPr>
-                        <a:t>0.04%</a:t>
-                      </a:r>
-                      <a:endParaRPr lang="en-US" sz="500" dirty="0">
-                        <a:latin typeface="Calibri" charset="0"/>
-                        <a:ea typeface="Calibri" charset="0"/>
-                        <a:cs typeface="Calibri" charset="0"/>
-                      </a:endParaRPr>
-                    </a:p>
-                  </a:txBody>
-                  <a:tcPr marL="91440" marR="91440" marT="45720" marB="45720">
-                    <a:lnL w="2540" cap="flat" cmpd="sng" algn="ctr">
-                      <a:solidFill>
-                        <a:srgbClr val="EEEEEE"/>
-                      </a:solidFill>
-                      <a:prstDash val="solid"/>
-                      <a:round/>
-                      <a:headEnd type="none" w="med" len="med"/>
-                      <a:tailEnd type="none" w="med" len="med"/>
-                    </a:lnL>
-                    <a:lnR w="2540" cap="flat" cmpd="sng" algn="ctr">
-                      <a:solidFill>
-                        <a:srgbClr val="EEEEEE"/>
-                      </a:solidFill>
-                      <a:prstDash val="solid"/>
-                      <a:round/>
-                      <a:headEnd type="none" w="med" len="med"/>
-                      <a:tailEnd type="none" w="med" len="med"/>
-                    </a:lnR>
-                    <a:lnT w="2540" cap="flat" cmpd="sng" algn="ctr">
-                      <a:solidFill>
-                        <a:srgbClr val="EEEEEE"/>
-                      </a:solidFill>
-                      <a:prstDash val="solid"/>
-                      <a:round/>
-                      <a:headEnd type="none" w="med" len="med"/>
-                      <a:tailEnd type="none" w="med" len="med"/>
-                    </a:lnT>
-                    <a:lnB w="2540" cap="flat" cmpd="sng" algn="ctr">
-                      <a:solidFill>
-                        <a:srgbClr val="EEEEEE"/>
-                      </a:solidFill>
-                      <a:prstDash val="solid"/>
-                      <a:round/>
-                      <a:headEnd type="none" w="med" len="med"/>
-                      <a:tailEnd type="none" w="med" len="med"/>
-                    </a:lnB>
-                  </a:tcPr>
-                </a:tc>
-                <a:tc>
-                  <a:txBody>
-                    <a:bodyPr/>
-                    <a:lstStyle/>
-                    <a:p>
-                      <a:pPr algn="ctr" indent="0" marL="0">
-                        <a:buNone/>
-                      </a:pPr>
-                      <a:r>
-                        <a:rPr lang="en-US" sz="500" dirty="0">
-                          <a:solidFill>
-                            <a:srgbClr val="777777"/>
-                          </a:solidFill>
-                          <a:latin typeface="Calibri" pitchFamily="34" charset="0"/>
-                          <a:ea typeface="Calibri" pitchFamily="34" charset="-122"/>
-                          <a:cs typeface="Calibri" pitchFamily="34" charset="-120"/>
-                        </a:rPr>
-                        <a:t>0.04%</a:t>
-                      </a:r>
-                      <a:endParaRPr lang="en-US" sz="500" dirty="0">
-                        <a:latin typeface="Calibri" charset="0"/>
-                        <a:ea typeface="Calibri" charset="0"/>
-                        <a:cs typeface="Calibri" charset="0"/>
-                      </a:endParaRPr>
-                    </a:p>
-                  </a:txBody>
-                  <a:tcPr marL="91440" marR="91440" marT="45720" marB="45720">
-                    <a:lnL w="2540" cap="flat" cmpd="sng" algn="ctr">
-                      <a:solidFill>
-                        <a:srgbClr val="EEEEEE"/>
-                      </a:solidFill>
-                      <a:prstDash val="solid"/>
-                      <a:round/>
-                      <a:headEnd type="none" w="med" len="med"/>
-                      <a:tailEnd type="none" w="med" len="med"/>
-                    </a:lnL>
-                    <a:lnR w="2540" cap="flat" cmpd="sng" algn="ctr">
-                      <a:solidFill>
-                        <a:srgbClr val="EEEEEE"/>
-                      </a:solidFill>
-                      <a:prstDash val="solid"/>
-                      <a:round/>
-                      <a:headEnd type="none" w="med" len="med"/>
-                      <a:tailEnd type="none" w="med" len="med"/>
-                    </a:lnR>
-                    <a:lnT w="2540" cap="flat" cmpd="sng" algn="ctr">
-                      <a:solidFill>
-                        <a:srgbClr val="EEEEEE"/>
-                      </a:solidFill>
-                      <a:prstDash val="solid"/>
-                      <a:round/>
-                      <a:headEnd type="none" w="med" len="med"/>
-                      <a:tailEnd type="none" w="med" len="med"/>
-                    </a:lnT>
-                    <a:lnB w="2540" cap="flat" cmpd="sng" algn="ctr">
-                      <a:solidFill>
-                        <a:srgbClr val="EEEEEE"/>
-                      </a:solidFill>
-                      <a:prstDash val="solid"/>
-                      <a:round/>
-                      <a:headEnd type="none" w="med" len="med"/>
-                      <a:tailEnd type="none" w="med" len="med"/>
-                    </a:lnB>
-                  </a:tcPr>
-                </a:tc>
-                <a:tc>
-                  <a:txBody>
-                    <a:bodyPr/>
-                    <a:lstStyle/>
-                    <a:p>
-                      <a:pPr algn="ctr" indent="0" marL="0">
-                        <a:buNone/>
-                      </a:pPr>
-                      <a:r>
-                        <a:rPr lang="en-US" sz="500" dirty="0">
-                          <a:solidFill>
-                            <a:srgbClr val="777777"/>
-                          </a:solidFill>
-                          <a:latin typeface="Calibri" pitchFamily="34" charset="0"/>
-                          <a:ea typeface="Calibri" pitchFamily="34" charset="-122"/>
-                          <a:cs typeface="Calibri" pitchFamily="34" charset="-120"/>
-                        </a:rPr>
-                        <a:t>0.04%</a:t>
-                      </a:r>
-                      <a:endParaRPr lang="en-US" sz="500" dirty="0">
-                        <a:latin typeface="Calibri" charset="0"/>
-                        <a:ea typeface="Calibri" charset="0"/>
-                        <a:cs typeface="Calibri" charset="0"/>
-                      </a:endParaRPr>
-                    </a:p>
-                  </a:txBody>
-                  <a:tcPr marL="91440" marR="91440" marT="45720" marB="45720">
-                    <a:lnL w="2540" cap="flat" cmpd="sng" algn="ctr">
-                      <a:solidFill>
-                        <a:srgbClr val="EEEEEE"/>
-                      </a:solidFill>
-                      <a:prstDash val="solid"/>
-                      <a:round/>
-                      <a:headEnd type="none" w="med" len="med"/>
-                      <a:tailEnd type="none" w="med" len="med"/>
-                    </a:lnL>
-                    <a:lnR w="2540" cap="flat" cmpd="sng" algn="ctr">
-                      <a:solidFill>
-                        <a:srgbClr val="EEEEEE"/>
-                      </a:solidFill>
-                      <a:prstDash val="solid"/>
-                      <a:round/>
-                      <a:headEnd type="none" w="med" len="med"/>
-                      <a:tailEnd type="none" w="med" len="med"/>
-                    </a:lnR>
-                    <a:lnT w="2540" cap="flat" cmpd="sng" algn="ctr">
-                      <a:solidFill>
-                        <a:srgbClr val="EEEEEE"/>
-                      </a:solidFill>
-                      <a:prstDash val="solid"/>
-                      <a:round/>
-                      <a:headEnd type="none" w="med" len="med"/>
-                      <a:tailEnd type="none" w="med" len="med"/>
-                    </a:lnT>
-                    <a:lnB w="2540" cap="flat" cmpd="sng" algn="ctr">
-                      <a:solidFill>
-                        <a:srgbClr val="EEEEEE"/>
-                      </a:solidFill>
-                      <a:prstDash val="solid"/>
-                      <a:round/>
-                      <a:headEnd type="none" w="med" len="med"/>
-                      <a:tailEnd type="none" w="med" len="med"/>
-                    </a:lnB>
-                  </a:tcPr>
-                </a:tc>
-                <a:tc>
-                  <a:txBody>
-                    <a:bodyPr/>
-                    <a:lstStyle/>
-                    <a:p>
-                      <a:pPr algn="ctr" indent="0" marL="0">
-                        <a:buNone/>
-                      </a:pPr>
-                      <a:r>
-                        <a:rPr lang="en-US" sz="500" dirty="0">
-                          <a:solidFill>
-                            <a:srgbClr val="777777"/>
-                          </a:solidFill>
-                          <a:latin typeface="Calibri" pitchFamily="34" charset="0"/>
-                          <a:ea typeface="Calibri" pitchFamily="34" charset="-122"/>
-                          <a:cs typeface="Calibri" pitchFamily="34" charset="-120"/>
-                        </a:rPr>
-                        <a:t>0.04%</a:t>
+                        <a:t>0.03%</a:t>
                       </a:r>
                       <a:endParaRPr lang="en-US" sz="500" dirty="0">
                         <a:latin typeface="Calibri" charset="0"/>
@@ -12721,7 +14179,7 @@
                           <a:ea typeface="Calibri" pitchFamily="34" charset="-122"/>
                           <a:cs typeface="Calibri" pitchFamily="34" charset="-120"/>
                         </a:rPr>
-                        <a:t>0.00%</a:t>
+                        <a:t>0.05%</a:t>
                       </a:r>
                       <a:endParaRPr lang="en-US" sz="500" dirty="0">
                         <a:latin typeface="Calibri" charset="0"/>
@@ -13436,7 +14894,7 @@
                           <a:ea typeface="Calibri" pitchFamily="34" charset="-122"/>
                           <a:cs typeface="Calibri" pitchFamily="34" charset="-120"/>
                         </a:rPr>
-                        <a:t>0.89%</a:t>
+                        <a:t>0.01%</a:t>
                       </a:r>
                       <a:endParaRPr lang="en-US" sz="500" dirty="0">
                         <a:latin typeface="Calibri" charset="0"/>
@@ -13501,7 +14959,7 @@
                           <a:ea typeface="Calibri" pitchFamily="34" charset="-122"/>
                           <a:cs typeface="Calibri" pitchFamily="34" charset="-120"/>
                         </a:rPr>
-                        <a:t>1.33%</a:t>
+                        <a:t>0.50%</a:t>
                       </a:r>
                       <a:endParaRPr lang="en-US" sz="500" dirty="0">
                         <a:latin typeface="Calibri" charset="0"/>
@@ -14467,7 +15925,7 @@
                           <a:ea typeface="Calibri" pitchFamily="34" charset="-122"/>
                           <a:cs typeface="Calibri" pitchFamily="34" charset="-120"/>
                         </a:rPr>
-                        <a:t>1.48%</a:t>
+                        <a:t>1.51%</a:t>
                       </a:r>
                       <a:endParaRPr lang="en-US" sz="500" dirty="0">
                         <a:latin typeface="Calibri" charset="0"/>
@@ -14664,7 +16122,7 @@
                           <a:ea typeface="Calibri" pitchFamily="34" charset="-122"/>
                           <a:cs typeface="Calibri" pitchFamily="34" charset="-120"/>
                         </a:rPr>
-                        <a:t>0.04%</a:t>
+                        <a:t>0.03%</a:t>
                       </a:r>
                       <a:endParaRPr lang="en-US" sz="500" dirty="0">
                         <a:latin typeface="Calibri" charset="0"/>
@@ -14729,7 +16187,7 @@
                           <a:ea typeface="Calibri" pitchFamily="34" charset="-122"/>
                           <a:cs typeface="Calibri" pitchFamily="34" charset="-120"/>
                         </a:rPr>
-                        <a:t>0.04%</a:t>
+                        <a:t>0.02%</a:t>
                       </a:r>
                       <a:endParaRPr lang="en-US" sz="500" dirty="0">
                         <a:latin typeface="Calibri" charset="0"/>
@@ -14794,7 +16252,7 @@
                           <a:ea typeface="Calibri" pitchFamily="34" charset="-122"/>
                           <a:cs typeface="Calibri" pitchFamily="34" charset="-120"/>
                         </a:rPr>
-                        <a:t>0.04%</a:t>
+                        <a:t>0.03%</a:t>
                       </a:r>
                       <a:endParaRPr lang="en-US" sz="500" dirty="0">
                         <a:latin typeface="Calibri" charset="0"/>
@@ -14859,7 +16317,7 @@
                           <a:ea typeface="Calibri" pitchFamily="34" charset="-122"/>
                           <a:cs typeface="Calibri" pitchFamily="34" charset="-120"/>
                         </a:rPr>
-                        <a:t>0.04%</a:t>
+                        <a:t>0.03%</a:t>
                       </a:r>
                       <a:endParaRPr lang="en-US" sz="500" dirty="0">
                         <a:latin typeface="Calibri" charset="0"/>
@@ -14924,7 +16382,7 @@
                           <a:ea typeface="Calibri" pitchFamily="34" charset="-122"/>
                           <a:cs typeface="Calibri" pitchFamily="34" charset="-120"/>
                         </a:rPr>
-                        <a:t>0.04%</a:t>
+                        <a:t>0.02%</a:t>
                       </a:r>
                       <a:endParaRPr lang="en-US" sz="500" dirty="0">
                         <a:latin typeface="Calibri" charset="0"/>
@@ -14989,7 +16447,7 @@
                           <a:ea typeface="Calibri" pitchFamily="34" charset="-122"/>
                           <a:cs typeface="Calibri" pitchFamily="34" charset="-120"/>
                         </a:rPr>
-                        <a:t>0.04%</a:t>
+                        <a:t>0.03%</a:t>
                       </a:r>
                       <a:endParaRPr lang="en-US" sz="500" dirty="0">
                         <a:latin typeface="Calibri" charset="0"/>
@@ -15249,7 +16707,7 @@
                           <a:ea typeface="Calibri" pitchFamily="34" charset="-122"/>
                           <a:cs typeface="Calibri" pitchFamily="34" charset="-120"/>
                         </a:rPr>
-                        <a:t>0.19%</a:t>
+                        <a:t>0.21%</a:t>
                       </a:r>
                       <a:endParaRPr lang="en-US" sz="500" dirty="0">
                         <a:latin typeface="Calibri" charset="0"/>
@@ -15314,7 +16772,7 @@
                           <a:ea typeface="Calibri" pitchFamily="34" charset="-122"/>
                           <a:cs typeface="Calibri" pitchFamily="34" charset="-120"/>
                         </a:rPr>
-                        <a:t>0.23%</a:t>
+                        <a:t>0.21%</a:t>
                       </a:r>
                       <a:endParaRPr lang="en-US" sz="500" dirty="0">
                         <a:latin typeface="Calibri" charset="0"/>
@@ -15379,7 +16837,7 @@
                           <a:ea typeface="Calibri" pitchFamily="34" charset="-122"/>
                           <a:cs typeface="Calibri" pitchFamily="34" charset="-120"/>
                         </a:rPr>
-                        <a:t>0.29%</a:t>
+                        <a:t>0.32%</a:t>
                       </a:r>
                       <a:endParaRPr lang="en-US" sz="500" dirty="0">
                         <a:latin typeface="Calibri" charset="0"/>
@@ -15444,7 +16902,7 @@
                           <a:ea typeface="Calibri" pitchFamily="34" charset="-122"/>
                           <a:cs typeface="Calibri" pitchFamily="34" charset="-120"/>
                         </a:rPr>
-                        <a:t>1.20%</a:t>
+                        <a:t>1.14%</a:t>
                       </a:r>
                       <a:endParaRPr lang="en-US" sz="500" dirty="0">
                         <a:latin typeface="Calibri" charset="0"/>
@@ -16345,7 +17803,7 @@
                           <a:ea typeface="Calibri" pitchFamily="34" charset="-122"/>
                           <a:cs typeface="Calibri" pitchFamily="34" charset="-120"/>
                         </a:rPr>
-                        <a:t>0.60%</a:t>
+                        <a:t>0.18%</a:t>
                       </a:r>
                       <a:endParaRPr lang="en-US" sz="500" dirty="0">
                         <a:latin typeface="Calibri" charset="0"/>
@@ -16410,7 +17868,7 @@
                           <a:ea typeface="Calibri" pitchFamily="34" charset="-122"/>
                           <a:cs typeface="Calibri" pitchFamily="34" charset="-120"/>
                         </a:rPr>
-                        <a:t>0.85%</a:t>
+                        <a:t>0.45%</a:t>
                       </a:r>
                       <a:endParaRPr lang="en-US" sz="500" dirty="0">
                         <a:latin typeface="Calibri" charset="0"/>
@@ -17376,7 +18834,7 @@
                           <a:ea typeface="Calibri" pitchFamily="34" charset="-122"/>
                           <a:cs typeface="Calibri" pitchFamily="34" charset="-120"/>
                         </a:rPr>
-                        <a:t>1.14%</a:t>
+                        <a:t>1.16%</a:t>
                       </a:r>
                       <a:endParaRPr lang="en-US" sz="500" dirty="0">
                         <a:latin typeface="Calibri" charset="0"/>
@@ -17573,7 +19031,7 @@
                           <a:ea typeface="Calibri" pitchFamily="34" charset="-122"/>
                           <a:cs typeface="Calibri" pitchFamily="34" charset="-120"/>
                         </a:rPr>
-                        <a:t>0.35%</a:t>
+                        <a:t>0.34%</a:t>
                       </a:r>
                       <a:endParaRPr lang="en-US" sz="500" dirty="0">
                         <a:latin typeface="Calibri" charset="0"/>
@@ -17638,7 +19096,7 @@
                           <a:ea typeface="Calibri" pitchFamily="34" charset="-122"/>
                           <a:cs typeface="Calibri" pitchFamily="34" charset="-120"/>
                         </a:rPr>
-                        <a:t>0.46%</a:t>
+                        <a:t>0.43%</a:t>
                       </a:r>
                       <a:endParaRPr lang="en-US" sz="500" dirty="0">
                         <a:latin typeface="Calibri" charset="0"/>
@@ -17703,7 +19161,7 @@
                           <a:ea typeface="Calibri" pitchFamily="34" charset="-122"/>
                           <a:cs typeface="Calibri" pitchFamily="34" charset="-120"/>
                         </a:rPr>
-                        <a:t>0.47%</a:t>
+                        <a:t>0.48%</a:t>
                       </a:r>
                       <a:endParaRPr lang="en-US" sz="500" dirty="0">
                         <a:latin typeface="Calibri" charset="0"/>
@@ -17768,7 +19226,7 @@
                           <a:ea typeface="Calibri" pitchFamily="34" charset="-122"/>
                           <a:cs typeface="Calibri" pitchFamily="34" charset="-120"/>
                         </a:rPr>
-                        <a:t>0.58%</a:t>
+                        <a:t>0.55%</a:t>
                       </a:r>
                       <a:endParaRPr lang="en-US" sz="500" dirty="0">
                         <a:latin typeface="Calibri" charset="0"/>
@@ -17833,7 +19291,7 @@
                           <a:ea typeface="Calibri" pitchFamily="34" charset="-122"/>
                           <a:cs typeface="Calibri" pitchFamily="34" charset="-120"/>
                         </a:rPr>
-                        <a:t>0.67%</a:t>
+                        <a:t>0.71%</a:t>
                       </a:r>
                       <a:endParaRPr lang="en-US" sz="500" dirty="0">
                         <a:latin typeface="Calibri" charset="0"/>
@@ -17898,7 +19356,7 @@
                           <a:ea typeface="Calibri" pitchFamily="34" charset="-122"/>
                           <a:cs typeface="Calibri" pitchFamily="34" charset="-120"/>
                         </a:rPr>
-                        <a:t>0.73%</a:t>
+                        <a:t>0.74%</a:t>
                       </a:r>
                       <a:endParaRPr lang="en-US" sz="500" dirty="0">
                         <a:latin typeface="Calibri" charset="0"/>
@@ -17963,7 +19421,7 @@
                           <a:ea typeface="Calibri" pitchFamily="34" charset="-122"/>
                           <a:cs typeface="Calibri" pitchFamily="34" charset="-120"/>
                         </a:rPr>
-                        <a:t>0.79%</a:t>
+                        <a:t>0.76%</a:t>
                       </a:r>
                       <a:endParaRPr lang="en-US" sz="500" dirty="0">
                         <a:latin typeface="Calibri" charset="0"/>
@@ -18028,7 +19486,7 @@
                           <a:ea typeface="Calibri" pitchFamily="34" charset="-122"/>
                           <a:cs typeface="Calibri" pitchFamily="34" charset="-120"/>
                         </a:rPr>
-                        <a:t>0.81%</a:t>
+                        <a:t>0.90%</a:t>
                       </a:r>
                       <a:endParaRPr lang="en-US" sz="500" dirty="0">
                         <a:latin typeface="Calibri" charset="0"/>
@@ -18158,7 +19616,7 @@
                           <a:ea typeface="Calibri" pitchFamily="34" charset="-122"/>
                           <a:cs typeface="Calibri" pitchFamily="34" charset="-120"/>
                         </a:rPr>
-                        <a:t>0.92%</a:t>
+                        <a:t>0.86%</a:t>
                       </a:r>
                       <a:endParaRPr lang="en-US" sz="500" dirty="0">
                         <a:latin typeface="Calibri" charset="0"/>
@@ -18223,6 +19681,71 @@
                           <a:ea typeface="Calibri" pitchFamily="34" charset="-122"/>
                           <a:cs typeface="Calibri" pitchFamily="34" charset="-120"/>
                         </a:rPr>
+                        <a:t>1.04%</a:t>
+                      </a:r>
+                      <a:endParaRPr lang="en-US" sz="500" dirty="0">
+                        <a:latin typeface="Calibri" charset="0"/>
+                        <a:ea typeface="Calibri" charset="0"/>
+                        <a:cs typeface="Calibri" charset="0"/>
+                      </a:endParaRPr>
+                    </a:p>
+                  </a:txBody>
+                  <a:tcPr marL="91440" marR="91440" marT="45720" marB="45720">
+                    <a:lnL w="2540" cap="flat" cmpd="sng" algn="ctr">
+                      <a:solidFill>
+                        <a:srgbClr val="EEEEEE"/>
+                      </a:solidFill>
+                      <a:prstDash val="solid"/>
+                      <a:round/>
+                      <a:headEnd type="none" w="med" len="med"/>
+                      <a:tailEnd type="none" w="med" len="med"/>
+                    </a:lnL>
+                    <a:lnR w="2540" cap="flat" cmpd="sng" algn="ctr">
+                      <a:solidFill>
+                        <a:srgbClr val="EEEEEE"/>
+                      </a:solidFill>
+                      <a:prstDash val="solid"/>
+                      <a:round/>
+                      <a:headEnd type="none" w="med" len="med"/>
+                      <a:tailEnd type="none" w="med" len="med"/>
+                    </a:lnR>
+                    <a:lnT w="2540" cap="flat" cmpd="sng" algn="ctr">
+                      <a:solidFill>
+                        <a:srgbClr val="EEEEEE"/>
+                      </a:solidFill>
+                      <a:prstDash val="solid"/>
+                      <a:round/>
+                      <a:headEnd type="none" w="med" len="med"/>
+                      <a:tailEnd type="none" w="med" len="med"/>
+                    </a:lnT>
+                    <a:lnB w="2540" cap="flat" cmpd="sng" algn="ctr">
+                      <a:solidFill>
+                        <a:srgbClr val="EEEEEE"/>
+                      </a:solidFill>
+                      <a:prstDash val="solid"/>
+                      <a:round/>
+                      <a:headEnd type="none" w="med" len="med"/>
+                      <a:tailEnd type="none" w="med" len="med"/>
+                    </a:lnB>
+                  </a:tcPr>
+                </a:tc>
+                <a:tc>
+                  <a:txBody>
+                    <a:bodyPr/>
+                    <a:lstStyle/>
+                    <a:p>
+                      <a:pPr algn="ctr" indent="0" marL="0">
+                        <a:buNone/>
+                      </a:pPr>
+                      <a:r>
+                        <a:rPr lang="en-US" sz="500" dirty="0">
+                          <a:solidFill>
+                            <a:srgbClr val="777777"/>
+                          </a:solidFill>
+                          <a:latin typeface="Calibri" pitchFamily="34" charset="0"/>
+                          <a:ea typeface="Calibri" pitchFamily="34" charset="-122"/>
+                          <a:cs typeface="Calibri" pitchFamily="34" charset="-120"/>
+                        </a:rPr>
                         <a:t>0.94%</a:t>
                       </a:r>
                       <a:endParaRPr lang="en-US" sz="500" dirty="0">
@@ -18280,7 +19803,7 @@
                         <a:buNone/>
                       </a:pPr>
                       <a:r>
-                        <a:rPr lang="en-US" sz="500" dirty="0">
+                        <a:rPr lang="en-US" sz="500" b="1" dirty="0">
                           <a:solidFill>
                             <a:srgbClr val="777777"/>
                           </a:solidFill>
@@ -18288,72 +19811,7 @@
                           <a:ea typeface="Calibri" pitchFamily="34" charset="-122"/>
                           <a:cs typeface="Calibri" pitchFamily="34" charset="-120"/>
                         </a:rPr>
-                        <a:t>0.94%</a:t>
-                      </a:r>
-                      <a:endParaRPr lang="en-US" sz="500" dirty="0">
-                        <a:latin typeface="Calibri" charset="0"/>
-                        <a:ea typeface="Calibri" charset="0"/>
-                        <a:cs typeface="Calibri" charset="0"/>
-                      </a:endParaRPr>
-                    </a:p>
-                  </a:txBody>
-                  <a:tcPr marL="91440" marR="91440" marT="45720" marB="45720">
-                    <a:lnL w="2540" cap="flat" cmpd="sng" algn="ctr">
-                      <a:solidFill>
-                        <a:srgbClr val="EEEEEE"/>
-                      </a:solidFill>
-                      <a:prstDash val="solid"/>
-                      <a:round/>
-                      <a:headEnd type="none" w="med" len="med"/>
-                      <a:tailEnd type="none" w="med" len="med"/>
-                    </a:lnL>
-                    <a:lnR w="2540" cap="flat" cmpd="sng" algn="ctr">
-                      <a:solidFill>
-                        <a:srgbClr val="EEEEEE"/>
-                      </a:solidFill>
-                      <a:prstDash val="solid"/>
-                      <a:round/>
-                      <a:headEnd type="none" w="med" len="med"/>
-                      <a:tailEnd type="none" w="med" len="med"/>
-                    </a:lnR>
-                    <a:lnT w="2540" cap="flat" cmpd="sng" algn="ctr">
-                      <a:solidFill>
-                        <a:srgbClr val="EEEEEE"/>
-                      </a:solidFill>
-                      <a:prstDash val="solid"/>
-                      <a:round/>
-                      <a:headEnd type="none" w="med" len="med"/>
-                      <a:tailEnd type="none" w="med" len="med"/>
-                    </a:lnT>
-                    <a:lnB w="2540" cap="flat" cmpd="sng" algn="ctr">
-                      <a:solidFill>
-                        <a:srgbClr val="EEEEEE"/>
-                      </a:solidFill>
-                      <a:prstDash val="solid"/>
-                      <a:round/>
-                      <a:headEnd type="none" w="med" len="med"/>
-                      <a:tailEnd type="none" w="med" len="med"/>
-                    </a:lnB>
-                  </a:tcPr>
-                </a:tc>
-                <a:tc>
-                  <a:txBody>
-                    <a:bodyPr/>
-                    <a:lstStyle/>
-                    <a:p>
-                      <a:pPr algn="ctr" indent="0" marL="0">
-                        <a:buNone/>
-                      </a:pPr>
-                      <a:r>
-                        <a:rPr lang="en-US" sz="500" b="1" dirty="0">
-                          <a:solidFill>
-                            <a:srgbClr val="777777"/>
-                          </a:solidFill>
-                          <a:latin typeface="Calibri" pitchFamily="34" charset="0"/>
-                          <a:ea typeface="Calibri" pitchFamily="34" charset="-122"/>
-                          <a:cs typeface="Calibri" pitchFamily="34" charset="-120"/>
-                        </a:rPr>
-                        <a:t>8.88%</a:t>
+                        <a:t>8.97%</a:t>
                       </a:r>
                       <a:endParaRPr lang="en-US" sz="500" dirty="0">
                         <a:latin typeface="Calibri" charset="0"/>
@@ -18539,7 +19997,7 @@
                           <a:ea typeface="Calibri" pitchFamily="34" charset="-122"/>
                           <a:cs typeface="Calibri" pitchFamily="34" charset="-120"/>
                         </a:rPr>
-                        <a:t>0.00%</a:t>
+                        <a:t>0.25%</a:t>
                       </a:r>
                       <a:endParaRPr lang="en-US" sz="500" dirty="0">
                         <a:latin typeface="Calibri" charset="0"/>
@@ -19254,7 +20712,7 @@
                           <a:ea typeface="Calibri" pitchFamily="34" charset="-122"/>
                           <a:cs typeface="Calibri" pitchFamily="34" charset="-120"/>
                         </a:rPr>
-                        <a:t>8.43%</a:t>
+                        <a:t>0.79%</a:t>
                       </a:r>
                       <a:endParaRPr lang="en-US" sz="500" dirty="0">
                         <a:latin typeface="Calibri" charset="0"/>
@@ -19319,7 +20777,7 @@
                           <a:ea typeface="Calibri" pitchFamily="34" charset="-122"/>
                           <a:cs typeface="Calibri" pitchFamily="34" charset="-120"/>
                         </a:rPr>
-                        <a:t>15.02%</a:t>
+                        <a:t>7.27%</a:t>
                       </a:r>
                       <a:endParaRPr lang="en-US" sz="500" dirty="0">
                         <a:latin typeface="Calibri" charset="0"/>
@@ -20482,6 +21940,331 @@
                           <a:ea typeface="Calibri" pitchFamily="34" charset="-122"/>
                           <a:cs typeface="Calibri" pitchFamily="34" charset="-120"/>
                         </a:rPr>
+                        <a:t>1.00%</a:t>
+                      </a:r>
+                      <a:endParaRPr lang="en-US" sz="500" dirty="0">
+                        <a:latin typeface="Calibri" charset="0"/>
+                        <a:ea typeface="Calibri" charset="0"/>
+                        <a:cs typeface="Calibri" charset="0"/>
+                      </a:endParaRPr>
+                    </a:p>
+                  </a:txBody>
+                  <a:tcPr marL="91440" marR="91440" marT="45720" marB="45720">
+                    <a:lnL w="2540" cap="flat" cmpd="sng" algn="ctr">
+                      <a:solidFill>
+                        <a:srgbClr val="EEEEEE"/>
+                      </a:solidFill>
+                      <a:prstDash val="solid"/>
+                      <a:round/>
+                      <a:headEnd type="none" w="med" len="med"/>
+                      <a:tailEnd type="none" w="med" len="med"/>
+                    </a:lnL>
+                    <a:lnR w="2540" cap="flat" cmpd="sng" algn="ctr">
+                      <a:solidFill>
+                        <a:srgbClr val="EEEEEE"/>
+                      </a:solidFill>
+                      <a:prstDash val="solid"/>
+                      <a:round/>
+                      <a:headEnd type="none" w="med" len="med"/>
+                      <a:tailEnd type="none" w="med" len="med"/>
+                    </a:lnR>
+                    <a:lnT w="2540" cap="flat" cmpd="sng" algn="ctr">
+                      <a:solidFill>
+                        <a:srgbClr val="EEEEEE"/>
+                      </a:solidFill>
+                      <a:prstDash val="solid"/>
+                      <a:round/>
+                      <a:headEnd type="none" w="med" len="med"/>
+                      <a:tailEnd type="none" w="med" len="med"/>
+                    </a:lnT>
+                    <a:lnB w="2540" cap="flat" cmpd="sng" algn="ctr">
+                      <a:solidFill>
+                        <a:srgbClr val="EEEEEE"/>
+                      </a:solidFill>
+                      <a:prstDash val="solid"/>
+                      <a:round/>
+                      <a:headEnd type="none" w="med" len="med"/>
+                      <a:tailEnd type="none" w="med" len="med"/>
+                    </a:lnB>
+                  </a:tcPr>
+                </a:tc>
+                <a:tc>
+                  <a:txBody>
+                    <a:bodyPr/>
+                    <a:lstStyle/>
+                    <a:p>
+                      <a:pPr algn="ctr" indent="0" marL="0">
+                        <a:buNone/>
+                      </a:pPr>
+                      <a:r>
+                        <a:rPr lang="en-US" sz="500" dirty="0">
+                          <a:solidFill>
+                            <a:srgbClr val="777777"/>
+                          </a:solidFill>
+                          <a:latin typeface="Calibri" pitchFamily="34" charset="0"/>
+                          <a:ea typeface="Calibri" pitchFamily="34" charset="-122"/>
+                          <a:cs typeface="Calibri" pitchFamily="34" charset="-120"/>
+                        </a:rPr>
+                        <a:t>0.88%</a:t>
+                      </a:r>
+                      <a:endParaRPr lang="en-US" sz="500" dirty="0">
+                        <a:latin typeface="Calibri" charset="0"/>
+                        <a:ea typeface="Calibri" charset="0"/>
+                        <a:cs typeface="Calibri" charset="0"/>
+                      </a:endParaRPr>
+                    </a:p>
+                  </a:txBody>
+                  <a:tcPr marL="91440" marR="91440" marT="45720" marB="45720">
+                    <a:lnL w="2540" cap="flat" cmpd="sng" algn="ctr">
+                      <a:solidFill>
+                        <a:srgbClr val="EEEEEE"/>
+                      </a:solidFill>
+                      <a:prstDash val="solid"/>
+                      <a:round/>
+                      <a:headEnd type="none" w="med" len="med"/>
+                      <a:tailEnd type="none" w="med" len="med"/>
+                    </a:lnL>
+                    <a:lnR w="2540" cap="flat" cmpd="sng" algn="ctr">
+                      <a:solidFill>
+                        <a:srgbClr val="EEEEEE"/>
+                      </a:solidFill>
+                      <a:prstDash val="solid"/>
+                      <a:round/>
+                      <a:headEnd type="none" w="med" len="med"/>
+                      <a:tailEnd type="none" w="med" len="med"/>
+                    </a:lnR>
+                    <a:lnT w="2540" cap="flat" cmpd="sng" algn="ctr">
+                      <a:solidFill>
+                        <a:srgbClr val="EEEEEE"/>
+                      </a:solidFill>
+                      <a:prstDash val="solid"/>
+                      <a:round/>
+                      <a:headEnd type="none" w="med" len="med"/>
+                      <a:tailEnd type="none" w="med" len="med"/>
+                    </a:lnT>
+                    <a:lnB w="2540" cap="flat" cmpd="sng" algn="ctr">
+                      <a:solidFill>
+                        <a:srgbClr val="EEEEEE"/>
+                      </a:solidFill>
+                      <a:prstDash val="solid"/>
+                      <a:round/>
+                      <a:headEnd type="none" w="med" len="med"/>
+                      <a:tailEnd type="none" w="med" len="med"/>
+                    </a:lnB>
+                  </a:tcPr>
+                </a:tc>
+                <a:tc>
+                  <a:txBody>
+                    <a:bodyPr/>
+                    <a:lstStyle/>
+                    <a:p>
+                      <a:pPr algn="ctr" indent="0" marL="0">
+                        <a:buNone/>
+                      </a:pPr>
+                      <a:r>
+                        <a:rPr lang="en-US" sz="500" dirty="0">
+                          <a:solidFill>
+                            <a:srgbClr val="777777"/>
+                          </a:solidFill>
+                          <a:latin typeface="Calibri" pitchFamily="34" charset="0"/>
+                          <a:ea typeface="Calibri" pitchFamily="34" charset="-122"/>
+                          <a:cs typeface="Calibri" pitchFamily="34" charset="-120"/>
+                        </a:rPr>
+                        <a:t>0.97%</a:t>
+                      </a:r>
+                      <a:endParaRPr lang="en-US" sz="500" dirty="0">
+                        <a:latin typeface="Calibri" charset="0"/>
+                        <a:ea typeface="Calibri" charset="0"/>
+                        <a:cs typeface="Calibri" charset="0"/>
+                      </a:endParaRPr>
+                    </a:p>
+                  </a:txBody>
+                  <a:tcPr marL="91440" marR="91440" marT="45720" marB="45720">
+                    <a:lnL w="2540" cap="flat" cmpd="sng" algn="ctr">
+                      <a:solidFill>
+                        <a:srgbClr val="EEEEEE"/>
+                      </a:solidFill>
+                      <a:prstDash val="solid"/>
+                      <a:round/>
+                      <a:headEnd type="none" w="med" len="med"/>
+                      <a:tailEnd type="none" w="med" len="med"/>
+                    </a:lnL>
+                    <a:lnR w="2540" cap="flat" cmpd="sng" algn="ctr">
+                      <a:solidFill>
+                        <a:srgbClr val="EEEEEE"/>
+                      </a:solidFill>
+                      <a:prstDash val="solid"/>
+                      <a:round/>
+                      <a:headEnd type="none" w="med" len="med"/>
+                      <a:tailEnd type="none" w="med" len="med"/>
+                    </a:lnR>
+                    <a:lnT w="2540" cap="flat" cmpd="sng" algn="ctr">
+                      <a:solidFill>
+                        <a:srgbClr val="EEEEEE"/>
+                      </a:solidFill>
+                      <a:prstDash val="solid"/>
+                      <a:round/>
+                      <a:headEnd type="none" w="med" len="med"/>
+                      <a:tailEnd type="none" w="med" len="med"/>
+                    </a:lnT>
+                    <a:lnB w="2540" cap="flat" cmpd="sng" algn="ctr">
+                      <a:solidFill>
+                        <a:srgbClr val="EEEEEE"/>
+                      </a:solidFill>
+                      <a:prstDash val="solid"/>
+                      <a:round/>
+                      <a:headEnd type="none" w="med" len="med"/>
+                      <a:tailEnd type="none" w="med" len="med"/>
+                    </a:lnB>
+                  </a:tcPr>
+                </a:tc>
+                <a:tc>
+                  <a:txBody>
+                    <a:bodyPr/>
+                    <a:lstStyle/>
+                    <a:p>
+                      <a:pPr algn="ctr" indent="0" marL="0">
+                        <a:buNone/>
+                      </a:pPr>
+                      <a:r>
+                        <a:rPr lang="en-US" sz="500" dirty="0">
+                          <a:solidFill>
+                            <a:srgbClr val="777777"/>
+                          </a:solidFill>
+                          <a:latin typeface="Calibri" pitchFamily="34" charset="0"/>
+                          <a:ea typeface="Calibri" pitchFamily="34" charset="-122"/>
+                          <a:cs typeface="Calibri" pitchFamily="34" charset="-120"/>
+                        </a:rPr>
+                        <a:t>0.88%</a:t>
+                      </a:r>
+                      <a:endParaRPr lang="en-US" sz="500" dirty="0">
+                        <a:latin typeface="Calibri" charset="0"/>
+                        <a:ea typeface="Calibri" charset="0"/>
+                        <a:cs typeface="Calibri" charset="0"/>
+                      </a:endParaRPr>
+                    </a:p>
+                  </a:txBody>
+                  <a:tcPr marL="91440" marR="91440" marT="45720" marB="45720">
+                    <a:lnL w="2540" cap="flat" cmpd="sng" algn="ctr">
+                      <a:solidFill>
+                        <a:srgbClr val="EEEEEE"/>
+                      </a:solidFill>
+                      <a:prstDash val="solid"/>
+                      <a:round/>
+                      <a:headEnd type="none" w="med" len="med"/>
+                      <a:tailEnd type="none" w="med" len="med"/>
+                    </a:lnL>
+                    <a:lnR w="2540" cap="flat" cmpd="sng" algn="ctr">
+                      <a:solidFill>
+                        <a:srgbClr val="EEEEEE"/>
+                      </a:solidFill>
+                      <a:prstDash val="solid"/>
+                      <a:round/>
+                      <a:headEnd type="none" w="med" len="med"/>
+                      <a:tailEnd type="none" w="med" len="med"/>
+                    </a:lnR>
+                    <a:lnT w="2540" cap="flat" cmpd="sng" algn="ctr">
+                      <a:solidFill>
+                        <a:srgbClr val="EEEEEE"/>
+                      </a:solidFill>
+                      <a:prstDash val="solid"/>
+                      <a:round/>
+                      <a:headEnd type="none" w="med" len="med"/>
+                      <a:tailEnd type="none" w="med" len="med"/>
+                    </a:lnT>
+                    <a:lnB w="2540" cap="flat" cmpd="sng" algn="ctr">
+                      <a:solidFill>
+                        <a:srgbClr val="EEEEEE"/>
+                      </a:solidFill>
+                      <a:prstDash val="solid"/>
+                      <a:round/>
+                      <a:headEnd type="none" w="med" len="med"/>
+                      <a:tailEnd type="none" w="med" len="med"/>
+                    </a:lnB>
+                  </a:tcPr>
+                </a:tc>
+                <a:tc>
+                  <a:txBody>
+                    <a:bodyPr/>
+                    <a:lstStyle/>
+                    <a:p>
+                      <a:pPr algn="ctr" indent="0" marL="0">
+                        <a:buNone/>
+                      </a:pPr>
+                      <a:r>
+                        <a:rPr lang="en-US" sz="500" dirty="0">
+                          <a:solidFill>
+                            <a:srgbClr val="777777"/>
+                          </a:solidFill>
+                          <a:latin typeface="Calibri" pitchFamily="34" charset="0"/>
+                          <a:ea typeface="Calibri" pitchFamily="34" charset="-122"/>
+                          <a:cs typeface="Calibri" pitchFamily="34" charset="-120"/>
+                        </a:rPr>
+                        <a:t>1.04%</a:t>
+                      </a:r>
+                      <a:endParaRPr lang="en-US" sz="500" dirty="0">
+                        <a:latin typeface="Calibri" charset="0"/>
+                        <a:ea typeface="Calibri" charset="0"/>
+                        <a:cs typeface="Calibri" charset="0"/>
+                      </a:endParaRPr>
+                    </a:p>
+                  </a:txBody>
+                  <a:tcPr marL="91440" marR="91440" marT="45720" marB="45720">
+                    <a:lnL w="2540" cap="flat" cmpd="sng" algn="ctr">
+                      <a:solidFill>
+                        <a:srgbClr val="EEEEEE"/>
+                      </a:solidFill>
+                      <a:prstDash val="solid"/>
+                      <a:round/>
+                      <a:headEnd type="none" w="med" len="med"/>
+                      <a:tailEnd type="none" w="med" len="med"/>
+                    </a:lnL>
+                    <a:lnR w="2540" cap="flat" cmpd="sng" algn="ctr">
+                      <a:solidFill>
+                        <a:srgbClr val="EEEEEE"/>
+                      </a:solidFill>
+                      <a:prstDash val="solid"/>
+                      <a:round/>
+                      <a:headEnd type="none" w="med" len="med"/>
+                      <a:tailEnd type="none" w="med" len="med"/>
+                    </a:lnR>
+                    <a:lnT w="2540" cap="flat" cmpd="sng" algn="ctr">
+                      <a:solidFill>
+                        <a:srgbClr val="EEEEEE"/>
+                      </a:solidFill>
+                      <a:prstDash val="solid"/>
+                      <a:round/>
+                      <a:headEnd type="none" w="med" len="med"/>
+                      <a:tailEnd type="none" w="med" len="med"/>
+                    </a:lnT>
+                    <a:lnB w="2540" cap="flat" cmpd="sng" algn="ctr">
+                      <a:solidFill>
+                        <a:srgbClr val="EEEEEE"/>
+                      </a:solidFill>
+                      <a:prstDash val="solid"/>
+                      <a:round/>
+                      <a:headEnd type="none" w="med" len="med"/>
+                      <a:tailEnd type="none" w="med" len="med"/>
+                    </a:lnB>
+                  </a:tcPr>
+                </a:tc>
+                <a:tc>
+                  <a:txBody>
+                    <a:bodyPr/>
+                    <a:lstStyle/>
+                    <a:p>
+                      <a:pPr algn="ctr" indent="0" marL="0">
+                        <a:buNone/>
+                      </a:pPr>
+                      <a:r>
+                        <a:rPr lang="en-US" sz="500" dirty="0">
+                          <a:solidFill>
+                            <a:srgbClr val="777777"/>
+                          </a:solidFill>
+                          <a:latin typeface="Calibri" pitchFamily="34" charset="0"/>
+                          <a:ea typeface="Calibri" pitchFamily="34" charset="-122"/>
+                          <a:cs typeface="Calibri" pitchFamily="34" charset="-120"/>
+                        </a:rPr>
                         <a:t>0.94%</a:t>
                       </a:r>
                       <a:endParaRPr lang="en-US" sz="500" dirty="0">
@@ -20547,7 +22330,7 @@
                           <a:ea typeface="Calibri" pitchFamily="34" charset="-122"/>
                           <a:cs typeface="Calibri" pitchFamily="34" charset="-120"/>
                         </a:rPr>
-                        <a:t>0.94%</a:t>
+                        <a:t>0.97%</a:t>
                       </a:r>
                       <a:endParaRPr lang="en-US" sz="500" dirty="0">
                         <a:latin typeface="Calibri" charset="0"/>
@@ -20612,7 +22395,7 @@
                           <a:ea typeface="Calibri" pitchFamily="34" charset="-122"/>
                           <a:cs typeface="Calibri" pitchFamily="34" charset="-120"/>
                         </a:rPr>
-                        <a:t>0.94%</a:t>
+                        <a:t>0.89%</a:t>
                       </a:r>
                       <a:endParaRPr lang="en-US" sz="500" dirty="0">
                         <a:latin typeface="Calibri" charset="0"/>
@@ -20677,7 +22460,7 @@
                           <a:ea typeface="Calibri" pitchFamily="34" charset="-122"/>
                           <a:cs typeface="Calibri" pitchFamily="34" charset="-120"/>
                         </a:rPr>
-                        <a:t>0.94%</a:t>
+                        <a:t>0.78%</a:t>
                       </a:r>
                       <a:endParaRPr lang="en-US" sz="500" dirty="0">
                         <a:latin typeface="Calibri" charset="0"/>
@@ -20742,7 +22525,7 @@
                           <a:ea typeface="Calibri" pitchFamily="34" charset="-122"/>
                           <a:cs typeface="Calibri" pitchFamily="34" charset="-120"/>
                         </a:rPr>
-                        <a:t>0.94%</a:t>
+                        <a:t>0.85%</a:t>
                       </a:r>
                       <a:endParaRPr lang="en-US" sz="500" dirty="0">
                         <a:latin typeface="Calibri" charset="0"/>
@@ -20807,7 +22590,7 @@
                           <a:ea typeface="Calibri" pitchFamily="34" charset="-122"/>
                           <a:cs typeface="Calibri" pitchFamily="34" charset="-120"/>
                         </a:rPr>
-                        <a:t>0.94%</a:t>
+                        <a:t>0.75%</a:t>
                       </a:r>
                       <a:endParaRPr lang="en-US" sz="500" dirty="0">
                         <a:latin typeface="Calibri" charset="0"/>
@@ -20872,64 +22655,64 @@
                           <a:ea typeface="Calibri" pitchFamily="34" charset="-122"/>
                           <a:cs typeface="Calibri" pitchFamily="34" charset="-120"/>
                         </a:rPr>
-                        <a:t>0.93%</a:t>
-                      </a:r>
-                      <a:endParaRPr lang="en-US" sz="500" dirty="0">
-                        <a:latin typeface="Calibri" charset="0"/>
-                        <a:ea typeface="Calibri" charset="0"/>
-                        <a:cs typeface="Calibri" charset="0"/>
-                      </a:endParaRPr>
-                    </a:p>
-                  </a:txBody>
-                  <a:tcPr marL="91440" marR="91440" marT="45720" marB="45720">
-                    <a:lnL w="2540" cap="flat" cmpd="sng" algn="ctr">
-                      <a:solidFill>
-                        <a:srgbClr val="EEEEEE"/>
-                      </a:solidFill>
-                      <a:prstDash val="solid"/>
-                      <a:round/>
-                      <a:headEnd type="none" w="med" len="med"/>
-                      <a:tailEnd type="none" w="med" len="med"/>
-                    </a:lnL>
-                    <a:lnR w="2540" cap="flat" cmpd="sng" algn="ctr">
-                      <a:solidFill>
-                        <a:srgbClr val="EEEEEE"/>
-                      </a:solidFill>
-                      <a:prstDash val="solid"/>
-                      <a:round/>
-                      <a:headEnd type="none" w="med" len="med"/>
-                      <a:tailEnd type="none" w="med" len="med"/>
-                    </a:lnR>
-                    <a:lnT w="2540" cap="flat" cmpd="sng" algn="ctr">
-                      <a:solidFill>
-                        <a:srgbClr val="EEEEEE"/>
-                      </a:solidFill>
-                      <a:prstDash val="solid"/>
-                      <a:round/>
-                      <a:headEnd type="none" w="med" len="med"/>
-                      <a:tailEnd type="none" w="med" len="med"/>
-                    </a:lnT>
-                    <a:lnB w="2540" cap="flat" cmpd="sng" algn="ctr">
-                      <a:solidFill>
-                        <a:srgbClr val="EEEEEE"/>
-                      </a:solidFill>
-                      <a:prstDash val="solid"/>
-                      <a:round/>
-                      <a:headEnd type="none" w="med" len="med"/>
-                      <a:tailEnd type="none" w="med" len="med"/>
-                    </a:lnB>
-                  </a:tcPr>
-                </a:tc>
-                <a:tc>
-                  <a:txBody>
-                    <a:bodyPr/>
-                    <a:lstStyle/>
-                    <a:p>
-                      <a:pPr algn="ctr" indent="0" marL="0">
-                        <a:buNone/>
-                      </a:pPr>
-                      <a:r>
-                        <a:rPr lang="en-US" sz="500" dirty="0">
+                        <a:t>0.71%</a:t>
+                      </a:r>
+                      <a:endParaRPr lang="en-US" sz="500" dirty="0">
+                        <a:latin typeface="Calibri" charset="0"/>
+                        <a:ea typeface="Calibri" charset="0"/>
+                        <a:cs typeface="Calibri" charset="0"/>
+                      </a:endParaRPr>
+                    </a:p>
+                  </a:txBody>
+                  <a:tcPr marL="91440" marR="91440" marT="45720" marB="45720">
+                    <a:lnL w="2540" cap="flat" cmpd="sng" algn="ctr">
+                      <a:solidFill>
+                        <a:srgbClr val="EEEEEE"/>
+                      </a:solidFill>
+                      <a:prstDash val="solid"/>
+                      <a:round/>
+                      <a:headEnd type="none" w="med" len="med"/>
+                      <a:tailEnd type="none" w="med" len="med"/>
+                    </a:lnL>
+                    <a:lnR w="2540" cap="flat" cmpd="sng" algn="ctr">
+                      <a:solidFill>
+                        <a:srgbClr val="EEEEEE"/>
+                      </a:solidFill>
+                      <a:prstDash val="solid"/>
+                      <a:round/>
+                      <a:headEnd type="none" w="med" len="med"/>
+                      <a:tailEnd type="none" w="med" len="med"/>
+                    </a:lnR>
+                    <a:lnT w="2540" cap="flat" cmpd="sng" algn="ctr">
+                      <a:solidFill>
+                        <a:srgbClr val="EEEEEE"/>
+                      </a:solidFill>
+                      <a:prstDash val="solid"/>
+                      <a:round/>
+                      <a:headEnd type="none" w="med" len="med"/>
+                      <a:tailEnd type="none" w="med" len="med"/>
+                    </a:lnT>
+                    <a:lnB w="2540" cap="flat" cmpd="sng" algn="ctr">
+                      <a:solidFill>
+                        <a:srgbClr val="EEEEEE"/>
+                      </a:solidFill>
+                      <a:prstDash val="solid"/>
+                      <a:round/>
+                      <a:headEnd type="none" w="med" len="med"/>
+                      <a:tailEnd type="none" w="med" len="med"/>
+                    </a:lnB>
+                  </a:tcPr>
+                </a:tc>
+                <a:tc>
+                  <a:txBody>
+                    <a:bodyPr/>
+                    <a:lstStyle/>
+                    <a:p>
+                      <a:pPr algn="ctr" indent="0" marL="0">
+                        <a:buNone/>
+                      </a:pPr>
+                      <a:r>
+                        <a:rPr lang="en-US" sz="500" b="1" dirty="0">
                           <a:solidFill>
                             <a:srgbClr val="777777"/>
                           </a:solidFill>
@@ -20937,332 +22720,7 @@
                           <a:ea typeface="Calibri" pitchFamily="34" charset="-122"/>
                           <a:cs typeface="Calibri" pitchFamily="34" charset="-120"/>
                         </a:rPr>
-                        <a:t>0.85%</a:t>
-                      </a:r>
-                      <a:endParaRPr lang="en-US" sz="500" dirty="0">
-                        <a:latin typeface="Calibri" charset="0"/>
-                        <a:ea typeface="Calibri" charset="0"/>
-                        <a:cs typeface="Calibri" charset="0"/>
-                      </a:endParaRPr>
-                    </a:p>
-                  </a:txBody>
-                  <a:tcPr marL="91440" marR="91440" marT="45720" marB="45720">
-                    <a:lnL w="2540" cap="flat" cmpd="sng" algn="ctr">
-                      <a:solidFill>
-                        <a:srgbClr val="EEEEEE"/>
-                      </a:solidFill>
-                      <a:prstDash val="solid"/>
-                      <a:round/>
-                      <a:headEnd type="none" w="med" len="med"/>
-                      <a:tailEnd type="none" w="med" len="med"/>
-                    </a:lnL>
-                    <a:lnR w="2540" cap="flat" cmpd="sng" algn="ctr">
-                      <a:solidFill>
-                        <a:srgbClr val="EEEEEE"/>
-                      </a:solidFill>
-                      <a:prstDash val="solid"/>
-                      <a:round/>
-                      <a:headEnd type="none" w="med" len="med"/>
-                      <a:tailEnd type="none" w="med" len="med"/>
-                    </a:lnR>
-                    <a:lnT w="2540" cap="flat" cmpd="sng" algn="ctr">
-                      <a:solidFill>
-                        <a:srgbClr val="EEEEEE"/>
-                      </a:solidFill>
-                      <a:prstDash val="solid"/>
-                      <a:round/>
-                      <a:headEnd type="none" w="med" len="med"/>
-                      <a:tailEnd type="none" w="med" len="med"/>
-                    </a:lnT>
-                    <a:lnB w="2540" cap="flat" cmpd="sng" algn="ctr">
-                      <a:solidFill>
-                        <a:srgbClr val="EEEEEE"/>
-                      </a:solidFill>
-                      <a:prstDash val="solid"/>
-                      <a:round/>
-                      <a:headEnd type="none" w="med" len="med"/>
-                      <a:tailEnd type="none" w="med" len="med"/>
-                    </a:lnB>
-                  </a:tcPr>
-                </a:tc>
-                <a:tc>
-                  <a:txBody>
-                    <a:bodyPr/>
-                    <a:lstStyle/>
-                    <a:p>
-                      <a:pPr algn="ctr" indent="0" marL="0">
-                        <a:buNone/>
-                      </a:pPr>
-                      <a:r>
-                        <a:rPr lang="en-US" sz="500" dirty="0">
-                          <a:solidFill>
-                            <a:srgbClr val="777777"/>
-                          </a:solidFill>
-                          <a:latin typeface="Calibri" pitchFamily="34" charset="0"/>
-                          <a:ea typeface="Calibri" pitchFamily="34" charset="-122"/>
-                          <a:cs typeface="Calibri" pitchFamily="34" charset="-120"/>
-                        </a:rPr>
-                        <a:t>0.80%</a:t>
-                      </a:r>
-                      <a:endParaRPr lang="en-US" sz="500" dirty="0">
-                        <a:latin typeface="Calibri" charset="0"/>
-                        <a:ea typeface="Calibri" charset="0"/>
-                        <a:cs typeface="Calibri" charset="0"/>
-                      </a:endParaRPr>
-                    </a:p>
-                  </a:txBody>
-                  <a:tcPr marL="91440" marR="91440" marT="45720" marB="45720">
-                    <a:lnL w="2540" cap="flat" cmpd="sng" algn="ctr">
-                      <a:solidFill>
-                        <a:srgbClr val="EEEEEE"/>
-                      </a:solidFill>
-                      <a:prstDash val="solid"/>
-                      <a:round/>
-                      <a:headEnd type="none" w="med" len="med"/>
-                      <a:tailEnd type="none" w="med" len="med"/>
-                    </a:lnL>
-                    <a:lnR w="2540" cap="flat" cmpd="sng" algn="ctr">
-                      <a:solidFill>
-                        <a:srgbClr val="EEEEEE"/>
-                      </a:solidFill>
-                      <a:prstDash val="solid"/>
-                      <a:round/>
-                      <a:headEnd type="none" w="med" len="med"/>
-                      <a:tailEnd type="none" w="med" len="med"/>
-                    </a:lnR>
-                    <a:lnT w="2540" cap="flat" cmpd="sng" algn="ctr">
-                      <a:solidFill>
-                        <a:srgbClr val="EEEEEE"/>
-                      </a:solidFill>
-                      <a:prstDash val="solid"/>
-                      <a:round/>
-                      <a:headEnd type="none" w="med" len="med"/>
-                      <a:tailEnd type="none" w="med" len="med"/>
-                    </a:lnT>
-                    <a:lnB w="2540" cap="flat" cmpd="sng" algn="ctr">
-                      <a:solidFill>
-                        <a:srgbClr val="EEEEEE"/>
-                      </a:solidFill>
-                      <a:prstDash val="solid"/>
-                      <a:round/>
-                      <a:headEnd type="none" w="med" len="med"/>
-                      <a:tailEnd type="none" w="med" len="med"/>
-                    </a:lnB>
-                  </a:tcPr>
-                </a:tc>
-                <a:tc>
-                  <a:txBody>
-                    <a:bodyPr/>
-                    <a:lstStyle/>
-                    <a:p>
-                      <a:pPr algn="ctr" indent="0" marL="0">
-                        <a:buNone/>
-                      </a:pPr>
-                      <a:r>
-                        <a:rPr lang="en-US" sz="500" dirty="0">
-                          <a:solidFill>
-                            <a:srgbClr val="777777"/>
-                          </a:solidFill>
-                          <a:latin typeface="Calibri" pitchFamily="34" charset="0"/>
-                          <a:ea typeface="Calibri" pitchFamily="34" charset="-122"/>
-                          <a:cs typeface="Calibri" pitchFamily="34" charset="-120"/>
-                        </a:rPr>
-                        <a:t>0.79%</a:t>
-                      </a:r>
-                      <a:endParaRPr lang="en-US" sz="500" dirty="0">
-                        <a:latin typeface="Calibri" charset="0"/>
-                        <a:ea typeface="Calibri" charset="0"/>
-                        <a:cs typeface="Calibri" charset="0"/>
-                      </a:endParaRPr>
-                    </a:p>
-                  </a:txBody>
-                  <a:tcPr marL="91440" marR="91440" marT="45720" marB="45720">
-                    <a:lnL w="2540" cap="flat" cmpd="sng" algn="ctr">
-                      <a:solidFill>
-                        <a:srgbClr val="EEEEEE"/>
-                      </a:solidFill>
-                      <a:prstDash val="solid"/>
-                      <a:round/>
-                      <a:headEnd type="none" w="med" len="med"/>
-                      <a:tailEnd type="none" w="med" len="med"/>
-                    </a:lnL>
-                    <a:lnR w="2540" cap="flat" cmpd="sng" algn="ctr">
-                      <a:solidFill>
-                        <a:srgbClr val="EEEEEE"/>
-                      </a:solidFill>
-                      <a:prstDash val="solid"/>
-                      <a:round/>
-                      <a:headEnd type="none" w="med" len="med"/>
-                      <a:tailEnd type="none" w="med" len="med"/>
-                    </a:lnR>
-                    <a:lnT w="2540" cap="flat" cmpd="sng" algn="ctr">
-                      <a:solidFill>
-                        <a:srgbClr val="EEEEEE"/>
-                      </a:solidFill>
-                      <a:prstDash val="solid"/>
-                      <a:round/>
-                      <a:headEnd type="none" w="med" len="med"/>
-                      <a:tailEnd type="none" w="med" len="med"/>
-                    </a:lnT>
-                    <a:lnB w="2540" cap="flat" cmpd="sng" algn="ctr">
-                      <a:solidFill>
-                        <a:srgbClr val="EEEEEE"/>
-                      </a:solidFill>
-                      <a:prstDash val="solid"/>
-                      <a:round/>
-                      <a:headEnd type="none" w="med" len="med"/>
-                      <a:tailEnd type="none" w="med" len="med"/>
-                    </a:lnB>
-                  </a:tcPr>
-                </a:tc>
-                <a:tc>
-                  <a:txBody>
-                    <a:bodyPr/>
-                    <a:lstStyle/>
-                    <a:p>
-                      <a:pPr algn="ctr" indent="0" marL="0">
-                        <a:buNone/>
-                      </a:pPr>
-                      <a:r>
-                        <a:rPr lang="en-US" sz="500" dirty="0">
-                          <a:solidFill>
-                            <a:srgbClr val="777777"/>
-                          </a:solidFill>
-                          <a:latin typeface="Calibri" pitchFamily="34" charset="0"/>
-                          <a:ea typeface="Calibri" pitchFamily="34" charset="-122"/>
-                          <a:cs typeface="Calibri" pitchFamily="34" charset="-120"/>
-                        </a:rPr>
-                        <a:t>0.75%</a:t>
-                      </a:r>
-                      <a:endParaRPr lang="en-US" sz="500" dirty="0">
-                        <a:latin typeface="Calibri" charset="0"/>
-                        <a:ea typeface="Calibri" charset="0"/>
-                        <a:cs typeface="Calibri" charset="0"/>
-                      </a:endParaRPr>
-                    </a:p>
-                  </a:txBody>
-                  <a:tcPr marL="91440" marR="91440" marT="45720" marB="45720">
-                    <a:lnL w="2540" cap="flat" cmpd="sng" algn="ctr">
-                      <a:solidFill>
-                        <a:srgbClr val="EEEEEE"/>
-                      </a:solidFill>
-                      <a:prstDash val="solid"/>
-                      <a:round/>
-                      <a:headEnd type="none" w="med" len="med"/>
-                      <a:tailEnd type="none" w="med" len="med"/>
-                    </a:lnL>
-                    <a:lnR w="2540" cap="flat" cmpd="sng" algn="ctr">
-                      <a:solidFill>
-                        <a:srgbClr val="EEEEEE"/>
-                      </a:solidFill>
-                      <a:prstDash val="solid"/>
-                      <a:round/>
-                      <a:headEnd type="none" w="med" len="med"/>
-                      <a:tailEnd type="none" w="med" len="med"/>
-                    </a:lnR>
-                    <a:lnT w="2540" cap="flat" cmpd="sng" algn="ctr">
-                      <a:solidFill>
-                        <a:srgbClr val="EEEEEE"/>
-                      </a:solidFill>
-                      <a:prstDash val="solid"/>
-                      <a:round/>
-                      <a:headEnd type="none" w="med" len="med"/>
-                      <a:tailEnd type="none" w="med" len="med"/>
-                    </a:lnT>
-                    <a:lnB w="2540" cap="flat" cmpd="sng" algn="ctr">
-                      <a:solidFill>
-                        <a:srgbClr val="EEEEEE"/>
-                      </a:solidFill>
-                      <a:prstDash val="solid"/>
-                      <a:round/>
-                      <a:headEnd type="none" w="med" len="med"/>
-                      <a:tailEnd type="none" w="med" len="med"/>
-                    </a:lnB>
-                  </a:tcPr>
-                </a:tc>
-                <a:tc>
-                  <a:txBody>
-                    <a:bodyPr/>
-                    <a:lstStyle/>
-                    <a:p>
-                      <a:pPr algn="ctr" indent="0" marL="0">
-                        <a:buNone/>
-                      </a:pPr>
-                      <a:r>
-                        <a:rPr lang="en-US" sz="500" dirty="0">
-                          <a:solidFill>
-                            <a:srgbClr val="777777"/>
-                          </a:solidFill>
-                          <a:latin typeface="Calibri" pitchFamily="34" charset="0"/>
-                          <a:ea typeface="Calibri" pitchFamily="34" charset="-122"/>
-                          <a:cs typeface="Calibri" pitchFamily="34" charset="-120"/>
-                        </a:rPr>
-                        <a:t>0.73%</a:t>
-                      </a:r>
-                      <a:endParaRPr lang="en-US" sz="500" dirty="0">
-                        <a:latin typeface="Calibri" charset="0"/>
-                        <a:ea typeface="Calibri" charset="0"/>
-                        <a:cs typeface="Calibri" charset="0"/>
-                      </a:endParaRPr>
-                    </a:p>
-                  </a:txBody>
-                  <a:tcPr marL="91440" marR="91440" marT="45720" marB="45720">
-                    <a:lnL w="2540" cap="flat" cmpd="sng" algn="ctr">
-                      <a:solidFill>
-                        <a:srgbClr val="EEEEEE"/>
-                      </a:solidFill>
-                      <a:prstDash val="solid"/>
-                      <a:round/>
-                      <a:headEnd type="none" w="med" len="med"/>
-                      <a:tailEnd type="none" w="med" len="med"/>
-                    </a:lnL>
-                    <a:lnR w="2540" cap="flat" cmpd="sng" algn="ctr">
-                      <a:solidFill>
-                        <a:srgbClr val="EEEEEE"/>
-                      </a:solidFill>
-                      <a:prstDash val="solid"/>
-                      <a:round/>
-                      <a:headEnd type="none" w="med" len="med"/>
-                      <a:tailEnd type="none" w="med" len="med"/>
-                    </a:lnR>
-                    <a:lnT w="2540" cap="flat" cmpd="sng" algn="ctr">
-                      <a:solidFill>
-                        <a:srgbClr val="EEEEEE"/>
-                      </a:solidFill>
-                      <a:prstDash val="solid"/>
-                      <a:round/>
-                      <a:headEnd type="none" w="med" len="med"/>
-                      <a:tailEnd type="none" w="med" len="med"/>
-                    </a:lnT>
-                    <a:lnB w="2540" cap="flat" cmpd="sng" algn="ctr">
-                      <a:solidFill>
-                        <a:srgbClr val="EEEEEE"/>
-                      </a:solidFill>
-                      <a:prstDash val="solid"/>
-                      <a:round/>
-                      <a:headEnd type="none" w="med" len="med"/>
-                      <a:tailEnd type="none" w="med" len="med"/>
-                    </a:lnB>
-                  </a:tcPr>
-                </a:tc>
-                <a:tc>
-                  <a:txBody>
-                    <a:bodyPr/>
-                    <a:lstStyle/>
-                    <a:p>
-                      <a:pPr algn="ctr" indent="0" marL="0">
-                        <a:buNone/>
-                      </a:pPr>
-                      <a:r>
-                        <a:rPr lang="en-US" sz="500" b="1" dirty="0">
-                          <a:solidFill>
-                            <a:srgbClr val="777777"/>
-                          </a:solidFill>
-                          <a:latin typeface="Calibri" pitchFamily="34" charset="0"/>
-                          <a:ea typeface="Calibri" pitchFamily="34" charset="-122"/>
-                          <a:cs typeface="Calibri" pitchFamily="34" charset="-120"/>
-                        </a:rPr>
-                        <a:t>11.00%</a:t>
+                        <a:t>11.19%</a:t>
                       </a:r>
                       <a:endParaRPr lang="en-US" sz="500" dirty="0">
                         <a:latin typeface="Calibri" charset="0"/>
@@ -21448,7 +22906,7 @@
                           <a:ea typeface="Calibri" pitchFamily="34" charset="-122"/>
                           <a:cs typeface="Calibri" pitchFamily="34" charset="-120"/>
                         </a:rPr>
-                        <a:t>0.00%</a:t>
+                        <a:t>0.79%</a:t>
                       </a:r>
                       <a:endParaRPr lang="en-US" sz="500" dirty="0">
                         <a:latin typeface="Calibri" charset="0"/>
@@ -22163,7 +23621,7 @@
                           <a:ea typeface="Calibri" pitchFamily="34" charset="-122"/>
                           <a:cs typeface="Calibri" pitchFamily="34" charset="-120"/>
                         </a:rPr>
-                        <a:t>7.49%</a:t>
+                        <a:t>0.59%</a:t>
                       </a:r>
                       <a:endParaRPr lang="en-US" sz="500" dirty="0">
                         <a:latin typeface="Calibri" charset="0"/>
@@ -22228,7 +23686,7 @@
                           <a:ea typeface="Calibri" pitchFamily="34" charset="-122"/>
                           <a:cs typeface="Calibri" pitchFamily="34" charset="-120"/>
                         </a:rPr>
-                        <a:t>15.78%</a:t>
+                        <a:t>9.36%</a:t>
                       </a:r>
                       <a:endParaRPr lang="en-US" sz="500" dirty="0">
                         <a:latin typeface="Calibri" charset="0"/>
@@ -23194,7 +24652,7 @@
                           <a:ea typeface="Calibri" pitchFamily="34" charset="-122"/>
                           <a:cs typeface="Calibri" pitchFamily="34" charset="-120"/>
                         </a:rPr>
-                        <a:t>11.51%</a:t>
+                        <a:t>11.72%</a:t>
                       </a:r>
                       <a:endParaRPr lang="en-US" sz="500" dirty="0">
                         <a:latin typeface="Calibri" charset="0"/>
@@ -23391,7 +24849,7 @@
                           <a:ea typeface="Calibri" pitchFamily="34" charset="-122"/>
                           <a:cs typeface="Calibri" pitchFamily="34" charset="-120"/>
                         </a:rPr>
-                        <a:t>0.69%</a:t>
+                        <a:t>0.74%</a:t>
                       </a:r>
                       <a:endParaRPr lang="en-US" sz="500" dirty="0">
                         <a:latin typeface="Calibri" charset="0"/>
@@ -23456,7 +24914,7 @@
                           <a:ea typeface="Calibri" pitchFamily="34" charset="-122"/>
                           <a:cs typeface="Calibri" pitchFamily="34" charset="-120"/>
                         </a:rPr>
-                        <a:t>0.60%</a:t>
+                        <a:t>0.61%</a:t>
                       </a:r>
                       <a:endParaRPr lang="en-US" sz="500" dirty="0">
                         <a:latin typeface="Calibri" charset="0"/>
@@ -23521,7 +24979,7 @@
                           <a:ea typeface="Calibri" pitchFamily="34" charset="-122"/>
                           <a:cs typeface="Calibri" pitchFamily="34" charset="-120"/>
                         </a:rPr>
-                        <a:t>0.60%</a:t>
+                        <a:t>0.56%</a:t>
                       </a:r>
                       <a:endParaRPr lang="en-US" sz="500" dirty="0">
                         <a:latin typeface="Calibri" charset="0"/>
@@ -23586,6 +25044,71 @@
                           <a:ea typeface="Calibri" pitchFamily="34" charset="-122"/>
                           <a:cs typeface="Calibri" pitchFamily="34" charset="-120"/>
                         </a:rPr>
+                        <a:t>0.61%</a:t>
+                      </a:r>
+                      <a:endParaRPr lang="en-US" sz="500" dirty="0">
+                        <a:latin typeface="Calibri" charset="0"/>
+                        <a:ea typeface="Calibri" charset="0"/>
+                        <a:cs typeface="Calibri" charset="0"/>
+                      </a:endParaRPr>
+                    </a:p>
+                  </a:txBody>
+                  <a:tcPr marL="91440" marR="91440" marT="45720" marB="45720">
+                    <a:lnL w="2540" cap="flat" cmpd="sng" algn="ctr">
+                      <a:solidFill>
+                        <a:srgbClr val="EEEEEE"/>
+                      </a:solidFill>
+                      <a:prstDash val="solid"/>
+                      <a:round/>
+                      <a:headEnd type="none" w="med" len="med"/>
+                      <a:tailEnd type="none" w="med" len="med"/>
+                    </a:lnL>
+                    <a:lnR w="2540" cap="flat" cmpd="sng" algn="ctr">
+                      <a:solidFill>
+                        <a:srgbClr val="EEEEEE"/>
+                      </a:solidFill>
+                      <a:prstDash val="solid"/>
+                      <a:round/>
+                      <a:headEnd type="none" w="med" len="med"/>
+                      <a:tailEnd type="none" w="med" len="med"/>
+                    </a:lnR>
+                    <a:lnT w="2540" cap="flat" cmpd="sng" algn="ctr">
+                      <a:solidFill>
+                        <a:srgbClr val="EEEEEE"/>
+                      </a:solidFill>
+                      <a:prstDash val="solid"/>
+                      <a:round/>
+                      <a:headEnd type="none" w="med" len="med"/>
+                      <a:tailEnd type="none" w="med" len="med"/>
+                    </a:lnT>
+                    <a:lnB w="2540" cap="flat" cmpd="sng" algn="ctr">
+                      <a:solidFill>
+                        <a:srgbClr val="EEEEEE"/>
+                      </a:solidFill>
+                      <a:prstDash val="solid"/>
+                      <a:round/>
+                      <a:headEnd type="none" w="med" len="med"/>
+                      <a:tailEnd type="none" w="med" len="med"/>
+                    </a:lnB>
+                  </a:tcPr>
+                </a:tc>
+                <a:tc>
+                  <a:txBody>
+                    <a:bodyPr/>
+                    <a:lstStyle/>
+                    <a:p>
+                      <a:pPr algn="ctr" indent="0" marL="0">
+                        <a:buNone/>
+                      </a:pPr>
+                      <a:r>
+                        <a:rPr lang="en-US" sz="500" dirty="0">
+                          <a:solidFill>
+                            <a:srgbClr val="777777"/>
+                          </a:solidFill>
+                          <a:latin typeface="Calibri" pitchFamily="34" charset="0"/>
+                          <a:ea typeface="Calibri" pitchFamily="34" charset="-122"/>
+                          <a:cs typeface="Calibri" pitchFamily="34" charset="-120"/>
+                        </a:rPr>
                         <a:t>0.55%</a:t>
                       </a:r>
                       <a:endParaRPr lang="en-US" sz="500" dirty="0">
@@ -23651,6 +25174,71 @@
                           <a:ea typeface="Calibri" pitchFamily="34" charset="-122"/>
                           <a:cs typeface="Calibri" pitchFamily="34" charset="-120"/>
                         </a:rPr>
+                        <a:t>0.46%</a:t>
+                      </a:r>
+                      <a:endParaRPr lang="en-US" sz="500" dirty="0">
+                        <a:latin typeface="Calibri" charset="0"/>
+                        <a:ea typeface="Calibri" charset="0"/>
+                        <a:cs typeface="Calibri" charset="0"/>
+                      </a:endParaRPr>
+                    </a:p>
+                  </a:txBody>
+                  <a:tcPr marL="91440" marR="91440" marT="45720" marB="45720">
+                    <a:lnL w="2540" cap="flat" cmpd="sng" algn="ctr">
+                      <a:solidFill>
+                        <a:srgbClr val="EEEEEE"/>
+                      </a:solidFill>
+                      <a:prstDash val="solid"/>
+                      <a:round/>
+                      <a:headEnd type="none" w="med" len="med"/>
+                      <a:tailEnd type="none" w="med" len="med"/>
+                    </a:lnL>
+                    <a:lnR w="2540" cap="flat" cmpd="sng" algn="ctr">
+                      <a:solidFill>
+                        <a:srgbClr val="EEEEEE"/>
+                      </a:solidFill>
+                      <a:prstDash val="solid"/>
+                      <a:round/>
+                      <a:headEnd type="none" w="med" len="med"/>
+                      <a:tailEnd type="none" w="med" len="med"/>
+                    </a:lnR>
+                    <a:lnT w="2540" cap="flat" cmpd="sng" algn="ctr">
+                      <a:solidFill>
+                        <a:srgbClr val="EEEEEE"/>
+                      </a:solidFill>
+                      <a:prstDash val="solid"/>
+                      <a:round/>
+                      <a:headEnd type="none" w="med" len="med"/>
+                      <a:tailEnd type="none" w="med" len="med"/>
+                    </a:lnT>
+                    <a:lnB w="2540" cap="flat" cmpd="sng" algn="ctr">
+                      <a:solidFill>
+                        <a:srgbClr val="EEEEEE"/>
+                      </a:solidFill>
+                      <a:prstDash val="solid"/>
+                      <a:round/>
+                      <a:headEnd type="none" w="med" len="med"/>
+                      <a:tailEnd type="none" w="med" len="med"/>
+                    </a:lnB>
+                  </a:tcPr>
+                </a:tc>
+                <a:tc>
+                  <a:txBody>
+                    <a:bodyPr/>
+                    <a:lstStyle/>
+                    <a:p>
+                      <a:pPr algn="ctr" indent="0" marL="0">
+                        <a:buNone/>
+                      </a:pPr>
+                      <a:r>
+                        <a:rPr lang="en-US" sz="500" dirty="0">
+                          <a:solidFill>
+                            <a:srgbClr val="777777"/>
+                          </a:solidFill>
+                          <a:latin typeface="Calibri" pitchFamily="34" charset="0"/>
+                          <a:ea typeface="Calibri" pitchFamily="34" charset="-122"/>
+                          <a:cs typeface="Calibri" pitchFamily="34" charset="-120"/>
+                        </a:rPr>
                         <a:t>0.53%</a:t>
                       </a:r>
                       <a:endParaRPr lang="en-US" sz="500" dirty="0">
@@ -23716,7 +25304,7 @@
                           <a:ea typeface="Calibri" pitchFamily="34" charset="-122"/>
                           <a:cs typeface="Calibri" pitchFamily="34" charset="-120"/>
                         </a:rPr>
-                        <a:t>0.49%</a:t>
+                        <a:t>0.48%</a:t>
                       </a:r>
                       <a:endParaRPr lang="en-US" sz="500" dirty="0">
                         <a:latin typeface="Calibri" charset="0"/>
@@ -23846,7 +25434,7 @@
                           <a:ea typeface="Calibri" pitchFamily="34" charset="-122"/>
                           <a:cs typeface="Calibri" pitchFamily="34" charset="-120"/>
                         </a:rPr>
-                        <a:t>0.48%</a:t>
+                        <a:t>0.45%</a:t>
                       </a:r>
                       <a:endParaRPr lang="en-US" sz="500" dirty="0">
                         <a:latin typeface="Calibri" charset="0"/>
@@ -23911,7 +25499,7 @@
                           <a:ea typeface="Calibri" pitchFamily="34" charset="-122"/>
                           <a:cs typeface="Calibri" pitchFamily="34" charset="-120"/>
                         </a:rPr>
-                        <a:t>0.46%</a:t>
+                        <a:t>0.44%</a:t>
                       </a:r>
                       <a:endParaRPr lang="en-US" sz="500" dirty="0">
                         <a:latin typeface="Calibri" charset="0"/>
@@ -23976,64 +25564,64 @@
                           <a:ea typeface="Calibri" pitchFamily="34" charset="-122"/>
                           <a:cs typeface="Calibri" pitchFamily="34" charset="-120"/>
                         </a:rPr>
-                        <a:t>0.45%</a:t>
-                      </a:r>
-                      <a:endParaRPr lang="en-US" sz="500" dirty="0">
-                        <a:latin typeface="Calibri" charset="0"/>
-                        <a:ea typeface="Calibri" charset="0"/>
-                        <a:cs typeface="Calibri" charset="0"/>
-                      </a:endParaRPr>
-                    </a:p>
-                  </a:txBody>
-                  <a:tcPr marL="91440" marR="91440" marT="45720" marB="45720">
-                    <a:lnL w="2540" cap="flat" cmpd="sng" algn="ctr">
-                      <a:solidFill>
-                        <a:srgbClr val="EEEEEE"/>
-                      </a:solidFill>
-                      <a:prstDash val="solid"/>
-                      <a:round/>
-                      <a:headEnd type="none" w="med" len="med"/>
-                      <a:tailEnd type="none" w="med" len="med"/>
-                    </a:lnL>
-                    <a:lnR w="2540" cap="flat" cmpd="sng" algn="ctr">
-                      <a:solidFill>
-                        <a:srgbClr val="EEEEEE"/>
-                      </a:solidFill>
-                      <a:prstDash val="solid"/>
-                      <a:round/>
-                      <a:headEnd type="none" w="med" len="med"/>
-                      <a:tailEnd type="none" w="med" len="med"/>
-                    </a:lnR>
-                    <a:lnT w="2540" cap="flat" cmpd="sng" algn="ctr">
-                      <a:solidFill>
-                        <a:srgbClr val="EEEEEE"/>
-                      </a:solidFill>
-                      <a:prstDash val="solid"/>
-                      <a:round/>
-                      <a:headEnd type="none" w="med" len="med"/>
-                      <a:tailEnd type="none" w="med" len="med"/>
-                    </a:lnT>
-                    <a:lnB w="2540" cap="flat" cmpd="sng" algn="ctr">
-                      <a:solidFill>
-                        <a:srgbClr val="EEEEEE"/>
-                      </a:solidFill>
-                      <a:prstDash val="solid"/>
-                      <a:round/>
-                      <a:headEnd type="none" w="med" len="med"/>
-                      <a:tailEnd type="none" w="med" len="med"/>
-                    </a:lnB>
-                  </a:tcPr>
-                </a:tc>
-                <a:tc>
-                  <a:txBody>
-                    <a:bodyPr/>
-                    <a:lstStyle/>
-                    <a:p>
-                      <a:pPr algn="ctr" indent="0" marL="0">
-                        <a:buNone/>
-                      </a:pPr>
-                      <a:r>
-                        <a:rPr lang="en-US" sz="500" dirty="0">
+                        <a:t>0.44%</a:t>
+                      </a:r>
+                      <a:endParaRPr lang="en-US" sz="500" dirty="0">
+                        <a:latin typeface="Calibri" charset="0"/>
+                        <a:ea typeface="Calibri" charset="0"/>
+                        <a:cs typeface="Calibri" charset="0"/>
+                      </a:endParaRPr>
+                    </a:p>
+                  </a:txBody>
+                  <a:tcPr marL="91440" marR="91440" marT="45720" marB="45720">
+                    <a:lnL w="2540" cap="flat" cmpd="sng" algn="ctr">
+                      <a:solidFill>
+                        <a:srgbClr val="EEEEEE"/>
+                      </a:solidFill>
+                      <a:prstDash val="solid"/>
+                      <a:round/>
+                      <a:headEnd type="none" w="med" len="med"/>
+                      <a:tailEnd type="none" w="med" len="med"/>
+                    </a:lnL>
+                    <a:lnR w="2540" cap="flat" cmpd="sng" algn="ctr">
+                      <a:solidFill>
+                        <a:srgbClr val="EEEEEE"/>
+                      </a:solidFill>
+                      <a:prstDash val="solid"/>
+                      <a:round/>
+                      <a:headEnd type="none" w="med" len="med"/>
+                      <a:tailEnd type="none" w="med" len="med"/>
+                    </a:lnR>
+                    <a:lnT w="2540" cap="flat" cmpd="sng" algn="ctr">
+                      <a:solidFill>
+                        <a:srgbClr val="EEEEEE"/>
+                      </a:solidFill>
+                      <a:prstDash val="solid"/>
+                      <a:round/>
+                      <a:headEnd type="none" w="med" len="med"/>
+                      <a:tailEnd type="none" w="med" len="med"/>
+                    </a:lnT>
+                    <a:lnB w="2540" cap="flat" cmpd="sng" algn="ctr">
+                      <a:solidFill>
+                        <a:srgbClr val="EEEEEE"/>
+                      </a:solidFill>
+                      <a:prstDash val="solid"/>
+                      <a:round/>
+                      <a:headEnd type="none" w="med" len="med"/>
+                      <a:tailEnd type="none" w="med" len="med"/>
+                    </a:lnB>
+                  </a:tcPr>
+                </a:tc>
+                <a:tc>
+                  <a:txBody>
+                    <a:bodyPr/>
+                    <a:lstStyle/>
+                    <a:p>
+                      <a:pPr algn="ctr" indent="0" marL="0">
+                        <a:buNone/>
+                      </a:pPr>
+                      <a:r>
+                        <a:rPr lang="en-US" sz="500" b="1" dirty="0">
                           <a:solidFill>
                             <a:srgbClr val="777777"/>
                           </a:solidFill>
@@ -24041,137 +25629,7 @@
                           <a:ea typeface="Calibri" pitchFamily="34" charset="-122"/>
                           <a:cs typeface="Calibri" pitchFamily="34" charset="-120"/>
                         </a:rPr>
-                        <a:t>0.44%</a:t>
-                      </a:r>
-                      <a:endParaRPr lang="en-US" sz="500" dirty="0">
-                        <a:latin typeface="Calibri" charset="0"/>
-                        <a:ea typeface="Calibri" charset="0"/>
-                        <a:cs typeface="Calibri" charset="0"/>
-                      </a:endParaRPr>
-                    </a:p>
-                  </a:txBody>
-                  <a:tcPr marL="91440" marR="91440" marT="45720" marB="45720">
-                    <a:lnL w="2540" cap="flat" cmpd="sng" algn="ctr">
-                      <a:solidFill>
-                        <a:srgbClr val="EEEEEE"/>
-                      </a:solidFill>
-                      <a:prstDash val="solid"/>
-                      <a:round/>
-                      <a:headEnd type="none" w="med" len="med"/>
-                      <a:tailEnd type="none" w="med" len="med"/>
-                    </a:lnL>
-                    <a:lnR w="2540" cap="flat" cmpd="sng" algn="ctr">
-                      <a:solidFill>
-                        <a:srgbClr val="EEEEEE"/>
-                      </a:solidFill>
-                      <a:prstDash val="solid"/>
-                      <a:round/>
-                      <a:headEnd type="none" w="med" len="med"/>
-                      <a:tailEnd type="none" w="med" len="med"/>
-                    </a:lnR>
-                    <a:lnT w="2540" cap="flat" cmpd="sng" algn="ctr">
-                      <a:solidFill>
-                        <a:srgbClr val="EEEEEE"/>
-                      </a:solidFill>
-                      <a:prstDash val="solid"/>
-                      <a:round/>
-                      <a:headEnd type="none" w="med" len="med"/>
-                      <a:tailEnd type="none" w="med" len="med"/>
-                    </a:lnT>
-                    <a:lnB w="2540" cap="flat" cmpd="sng" algn="ctr">
-                      <a:solidFill>
-                        <a:srgbClr val="EEEEEE"/>
-                      </a:solidFill>
-                      <a:prstDash val="solid"/>
-                      <a:round/>
-                      <a:headEnd type="none" w="med" len="med"/>
-                      <a:tailEnd type="none" w="med" len="med"/>
-                    </a:lnB>
-                  </a:tcPr>
-                </a:tc>
-                <a:tc>
-                  <a:txBody>
-                    <a:bodyPr/>
-                    <a:lstStyle/>
-                    <a:p>
-                      <a:pPr algn="ctr" indent="0" marL="0">
-                        <a:buNone/>
-                      </a:pPr>
-                      <a:r>
-                        <a:rPr lang="en-US" sz="500" dirty="0">
-                          <a:solidFill>
-                            <a:srgbClr val="777777"/>
-                          </a:solidFill>
-                          <a:latin typeface="Calibri" pitchFamily="34" charset="0"/>
-                          <a:ea typeface="Calibri" pitchFamily="34" charset="-122"/>
-                          <a:cs typeface="Calibri" pitchFamily="34" charset="-120"/>
-                        </a:rPr>
-                        <a:t>0.43%</a:t>
-                      </a:r>
-                      <a:endParaRPr lang="en-US" sz="500" dirty="0">
-                        <a:latin typeface="Calibri" charset="0"/>
-                        <a:ea typeface="Calibri" charset="0"/>
-                        <a:cs typeface="Calibri" charset="0"/>
-                      </a:endParaRPr>
-                    </a:p>
-                  </a:txBody>
-                  <a:tcPr marL="91440" marR="91440" marT="45720" marB="45720">
-                    <a:lnL w="2540" cap="flat" cmpd="sng" algn="ctr">
-                      <a:solidFill>
-                        <a:srgbClr val="EEEEEE"/>
-                      </a:solidFill>
-                      <a:prstDash val="solid"/>
-                      <a:round/>
-                      <a:headEnd type="none" w="med" len="med"/>
-                      <a:tailEnd type="none" w="med" len="med"/>
-                    </a:lnL>
-                    <a:lnR w="2540" cap="flat" cmpd="sng" algn="ctr">
-                      <a:solidFill>
-                        <a:srgbClr val="EEEEEE"/>
-                      </a:solidFill>
-                      <a:prstDash val="solid"/>
-                      <a:round/>
-                      <a:headEnd type="none" w="med" len="med"/>
-                      <a:tailEnd type="none" w="med" len="med"/>
-                    </a:lnR>
-                    <a:lnT w="2540" cap="flat" cmpd="sng" algn="ctr">
-                      <a:solidFill>
-                        <a:srgbClr val="EEEEEE"/>
-                      </a:solidFill>
-                      <a:prstDash val="solid"/>
-                      <a:round/>
-                      <a:headEnd type="none" w="med" len="med"/>
-                      <a:tailEnd type="none" w="med" len="med"/>
-                    </a:lnT>
-                    <a:lnB w="2540" cap="flat" cmpd="sng" algn="ctr">
-                      <a:solidFill>
-                        <a:srgbClr val="EEEEEE"/>
-                      </a:solidFill>
-                      <a:prstDash val="solid"/>
-                      <a:round/>
-                      <a:headEnd type="none" w="med" len="med"/>
-                      <a:tailEnd type="none" w="med" len="med"/>
-                    </a:lnB>
-                  </a:tcPr>
-                </a:tc>
-                <a:tc>
-                  <a:txBody>
-                    <a:bodyPr/>
-                    <a:lstStyle/>
-                    <a:p>
-                      <a:pPr algn="ctr" indent="0" marL="0">
-                        <a:buNone/>
-                      </a:pPr>
-                      <a:r>
-                        <a:rPr lang="en-US" sz="500" b="1" dirty="0">
-                          <a:solidFill>
-                            <a:srgbClr val="777777"/>
-                          </a:solidFill>
-                          <a:latin typeface="Calibri" pitchFamily="34" charset="0"/>
-                          <a:ea typeface="Calibri" pitchFamily="34" charset="-122"/>
-                          <a:cs typeface="Calibri" pitchFamily="34" charset="-120"/>
-                        </a:rPr>
-                        <a:t>6.38%</a:t>
+                        <a:t>6.54%</a:t>
                       </a:r>
                       <a:endParaRPr lang="en-US" sz="500" dirty="0">
                         <a:latin typeface="Calibri" charset="0"/>
@@ -24357,7 +25815,7 @@
                           <a:ea typeface="Calibri" pitchFamily="34" charset="-122"/>
                           <a:cs typeface="Calibri" pitchFamily="34" charset="-120"/>
                         </a:rPr>
-                        <a:t>0.00%</a:t>
+                        <a:t>0.57%</a:t>
                       </a:r>
                       <a:endParaRPr lang="en-US" sz="500" dirty="0">
                         <a:latin typeface="Calibri" charset="0"/>
@@ -25072,7 +26530,7 @@
                           <a:ea typeface="Calibri" pitchFamily="34" charset="-122"/>
                           <a:cs typeface="Calibri" pitchFamily="34" charset="-120"/>
                         </a:rPr>
-                        <a:t>-2.99%</a:t>
+                        <a:t>0.31%</a:t>
                       </a:r>
                       <a:endParaRPr lang="en-US" sz="500" dirty="0">
                         <a:latin typeface="Calibri" charset="0"/>
@@ -25137,7 +26595,7 @@
                           <a:ea typeface="Calibri" pitchFamily="34" charset="-122"/>
                           <a:cs typeface="Calibri" pitchFamily="34" charset="-120"/>
                         </a:rPr>
-                        <a:t>0.85%</a:t>
+                        <a:t>4.95%</a:t>
                       </a:r>
                       <a:endParaRPr lang="en-US" sz="500" dirty="0">
                         <a:latin typeface="Calibri" charset="0"/>
@@ -26103,7 +27561,7 @@
                           <a:ea typeface="Calibri" pitchFamily="34" charset="-122"/>
                           <a:cs typeface="Calibri" pitchFamily="34" charset="-120"/>
                         </a:rPr>
-                        <a:t>6.91%</a:t>
+                        <a:t>7.02%</a:t>
                       </a:r>
                       <a:endParaRPr lang="en-US" sz="500" dirty="0">
                         <a:latin typeface="Calibri" charset="0"/>
@@ -26300,6 +27758,201 @@
                           <a:ea typeface="Calibri" pitchFamily="34" charset="-122"/>
                           <a:cs typeface="Calibri" pitchFamily="34" charset="-120"/>
                         </a:rPr>
+                        <a:t>0.45%</a:t>
+                      </a:r>
+                      <a:endParaRPr lang="en-US" sz="500" dirty="0">
+                        <a:latin typeface="Calibri" charset="0"/>
+                        <a:ea typeface="Calibri" charset="0"/>
+                        <a:cs typeface="Calibri" charset="0"/>
+                      </a:endParaRPr>
+                    </a:p>
+                  </a:txBody>
+                  <a:tcPr marL="91440" marR="91440" marT="45720" marB="45720">
+                    <a:lnL w="2540" cap="flat" cmpd="sng" algn="ctr">
+                      <a:solidFill>
+                        <a:srgbClr val="EEEEEE"/>
+                      </a:solidFill>
+                      <a:prstDash val="solid"/>
+                      <a:round/>
+                      <a:headEnd type="none" w="med" len="med"/>
+                      <a:tailEnd type="none" w="med" len="med"/>
+                    </a:lnL>
+                    <a:lnR w="2540" cap="flat" cmpd="sng" algn="ctr">
+                      <a:solidFill>
+                        <a:srgbClr val="EEEEEE"/>
+                      </a:solidFill>
+                      <a:prstDash val="solid"/>
+                      <a:round/>
+                      <a:headEnd type="none" w="med" len="med"/>
+                      <a:tailEnd type="none" w="med" len="med"/>
+                    </a:lnR>
+                    <a:lnT w="2540" cap="flat" cmpd="sng" algn="ctr">
+                      <a:solidFill>
+                        <a:srgbClr val="EEEEEE"/>
+                      </a:solidFill>
+                      <a:prstDash val="solid"/>
+                      <a:round/>
+                      <a:headEnd type="none" w="med" len="med"/>
+                      <a:tailEnd type="none" w="med" len="med"/>
+                    </a:lnT>
+                    <a:lnB w="2540" cap="flat" cmpd="sng" algn="ctr">
+                      <a:solidFill>
+                        <a:srgbClr val="EEEEEE"/>
+                      </a:solidFill>
+                      <a:prstDash val="solid"/>
+                      <a:round/>
+                      <a:headEnd type="none" w="med" len="med"/>
+                      <a:tailEnd type="none" w="med" len="med"/>
+                    </a:lnB>
+                  </a:tcPr>
+                </a:tc>
+                <a:tc>
+                  <a:txBody>
+                    <a:bodyPr/>
+                    <a:lstStyle/>
+                    <a:p>
+                      <a:pPr algn="ctr" indent="0" marL="0">
+                        <a:buNone/>
+                      </a:pPr>
+                      <a:r>
+                        <a:rPr lang="en-US" sz="500" dirty="0">
+                          <a:solidFill>
+                            <a:srgbClr val="777777"/>
+                          </a:solidFill>
+                          <a:latin typeface="Calibri" pitchFamily="34" charset="0"/>
+                          <a:ea typeface="Calibri" pitchFamily="34" charset="-122"/>
+                          <a:cs typeface="Calibri" pitchFamily="34" charset="-120"/>
+                        </a:rPr>
+                        <a:t>0.39%</a:t>
+                      </a:r>
+                      <a:endParaRPr lang="en-US" sz="500" dirty="0">
+                        <a:latin typeface="Calibri" charset="0"/>
+                        <a:ea typeface="Calibri" charset="0"/>
+                        <a:cs typeface="Calibri" charset="0"/>
+                      </a:endParaRPr>
+                    </a:p>
+                  </a:txBody>
+                  <a:tcPr marL="91440" marR="91440" marT="45720" marB="45720">
+                    <a:lnL w="2540" cap="flat" cmpd="sng" algn="ctr">
+                      <a:solidFill>
+                        <a:srgbClr val="EEEEEE"/>
+                      </a:solidFill>
+                      <a:prstDash val="solid"/>
+                      <a:round/>
+                      <a:headEnd type="none" w="med" len="med"/>
+                      <a:tailEnd type="none" w="med" len="med"/>
+                    </a:lnL>
+                    <a:lnR w="2540" cap="flat" cmpd="sng" algn="ctr">
+                      <a:solidFill>
+                        <a:srgbClr val="EEEEEE"/>
+                      </a:solidFill>
+                      <a:prstDash val="solid"/>
+                      <a:round/>
+                      <a:headEnd type="none" w="med" len="med"/>
+                      <a:tailEnd type="none" w="med" len="med"/>
+                    </a:lnR>
+                    <a:lnT w="2540" cap="flat" cmpd="sng" algn="ctr">
+                      <a:solidFill>
+                        <a:srgbClr val="EEEEEE"/>
+                      </a:solidFill>
+                      <a:prstDash val="solid"/>
+                      <a:round/>
+                      <a:headEnd type="none" w="med" len="med"/>
+                      <a:tailEnd type="none" w="med" len="med"/>
+                    </a:lnT>
+                    <a:lnB w="2540" cap="flat" cmpd="sng" algn="ctr">
+                      <a:solidFill>
+                        <a:srgbClr val="EEEEEE"/>
+                      </a:solidFill>
+                      <a:prstDash val="solid"/>
+                      <a:round/>
+                      <a:headEnd type="none" w="med" len="med"/>
+                      <a:tailEnd type="none" w="med" len="med"/>
+                    </a:lnB>
+                  </a:tcPr>
+                </a:tc>
+                <a:tc>
+                  <a:txBody>
+                    <a:bodyPr/>
+                    <a:lstStyle/>
+                    <a:p>
+                      <a:pPr algn="ctr" indent="0" marL="0">
+                        <a:buNone/>
+                      </a:pPr>
+                      <a:r>
+                        <a:rPr lang="en-US" sz="500" dirty="0">
+                          <a:solidFill>
+                            <a:srgbClr val="777777"/>
+                          </a:solidFill>
+                          <a:latin typeface="Calibri" pitchFamily="34" charset="0"/>
+                          <a:ea typeface="Calibri" pitchFamily="34" charset="-122"/>
+                          <a:cs typeface="Calibri" pitchFamily="34" charset="-120"/>
+                        </a:rPr>
+                        <a:t>0.43%</a:t>
+                      </a:r>
+                      <a:endParaRPr lang="en-US" sz="500" dirty="0">
+                        <a:latin typeface="Calibri" charset="0"/>
+                        <a:ea typeface="Calibri" charset="0"/>
+                        <a:cs typeface="Calibri" charset="0"/>
+                      </a:endParaRPr>
+                    </a:p>
+                  </a:txBody>
+                  <a:tcPr marL="91440" marR="91440" marT="45720" marB="45720">
+                    <a:lnL w="2540" cap="flat" cmpd="sng" algn="ctr">
+                      <a:solidFill>
+                        <a:srgbClr val="EEEEEE"/>
+                      </a:solidFill>
+                      <a:prstDash val="solid"/>
+                      <a:round/>
+                      <a:headEnd type="none" w="med" len="med"/>
+                      <a:tailEnd type="none" w="med" len="med"/>
+                    </a:lnL>
+                    <a:lnR w="2540" cap="flat" cmpd="sng" algn="ctr">
+                      <a:solidFill>
+                        <a:srgbClr val="EEEEEE"/>
+                      </a:solidFill>
+                      <a:prstDash val="solid"/>
+                      <a:round/>
+                      <a:headEnd type="none" w="med" len="med"/>
+                      <a:tailEnd type="none" w="med" len="med"/>
+                    </a:lnR>
+                    <a:lnT w="2540" cap="flat" cmpd="sng" algn="ctr">
+                      <a:solidFill>
+                        <a:srgbClr val="EEEEEE"/>
+                      </a:solidFill>
+                      <a:prstDash val="solid"/>
+                      <a:round/>
+                      <a:headEnd type="none" w="med" len="med"/>
+                      <a:tailEnd type="none" w="med" len="med"/>
+                    </a:lnT>
+                    <a:lnB w="2540" cap="flat" cmpd="sng" algn="ctr">
+                      <a:solidFill>
+                        <a:srgbClr val="EEEEEE"/>
+                      </a:solidFill>
+                      <a:prstDash val="solid"/>
+                      <a:round/>
+                      <a:headEnd type="none" w="med" len="med"/>
+                      <a:tailEnd type="none" w="med" len="med"/>
+                    </a:lnB>
+                  </a:tcPr>
+                </a:tc>
+                <a:tc>
+                  <a:txBody>
+                    <a:bodyPr/>
+                    <a:lstStyle/>
+                    <a:p>
+                      <a:pPr algn="ctr" indent="0" marL="0">
+                        <a:buNone/>
+                      </a:pPr>
+                      <a:r>
+                        <a:rPr lang="en-US" sz="500" dirty="0">
+                          <a:solidFill>
+                            <a:srgbClr val="777777"/>
+                          </a:solidFill>
+                          <a:latin typeface="Calibri" pitchFamily="34" charset="0"/>
+                          <a:ea typeface="Calibri" pitchFamily="34" charset="-122"/>
+                          <a:cs typeface="Calibri" pitchFamily="34" charset="-120"/>
+                        </a:rPr>
                         <a:t>0.42%</a:t>
                       </a:r>
                       <a:endParaRPr lang="en-US" sz="500" dirty="0">
@@ -26430,6 +28083,201 @@
                           <a:ea typeface="Calibri" pitchFamily="34" charset="-122"/>
                           <a:cs typeface="Calibri" pitchFamily="34" charset="-120"/>
                         </a:rPr>
+                        <a:t>0.43%</a:t>
+                      </a:r>
+                      <a:endParaRPr lang="en-US" sz="500" dirty="0">
+                        <a:latin typeface="Calibri" charset="0"/>
+                        <a:ea typeface="Calibri" charset="0"/>
+                        <a:cs typeface="Calibri" charset="0"/>
+                      </a:endParaRPr>
+                    </a:p>
+                  </a:txBody>
+                  <a:tcPr marL="91440" marR="91440" marT="45720" marB="45720">
+                    <a:lnL w="2540" cap="flat" cmpd="sng" algn="ctr">
+                      <a:solidFill>
+                        <a:srgbClr val="EEEEEE"/>
+                      </a:solidFill>
+                      <a:prstDash val="solid"/>
+                      <a:round/>
+                      <a:headEnd type="none" w="med" len="med"/>
+                      <a:tailEnd type="none" w="med" len="med"/>
+                    </a:lnL>
+                    <a:lnR w="2540" cap="flat" cmpd="sng" algn="ctr">
+                      <a:solidFill>
+                        <a:srgbClr val="EEEEEE"/>
+                      </a:solidFill>
+                      <a:prstDash val="solid"/>
+                      <a:round/>
+                      <a:headEnd type="none" w="med" len="med"/>
+                      <a:tailEnd type="none" w="med" len="med"/>
+                    </a:lnR>
+                    <a:lnT w="2540" cap="flat" cmpd="sng" algn="ctr">
+                      <a:solidFill>
+                        <a:srgbClr val="EEEEEE"/>
+                      </a:solidFill>
+                      <a:prstDash val="solid"/>
+                      <a:round/>
+                      <a:headEnd type="none" w="med" len="med"/>
+                      <a:tailEnd type="none" w="med" len="med"/>
+                    </a:lnT>
+                    <a:lnB w="2540" cap="flat" cmpd="sng" algn="ctr">
+                      <a:solidFill>
+                        <a:srgbClr val="EEEEEE"/>
+                      </a:solidFill>
+                      <a:prstDash val="solid"/>
+                      <a:round/>
+                      <a:headEnd type="none" w="med" len="med"/>
+                      <a:tailEnd type="none" w="med" len="med"/>
+                    </a:lnB>
+                  </a:tcPr>
+                </a:tc>
+                <a:tc>
+                  <a:txBody>
+                    <a:bodyPr/>
+                    <a:lstStyle/>
+                    <a:p>
+                      <a:pPr algn="ctr" indent="0" marL="0">
+                        <a:buNone/>
+                      </a:pPr>
+                      <a:r>
+                        <a:rPr lang="en-US" sz="500" dirty="0">
+                          <a:solidFill>
+                            <a:srgbClr val="777777"/>
+                          </a:solidFill>
+                          <a:latin typeface="Calibri" pitchFamily="34" charset="0"/>
+                          <a:ea typeface="Calibri" pitchFamily="34" charset="-122"/>
+                          <a:cs typeface="Calibri" pitchFamily="34" charset="-120"/>
+                        </a:rPr>
+                        <a:t>0.43%</a:t>
+                      </a:r>
+                      <a:endParaRPr lang="en-US" sz="500" dirty="0">
+                        <a:latin typeface="Calibri" charset="0"/>
+                        <a:ea typeface="Calibri" charset="0"/>
+                        <a:cs typeface="Calibri" charset="0"/>
+                      </a:endParaRPr>
+                    </a:p>
+                  </a:txBody>
+                  <a:tcPr marL="91440" marR="91440" marT="45720" marB="45720">
+                    <a:lnL w="2540" cap="flat" cmpd="sng" algn="ctr">
+                      <a:solidFill>
+                        <a:srgbClr val="EEEEEE"/>
+                      </a:solidFill>
+                      <a:prstDash val="solid"/>
+                      <a:round/>
+                      <a:headEnd type="none" w="med" len="med"/>
+                      <a:tailEnd type="none" w="med" len="med"/>
+                    </a:lnL>
+                    <a:lnR w="2540" cap="flat" cmpd="sng" algn="ctr">
+                      <a:solidFill>
+                        <a:srgbClr val="EEEEEE"/>
+                      </a:solidFill>
+                      <a:prstDash val="solid"/>
+                      <a:round/>
+                      <a:headEnd type="none" w="med" len="med"/>
+                      <a:tailEnd type="none" w="med" len="med"/>
+                    </a:lnR>
+                    <a:lnT w="2540" cap="flat" cmpd="sng" algn="ctr">
+                      <a:solidFill>
+                        <a:srgbClr val="EEEEEE"/>
+                      </a:solidFill>
+                      <a:prstDash val="solid"/>
+                      <a:round/>
+                      <a:headEnd type="none" w="med" len="med"/>
+                      <a:tailEnd type="none" w="med" len="med"/>
+                    </a:lnT>
+                    <a:lnB w="2540" cap="flat" cmpd="sng" algn="ctr">
+                      <a:solidFill>
+                        <a:srgbClr val="EEEEEE"/>
+                      </a:solidFill>
+                      <a:prstDash val="solid"/>
+                      <a:round/>
+                      <a:headEnd type="none" w="med" len="med"/>
+                      <a:tailEnd type="none" w="med" len="med"/>
+                    </a:lnB>
+                  </a:tcPr>
+                </a:tc>
+                <a:tc>
+                  <a:txBody>
+                    <a:bodyPr/>
+                    <a:lstStyle/>
+                    <a:p>
+                      <a:pPr algn="ctr" indent="0" marL="0">
+                        <a:buNone/>
+                      </a:pPr>
+                      <a:r>
+                        <a:rPr lang="en-US" sz="500" dirty="0">
+                          <a:solidFill>
+                            <a:srgbClr val="777777"/>
+                          </a:solidFill>
+                          <a:latin typeface="Calibri" pitchFamily="34" charset="0"/>
+                          <a:ea typeface="Calibri" pitchFamily="34" charset="-122"/>
+                          <a:cs typeface="Calibri" pitchFamily="34" charset="-120"/>
+                        </a:rPr>
+                        <a:t>0.38%</a:t>
+                      </a:r>
+                      <a:endParaRPr lang="en-US" sz="500" dirty="0">
+                        <a:latin typeface="Calibri" charset="0"/>
+                        <a:ea typeface="Calibri" charset="0"/>
+                        <a:cs typeface="Calibri" charset="0"/>
+                      </a:endParaRPr>
+                    </a:p>
+                  </a:txBody>
+                  <a:tcPr marL="91440" marR="91440" marT="45720" marB="45720">
+                    <a:lnL w="2540" cap="flat" cmpd="sng" algn="ctr">
+                      <a:solidFill>
+                        <a:srgbClr val="EEEEEE"/>
+                      </a:solidFill>
+                      <a:prstDash val="solid"/>
+                      <a:round/>
+                      <a:headEnd type="none" w="med" len="med"/>
+                      <a:tailEnd type="none" w="med" len="med"/>
+                    </a:lnL>
+                    <a:lnR w="2540" cap="flat" cmpd="sng" algn="ctr">
+                      <a:solidFill>
+                        <a:srgbClr val="EEEEEE"/>
+                      </a:solidFill>
+                      <a:prstDash val="solid"/>
+                      <a:round/>
+                      <a:headEnd type="none" w="med" len="med"/>
+                      <a:tailEnd type="none" w="med" len="med"/>
+                    </a:lnR>
+                    <a:lnT w="2540" cap="flat" cmpd="sng" algn="ctr">
+                      <a:solidFill>
+                        <a:srgbClr val="EEEEEE"/>
+                      </a:solidFill>
+                      <a:prstDash val="solid"/>
+                      <a:round/>
+                      <a:headEnd type="none" w="med" len="med"/>
+                      <a:tailEnd type="none" w="med" len="med"/>
+                    </a:lnT>
+                    <a:lnB w="2540" cap="flat" cmpd="sng" algn="ctr">
+                      <a:solidFill>
+                        <a:srgbClr val="EEEEEE"/>
+                      </a:solidFill>
+                      <a:prstDash val="solid"/>
+                      <a:round/>
+                      <a:headEnd type="none" w="med" len="med"/>
+                      <a:tailEnd type="none" w="med" len="med"/>
+                    </a:lnB>
+                  </a:tcPr>
+                </a:tc>
+                <a:tc>
+                  <a:txBody>
+                    <a:bodyPr/>
+                    <a:lstStyle/>
+                    <a:p>
+                      <a:pPr algn="ctr" indent="0" marL="0">
+                        <a:buNone/>
+                      </a:pPr>
+                      <a:r>
+                        <a:rPr lang="en-US" sz="500" dirty="0">
+                          <a:solidFill>
+                            <a:srgbClr val="777777"/>
+                          </a:solidFill>
+                          <a:latin typeface="Calibri" pitchFamily="34" charset="0"/>
+                          <a:ea typeface="Calibri" pitchFamily="34" charset="-122"/>
+                          <a:cs typeface="Calibri" pitchFamily="34" charset="-120"/>
+                        </a:rPr>
                         <a:t>0.42%</a:t>
                       </a:r>
                       <a:endParaRPr lang="en-US" sz="500" dirty="0">
@@ -26495,7 +28343,7 @@
                           <a:ea typeface="Calibri" pitchFamily="34" charset="-122"/>
                           <a:cs typeface="Calibri" pitchFamily="34" charset="-120"/>
                         </a:rPr>
-                        <a:t>0.42%</a:t>
+                        <a:t>0.40%</a:t>
                       </a:r>
                       <a:endParaRPr lang="en-US" sz="500" dirty="0">
                         <a:latin typeface="Calibri" charset="0"/>
@@ -26560,7 +28408,7 @@
                           <a:ea typeface="Calibri" pitchFamily="34" charset="-122"/>
                           <a:cs typeface="Calibri" pitchFamily="34" charset="-120"/>
                         </a:rPr>
-                        <a:t>0.42%</a:t>
+                        <a:t>0.38%</a:t>
                       </a:r>
                       <a:endParaRPr lang="en-US" sz="500" dirty="0">
                         <a:latin typeface="Calibri" charset="0"/>
@@ -26625,64 +28473,64 @@
                           <a:ea typeface="Calibri" pitchFamily="34" charset="-122"/>
                           <a:cs typeface="Calibri" pitchFamily="34" charset="-120"/>
                         </a:rPr>
-                        <a:t>0.42%</a:t>
-                      </a:r>
-                      <a:endParaRPr lang="en-US" sz="500" dirty="0">
-                        <a:latin typeface="Calibri" charset="0"/>
-                        <a:ea typeface="Calibri" charset="0"/>
-                        <a:cs typeface="Calibri" charset="0"/>
-                      </a:endParaRPr>
-                    </a:p>
-                  </a:txBody>
-                  <a:tcPr marL="91440" marR="91440" marT="45720" marB="45720">
-                    <a:lnL w="2540" cap="flat" cmpd="sng" algn="ctr">
-                      <a:solidFill>
-                        <a:srgbClr val="EEEEEE"/>
-                      </a:solidFill>
-                      <a:prstDash val="solid"/>
-                      <a:round/>
-                      <a:headEnd type="none" w="med" len="med"/>
-                      <a:tailEnd type="none" w="med" len="med"/>
-                    </a:lnL>
-                    <a:lnR w="2540" cap="flat" cmpd="sng" algn="ctr">
-                      <a:solidFill>
-                        <a:srgbClr val="EEEEEE"/>
-                      </a:solidFill>
-                      <a:prstDash val="solid"/>
-                      <a:round/>
-                      <a:headEnd type="none" w="med" len="med"/>
-                      <a:tailEnd type="none" w="med" len="med"/>
-                    </a:lnR>
-                    <a:lnT w="2540" cap="flat" cmpd="sng" algn="ctr">
-                      <a:solidFill>
-                        <a:srgbClr val="EEEEEE"/>
-                      </a:solidFill>
-                      <a:prstDash val="solid"/>
-                      <a:round/>
-                      <a:headEnd type="none" w="med" len="med"/>
-                      <a:tailEnd type="none" w="med" len="med"/>
-                    </a:lnT>
-                    <a:lnB w="2540" cap="flat" cmpd="sng" algn="ctr">
-                      <a:solidFill>
-                        <a:srgbClr val="EEEEEE"/>
-                      </a:solidFill>
-                      <a:prstDash val="solid"/>
-                      <a:round/>
-                      <a:headEnd type="none" w="med" len="med"/>
-                      <a:tailEnd type="none" w="med" len="med"/>
-                    </a:lnB>
-                  </a:tcPr>
-                </a:tc>
-                <a:tc>
-                  <a:txBody>
-                    <a:bodyPr/>
-                    <a:lstStyle/>
-                    <a:p>
-                      <a:pPr algn="ctr" indent="0" marL="0">
-                        <a:buNone/>
-                      </a:pPr>
-                      <a:r>
-                        <a:rPr lang="en-US" sz="500" dirty="0">
+                        <a:t>0.41%</a:t>
+                      </a:r>
+                      <a:endParaRPr lang="en-US" sz="500" dirty="0">
+                        <a:latin typeface="Calibri" charset="0"/>
+                        <a:ea typeface="Calibri" charset="0"/>
+                        <a:cs typeface="Calibri" charset="0"/>
+                      </a:endParaRPr>
+                    </a:p>
+                  </a:txBody>
+                  <a:tcPr marL="91440" marR="91440" marT="45720" marB="45720">
+                    <a:lnL w="2540" cap="flat" cmpd="sng" algn="ctr">
+                      <a:solidFill>
+                        <a:srgbClr val="EEEEEE"/>
+                      </a:solidFill>
+                      <a:prstDash val="solid"/>
+                      <a:round/>
+                      <a:headEnd type="none" w="med" len="med"/>
+                      <a:tailEnd type="none" w="med" len="med"/>
+                    </a:lnL>
+                    <a:lnR w="2540" cap="flat" cmpd="sng" algn="ctr">
+                      <a:solidFill>
+                        <a:srgbClr val="EEEEEE"/>
+                      </a:solidFill>
+                      <a:prstDash val="solid"/>
+                      <a:round/>
+                      <a:headEnd type="none" w="med" len="med"/>
+                      <a:tailEnd type="none" w="med" len="med"/>
+                    </a:lnR>
+                    <a:lnT w="2540" cap="flat" cmpd="sng" algn="ctr">
+                      <a:solidFill>
+                        <a:srgbClr val="EEEEEE"/>
+                      </a:solidFill>
+                      <a:prstDash val="solid"/>
+                      <a:round/>
+                      <a:headEnd type="none" w="med" len="med"/>
+                      <a:tailEnd type="none" w="med" len="med"/>
+                    </a:lnT>
+                    <a:lnB w="2540" cap="flat" cmpd="sng" algn="ctr">
+                      <a:solidFill>
+                        <a:srgbClr val="EEEEEE"/>
+                      </a:solidFill>
+                      <a:prstDash val="solid"/>
+                      <a:round/>
+                      <a:headEnd type="none" w="med" len="med"/>
+                      <a:tailEnd type="none" w="med" len="med"/>
+                    </a:lnB>
+                  </a:tcPr>
+                </a:tc>
+                <a:tc>
+                  <a:txBody>
+                    <a:bodyPr/>
+                    <a:lstStyle/>
+                    <a:p>
+                      <a:pPr algn="ctr" indent="0" marL="0">
+                        <a:buNone/>
+                      </a:pPr>
+                      <a:r>
+                        <a:rPr lang="en-US" sz="500" b="1" dirty="0">
                           <a:solidFill>
                             <a:srgbClr val="777777"/>
                           </a:solidFill>
@@ -26690,397 +28538,7 @@
                           <a:ea typeface="Calibri" pitchFamily="34" charset="-122"/>
                           <a:cs typeface="Calibri" pitchFamily="34" charset="-120"/>
                         </a:rPr>
-                        <a:t>0.41%</a:t>
-                      </a:r>
-                      <a:endParaRPr lang="en-US" sz="500" dirty="0">
-                        <a:latin typeface="Calibri" charset="0"/>
-                        <a:ea typeface="Calibri" charset="0"/>
-                        <a:cs typeface="Calibri" charset="0"/>
-                      </a:endParaRPr>
-                    </a:p>
-                  </a:txBody>
-                  <a:tcPr marL="91440" marR="91440" marT="45720" marB="45720">
-                    <a:lnL w="2540" cap="flat" cmpd="sng" algn="ctr">
-                      <a:solidFill>
-                        <a:srgbClr val="EEEEEE"/>
-                      </a:solidFill>
-                      <a:prstDash val="solid"/>
-                      <a:round/>
-                      <a:headEnd type="none" w="med" len="med"/>
-                      <a:tailEnd type="none" w="med" len="med"/>
-                    </a:lnL>
-                    <a:lnR w="2540" cap="flat" cmpd="sng" algn="ctr">
-                      <a:solidFill>
-                        <a:srgbClr val="EEEEEE"/>
-                      </a:solidFill>
-                      <a:prstDash val="solid"/>
-                      <a:round/>
-                      <a:headEnd type="none" w="med" len="med"/>
-                      <a:tailEnd type="none" w="med" len="med"/>
-                    </a:lnR>
-                    <a:lnT w="2540" cap="flat" cmpd="sng" algn="ctr">
-                      <a:solidFill>
-                        <a:srgbClr val="EEEEEE"/>
-                      </a:solidFill>
-                      <a:prstDash val="solid"/>
-                      <a:round/>
-                      <a:headEnd type="none" w="med" len="med"/>
-                      <a:tailEnd type="none" w="med" len="med"/>
-                    </a:lnT>
-                    <a:lnB w="2540" cap="flat" cmpd="sng" algn="ctr">
-                      <a:solidFill>
-                        <a:srgbClr val="EEEEEE"/>
-                      </a:solidFill>
-                      <a:prstDash val="solid"/>
-                      <a:round/>
-                      <a:headEnd type="none" w="med" len="med"/>
-                      <a:tailEnd type="none" w="med" len="med"/>
-                    </a:lnB>
-                  </a:tcPr>
-                </a:tc>
-                <a:tc>
-                  <a:txBody>
-                    <a:bodyPr/>
-                    <a:lstStyle/>
-                    <a:p>
-                      <a:pPr algn="ctr" indent="0" marL="0">
-                        <a:buNone/>
-                      </a:pPr>
-                      <a:r>
-                        <a:rPr lang="en-US" sz="500" dirty="0">
-                          <a:solidFill>
-                            <a:srgbClr val="777777"/>
-                          </a:solidFill>
-                          <a:latin typeface="Calibri" pitchFamily="34" charset="0"/>
-                          <a:ea typeface="Calibri" pitchFamily="34" charset="-122"/>
-                          <a:cs typeface="Calibri" pitchFamily="34" charset="-120"/>
-                        </a:rPr>
-                        <a:t>0.40%</a:t>
-                      </a:r>
-                      <a:endParaRPr lang="en-US" sz="500" dirty="0">
-                        <a:latin typeface="Calibri" charset="0"/>
-                        <a:ea typeface="Calibri" charset="0"/>
-                        <a:cs typeface="Calibri" charset="0"/>
-                      </a:endParaRPr>
-                    </a:p>
-                  </a:txBody>
-                  <a:tcPr marL="91440" marR="91440" marT="45720" marB="45720">
-                    <a:lnL w="2540" cap="flat" cmpd="sng" algn="ctr">
-                      <a:solidFill>
-                        <a:srgbClr val="EEEEEE"/>
-                      </a:solidFill>
-                      <a:prstDash val="solid"/>
-                      <a:round/>
-                      <a:headEnd type="none" w="med" len="med"/>
-                      <a:tailEnd type="none" w="med" len="med"/>
-                    </a:lnL>
-                    <a:lnR w="2540" cap="flat" cmpd="sng" algn="ctr">
-                      <a:solidFill>
-                        <a:srgbClr val="EEEEEE"/>
-                      </a:solidFill>
-                      <a:prstDash val="solid"/>
-                      <a:round/>
-                      <a:headEnd type="none" w="med" len="med"/>
-                      <a:tailEnd type="none" w="med" len="med"/>
-                    </a:lnR>
-                    <a:lnT w="2540" cap="flat" cmpd="sng" algn="ctr">
-                      <a:solidFill>
-                        <a:srgbClr val="EEEEEE"/>
-                      </a:solidFill>
-                      <a:prstDash val="solid"/>
-                      <a:round/>
-                      <a:headEnd type="none" w="med" len="med"/>
-                      <a:tailEnd type="none" w="med" len="med"/>
-                    </a:lnT>
-                    <a:lnB w="2540" cap="flat" cmpd="sng" algn="ctr">
-                      <a:solidFill>
-                        <a:srgbClr val="EEEEEE"/>
-                      </a:solidFill>
-                      <a:prstDash val="solid"/>
-                      <a:round/>
-                      <a:headEnd type="none" w="med" len="med"/>
-                      <a:tailEnd type="none" w="med" len="med"/>
-                    </a:lnB>
-                  </a:tcPr>
-                </a:tc>
-                <a:tc>
-                  <a:txBody>
-                    <a:bodyPr/>
-                    <a:lstStyle/>
-                    <a:p>
-                      <a:pPr algn="ctr" indent="0" marL="0">
-                        <a:buNone/>
-                      </a:pPr>
-                      <a:r>
-                        <a:rPr lang="en-US" sz="500" dirty="0">
-                          <a:solidFill>
-                            <a:srgbClr val="777777"/>
-                          </a:solidFill>
-                          <a:latin typeface="Calibri" pitchFamily="34" charset="0"/>
-                          <a:ea typeface="Calibri" pitchFamily="34" charset="-122"/>
-                          <a:cs typeface="Calibri" pitchFamily="34" charset="-120"/>
-                        </a:rPr>
-                        <a:t>0.40%</a:t>
-                      </a:r>
-                      <a:endParaRPr lang="en-US" sz="500" dirty="0">
-                        <a:latin typeface="Calibri" charset="0"/>
-                        <a:ea typeface="Calibri" charset="0"/>
-                        <a:cs typeface="Calibri" charset="0"/>
-                      </a:endParaRPr>
-                    </a:p>
-                  </a:txBody>
-                  <a:tcPr marL="91440" marR="91440" marT="45720" marB="45720">
-                    <a:lnL w="2540" cap="flat" cmpd="sng" algn="ctr">
-                      <a:solidFill>
-                        <a:srgbClr val="EEEEEE"/>
-                      </a:solidFill>
-                      <a:prstDash val="solid"/>
-                      <a:round/>
-                      <a:headEnd type="none" w="med" len="med"/>
-                      <a:tailEnd type="none" w="med" len="med"/>
-                    </a:lnL>
-                    <a:lnR w="2540" cap="flat" cmpd="sng" algn="ctr">
-                      <a:solidFill>
-                        <a:srgbClr val="EEEEEE"/>
-                      </a:solidFill>
-                      <a:prstDash val="solid"/>
-                      <a:round/>
-                      <a:headEnd type="none" w="med" len="med"/>
-                      <a:tailEnd type="none" w="med" len="med"/>
-                    </a:lnR>
-                    <a:lnT w="2540" cap="flat" cmpd="sng" algn="ctr">
-                      <a:solidFill>
-                        <a:srgbClr val="EEEEEE"/>
-                      </a:solidFill>
-                      <a:prstDash val="solid"/>
-                      <a:round/>
-                      <a:headEnd type="none" w="med" len="med"/>
-                      <a:tailEnd type="none" w="med" len="med"/>
-                    </a:lnT>
-                    <a:lnB w="2540" cap="flat" cmpd="sng" algn="ctr">
-                      <a:solidFill>
-                        <a:srgbClr val="EEEEEE"/>
-                      </a:solidFill>
-                      <a:prstDash val="solid"/>
-                      <a:round/>
-                      <a:headEnd type="none" w="med" len="med"/>
-                      <a:tailEnd type="none" w="med" len="med"/>
-                    </a:lnB>
-                  </a:tcPr>
-                </a:tc>
-                <a:tc>
-                  <a:txBody>
-                    <a:bodyPr/>
-                    <a:lstStyle/>
-                    <a:p>
-                      <a:pPr algn="ctr" indent="0" marL="0">
-                        <a:buNone/>
-                      </a:pPr>
-                      <a:r>
-                        <a:rPr lang="en-US" sz="500" dirty="0">
-                          <a:solidFill>
-                            <a:srgbClr val="777777"/>
-                          </a:solidFill>
-                          <a:latin typeface="Calibri" pitchFamily="34" charset="0"/>
-                          <a:ea typeface="Calibri" pitchFamily="34" charset="-122"/>
-                          <a:cs typeface="Calibri" pitchFamily="34" charset="-120"/>
-                        </a:rPr>
-                        <a:t>0.40%</a:t>
-                      </a:r>
-                      <a:endParaRPr lang="en-US" sz="500" dirty="0">
-                        <a:latin typeface="Calibri" charset="0"/>
-                        <a:ea typeface="Calibri" charset="0"/>
-                        <a:cs typeface="Calibri" charset="0"/>
-                      </a:endParaRPr>
-                    </a:p>
-                  </a:txBody>
-                  <a:tcPr marL="91440" marR="91440" marT="45720" marB="45720">
-                    <a:lnL w="2540" cap="flat" cmpd="sng" algn="ctr">
-                      <a:solidFill>
-                        <a:srgbClr val="EEEEEE"/>
-                      </a:solidFill>
-                      <a:prstDash val="solid"/>
-                      <a:round/>
-                      <a:headEnd type="none" w="med" len="med"/>
-                      <a:tailEnd type="none" w="med" len="med"/>
-                    </a:lnL>
-                    <a:lnR w="2540" cap="flat" cmpd="sng" algn="ctr">
-                      <a:solidFill>
-                        <a:srgbClr val="EEEEEE"/>
-                      </a:solidFill>
-                      <a:prstDash val="solid"/>
-                      <a:round/>
-                      <a:headEnd type="none" w="med" len="med"/>
-                      <a:tailEnd type="none" w="med" len="med"/>
-                    </a:lnR>
-                    <a:lnT w="2540" cap="flat" cmpd="sng" algn="ctr">
-                      <a:solidFill>
-                        <a:srgbClr val="EEEEEE"/>
-                      </a:solidFill>
-                      <a:prstDash val="solid"/>
-                      <a:round/>
-                      <a:headEnd type="none" w="med" len="med"/>
-                      <a:tailEnd type="none" w="med" len="med"/>
-                    </a:lnT>
-                    <a:lnB w="2540" cap="flat" cmpd="sng" algn="ctr">
-                      <a:solidFill>
-                        <a:srgbClr val="EEEEEE"/>
-                      </a:solidFill>
-                      <a:prstDash val="solid"/>
-                      <a:round/>
-                      <a:headEnd type="none" w="med" len="med"/>
-                      <a:tailEnd type="none" w="med" len="med"/>
-                    </a:lnB>
-                  </a:tcPr>
-                </a:tc>
-                <a:tc>
-                  <a:txBody>
-                    <a:bodyPr/>
-                    <a:lstStyle/>
-                    <a:p>
-                      <a:pPr algn="ctr" indent="0" marL="0">
-                        <a:buNone/>
-                      </a:pPr>
-                      <a:r>
-                        <a:rPr lang="en-US" sz="500" dirty="0">
-                          <a:solidFill>
-                            <a:srgbClr val="777777"/>
-                          </a:solidFill>
-                          <a:latin typeface="Calibri" pitchFamily="34" charset="0"/>
-                          <a:ea typeface="Calibri" pitchFamily="34" charset="-122"/>
-                          <a:cs typeface="Calibri" pitchFamily="34" charset="-120"/>
-                        </a:rPr>
-                        <a:t>0.40%</a:t>
-                      </a:r>
-                      <a:endParaRPr lang="en-US" sz="500" dirty="0">
-                        <a:latin typeface="Calibri" charset="0"/>
-                        <a:ea typeface="Calibri" charset="0"/>
-                        <a:cs typeface="Calibri" charset="0"/>
-                      </a:endParaRPr>
-                    </a:p>
-                  </a:txBody>
-                  <a:tcPr marL="91440" marR="91440" marT="45720" marB="45720">
-                    <a:lnL w="2540" cap="flat" cmpd="sng" algn="ctr">
-                      <a:solidFill>
-                        <a:srgbClr val="EEEEEE"/>
-                      </a:solidFill>
-                      <a:prstDash val="solid"/>
-                      <a:round/>
-                      <a:headEnd type="none" w="med" len="med"/>
-                      <a:tailEnd type="none" w="med" len="med"/>
-                    </a:lnL>
-                    <a:lnR w="2540" cap="flat" cmpd="sng" algn="ctr">
-                      <a:solidFill>
-                        <a:srgbClr val="EEEEEE"/>
-                      </a:solidFill>
-                      <a:prstDash val="solid"/>
-                      <a:round/>
-                      <a:headEnd type="none" w="med" len="med"/>
-                      <a:tailEnd type="none" w="med" len="med"/>
-                    </a:lnR>
-                    <a:lnT w="2540" cap="flat" cmpd="sng" algn="ctr">
-                      <a:solidFill>
-                        <a:srgbClr val="EEEEEE"/>
-                      </a:solidFill>
-                      <a:prstDash val="solid"/>
-                      <a:round/>
-                      <a:headEnd type="none" w="med" len="med"/>
-                      <a:tailEnd type="none" w="med" len="med"/>
-                    </a:lnT>
-                    <a:lnB w="2540" cap="flat" cmpd="sng" algn="ctr">
-                      <a:solidFill>
-                        <a:srgbClr val="EEEEEE"/>
-                      </a:solidFill>
-                      <a:prstDash val="solid"/>
-                      <a:round/>
-                      <a:headEnd type="none" w="med" len="med"/>
-                      <a:tailEnd type="none" w="med" len="med"/>
-                    </a:lnB>
-                  </a:tcPr>
-                </a:tc>
-                <a:tc>
-                  <a:txBody>
-                    <a:bodyPr/>
-                    <a:lstStyle/>
-                    <a:p>
-                      <a:pPr algn="ctr" indent="0" marL="0">
-                        <a:buNone/>
-                      </a:pPr>
-                      <a:r>
-                        <a:rPr lang="en-US" sz="500" dirty="0">
-                          <a:solidFill>
-                            <a:srgbClr val="777777"/>
-                          </a:solidFill>
-                          <a:latin typeface="Calibri" pitchFamily="34" charset="0"/>
-                          <a:ea typeface="Calibri" pitchFamily="34" charset="-122"/>
-                          <a:cs typeface="Calibri" pitchFamily="34" charset="-120"/>
-                        </a:rPr>
-                        <a:t>0.39%</a:t>
-                      </a:r>
-                      <a:endParaRPr lang="en-US" sz="500" dirty="0">
-                        <a:latin typeface="Calibri" charset="0"/>
-                        <a:ea typeface="Calibri" charset="0"/>
-                        <a:cs typeface="Calibri" charset="0"/>
-                      </a:endParaRPr>
-                    </a:p>
-                  </a:txBody>
-                  <a:tcPr marL="91440" marR="91440" marT="45720" marB="45720">
-                    <a:lnL w="2540" cap="flat" cmpd="sng" algn="ctr">
-                      <a:solidFill>
-                        <a:srgbClr val="EEEEEE"/>
-                      </a:solidFill>
-                      <a:prstDash val="solid"/>
-                      <a:round/>
-                      <a:headEnd type="none" w="med" len="med"/>
-                      <a:tailEnd type="none" w="med" len="med"/>
-                    </a:lnL>
-                    <a:lnR w="2540" cap="flat" cmpd="sng" algn="ctr">
-                      <a:solidFill>
-                        <a:srgbClr val="EEEEEE"/>
-                      </a:solidFill>
-                      <a:prstDash val="solid"/>
-                      <a:round/>
-                      <a:headEnd type="none" w="med" len="med"/>
-                      <a:tailEnd type="none" w="med" len="med"/>
-                    </a:lnR>
-                    <a:lnT w="2540" cap="flat" cmpd="sng" algn="ctr">
-                      <a:solidFill>
-                        <a:srgbClr val="EEEEEE"/>
-                      </a:solidFill>
-                      <a:prstDash val="solid"/>
-                      <a:round/>
-                      <a:headEnd type="none" w="med" len="med"/>
-                      <a:tailEnd type="none" w="med" len="med"/>
-                    </a:lnT>
-                    <a:lnB w="2540" cap="flat" cmpd="sng" algn="ctr">
-                      <a:solidFill>
-                        <a:srgbClr val="EEEEEE"/>
-                      </a:solidFill>
-                      <a:prstDash val="solid"/>
-                      <a:round/>
-                      <a:headEnd type="none" w="med" len="med"/>
-                      <a:tailEnd type="none" w="med" len="med"/>
-                    </a:lnB>
-                  </a:tcPr>
-                </a:tc>
-                <a:tc>
-                  <a:txBody>
-                    <a:bodyPr/>
-                    <a:lstStyle/>
-                    <a:p>
-                      <a:pPr algn="ctr" indent="0" marL="0">
-                        <a:buNone/>
-                      </a:pPr>
-                      <a:r>
-                        <a:rPr lang="en-US" sz="500" b="1" dirty="0">
-                          <a:solidFill>
-                            <a:srgbClr val="777777"/>
-                          </a:solidFill>
-                          <a:latin typeface="Calibri" pitchFamily="34" charset="0"/>
-                          <a:ea typeface="Calibri" pitchFamily="34" charset="-122"/>
-                          <a:cs typeface="Calibri" pitchFamily="34" charset="-120"/>
-                        </a:rPr>
-                        <a:t>4.99%</a:t>
+                        <a:t>4.61%</a:t>
                       </a:r>
                       <a:endParaRPr lang="en-US" sz="500" dirty="0">
                         <a:latin typeface="Calibri" charset="0"/>
@@ -27266,7 +28724,7 @@
                           <a:ea typeface="Calibri" pitchFamily="34" charset="-122"/>
                           <a:cs typeface="Calibri" pitchFamily="34" charset="-120"/>
                         </a:rPr>
-                        <a:t>0.00%</a:t>
+                        <a:t>0.29%</a:t>
                       </a:r>
                       <a:endParaRPr lang="en-US" sz="500" dirty="0">
                         <a:latin typeface="Calibri" charset="0"/>
@@ -27331,6 +28789,461 @@
                           <a:ea typeface="Calibri" pitchFamily="34" charset="-122"/>
                           <a:cs typeface="Calibri" pitchFamily="34" charset="-120"/>
                         </a:rPr>
+                        <a:t>0.30%</a:t>
+                      </a:r>
+                      <a:endParaRPr lang="en-US" sz="500" dirty="0">
+                        <a:latin typeface="Calibri" charset="0"/>
+                        <a:ea typeface="Calibri" charset="0"/>
+                        <a:cs typeface="Calibri" charset="0"/>
+                      </a:endParaRPr>
+                    </a:p>
+                  </a:txBody>
+                  <a:tcPr marL="91440" marR="91440" marT="45720" marB="45720">
+                    <a:lnL w="2540" cap="flat" cmpd="sng" algn="ctr">
+                      <a:solidFill>
+                        <a:srgbClr val="EEEEEE"/>
+                      </a:solidFill>
+                      <a:prstDash val="solid"/>
+                      <a:round/>
+                      <a:headEnd type="none" w="med" len="med"/>
+                      <a:tailEnd type="none" w="med" len="med"/>
+                    </a:lnL>
+                    <a:lnR w="2540" cap="flat" cmpd="sng" algn="ctr">
+                      <a:solidFill>
+                        <a:srgbClr val="EEEEEE"/>
+                      </a:solidFill>
+                      <a:prstDash val="solid"/>
+                      <a:round/>
+                      <a:headEnd type="none" w="med" len="med"/>
+                      <a:tailEnd type="none" w="med" len="med"/>
+                    </a:lnR>
+                    <a:lnT w="2540" cap="flat" cmpd="sng" algn="ctr">
+                      <a:solidFill>
+                        <a:srgbClr val="EEEEEE"/>
+                      </a:solidFill>
+                      <a:prstDash val="solid"/>
+                      <a:round/>
+                      <a:headEnd type="none" w="med" len="med"/>
+                      <a:tailEnd type="none" w="med" len="med"/>
+                    </a:lnT>
+                    <a:lnB w="2540" cap="flat" cmpd="sng" algn="ctr">
+                      <a:solidFill>
+                        <a:srgbClr val="EEEEEE"/>
+                      </a:solidFill>
+                      <a:prstDash val="solid"/>
+                      <a:round/>
+                      <a:headEnd type="none" w="med" len="med"/>
+                      <a:tailEnd type="none" w="med" len="med"/>
+                    </a:lnB>
+                  </a:tcPr>
+                </a:tc>
+                <a:tc>
+                  <a:txBody>
+                    <a:bodyPr/>
+                    <a:lstStyle/>
+                    <a:p>
+                      <a:pPr algn="ctr" indent="0" marL="0">
+                        <a:buNone/>
+                      </a:pPr>
+                      <a:r>
+                        <a:rPr lang="en-US" sz="500" dirty="0">
+                          <a:solidFill>
+                            <a:srgbClr val="999999"/>
+                          </a:solidFill>
+                          <a:latin typeface="Calibri" pitchFamily="34" charset="0"/>
+                          <a:ea typeface="Calibri" pitchFamily="34" charset="-122"/>
+                          <a:cs typeface="Calibri" pitchFamily="34" charset="-120"/>
+                        </a:rPr>
+                        <a:t>0.30%</a:t>
+                      </a:r>
+                      <a:endParaRPr lang="en-US" sz="500" dirty="0">
+                        <a:latin typeface="Calibri" charset="0"/>
+                        <a:ea typeface="Calibri" charset="0"/>
+                        <a:cs typeface="Calibri" charset="0"/>
+                      </a:endParaRPr>
+                    </a:p>
+                  </a:txBody>
+                  <a:tcPr marL="91440" marR="91440" marT="45720" marB="45720">
+                    <a:lnL w="2540" cap="flat" cmpd="sng" algn="ctr">
+                      <a:solidFill>
+                        <a:srgbClr val="EEEEEE"/>
+                      </a:solidFill>
+                      <a:prstDash val="solid"/>
+                      <a:round/>
+                      <a:headEnd type="none" w="med" len="med"/>
+                      <a:tailEnd type="none" w="med" len="med"/>
+                    </a:lnL>
+                    <a:lnR w="2540" cap="flat" cmpd="sng" algn="ctr">
+                      <a:solidFill>
+                        <a:srgbClr val="EEEEEE"/>
+                      </a:solidFill>
+                      <a:prstDash val="solid"/>
+                      <a:round/>
+                      <a:headEnd type="none" w="med" len="med"/>
+                      <a:tailEnd type="none" w="med" len="med"/>
+                    </a:lnR>
+                    <a:lnT w="2540" cap="flat" cmpd="sng" algn="ctr">
+                      <a:solidFill>
+                        <a:srgbClr val="EEEEEE"/>
+                      </a:solidFill>
+                      <a:prstDash val="solid"/>
+                      <a:round/>
+                      <a:headEnd type="none" w="med" len="med"/>
+                      <a:tailEnd type="none" w="med" len="med"/>
+                    </a:lnT>
+                    <a:lnB w="2540" cap="flat" cmpd="sng" algn="ctr">
+                      <a:solidFill>
+                        <a:srgbClr val="EEEEEE"/>
+                      </a:solidFill>
+                      <a:prstDash val="solid"/>
+                      <a:round/>
+                      <a:headEnd type="none" w="med" len="med"/>
+                      <a:tailEnd type="none" w="med" len="med"/>
+                    </a:lnB>
+                  </a:tcPr>
+                </a:tc>
+                <a:tc>
+                  <a:txBody>
+                    <a:bodyPr/>
+                    <a:lstStyle/>
+                    <a:p>
+                      <a:pPr algn="ctr" indent="0" marL="0">
+                        <a:buNone/>
+                      </a:pPr>
+                      <a:r>
+                        <a:rPr lang="en-US" sz="500" dirty="0">
+                          <a:solidFill>
+                            <a:srgbClr val="999999"/>
+                          </a:solidFill>
+                          <a:latin typeface="Calibri" pitchFamily="34" charset="0"/>
+                          <a:ea typeface="Calibri" pitchFamily="34" charset="-122"/>
+                          <a:cs typeface="Calibri" pitchFamily="34" charset="-120"/>
+                        </a:rPr>
+                        <a:t>0.30%</a:t>
+                      </a:r>
+                      <a:endParaRPr lang="en-US" sz="500" dirty="0">
+                        <a:latin typeface="Calibri" charset="0"/>
+                        <a:ea typeface="Calibri" charset="0"/>
+                        <a:cs typeface="Calibri" charset="0"/>
+                      </a:endParaRPr>
+                    </a:p>
+                  </a:txBody>
+                  <a:tcPr marL="91440" marR="91440" marT="45720" marB="45720">
+                    <a:lnL w="2540" cap="flat" cmpd="sng" algn="ctr">
+                      <a:solidFill>
+                        <a:srgbClr val="EEEEEE"/>
+                      </a:solidFill>
+                      <a:prstDash val="solid"/>
+                      <a:round/>
+                      <a:headEnd type="none" w="med" len="med"/>
+                      <a:tailEnd type="none" w="med" len="med"/>
+                    </a:lnL>
+                    <a:lnR w="2540" cap="flat" cmpd="sng" algn="ctr">
+                      <a:solidFill>
+                        <a:srgbClr val="EEEEEE"/>
+                      </a:solidFill>
+                      <a:prstDash val="solid"/>
+                      <a:round/>
+                      <a:headEnd type="none" w="med" len="med"/>
+                      <a:tailEnd type="none" w="med" len="med"/>
+                    </a:lnR>
+                    <a:lnT w="2540" cap="flat" cmpd="sng" algn="ctr">
+                      <a:solidFill>
+                        <a:srgbClr val="EEEEEE"/>
+                      </a:solidFill>
+                      <a:prstDash val="solid"/>
+                      <a:round/>
+                      <a:headEnd type="none" w="med" len="med"/>
+                      <a:tailEnd type="none" w="med" len="med"/>
+                    </a:lnT>
+                    <a:lnB w="2540" cap="flat" cmpd="sng" algn="ctr">
+                      <a:solidFill>
+                        <a:srgbClr val="EEEEEE"/>
+                      </a:solidFill>
+                      <a:prstDash val="solid"/>
+                      <a:round/>
+                      <a:headEnd type="none" w="med" len="med"/>
+                      <a:tailEnd type="none" w="med" len="med"/>
+                    </a:lnB>
+                  </a:tcPr>
+                </a:tc>
+                <a:tc>
+                  <a:txBody>
+                    <a:bodyPr/>
+                    <a:lstStyle/>
+                    <a:p>
+                      <a:pPr algn="ctr" indent="0" marL="0">
+                        <a:buNone/>
+                      </a:pPr>
+                      <a:r>
+                        <a:rPr lang="en-US" sz="500" dirty="0">
+                          <a:solidFill>
+                            <a:srgbClr val="999999"/>
+                          </a:solidFill>
+                          <a:latin typeface="Calibri" pitchFamily="34" charset="0"/>
+                          <a:ea typeface="Calibri" pitchFamily="34" charset="-122"/>
+                          <a:cs typeface="Calibri" pitchFamily="34" charset="-120"/>
+                        </a:rPr>
+                        <a:t>0.30%</a:t>
+                      </a:r>
+                      <a:endParaRPr lang="en-US" sz="500" dirty="0">
+                        <a:latin typeface="Calibri" charset="0"/>
+                        <a:ea typeface="Calibri" charset="0"/>
+                        <a:cs typeface="Calibri" charset="0"/>
+                      </a:endParaRPr>
+                    </a:p>
+                  </a:txBody>
+                  <a:tcPr marL="91440" marR="91440" marT="45720" marB="45720">
+                    <a:lnL w="2540" cap="flat" cmpd="sng" algn="ctr">
+                      <a:solidFill>
+                        <a:srgbClr val="EEEEEE"/>
+                      </a:solidFill>
+                      <a:prstDash val="solid"/>
+                      <a:round/>
+                      <a:headEnd type="none" w="med" len="med"/>
+                      <a:tailEnd type="none" w="med" len="med"/>
+                    </a:lnL>
+                    <a:lnR w="2540" cap="flat" cmpd="sng" algn="ctr">
+                      <a:solidFill>
+                        <a:srgbClr val="EEEEEE"/>
+                      </a:solidFill>
+                      <a:prstDash val="solid"/>
+                      <a:round/>
+                      <a:headEnd type="none" w="med" len="med"/>
+                      <a:tailEnd type="none" w="med" len="med"/>
+                    </a:lnR>
+                    <a:lnT w="2540" cap="flat" cmpd="sng" algn="ctr">
+                      <a:solidFill>
+                        <a:srgbClr val="EEEEEE"/>
+                      </a:solidFill>
+                      <a:prstDash val="solid"/>
+                      <a:round/>
+                      <a:headEnd type="none" w="med" len="med"/>
+                      <a:tailEnd type="none" w="med" len="med"/>
+                    </a:lnT>
+                    <a:lnB w="2540" cap="flat" cmpd="sng" algn="ctr">
+                      <a:solidFill>
+                        <a:srgbClr val="EEEEEE"/>
+                      </a:solidFill>
+                      <a:prstDash val="solid"/>
+                      <a:round/>
+                      <a:headEnd type="none" w="med" len="med"/>
+                      <a:tailEnd type="none" w="med" len="med"/>
+                    </a:lnB>
+                  </a:tcPr>
+                </a:tc>
+                <a:tc>
+                  <a:txBody>
+                    <a:bodyPr/>
+                    <a:lstStyle/>
+                    <a:p>
+                      <a:pPr algn="ctr" indent="0" marL="0">
+                        <a:buNone/>
+                      </a:pPr>
+                      <a:r>
+                        <a:rPr lang="en-US" sz="500" dirty="0">
+                          <a:solidFill>
+                            <a:srgbClr val="999999"/>
+                          </a:solidFill>
+                          <a:latin typeface="Calibri" pitchFamily="34" charset="0"/>
+                          <a:ea typeface="Calibri" pitchFamily="34" charset="-122"/>
+                          <a:cs typeface="Calibri" pitchFamily="34" charset="-120"/>
+                        </a:rPr>
+                        <a:t>0.30%</a:t>
+                      </a:r>
+                      <a:endParaRPr lang="en-US" sz="500" dirty="0">
+                        <a:latin typeface="Calibri" charset="0"/>
+                        <a:ea typeface="Calibri" charset="0"/>
+                        <a:cs typeface="Calibri" charset="0"/>
+                      </a:endParaRPr>
+                    </a:p>
+                  </a:txBody>
+                  <a:tcPr marL="91440" marR="91440" marT="45720" marB="45720">
+                    <a:lnL w="2540" cap="flat" cmpd="sng" algn="ctr">
+                      <a:solidFill>
+                        <a:srgbClr val="EEEEEE"/>
+                      </a:solidFill>
+                      <a:prstDash val="solid"/>
+                      <a:round/>
+                      <a:headEnd type="none" w="med" len="med"/>
+                      <a:tailEnd type="none" w="med" len="med"/>
+                    </a:lnL>
+                    <a:lnR w="2540" cap="flat" cmpd="sng" algn="ctr">
+                      <a:solidFill>
+                        <a:srgbClr val="EEEEEE"/>
+                      </a:solidFill>
+                      <a:prstDash val="solid"/>
+                      <a:round/>
+                      <a:headEnd type="none" w="med" len="med"/>
+                      <a:tailEnd type="none" w="med" len="med"/>
+                    </a:lnR>
+                    <a:lnT w="2540" cap="flat" cmpd="sng" algn="ctr">
+                      <a:solidFill>
+                        <a:srgbClr val="EEEEEE"/>
+                      </a:solidFill>
+                      <a:prstDash val="solid"/>
+                      <a:round/>
+                      <a:headEnd type="none" w="med" len="med"/>
+                      <a:tailEnd type="none" w="med" len="med"/>
+                    </a:lnT>
+                    <a:lnB w="2540" cap="flat" cmpd="sng" algn="ctr">
+                      <a:solidFill>
+                        <a:srgbClr val="EEEEEE"/>
+                      </a:solidFill>
+                      <a:prstDash val="solid"/>
+                      <a:round/>
+                      <a:headEnd type="none" w="med" len="med"/>
+                      <a:tailEnd type="none" w="med" len="med"/>
+                    </a:lnB>
+                  </a:tcPr>
+                </a:tc>
+                <a:tc>
+                  <a:txBody>
+                    <a:bodyPr/>
+                    <a:lstStyle/>
+                    <a:p>
+                      <a:pPr algn="ctr" indent="0" marL="0">
+                        <a:buNone/>
+                      </a:pPr>
+                      <a:r>
+                        <a:rPr lang="en-US" sz="500" dirty="0">
+                          <a:solidFill>
+                            <a:srgbClr val="999999"/>
+                          </a:solidFill>
+                          <a:latin typeface="Calibri" pitchFamily="34" charset="0"/>
+                          <a:ea typeface="Calibri" pitchFamily="34" charset="-122"/>
+                          <a:cs typeface="Calibri" pitchFamily="34" charset="-120"/>
+                        </a:rPr>
+                        <a:t>0.29%</a:t>
+                      </a:r>
+                      <a:endParaRPr lang="en-US" sz="500" dirty="0">
+                        <a:latin typeface="Calibri" charset="0"/>
+                        <a:ea typeface="Calibri" charset="0"/>
+                        <a:cs typeface="Calibri" charset="0"/>
+                      </a:endParaRPr>
+                    </a:p>
+                  </a:txBody>
+                  <a:tcPr marL="91440" marR="91440" marT="45720" marB="45720">
+                    <a:lnL w="2540" cap="flat" cmpd="sng" algn="ctr">
+                      <a:solidFill>
+                        <a:srgbClr val="EEEEEE"/>
+                      </a:solidFill>
+                      <a:prstDash val="solid"/>
+                      <a:round/>
+                      <a:headEnd type="none" w="med" len="med"/>
+                      <a:tailEnd type="none" w="med" len="med"/>
+                    </a:lnL>
+                    <a:lnR w="2540" cap="flat" cmpd="sng" algn="ctr">
+                      <a:solidFill>
+                        <a:srgbClr val="EEEEEE"/>
+                      </a:solidFill>
+                      <a:prstDash val="solid"/>
+                      <a:round/>
+                      <a:headEnd type="none" w="med" len="med"/>
+                      <a:tailEnd type="none" w="med" len="med"/>
+                    </a:lnR>
+                    <a:lnT w="2540" cap="flat" cmpd="sng" algn="ctr">
+                      <a:solidFill>
+                        <a:srgbClr val="EEEEEE"/>
+                      </a:solidFill>
+                      <a:prstDash val="solid"/>
+                      <a:round/>
+                      <a:headEnd type="none" w="med" len="med"/>
+                      <a:tailEnd type="none" w="med" len="med"/>
+                    </a:lnT>
+                    <a:lnB w="2540" cap="flat" cmpd="sng" algn="ctr">
+                      <a:solidFill>
+                        <a:srgbClr val="EEEEEE"/>
+                      </a:solidFill>
+                      <a:prstDash val="solid"/>
+                      <a:round/>
+                      <a:headEnd type="none" w="med" len="med"/>
+                      <a:tailEnd type="none" w="med" len="med"/>
+                    </a:lnB>
+                  </a:tcPr>
+                </a:tc>
+                <a:tc>
+                  <a:txBody>
+                    <a:bodyPr/>
+                    <a:lstStyle/>
+                    <a:p>
+                      <a:pPr algn="ctr" indent="0" marL="0">
+                        <a:buNone/>
+                      </a:pPr>
+                      <a:r>
+                        <a:rPr lang="en-US" sz="500" dirty="0">
+                          <a:solidFill>
+                            <a:srgbClr val="999999"/>
+                          </a:solidFill>
+                          <a:latin typeface="Calibri" pitchFamily="34" charset="0"/>
+                          <a:ea typeface="Calibri" pitchFamily="34" charset="-122"/>
+                          <a:cs typeface="Calibri" pitchFamily="34" charset="-120"/>
+                        </a:rPr>
+                        <a:t>0.29%</a:t>
+                      </a:r>
+                      <a:endParaRPr lang="en-US" sz="500" dirty="0">
+                        <a:latin typeface="Calibri" charset="0"/>
+                        <a:ea typeface="Calibri" charset="0"/>
+                        <a:cs typeface="Calibri" charset="0"/>
+                      </a:endParaRPr>
+                    </a:p>
+                  </a:txBody>
+                  <a:tcPr marL="91440" marR="91440" marT="45720" marB="45720">
+                    <a:lnL w="2540" cap="flat" cmpd="sng" algn="ctr">
+                      <a:solidFill>
+                        <a:srgbClr val="EEEEEE"/>
+                      </a:solidFill>
+                      <a:prstDash val="solid"/>
+                      <a:round/>
+                      <a:headEnd type="none" w="med" len="med"/>
+                      <a:tailEnd type="none" w="med" len="med"/>
+                    </a:lnL>
+                    <a:lnR w="2540" cap="flat" cmpd="sng" algn="ctr">
+                      <a:solidFill>
+                        <a:srgbClr val="EEEEEE"/>
+                      </a:solidFill>
+                      <a:prstDash val="solid"/>
+                      <a:round/>
+                      <a:headEnd type="none" w="med" len="med"/>
+                      <a:tailEnd type="none" w="med" len="med"/>
+                    </a:lnR>
+                    <a:lnT w="2540" cap="flat" cmpd="sng" algn="ctr">
+                      <a:solidFill>
+                        <a:srgbClr val="EEEEEE"/>
+                      </a:solidFill>
+                      <a:prstDash val="solid"/>
+                      <a:round/>
+                      <a:headEnd type="none" w="med" len="med"/>
+                      <a:tailEnd type="none" w="med" len="med"/>
+                    </a:lnT>
+                    <a:lnB w="2540" cap="flat" cmpd="sng" algn="ctr">
+                      <a:solidFill>
+                        <a:srgbClr val="EEEEEE"/>
+                      </a:solidFill>
+                      <a:prstDash val="solid"/>
+                      <a:round/>
+                      <a:headEnd type="none" w="med" len="med"/>
+                      <a:tailEnd type="none" w="med" len="med"/>
+                    </a:lnB>
+                  </a:tcPr>
+                </a:tc>
+                <a:tc>
+                  <a:txBody>
+                    <a:bodyPr/>
+                    <a:lstStyle/>
+                    <a:p>
+                      <a:pPr algn="ctr" indent="0" marL="0">
+                        <a:buNone/>
+                      </a:pPr>
+                      <a:r>
+                        <a:rPr lang="en-US" sz="500" dirty="0">
+                          <a:solidFill>
+                            <a:srgbClr val="999999"/>
+                          </a:solidFill>
+                          <a:latin typeface="Calibri" pitchFamily="34" charset="0"/>
+                          <a:ea typeface="Calibri" pitchFamily="34" charset="-122"/>
+                          <a:cs typeface="Calibri" pitchFamily="34" charset="-120"/>
+                        </a:rPr>
                         <a:t>0.28%</a:t>
                       </a:r>
                       <a:endParaRPr lang="en-US" sz="500" dirty="0">
@@ -27396,7 +29309,7 @@
                           <a:ea typeface="Calibri" pitchFamily="34" charset="-122"/>
                           <a:cs typeface="Calibri" pitchFamily="34" charset="-120"/>
                         </a:rPr>
-                        <a:t>0.31%</a:t>
+                        <a:t>0.28%</a:t>
                       </a:r>
                       <a:endParaRPr lang="en-US" sz="500" dirty="0">
                         <a:latin typeface="Calibri" charset="0"/>
@@ -27461,7 +29374,7 @@
                           <a:ea typeface="Calibri" pitchFamily="34" charset="-122"/>
                           <a:cs typeface="Calibri" pitchFamily="34" charset="-120"/>
                         </a:rPr>
-                        <a:t>0.30%</a:t>
+                        <a:t>0.28%</a:t>
                       </a:r>
                       <a:endParaRPr lang="en-US" sz="500" dirty="0">
                         <a:latin typeface="Calibri" charset="0"/>
@@ -27526,64 +29439,64 @@
                           <a:ea typeface="Calibri" pitchFamily="34" charset="-122"/>
                           <a:cs typeface="Calibri" pitchFamily="34" charset="-120"/>
                         </a:rPr>
-                        <a:t>0.31%</a:t>
-                      </a:r>
-                      <a:endParaRPr lang="en-US" sz="500" dirty="0">
-                        <a:latin typeface="Calibri" charset="0"/>
-                        <a:ea typeface="Calibri" charset="0"/>
-                        <a:cs typeface="Calibri" charset="0"/>
-                      </a:endParaRPr>
-                    </a:p>
-                  </a:txBody>
-                  <a:tcPr marL="91440" marR="91440" marT="45720" marB="45720">
-                    <a:lnL w="2540" cap="flat" cmpd="sng" algn="ctr">
-                      <a:solidFill>
-                        <a:srgbClr val="EEEEEE"/>
-                      </a:solidFill>
-                      <a:prstDash val="solid"/>
-                      <a:round/>
-                      <a:headEnd type="none" w="med" len="med"/>
-                      <a:tailEnd type="none" w="med" len="med"/>
-                    </a:lnL>
-                    <a:lnR w="2540" cap="flat" cmpd="sng" algn="ctr">
-                      <a:solidFill>
-                        <a:srgbClr val="EEEEEE"/>
-                      </a:solidFill>
-                      <a:prstDash val="solid"/>
-                      <a:round/>
-                      <a:headEnd type="none" w="med" len="med"/>
-                      <a:tailEnd type="none" w="med" len="med"/>
-                    </a:lnR>
-                    <a:lnT w="2540" cap="flat" cmpd="sng" algn="ctr">
-                      <a:solidFill>
-                        <a:srgbClr val="EEEEEE"/>
-                      </a:solidFill>
-                      <a:prstDash val="solid"/>
-                      <a:round/>
-                      <a:headEnd type="none" w="med" len="med"/>
-                      <a:tailEnd type="none" w="med" len="med"/>
-                    </a:lnT>
-                    <a:lnB w="2540" cap="flat" cmpd="sng" algn="ctr">
-                      <a:solidFill>
-                        <a:srgbClr val="EEEEEE"/>
-                      </a:solidFill>
-                      <a:prstDash val="solid"/>
-                      <a:round/>
-                      <a:headEnd type="none" w="med" len="med"/>
-                      <a:tailEnd type="none" w="med" len="med"/>
-                    </a:lnB>
-                  </a:tcPr>
-                </a:tc>
-                <a:tc>
-                  <a:txBody>
-                    <a:bodyPr/>
-                    <a:lstStyle/>
-                    <a:p>
-                      <a:pPr algn="ctr" indent="0" marL="0">
-                        <a:buNone/>
-                      </a:pPr>
-                      <a:r>
-                        <a:rPr lang="en-US" sz="500" dirty="0">
+                        <a:t>0.27%</a:t>
+                      </a:r>
+                      <a:endParaRPr lang="en-US" sz="500" dirty="0">
+                        <a:latin typeface="Calibri" charset="0"/>
+                        <a:ea typeface="Calibri" charset="0"/>
+                        <a:cs typeface="Calibri" charset="0"/>
+                      </a:endParaRPr>
+                    </a:p>
+                  </a:txBody>
+                  <a:tcPr marL="91440" marR="91440" marT="45720" marB="45720">
+                    <a:lnL w="2540" cap="flat" cmpd="sng" algn="ctr">
+                      <a:solidFill>
+                        <a:srgbClr val="EEEEEE"/>
+                      </a:solidFill>
+                      <a:prstDash val="solid"/>
+                      <a:round/>
+                      <a:headEnd type="none" w="med" len="med"/>
+                      <a:tailEnd type="none" w="med" len="med"/>
+                    </a:lnL>
+                    <a:lnR w="2540" cap="flat" cmpd="sng" algn="ctr">
+                      <a:solidFill>
+                        <a:srgbClr val="EEEEEE"/>
+                      </a:solidFill>
+                      <a:prstDash val="solid"/>
+                      <a:round/>
+                      <a:headEnd type="none" w="med" len="med"/>
+                      <a:tailEnd type="none" w="med" len="med"/>
+                    </a:lnR>
+                    <a:lnT w="2540" cap="flat" cmpd="sng" algn="ctr">
+                      <a:solidFill>
+                        <a:srgbClr val="EEEEEE"/>
+                      </a:solidFill>
+                      <a:prstDash val="solid"/>
+                      <a:round/>
+                      <a:headEnd type="none" w="med" len="med"/>
+                      <a:tailEnd type="none" w="med" len="med"/>
+                    </a:lnT>
+                    <a:lnB w="2540" cap="flat" cmpd="sng" algn="ctr">
+                      <a:solidFill>
+                        <a:srgbClr val="EEEEEE"/>
+                      </a:solidFill>
+                      <a:prstDash val="solid"/>
+                      <a:round/>
+                      <a:headEnd type="none" w="med" len="med"/>
+                      <a:tailEnd type="none" w="med" len="med"/>
+                    </a:lnB>
+                  </a:tcPr>
+                </a:tc>
+                <a:tc>
+                  <a:txBody>
+                    <a:bodyPr/>
+                    <a:lstStyle/>
+                    <a:p>
+                      <a:pPr algn="ctr" indent="0" marL="0">
+                        <a:buNone/>
+                      </a:pPr>
+                      <a:r>
+                        <a:rPr lang="en-US" sz="500" b="1" dirty="0">
                           <a:solidFill>
                             <a:srgbClr val="999999"/>
                           </a:solidFill>
@@ -27591,462 +29504,7 @@
                           <a:ea typeface="Calibri" pitchFamily="34" charset="-122"/>
                           <a:cs typeface="Calibri" pitchFamily="34" charset="-120"/>
                         </a:rPr>
-                        <a:t>0.30%</a:t>
-                      </a:r>
-                      <a:endParaRPr lang="en-US" sz="500" dirty="0">
-                        <a:latin typeface="Calibri" charset="0"/>
-                        <a:ea typeface="Calibri" charset="0"/>
-                        <a:cs typeface="Calibri" charset="0"/>
-                      </a:endParaRPr>
-                    </a:p>
-                  </a:txBody>
-                  <a:tcPr marL="91440" marR="91440" marT="45720" marB="45720">
-                    <a:lnL w="2540" cap="flat" cmpd="sng" algn="ctr">
-                      <a:solidFill>
-                        <a:srgbClr val="EEEEEE"/>
-                      </a:solidFill>
-                      <a:prstDash val="solid"/>
-                      <a:round/>
-                      <a:headEnd type="none" w="med" len="med"/>
-                      <a:tailEnd type="none" w="med" len="med"/>
-                    </a:lnL>
-                    <a:lnR w="2540" cap="flat" cmpd="sng" algn="ctr">
-                      <a:solidFill>
-                        <a:srgbClr val="EEEEEE"/>
-                      </a:solidFill>
-                      <a:prstDash val="solid"/>
-                      <a:round/>
-                      <a:headEnd type="none" w="med" len="med"/>
-                      <a:tailEnd type="none" w="med" len="med"/>
-                    </a:lnR>
-                    <a:lnT w="2540" cap="flat" cmpd="sng" algn="ctr">
-                      <a:solidFill>
-                        <a:srgbClr val="EEEEEE"/>
-                      </a:solidFill>
-                      <a:prstDash val="solid"/>
-                      <a:round/>
-                      <a:headEnd type="none" w="med" len="med"/>
-                      <a:tailEnd type="none" w="med" len="med"/>
-                    </a:lnT>
-                    <a:lnB w="2540" cap="flat" cmpd="sng" algn="ctr">
-                      <a:solidFill>
-                        <a:srgbClr val="EEEEEE"/>
-                      </a:solidFill>
-                      <a:prstDash val="solid"/>
-                      <a:round/>
-                      <a:headEnd type="none" w="med" len="med"/>
-                      <a:tailEnd type="none" w="med" len="med"/>
-                    </a:lnB>
-                  </a:tcPr>
-                </a:tc>
-                <a:tc>
-                  <a:txBody>
-                    <a:bodyPr/>
-                    <a:lstStyle/>
-                    <a:p>
-                      <a:pPr algn="ctr" indent="0" marL="0">
-                        <a:buNone/>
-                      </a:pPr>
-                      <a:r>
-                        <a:rPr lang="en-US" sz="500" dirty="0">
-                          <a:solidFill>
-                            <a:srgbClr val="999999"/>
-                          </a:solidFill>
-                          <a:latin typeface="Calibri" pitchFamily="34" charset="0"/>
-                          <a:ea typeface="Calibri" pitchFamily="34" charset="-122"/>
-                          <a:cs typeface="Calibri" pitchFamily="34" charset="-120"/>
-                        </a:rPr>
-                        <a:t>0.30%</a:t>
-                      </a:r>
-                      <a:endParaRPr lang="en-US" sz="500" dirty="0">
-                        <a:latin typeface="Calibri" charset="0"/>
-                        <a:ea typeface="Calibri" charset="0"/>
-                        <a:cs typeface="Calibri" charset="0"/>
-                      </a:endParaRPr>
-                    </a:p>
-                  </a:txBody>
-                  <a:tcPr marL="91440" marR="91440" marT="45720" marB="45720">
-                    <a:lnL w="2540" cap="flat" cmpd="sng" algn="ctr">
-                      <a:solidFill>
-                        <a:srgbClr val="EEEEEE"/>
-                      </a:solidFill>
-                      <a:prstDash val="solid"/>
-                      <a:round/>
-                      <a:headEnd type="none" w="med" len="med"/>
-                      <a:tailEnd type="none" w="med" len="med"/>
-                    </a:lnL>
-                    <a:lnR w="2540" cap="flat" cmpd="sng" algn="ctr">
-                      <a:solidFill>
-                        <a:srgbClr val="EEEEEE"/>
-                      </a:solidFill>
-                      <a:prstDash val="solid"/>
-                      <a:round/>
-                      <a:headEnd type="none" w="med" len="med"/>
-                      <a:tailEnd type="none" w="med" len="med"/>
-                    </a:lnR>
-                    <a:lnT w="2540" cap="flat" cmpd="sng" algn="ctr">
-                      <a:solidFill>
-                        <a:srgbClr val="EEEEEE"/>
-                      </a:solidFill>
-                      <a:prstDash val="solid"/>
-                      <a:round/>
-                      <a:headEnd type="none" w="med" len="med"/>
-                      <a:tailEnd type="none" w="med" len="med"/>
-                    </a:lnT>
-                    <a:lnB w="2540" cap="flat" cmpd="sng" algn="ctr">
-                      <a:solidFill>
-                        <a:srgbClr val="EEEEEE"/>
-                      </a:solidFill>
-                      <a:prstDash val="solid"/>
-                      <a:round/>
-                      <a:headEnd type="none" w="med" len="med"/>
-                      <a:tailEnd type="none" w="med" len="med"/>
-                    </a:lnB>
-                  </a:tcPr>
-                </a:tc>
-                <a:tc>
-                  <a:txBody>
-                    <a:bodyPr/>
-                    <a:lstStyle/>
-                    <a:p>
-                      <a:pPr algn="ctr" indent="0" marL="0">
-                        <a:buNone/>
-                      </a:pPr>
-                      <a:r>
-                        <a:rPr lang="en-US" sz="500" dirty="0">
-                          <a:solidFill>
-                            <a:srgbClr val="999999"/>
-                          </a:solidFill>
-                          <a:latin typeface="Calibri" pitchFamily="34" charset="0"/>
-                          <a:ea typeface="Calibri" pitchFamily="34" charset="-122"/>
-                          <a:cs typeface="Calibri" pitchFamily="34" charset="-120"/>
-                        </a:rPr>
-                        <a:t>0.30%</a:t>
-                      </a:r>
-                      <a:endParaRPr lang="en-US" sz="500" dirty="0">
-                        <a:latin typeface="Calibri" charset="0"/>
-                        <a:ea typeface="Calibri" charset="0"/>
-                        <a:cs typeface="Calibri" charset="0"/>
-                      </a:endParaRPr>
-                    </a:p>
-                  </a:txBody>
-                  <a:tcPr marL="91440" marR="91440" marT="45720" marB="45720">
-                    <a:lnL w="2540" cap="flat" cmpd="sng" algn="ctr">
-                      <a:solidFill>
-                        <a:srgbClr val="EEEEEE"/>
-                      </a:solidFill>
-                      <a:prstDash val="solid"/>
-                      <a:round/>
-                      <a:headEnd type="none" w="med" len="med"/>
-                      <a:tailEnd type="none" w="med" len="med"/>
-                    </a:lnL>
-                    <a:lnR w="2540" cap="flat" cmpd="sng" algn="ctr">
-                      <a:solidFill>
-                        <a:srgbClr val="EEEEEE"/>
-                      </a:solidFill>
-                      <a:prstDash val="solid"/>
-                      <a:round/>
-                      <a:headEnd type="none" w="med" len="med"/>
-                      <a:tailEnd type="none" w="med" len="med"/>
-                    </a:lnR>
-                    <a:lnT w="2540" cap="flat" cmpd="sng" algn="ctr">
-                      <a:solidFill>
-                        <a:srgbClr val="EEEEEE"/>
-                      </a:solidFill>
-                      <a:prstDash val="solid"/>
-                      <a:round/>
-                      <a:headEnd type="none" w="med" len="med"/>
-                      <a:tailEnd type="none" w="med" len="med"/>
-                    </a:lnT>
-                    <a:lnB w="2540" cap="flat" cmpd="sng" algn="ctr">
-                      <a:solidFill>
-                        <a:srgbClr val="EEEEEE"/>
-                      </a:solidFill>
-                      <a:prstDash val="solid"/>
-                      <a:round/>
-                      <a:headEnd type="none" w="med" len="med"/>
-                      <a:tailEnd type="none" w="med" len="med"/>
-                    </a:lnB>
-                  </a:tcPr>
-                </a:tc>
-                <a:tc>
-                  <a:txBody>
-                    <a:bodyPr/>
-                    <a:lstStyle/>
-                    <a:p>
-                      <a:pPr algn="ctr" indent="0" marL="0">
-                        <a:buNone/>
-                      </a:pPr>
-                      <a:r>
-                        <a:rPr lang="en-US" sz="500" dirty="0">
-                          <a:solidFill>
-                            <a:srgbClr val="999999"/>
-                          </a:solidFill>
-                          <a:latin typeface="Calibri" pitchFamily="34" charset="0"/>
-                          <a:ea typeface="Calibri" pitchFamily="34" charset="-122"/>
-                          <a:cs typeface="Calibri" pitchFamily="34" charset="-120"/>
-                        </a:rPr>
-                        <a:t>0.28%</a:t>
-                      </a:r>
-                      <a:endParaRPr lang="en-US" sz="500" dirty="0">
-                        <a:latin typeface="Calibri" charset="0"/>
-                        <a:ea typeface="Calibri" charset="0"/>
-                        <a:cs typeface="Calibri" charset="0"/>
-                      </a:endParaRPr>
-                    </a:p>
-                  </a:txBody>
-                  <a:tcPr marL="91440" marR="91440" marT="45720" marB="45720">
-                    <a:lnL w="2540" cap="flat" cmpd="sng" algn="ctr">
-                      <a:solidFill>
-                        <a:srgbClr val="EEEEEE"/>
-                      </a:solidFill>
-                      <a:prstDash val="solid"/>
-                      <a:round/>
-                      <a:headEnd type="none" w="med" len="med"/>
-                      <a:tailEnd type="none" w="med" len="med"/>
-                    </a:lnL>
-                    <a:lnR w="2540" cap="flat" cmpd="sng" algn="ctr">
-                      <a:solidFill>
-                        <a:srgbClr val="EEEEEE"/>
-                      </a:solidFill>
-                      <a:prstDash val="solid"/>
-                      <a:round/>
-                      <a:headEnd type="none" w="med" len="med"/>
-                      <a:tailEnd type="none" w="med" len="med"/>
-                    </a:lnR>
-                    <a:lnT w="2540" cap="flat" cmpd="sng" algn="ctr">
-                      <a:solidFill>
-                        <a:srgbClr val="EEEEEE"/>
-                      </a:solidFill>
-                      <a:prstDash val="solid"/>
-                      <a:round/>
-                      <a:headEnd type="none" w="med" len="med"/>
-                      <a:tailEnd type="none" w="med" len="med"/>
-                    </a:lnT>
-                    <a:lnB w="2540" cap="flat" cmpd="sng" algn="ctr">
-                      <a:solidFill>
-                        <a:srgbClr val="EEEEEE"/>
-                      </a:solidFill>
-                      <a:prstDash val="solid"/>
-                      <a:round/>
-                      <a:headEnd type="none" w="med" len="med"/>
-                      <a:tailEnd type="none" w="med" len="med"/>
-                    </a:lnB>
-                  </a:tcPr>
-                </a:tc>
-                <a:tc>
-                  <a:txBody>
-                    <a:bodyPr/>
-                    <a:lstStyle/>
-                    <a:p>
-                      <a:pPr algn="ctr" indent="0" marL="0">
-                        <a:buNone/>
-                      </a:pPr>
-                      <a:r>
-                        <a:rPr lang="en-US" sz="500" dirty="0">
-                          <a:solidFill>
-                            <a:srgbClr val="999999"/>
-                          </a:solidFill>
-                          <a:latin typeface="Calibri" pitchFamily="34" charset="0"/>
-                          <a:ea typeface="Calibri" pitchFamily="34" charset="-122"/>
-                          <a:cs typeface="Calibri" pitchFamily="34" charset="-120"/>
-                        </a:rPr>
-                        <a:t>0.29%</a:t>
-                      </a:r>
-                      <a:endParaRPr lang="en-US" sz="500" dirty="0">
-                        <a:latin typeface="Calibri" charset="0"/>
-                        <a:ea typeface="Calibri" charset="0"/>
-                        <a:cs typeface="Calibri" charset="0"/>
-                      </a:endParaRPr>
-                    </a:p>
-                  </a:txBody>
-                  <a:tcPr marL="91440" marR="91440" marT="45720" marB="45720">
-                    <a:lnL w="2540" cap="flat" cmpd="sng" algn="ctr">
-                      <a:solidFill>
-                        <a:srgbClr val="EEEEEE"/>
-                      </a:solidFill>
-                      <a:prstDash val="solid"/>
-                      <a:round/>
-                      <a:headEnd type="none" w="med" len="med"/>
-                      <a:tailEnd type="none" w="med" len="med"/>
-                    </a:lnL>
-                    <a:lnR w="2540" cap="flat" cmpd="sng" algn="ctr">
-                      <a:solidFill>
-                        <a:srgbClr val="EEEEEE"/>
-                      </a:solidFill>
-                      <a:prstDash val="solid"/>
-                      <a:round/>
-                      <a:headEnd type="none" w="med" len="med"/>
-                      <a:tailEnd type="none" w="med" len="med"/>
-                    </a:lnR>
-                    <a:lnT w="2540" cap="flat" cmpd="sng" algn="ctr">
-                      <a:solidFill>
-                        <a:srgbClr val="EEEEEE"/>
-                      </a:solidFill>
-                      <a:prstDash val="solid"/>
-                      <a:round/>
-                      <a:headEnd type="none" w="med" len="med"/>
-                      <a:tailEnd type="none" w="med" len="med"/>
-                    </a:lnT>
-                    <a:lnB w="2540" cap="flat" cmpd="sng" algn="ctr">
-                      <a:solidFill>
-                        <a:srgbClr val="EEEEEE"/>
-                      </a:solidFill>
-                      <a:prstDash val="solid"/>
-                      <a:round/>
-                      <a:headEnd type="none" w="med" len="med"/>
-                      <a:tailEnd type="none" w="med" len="med"/>
-                    </a:lnB>
-                  </a:tcPr>
-                </a:tc>
-                <a:tc>
-                  <a:txBody>
-                    <a:bodyPr/>
-                    <a:lstStyle/>
-                    <a:p>
-                      <a:pPr algn="ctr" indent="0" marL="0">
-                        <a:buNone/>
-                      </a:pPr>
-                      <a:r>
-                        <a:rPr lang="en-US" sz="500" dirty="0">
-                          <a:solidFill>
-                            <a:srgbClr val="999999"/>
-                          </a:solidFill>
-                          <a:latin typeface="Calibri" pitchFamily="34" charset="0"/>
-                          <a:ea typeface="Calibri" pitchFamily="34" charset="-122"/>
-                          <a:cs typeface="Calibri" pitchFamily="34" charset="-120"/>
-                        </a:rPr>
-                        <a:t>0.28%</a:t>
-                      </a:r>
-                      <a:endParaRPr lang="en-US" sz="500" dirty="0">
-                        <a:latin typeface="Calibri" charset="0"/>
-                        <a:ea typeface="Calibri" charset="0"/>
-                        <a:cs typeface="Calibri" charset="0"/>
-                      </a:endParaRPr>
-                    </a:p>
-                  </a:txBody>
-                  <a:tcPr marL="91440" marR="91440" marT="45720" marB="45720">
-                    <a:lnL w="2540" cap="flat" cmpd="sng" algn="ctr">
-                      <a:solidFill>
-                        <a:srgbClr val="EEEEEE"/>
-                      </a:solidFill>
-                      <a:prstDash val="solid"/>
-                      <a:round/>
-                      <a:headEnd type="none" w="med" len="med"/>
-                      <a:tailEnd type="none" w="med" len="med"/>
-                    </a:lnL>
-                    <a:lnR w="2540" cap="flat" cmpd="sng" algn="ctr">
-                      <a:solidFill>
-                        <a:srgbClr val="EEEEEE"/>
-                      </a:solidFill>
-                      <a:prstDash val="solid"/>
-                      <a:round/>
-                      <a:headEnd type="none" w="med" len="med"/>
-                      <a:tailEnd type="none" w="med" len="med"/>
-                    </a:lnR>
-                    <a:lnT w="2540" cap="flat" cmpd="sng" algn="ctr">
-                      <a:solidFill>
-                        <a:srgbClr val="EEEEEE"/>
-                      </a:solidFill>
-                      <a:prstDash val="solid"/>
-                      <a:round/>
-                      <a:headEnd type="none" w="med" len="med"/>
-                      <a:tailEnd type="none" w="med" len="med"/>
-                    </a:lnT>
-                    <a:lnB w="2540" cap="flat" cmpd="sng" algn="ctr">
-                      <a:solidFill>
-                        <a:srgbClr val="EEEEEE"/>
-                      </a:solidFill>
-                      <a:prstDash val="solid"/>
-                      <a:round/>
-                      <a:headEnd type="none" w="med" len="med"/>
-                      <a:tailEnd type="none" w="med" len="med"/>
-                    </a:lnB>
-                  </a:tcPr>
-                </a:tc>
-                <a:tc>
-                  <a:txBody>
-                    <a:bodyPr/>
-                    <a:lstStyle/>
-                    <a:p>
-                      <a:pPr algn="ctr" indent="0" marL="0">
-                        <a:buNone/>
-                      </a:pPr>
-                      <a:r>
-                        <a:rPr lang="en-US" sz="500" dirty="0">
-                          <a:solidFill>
-                            <a:srgbClr val="999999"/>
-                          </a:solidFill>
-                          <a:latin typeface="Calibri" pitchFamily="34" charset="0"/>
-                          <a:ea typeface="Calibri" pitchFamily="34" charset="-122"/>
-                          <a:cs typeface="Calibri" pitchFamily="34" charset="-120"/>
-                        </a:rPr>
-                        <a:t>0.56%</a:t>
-                      </a:r>
-                      <a:endParaRPr lang="en-US" sz="500" dirty="0">
-                        <a:latin typeface="Calibri" charset="0"/>
-                        <a:ea typeface="Calibri" charset="0"/>
-                        <a:cs typeface="Calibri" charset="0"/>
-                      </a:endParaRPr>
-                    </a:p>
-                  </a:txBody>
-                  <a:tcPr marL="91440" marR="91440" marT="45720" marB="45720">
-                    <a:lnL w="2540" cap="flat" cmpd="sng" algn="ctr">
-                      <a:solidFill>
-                        <a:srgbClr val="EEEEEE"/>
-                      </a:solidFill>
-                      <a:prstDash val="solid"/>
-                      <a:round/>
-                      <a:headEnd type="none" w="med" len="med"/>
-                      <a:tailEnd type="none" w="med" len="med"/>
-                    </a:lnL>
-                    <a:lnR w="2540" cap="flat" cmpd="sng" algn="ctr">
-                      <a:solidFill>
-                        <a:srgbClr val="EEEEEE"/>
-                      </a:solidFill>
-                      <a:prstDash val="solid"/>
-                      <a:round/>
-                      <a:headEnd type="none" w="med" len="med"/>
-                      <a:tailEnd type="none" w="med" len="med"/>
-                    </a:lnR>
-                    <a:lnT w="2540" cap="flat" cmpd="sng" algn="ctr">
-                      <a:solidFill>
-                        <a:srgbClr val="EEEEEE"/>
-                      </a:solidFill>
-                      <a:prstDash val="solid"/>
-                      <a:round/>
-                      <a:headEnd type="none" w="med" len="med"/>
-                      <a:tailEnd type="none" w="med" len="med"/>
-                    </a:lnT>
-                    <a:lnB w="2540" cap="flat" cmpd="sng" algn="ctr">
-                      <a:solidFill>
-                        <a:srgbClr val="EEEEEE"/>
-                      </a:solidFill>
-                      <a:prstDash val="solid"/>
-                      <a:round/>
-                      <a:headEnd type="none" w="med" len="med"/>
-                      <a:tailEnd type="none" w="med" len="med"/>
-                    </a:lnB>
-                  </a:tcPr>
-                </a:tc>
-                <a:tc>
-                  <a:txBody>
-                    <a:bodyPr/>
-                    <a:lstStyle/>
-                    <a:p>
-                      <a:pPr algn="ctr" indent="0" marL="0">
-                        <a:buNone/>
-                      </a:pPr>
-                      <a:r>
-                        <a:rPr lang="en-US" sz="500" b="1" dirty="0">
-                          <a:solidFill>
-                            <a:srgbClr val="999999"/>
-                          </a:solidFill>
-                          <a:latin typeface="Calibri" pitchFamily="34" charset="0"/>
-                          <a:ea typeface="Calibri" pitchFamily="34" charset="-122"/>
-                          <a:cs typeface="Calibri" pitchFamily="34" charset="-120"/>
-                        </a:rPr>
-                        <a:t>3.54%</a:t>
+                        <a:t>3.26%</a:t>
                       </a:r>
                       <a:endParaRPr lang="en-US" sz="500" dirty="0">
                         <a:latin typeface="Calibri" charset="0"/>
@@ -28687,7 +30145,7 @@
                           <a:ea typeface="Calibri" pitchFamily="34" charset="-122"/>
                           <a:cs typeface="Calibri" pitchFamily="34" charset="-120"/>
                         </a:rPr>
-                        <a:t>0.52%</a:t>
+                        <a:t>0.50%</a:t>
                       </a:r>
                       <a:endParaRPr lang="en-US" sz="500" dirty="0">
                         <a:latin typeface="Calibri" charset="0"/>
@@ -28817,7 +30275,7 @@
                           <a:ea typeface="Calibri" pitchFamily="34" charset="-122"/>
                           <a:cs typeface="Calibri" pitchFamily="34" charset="-120"/>
                         </a:rPr>
-                        <a:t>0.53%</a:t>
+                        <a:t>0.51%</a:t>
                       </a:r>
                       <a:endParaRPr lang="en-US" sz="500" dirty="0">
                         <a:latin typeface="Calibri" charset="0"/>
@@ -28947,7 +30405,7 @@
                           <a:ea typeface="Calibri" pitchFamily="34" charset="-122"/>
                           <a:cs typeface="Calibri" pitchFamily="34" charset="-120"/>
                         </a:rPr>
-                        <a:t>0.58%</a:t>
+                        <a:t>0.56%</a:t>
                       </a:r>
                       <a:endParaRPr lang="en-US" sz="500" dirty="0">
                         <a:latin typeface="Calibri" charset="0"/>
@@ -29012,7 +30470,7 @@
                           <a:ea typeface="Calibri" pitchFamily="34" charset="-122"/>
                           <a:cs typeface="Calibri" pitchFamily="34" charset="-120"/>
                         </a:rPr>
-                        <a:t>5.85%</a:t>
+                        <a:t>6.18%</a:t>
                       </a:r>
                       <a:endParaRPr lang="en-US" sz="500" dirty="0">
                         <a:latin typeface="Calibri" charset="0"/>
@@ -29209,7 +30667,7 @@
                           <a:ea typeface="Calibri" pitchFamily="34" charset="-122"/>
                           <a:cs typeface="Calibri" pitchFamily="34" charset="-120"/>
                         </a:rPr>
-                        <a:t>0.37%</a:t>
+                        <a:t>0.39%</a:t>
                       </a:r>
                       <a:endParaRPr lang="en-US" sz="500" dirty="0">
                         <a:latin typeface="Calibri" charset="0"/>
@@ -29274,7 +30732,7 @@
                           <a:ea typeface="Calibri" pitchFamily="34" charset="-122"/>
                           <a:cs typeface="Calibri" pitchFamily="34" charset="-120"/>
                         </a:rPr>
-                        <a:t>0.37%</a:t>
+                        <a:t>0.36%</a:t>
                       </a:r>
                       <a:endParaRPr lang="en-US" sz="500" dirty="0">
                         <a:latin typeface="Calibri" charset="0"/>
@@ -29339,7 +30797,7 @@
                           <a:ea typeface="Calibri" pitchFamily="34" charset="-122"/>
                           <a:cs typeface="Calibri" pitchFamily="34" charset="-120"/>
                         </a:rPr>
-                        <a:t>0.37%</a:t>
+                        <a:t>0.39%</a:t>
                       </a:r>
                       <a:endParaRPr lang="en-US" sz="500" dirty="0">
                         <a:latin typeface="Calibri" charset="0"/>
@@ -29404,7 +30862,7 @@
                           <a:ea typeface="Calibri" pitchFamily="34" charset="-122"/>
                           <a:cs typeface="Calibri" pitchFamily="34" charset="-120"/>
                         </a:rPr>
-                        <a:t>0.37%</a:t>
+                        <a:t>0.38%</a:t>
                       </a:r>
                       <a:endParaRPr lang="en-US" sz="500" dirty="0">
                         <a:latin typeface="Calibri" charset="0"/>
@@ -30087,7 +31545,7 @@
                           <a:ea typeface="Calibri" pitchFamily="34" charset="-122"/>
                           <a:cs typeface="Calibri" pitchFamily="34" charset="-120"/>
                         </a:rPr>
-                        <a:t>0.00%</a:t>
+                        <a:t>0.26%</a:t>
                       </a:r>
                       <a:endParaRPr lang="en-US" sz="500" dirty="0">
                         <a:latin typeface="Calibri" charset="0"/>
@@ -30152,7 +31610,7 @@
                           <a:ea typeface="Calibri" pitchFamily="34" charset="-122"/>
                           <a:cs typeface="Calibri" pitchFamily="34" charset="-120"/>
                         </a:rPr>
-                        <a:t>0.24%</a:t>
+                        <a:t>0.26%</a:t>
                       </a:r>
                       <a:endParaRPr lang="en-US" sz="500" dirty="0">
                         <a:latin typeface="Calibri" charset="0"/>
@@ -30217,7 +31675,7 @@
                           <a:ea typeface="Calibri" pitchFamily="34" charset="-122"/>
                           <a:cs typeface="Calibri" pitchFamily="34" charset="-120"/>
                         </a:rPr>
-                        <a:t>0.27%</a:t>
+                        <a:t>0.26%</a:t>
                       </a:r>
                       <a:endParaRPr lang="en-US" sz="500" dirty="0">
                         <a:latin typeface="Calibri" charset="0"/>
@@ -30965,7 +32423,7 @@
                           <a:ea typeface="Calibri" pitchFamily="34" charset="-122"/>
                           <a:cs typeface="Calibri" pitchFamily="34" charset="-120"/>
                         </a:rPr>
-                        <a:t>0.58%</a:t>
+                        <a:t>0.56%</a:t>
                       </a:r>
                       <a:endParaRPr lang="en-US" sz="500" dirty="0">
                         <a:latin typeface="Calibri" charset="0"/>
@@ -31030,7 +32488,7 @@
                           <a:ea typeface="Calibri" pitchFamily="34" charset="-122"/>
                           <a:cs typeface="Calibri" pitchFamily="34" charset="-120"/>
                         </a:rPr>
-                        <a:t>0.53%</a:t>
+                        <a:t>0.56%</a:t>
                       </a:r>
                       <a:endParaRPr lang="en-US" sz="500" dirty="0">
                         <a:latin typeface="Calibri" charset="0"/>
@@ -31095,7 +32553,7 @@
                           <a:ea typeface="Calibri" pitchFamily="34" charset="-122"/>
                           <a:cs typeface="Calibri" pitchFamily="34" charset="-120"/>
                         </a:rPr>
-                        <a:t>0.57%</a:t>
+                        <a:t>0.55%</a:t>
                       </a:r>
                       <a:endParaRPr lang="en-US" sz="500" dirty="0">
                         <a:latin typeface="Calibri" charset="0"/>

--- a/folletos/2026-04/pptx/FIP_VANTRUST_LIQUIDEZ_CAJA.pptx
+++ b/folletos/2026-04/pptx/FIP_VANTRUST_LIQUIDEZ_CAJA.pptx
@@ -4571,7 +4571,7 @@
                 <a:ea typeface="Calibri" pitchFamily="34" charset="-122"/>
                 <a:cs typeface="Calibri" pitchFamily="34" charset="-120"/>
               </a:rPr>
-              <a:t>prueba CLP</a:t>
+              <a:t>prueba 13 CLP</a:t>
             </a:r>
             <a:endParaRPr lang="en-US" sz="800" dirty="0"/>
           </a:p>

--- a/folletos/2026-04/pptx/FIP_VANTRUST_LIQUIDEZ_CAJA.pptx
+++ b/folletos/2026-04/pptx/FIP_VANTRUST_LIQUIDEZ_CAJA.pptx
@@ -4571,7 +4571,7 @@
                 <a:ea typeface="Calibri" pitchFamily="34" charset="-122"/>
                 <a:cs typeface="Calibri" pitchFamily="34" charset="-120"/>
               </a:rPr>
-              <a:t>prueba CLP</a:t>
+              <a:t>prueba 14 CLP</a:t>
             </a:r>
             <a:endParaRPr lang="en-US" sz="800" dirty="0"/>
           </a:p>
